--- a/Presentation/SiteSafeAiPresentation.pptx
+++ b/Presentation/SiteSafeAiPresentation.pptx
@@ -1,14 +1,21 @@
 
 <file path=ppt/presentation.xml><?xml version="1.0" encoding="utf-8"?>
-<p:presentation xmlns:a="http://schemas.openxmlformats.org/drawingml/2006/main" xmlns:r="http://schemas.openxmlformats.org/officeDocument/2006/relationships" xmlns:p="http://schemas.openxmlformats.org/presentationml/2006/main" saveSubsetFonts="1">
+<p:presentation xmlns:a="http://schemas.openxmlformats.org/drawingml/2006/main" xmlns:r="http://schemas.openxmlformats.org/officeDocument/2006/relationships" xmlns:p="http://schemas.openxmlformats.org/presentationml/2006/main" showSpecialPlsOnTitleSld="0" saveSubsetFonts="1">
   <p:sldMasterIdLst>
     <p:sldMasterId id="2147483648" r:id="rId1"/>
   </p:sldMasterIdLst>
+  <p:notesMasterIdLst>
+    <p:notesMasterId r:id="rId10"/>
+  </p:notesMasterIdLst>
   <p:sldIdLst>
     <p:sldId id="256" r:id="rId2"/>
     <p:sldId id="258" r:id="rId3"/>
-    <p:sldId id="257" r:id="rId4"/>
-    <p:sldId id="259" r:id="rId5"/>
+    <p:sldId id="260" r:id="rId4"/>
+    <p:sldId id="264" r:id="rId5"/>
+    <p:sldId id="259" r:id="rId6"/>
+    <p:sldId id="257" r:id="rId7"/>
+    <p:sldId id="265" r:id="rId8"/>
+    <p:sldId id="263" r:id="rId9"/>
   </p:sldIdLst>
   <p:sldSz cx="12192000" cy="6858000"/>
   <p:notesSz cx="6858000" cy="9144000"/>
@@ -110,7 +117,7 @@
   <p:extLst>
     <p:ext uri="{EFAFB233-063F-42B5-8137-9DF3F51BA10A}">
       <p15:sldGuideLst xmlns:p15="http://schemas.microsoft.com/office/powerpoint/2012/main">
-        <p15:guide id="1" orient="horz" pos="2160" userDrawn="1">
+        <p15:guide id="1" orient="horz" pos="2183" userDrawn="1">
           <p15:clr>
             <a:srgbClr val="A4A3A4"/>
           </p15:clr>
@@ -127,6 +134,753 @@
 </file>
 
 <file path=ppt/diagrams/colors1.xml><?xml version="1.0" encoding="utf-8"?>
+<dgm:colorsDef xmlns:dgm="http://schemas.openxmlformats.org/drawingml/2006/diagram" xmlns:a="http://schemas.openxmlformats.org/drawingml/2006/main" uniqueId="urn:microsoft.com/office/officeart/2005/8/colors/accent1_2">
+  <dgm:title val=""/>
+  <dgm:desc val=""/>
+  <dgm:catLst>
+    <dgm:cat type="accent1" pri="11200"/>
+  </dgm:catLst>
+  <dgm:styleLbl name="node0">
+    <dgm:fillClrLst meth="repeat">
+      <a:schemeClr val="accent1"/>
+    </dgm:fillClrLst>
+    <dgm:linClrLst meth="repeat">
+      <a:schemeClr val="lt1"/>
+    </dgm:linClrLst>
+    <dgm:effectClrLst/>
+    <dgm:txLinClrLst/>
+    <dgm:txFillClrLst/>
+    <dgm:txEffectClrLst/>
+  </dgm:styleLbl>
+  <dgm:styleLbl name="alignNode1">
+    <dgm:fillClrLst meth="repeat">
+      <a:schemeClr val="accent1"/>
+    </dgm:fillClrLst>
+    <dgm:linClrLst meth="repeat">
+      <a:schemeClr val="accent1"/>
+    </dgm:linClrLst>
+    <dgm:effectClrLst/>
+    <dgm:txLinClrLst/>
+    <dgm:txFillClrLst/>
+    <dgm:txEffectClrLst/>
+  </dgm:styleLbl>
+  <dgm:styleLbl name="node1">
+    <dgm:fillClrLst meth="repeat">
+      <a:schemeClr val="accent1"/>
+    </dgm:fillClrLst>
+    <dgm:linClrLst meth="repeat">
+      <a:schemeClr val="lt1"/>
+    </dgm:linClrLst>
+    <dgm:effectClrLst/>
+    <dgm:txLinClrLst/>
+    <dgm:txFillClrLst/>
+    <dgm:txEffectClrLst/>
+  </dgm:styleLbl>
+  <dgm:styleLbl name="lnNode1">
+    <dgm:fillClrLst meth="repeat">
+      <a:schemeClr val="accent1"/>
+    </dgm:fillClrLst>
+    <dgm:linClrLst meth="repeat">
+      <a:schemeClr val="lt1"/>
+    </dgm:linClrLst>
+    <dgm:effectClrLst/>
+    <dgm:txLinClrLst/>
+    <dgm:txFillClrLst/>
+    <dgm:txEffectClrLst/>
+  </dgm:styleLbl>
+  <dgm:styleLbl name="vennNode1">
+    <dgm:fillClrLst meth="repeat">
+      <a:schemeClr val="accent1">
+        <a:alpha val="50000"/>
+      </a:schemeClr>
+    </dgm:fillClrLst>
+    <dgm:linClrLst meth="repeat">
+      <a:schemeClr val="lt1"/>
+    </dgm:linClrLst>
+    <dgm:effectClrLst/>
+    <dgm:txLinClrLst/>
+    <dgm:txFillClrLst/>
+    <dgm:txEffectClrLst/>
+  </dgm:styleLbl>
+  <dgm:styleLbl name="node2">
+    <dgm:fillClrLst meth="repeat">
+      <a:schemeClr val="accent1"/>
+    </dgm:fillClrLst>
+    <dgm:linClrLst meth="repeat">
+      <a:schemeClr val="lt1"/>
+    </dgm:linClrLst>
+    <dgm:effectClrLst/>
+    <dgm:txLinClrLst/>
+    <dgm:txFillClrLst/>
+    <dgm:txEffectClrLst/>
+  </dgm:styleLbl>
+  <dgm:styleLbl name="node3">
+    <dgm:fillClrLst meth="repeat">
+      <a:schemeClr val="accent1"/>
+    </dgm:fillClrLst>
+    <dgm:linClrLst meth="repeat">
+      <a:schemeClr val="lt1"/>
+    </dgm:linClrLst>
+    <dgm:effectClrLst/>
+    <dgm:txLinClrLst/>
+    <dgm:txFillClrLst/>
+    <dgm:txEffectClrLst/>
+  </dgm:styleLbl>
+  <dgm:styleLbl name="node4">
+    <dgm:fillClrLst meth="repeat">
+      <a:schemeClr val="accent1"/>
+    </dgm:fillClrLst>
+    <dgm:linClrLst meth="repeat">
+      <a:schemeClr val="lt1"/>
+    </dgm:linClrLst>
+    <dgm:effectClrLst/>
+    <dgm:txLinClrLst/>
+    <dgm:txFillClrLst/>
+    <dgm:txEffectClrLst/>
+  </dgm:styleLbl>
+  <dgm:styleLbl name="fgImgPlace1">
+    <dgm:fillClrLst meth="repeat">
+      <a:schemeClr val="accent1">
+        <a:tint val="50000"/>
+      </a:schemeClr>
+    </dgm:fillClrLst>
+    <dgm:linClrLst meth="repeat">
+      <a:schemeClr val="lt1"/>
+    </dgm:linClrLst>
+    <dgm:effectClrLst/>
+    <dgm:txLinClrLst/>
+    <dgm:txFillClrLst meth="repeat">
+      <a:schemeClr val="lt1"/>
+    </dgm:txFillClrLst>
+    <dgm:txEffectClrLst/>
+  </dgm:styleLbl>
+  <dgm:styleLbl name="alignImgPlace1">
+    <dgm:fillClrLst meth="repeat">
+      <a:schemeClr val="accent1">
+        <a:tint val="50000"/>
+      </a:schemeClr>
+    </dgm:fillClrLst>
+    <dgm:linClrLst meth="repeat">
+      <a:schemeClr val="lt1"/>
+    </dgm:linClrLst>
+    <dgm:effectClrLst/>
+    <dgm:txLinClrLst/>
+    <dgm:txFillClrLst meth="repeat">
+      <a:schemeClr val="lt1"/>
+    </dgm:txFillClrLst>
+    <dgm:txEffectClrLst/>
+  </dgm:styleLbl>
+  <dgm:styleLbl name="bgImgPlace1">
+    <dgm:fillClrLst meth="repeat">
+      <a:schemeClr val="accent1">
+        <a:tint val="50000"/>
+      </a:schemeClr>
+    </dgm:fillClrLst>
+    <dgm:linClrLst meth="repeat">
+      <a:schemeClr val="lt1"/>
+    </dgm:linClrLst>
+    <dgm:effectClrLst/>
+    <dgm:txLinClrLst/>
+    <dgm:txFillClrLst meth="repeat">
+      <a:schemeClr val="lt1"/>
+    </dgm:txFillClrLst>
+    <dgm:txEffectClrLst/>
+  </dgm:styleLbl>
+  <dgm:styleLbl name="sibTrans2D1">
+    <dgm:fillClrLst meth="repeat">
+      <a:schemeClr val="accent1">
+        <a:tint val="60000"/>
+      </a:schemeClr>
+    </dgm:fillClrLst>
+    <dgm:linClrLst meth="repeat">
+      <a:schemeClr val="accent1">
+        <a:tint val="60000"/>
+      </a:schemeClr>
+    </dgm:linClrLst>
+    <dgm:effectClrLst/>
+    <dgm:txLinClrLst/>
+    <dgm:txFillClrLst/>
+    <dgm:txEffectClrLst/>
+  </dgm:styleLbl>
+  <dgm:styleLbl name="fgSibTrans2D1">
+    <dgm:fillClrLst meth="repeat">
+      <a:schemeClr val="accent1">
+        <a:tint val="60000"/>
+      </a:schemeClr>
+    </dgm:fillClrLst>
+    <dgm:linClrLst meth="repeat">
+      <a:schemeClr val="accent1">
+        <a:tint val="60000"/>
+      </a:schemeClr>
+    </dgm:linClrLst>
+    <dgm:effectClrLst/>
+    <dgm:txLinClrLst/>
+    <dgm:txFillClrLst/>
+    <dgm:txEffectClrLst/>
+  </dgm:styleLbl>
+  <dgm:styleLbl name="bgSibTrans2D1">
+    <dgm:fillClrLst meth="repeat">
+      <a:schemeClr val="accent1">
+        <a:tint val="60000"/>
+      </a:schemeClr>
+    </dgm:fillClrLst>
+    <dgm:linClrLst meth="repeat">
+      <a:schemeClr val="accent1">
+        <a:tint val="60000"/>
+      </a:schemeClr>
+    </dgm:linClrLst>
+    <dgm:effectClrLst/>
+    <dgm:txLinClrLst/>
+    <dgm:txFillClrLst/>
+    <dgm:txEffectClrLst/>
+  </dgm:styleLbl>
+  <dgm:styleLbl name="sibTrans1D1">
+    <dgm:fillClrLst meth="repeat">
+      <a:schemeClr val="accent1"/>
+    </dgm:fillClrLst>
+    <dgm:linClrLst meth="repeat">
+      <a:schemeClr val="accent1"/>
+    </dgm:linClrLst>
+    <dgm:effectClrLst/>
+    <dgm:txLinClrLst/>
+    <dgm:txFillClrLst meth="repeat">
+      <a:schemeClr val="tx1"/>
+    </dgm:txFillClrLst>
+    <dgm:txEffectClrLst/>
+  </dgm:styleLbl>
+  <dgm:styleLbl name="callout">
+    <dgm:fillClrLst meth="repeat">
+      <a:schemeClr val="accent1"/>
+    </dgm:fillClrLst>
+    <dgm:linClrLst meth="repeat">
+      <a:schemeClr val="accent1">
+        <a:tint val="50000"/>
+      </a:schemeClr>
+    </dgm:linClrLst>
+    <dgm:effectClrLst/>
+    <dgm:txLinClrLst/>
+    <dgm:txFillClrLst meth="repeat">
+      <a:schemeClr val="tx1"/>
+    </dgm:txFillClrLst>
+    <dgm:txEffectClrLst/>
+  </dgm:styleLbl>
+  <dgm:styleLbl name="asst0">
+    <dgm:fillClrLst meth="repeat">
+      <a:schemeClr val="accent1"/>
+    </dgm:fillClrLst>
+    <dgm:linClrLst meth="repeat">
+      <a:schemeClr val="lt1"/>
+    </dgm:linClrLst>
+    <dgm:effectClrLst/>
+    <dgm:txLinClrLst/>
+    <dgm:txFillClrLst/>
+    <dgm:txEffectClrLst/>
+  </dgm:styleLbl>
+  <dgm:styleLbl name="asst1">
+    <dgm:fillClrLst meth="repeat">
+      <a:schemeClr val="accent1"/>
+    </dgm:fillClrLst>
+    <dgm:linClrLst meth="repeat">
+      <a:schemeClr val="lt1"/>
+    </dgm:linClrLst>
+    <dgm:effectClrLst/>
+    <dgm:txLinClrLst/>
+    <dgm:txFillClrLst/>
+    <dgm:txEffectClrLst/>
+  </dgm:styleLbl>
+  <dgm:styleLbl name="asst2">
+    <dgm:fillClrLst meth="repeat">
+      <a:schemeClr val="accent1"/>
+    </dgm:fillClrLst>
+    <dgm:linClrLst meth="repeat">
+      <a:schemeClr val="lt1"/>
+    </dgm:linClrLst>
+    <dgm:effectClrLst/>
+    <dgm:txLinClrLst/>
+    <dgm:txFillClrLst/>
+    <dgm:txEffectClrLst/>
+  </dgm:styleLbl>
+  <dgm:styleLbl name="asst3">
+    <dgm:fillClrLst meth="repeat">
+      <a:schemeClr val="accent1"/>
+    </dgm:fillClrLst>
+    <dgm:linClrLst meth="repeat">
+      <a:schemeClr val="lt1"/>
+    </dgm:linClrLst>
+    <dgm:effectClrLst/>
+    <dgm:txLinClrLst/>
+    <dgm:txFillClrLst/>
+    <dgm:txEffectClrLst/>
+  </dgm:styleLbl>
+  <dgm:styleLbl name="asst4">
+    <dgm:fillClrLst meth="repeat">
+      <a:schemeClr val="accent1"/>
+    </dgm:fillClrLst>
+    <dgm:linClrLst meth="repeat">
+      <a:schemeClr val="lt1"/>
+    </dgm:linClrLst>
+    <dgm:effectClrLst/>
+    <dgm:txLinClrLst/>
+    <dgm:txFillClrLst/>
+    <dgm:txEffectClrLst/>
+  </dgm:styleLbl>
+  <dgm:styleLbl name="parChTrans2D1">
+    <dgm:fillClrLst meth="repeat">
+      <a:schemeClr val="accent1">
+        <a:tint val="60000"/>
+      </a:schemeClr>
+    </dgm:fillClrLst>
+    <dgm:linClrLst meth="repeat">
+      <a:schemeClr val="accent1">
+        <a:tint val="60000"/>
+      </a:schemeClr>
+    </dgm:linClrLst>
+    <dgm:effectClrLst/>
+    <dgm:txLinClrLst/>
+    <dgm:txFillClrLst meth="repeat">
+      <a:schemeClr val="lt1"/>
+    </dgm:txFillClrLst>
+    <dgm:txEffectClrLst/>
+  </dgm:styleLbl>
+  <dgm:styleLbl name="parChTrans2D2">
+    <dgm:fillClrLst meth="repeat">
+      <a:schemeClr val="accent1"/>
+    </dgm:fillClrLst>
+    <dgm:linClrLst meth="repeat">
+      <a:schemeClr val="accent1"/>
+    </dgm:linClrLst>
+    <dgm:effectClrLst/>
+    <dgm:txLinClrLst/>
+    <dgm:txFillClrLst meth="repeat">
+      <a:schemeClr val="lt1"/>
+    </dgm:txFillClrLst>
+    <dgm:txEffectClrLst/>
+  </dgm:styleLbl>
+  <dgm:styleLbl name="parChTrans2D3">
+    <dgm:fillClrLst meth="repeat">
+      <a:schemeClr val="accent1"/>
+    </dgm:fillClrLst>
+    <dgm:linClrLst meth="repeat">
+      <a:schemeClr val="accent1"/>
+    </dgm:linClrLst>
+    <dgm:effectClrLst/>
+    <dgm:txLinClrLst/>
+    <dgm:txFillClrLst meth="repeat">
+      <a:schemeClr val="lt1"/>
+    </dgm:txFillClrLst>
+    <dgm:txEffectClrLst/>
+  </dgm:styleLbl>
+  <dgm:styleLbl name="parChTrans2D4">
+    <dgm:fillClrLst meth="repeat">
+      <a:schemeClr val="accent1"/>
+    </dgm:fillClrLst>
+    <dgm:linClrLst meth="repeat">
+      <a:schemeClr val="accent1"/>
+    </dgm:linClrLst>
+    <dgm:effectClrLst/>
+    <dgm:txLinClrLst/>
+    <dgm:txFillClrLst meth="repeat">
+      <a:schemeClr val="lt1"/>
+    </dgm:txFillClrLst>
+    <dgm:txEffectClrLst/>
+  </dgm:styleLbl>
+  <dgm:styleLbl name="parChTrans1D1">
+    <dgm:fillClrLst meth="repeat">
+      <a:schemeClr val="accent1"/>
+    </dgm:fillClrLst>
+    <dgm:linClrLst meth="repeat">
+      <a:schemeClr val="accent1">
+        <a:shade val="60000"/>
+      </a:schemeClr>
+    </dgm:linClrLst>
+    <dgm:effectClrLst/>
+    <dgm:txLinClrLst/>
+    <dgm:txFillClrLst meth="repeat">
+      <a:schemeClr val="tx1"/>
+    </dgm:txFillClrLst>
+    <dgm:txEffectClrLst/>
+  </dgm:styleLbl>
+  <dgm:styleLbl name="parChTrans1D2">
+    <dgm:fillClrLst meth="repeat">
+      <a:schemeClr val="accent1"/>
+    </dgm:fillClrLst>
+    <dgm:linClrLst meth="repeat">
+      <a:schemeClr val="accent1">
+        <a:shade val="60000"/>
+      </a:schemeClr>
+    </dgm:linClrLst>
+    <dgm:effectClrLst/>
+    <dgm:txLinClrLst/>
+    <dgm:txFillClrLst meth="repeat">
+      <a:schemeClr val="tx1"/>
+    </dgm:txFillClrLst>
+    <dgm:txEffectClrLst/>
+  </dgm:styleLbl>
+  <dgm:styleLbl name="parChTrans1D3">
+    <dgm:fillClrLst meth="repeat">
+      <a:schemeClr val="accent1"/>
+    </dgm:fillClrLst>
+    <dgm:linClrLst meth="repeat">
+      <a:schemeClr val="accent1">
+        <a:shade val="80000"/>
+      </a:schemeClr>
+    </dgm:linClrLst>
+    <dgm:effectClrLst/>
+    <dgm:txLinClrLst/>
+    <dgm:txFillClrLst meth="repeat">
+      <a:schemeClr val="tx1"/>
+    </dgm:txFillClrLst>
+    <dgm:txEffectClrLst/>
+  </dgm:styleLbl>
+  <dgm:styleLbl name="parChTrans1D4">
+    <dgm:fillClrLst meth="repeat">
+      <a:schemeClr val="accent1"/>
+    </dgm:fillClrLst>
+    <dgm:linClrLst meth="repeat">
+      <a:schemeClr val="accent1">
+        <a:shade val="80000"/>
+      </a:schemeClr>
+    </dgm:linClrLst>
+    <dgm:effectClrLst/>
+    <dgm:txLinClrLst/>
+    <dgm:txFillClrLst meth="repeat">
+      <a:schemeClr val="tx1"/>
+    </dgm:txFillClrLst>
+    <dgm:txEffectClrLst/>
+  </dgm:styleLbl>
+  <dgm:styleLbl name="fgAcc1">
+    <dgm:fillClrLst meth="repeat">
+      <a:schemeClr val="lt1">
+        <a:alpha val="90000"/>
+      </a:schemeClr>
+    </dgm:fillClrLst>
+    <dgm:linClrLst meth="repeat">
+      <a:schemeClr val="accent1"/>
+    </dgm:linClrLst>
+    <dgm:effectClrLst/>
+    <dgm:txLinClrLst/>
+    <dgm:txFillClrLst meth="repeat">
+      <a:schemeClr val="dk1"/>
+    </dgm:txFillClrLst>
+    <dgm:txEffectClrLst/>
+  </dgm:styleLbl>
+  <dgm:styleLbl name="conFgAcc1">
+    <dgm:fillClrLst meth="repeat">
+      <a:schemeClr val="lt1">
+        <a:alpha val="90000"/>
+      </a:schemeClr>
+    </dgm:fillClrLst>
+    <dgm:linClrLst meth="repeat">
+      <a:schemeClr val="accent1"/>
+    </dgm:linClrLst>
+    <dgm:effectClrLst/>
+    <dgm:txLinClrLst/>
+    <dgm:txFillClrLst meth="repeat">
+      <a:schemeClr val="dk1"/>
+    </dgm:txFillClrLst>
+    <dgm:txEffectClrLst/>
+  </dgm:styleLbl>
+  <dgm:styleLbl name="alignAcc1">
+    <dgm:fillClrLst meth="repeat">
+      <a:schemeClr val="lt1">
+        <a:alpha val="90000"/>
+      </a:schemeClr>
+    </dgm:fillClrLst>
+    <dgm:linClrLst meth="repeat">
+      <a:schemeClr val="accent1"/>
+    </dgm:linClrLst>
+    <dgm:effectClrLst/>
+    <dgm:txLinClrLst/>
+    <dgm:txFillClrLst meth="repeat">
+      <a:schemeClr val="dk1"/>
+    </dgm:txFillClrLst>
+    <dgm:txEffectClrLst/>
+  </dgm:styleLbl>
+  <dgm:styleLbl name="trAlignAcc1">
+    <dgm:fillClrLst meth="repeat">
+      <a:schemeClr val="lt1">
+        <a:alpha val="40000"/>
+      </a:schemeClr>
+    </dgm:fillClrLst>
+    <dgm:linClrLst meth="repeat">
+      <a:schemeClr val="accent1"/>
+    </dgm:linClrLst>
+    <dgm:effectClrLst/>
+    <dgm:txLinClrLst/>
+    <dgm:txFillClrLst meth="repeat">
+      <a:schemeClr val="dk1"/>
+    </dgm:txFillClrLst>
+    <dgm:txEffectClrLst/>
+  </dgm:styleLbl>
+  <dgm:styleLbl name="bgAcc1">
+    <dgm:fillClrLst meth="repeat">
+      <a:schemeClr val="lt1">
+        <a:alpha val="90000"/>
+      </a:schemeClr>
+    </dgm:fillClrLst>
+    <dgm:linClrLst meth="repeat">
+      <a:schemeClr val="accent1"/>
+    </dgm:linClrLst>
+    <dgm:effectClrLst/>
+    <dgm:txLinClrLst/>
+    <dgm:txFillClrLst meth="repeat">
+      <a:schemeClr val="dk1"/>
+    </dgm:txFillClrLst>
+    <dgm:txEffectClrLst/>
+  </dgm:styleLbl>
+  <dgm:styleLbl name="solidFgAcc1">
+    <dgm:fillClrLst meth="repeat">
+      <a:schemeClr val="lt1"/>
+    </dgm:fillClrLst>
+    <dgm:linClrLst meth="repeat">
+      <a:schemeClr val="accent1"/>
+    </dgm:linClrLst>
+    <dgm:effectClrLst/>
+    <dgm:txLinClrLst/>
+    <dgm:txFillClrLst meth="repeat">
+      <a:schemeClr val="dk1"/>
+    </dgm:txFillClrLst>
+    <dgm:txEffectClrLst/>
+  </dgm:styleLbl>
+  <dgm:styleLbl name="solidAlignAcc1">
+    <dgm:fillClrLst meth="repeat">
+      <a:schemeClr val="lt1"/>
+    </dgm:fillClrLst>
+    <dgm:linClrLst meth="repeat">
+      <a:schemeClr val="accent1"/>
+    </dgm:linClrLst>
+    <dgm:effectClrLst/>
+    <dgm:txLinClrLst/>
+    <dgm:txFillClrLst meth="repeat">
+      <a:schemeClr val="dk1"/>
+    </dgm:txFillClrLst>
+    <dgm:txEffectClrLst/>
+  </dgm:styleLbl>
+  <dgm:styleLbl name="solidBgAcc1">
+    <dgm:fillClrLst meth="repeat">
+      <a:schemeClr val="lt1"/>
+    </dgm:fillClrLst>
+    <dgm:linClrLst meth="repeat">
+      <a:schemeClr val="accent1"/>
+    </dgm:linClrLst>
+    <dgm:effectClrLst/>
+    <dgm:txLinClrLst/>
+    <dgm:txFillClrLst meth="repeat">
+      <a:schemeClr val="dk1"/>
+    </dgm:txFillClrLst>
+    <dgm:txEffectClrLst/>
+  </dgm:styleLbl>
+  <dgm:styleLbl name="fgAccFollowNode1">
+    <dgm:fillClrLst meth="repeat">
+      <a:schemeClr val="accent1">
+        <a:alpha val="90000"/>
+        <a:tint val="40000"/>
+      </a:schemeClr>
+    </dgm:fillClrLst>
+    <dgm:linClrLst meth="repeat">
+      <a:schemeClr val="accent1">
+        <a:alpha val="90000"/>
+        <a:tint val="40000"/>
+      </a:schemeClr>
+    </dgm:linClrLst>
+    <dgm:effectClrLst/>
+    <dgm:txLinClrLst/>
+    <dgm:txFillClrLst meth="repeat">
+      <a:schemeClr val="dk1"/>
+    </dgm:txFillClrLst>
+    <dgm:txEffectClrLst/>
+  </dgm:styleLbl>
+  <dgm:styleLbl name="alignAccFollowNode1">
+    <dgm:fillClrLst meth="repeat">
+      <a:schemeClr val="accent1">
+        <a:alpha val="90000"/>
+        <a:tint val="40000"/>
+      </a:schemeClr>
+    </dgm:fillClrLst>
+    <dgm:linClrLst meth="repeat">
+      <a:schemeClr val="accent1">
+        <a:alpha val="90000"/>
+        <a:tint val="40000"/>
+      </a:schemeClr>
+    </dgm:linClrLst>
+    <dgm:effectClrLst/>
+    <dgm:txLinClrLst/>
+    <dgm:txFillClrLst meth="repeat">
+      <a:schemeClr val="dk1"/>
+    </dgm:txFillClrLst>
+    <dgm:txEffectClrLst/>
+  </dgm:styleLbl>
+  <dgm:styleLbl name="bgAccFollowNode1">
+    <dgm:fillClrLst meth="repeat">
+      <a:schemeClr val="accent1">
+        <a:alpha val="90000"/>
+        <a:tint val="40000"/>
+      </a:schemeClr>
+    </dgm:fillClrLst>
+    <dgm:linClrLst meth="repeat">
+      <a:schemeClr val="accent1">
+        <a:alpha val="90000"/>
+        <a:tint val="40000"/>
+      </a:schemeClr>
+    </dgm:linClrLst>
+    <dgm:effectClrLst/>
+    <dgm:txLinClrLst/>
+    <dgm:txFillClrLst meth="repeat">
+      <a:schemeClr val="dk1"/>
+    </dgm:txFillClrLst>
+    <dgm:txEffectClrLst/>
+  </dgm:styleLbl>
+  <dgm:styleLbl name="fgAcc0">
+    <dgm:fillClrLst meth="repeat">
+      <a:schemeClr val="lt1">
+        <a:alpha val="90000"/>
+      </a:schemeClr>
+    </dgm:fillClrLst>
+    <dgm:linClrLst meth="repeat">
+      <a:schemeClr val="accent1"/>
+    </dgm:linClrLst>
+    <dgm:effectClrLst/>
+    <dgm:txLinClrLst/>
+    <dgm:txFillClrLst meth="repeat">
+      <a:schemeClr val="dk1"/>
+    </dgm:txFillClrLst>
+    <dgm:txEffectClrLst/>
+  </dgm:styleLbl>
+  <dgm:styleLbl name="fgAcc2">
+    <dgm:fillClrLst meth="repeat">
+      <a:schemeClr val="lt1">
+        <a:alpha val="90000"/>
+      </a:schemeClr>
+    </dgm:fillClrLst>
+    <dgm:linClrLst meth="repeat">
+      <a:schemeClr val="accent1"/>
+    </dgm:linClrLst>
+    <dgm:effectClrLst/>
+    <dgm:txLinClrLst/>
+    <dgm:txFillClrLst meth="repeat">
+      <a:schemeClr val="dk1"/>
+    </dgm:txFillClrLst>
+    <dgm:txEffectClrLst/>
+  </dgm:styleLbl>
+  <dgm:styleLbl name="fgAcc3">
+    <dgm:fillClrLst meth="repeat">
+      <a:schemeClr val="lt1">
+        <a:alpha val="90000"/>
+      </a:schemeClr>
+    </dgm:fillClrLst>
+    <dgm:linClrLst meth="repeat">
+      <a:schemeClr val="accent1"/>
+    </dgm:linClrLst>
+    <dgm:effectClrLst/>
+    <dgm:txLinClrLst/>
+    <dgm:txFillClrLst meth="repeat">
+      <a:schemeClr val="dk1"/>
+    </dgm:txFillClrLst>
+    <dgm:txEffectClrLst/>
+  </dgm:styleLbl>
+  <dgm:styleLbl name="fgAcc4">
+    <dgm:fillClrLst meth="repeat">
+      <a:schemeClr val="lt1">
+        <a:alpha val="90000"/>
+      </a:schemeClr>
+    </dgm:fillClrLst>
+    <dgm:linClrLst meth="repeat">
+      <a:schemeClr val="accent1"/>
+    </dgm:linClrLst>
+    <dgm:effectClrLst/>
+    <dgm:txLinClrLst/>
+    <dgm:txFillClrLst meth="repeat">
+      <a:schemeClr val="dk1"/>
+    </dgm:txFillClrLst>
+    <dgm:txEffectClrLst/>
+  </dgm:styleLbl>
+  <dgm:styleLbl name="bgShp">
+    <dgm:fillClrLst meth="repeat">
+      <a:schemeClr val="accent1">
+        <a:tint val="40000"/>
+      </a:schemeClr>
+    </dgm:fillClrLst>
+    <dgm:linClrLst meth="repeat">
+      <a:schemeClr val="accent1"/>
+    </dgm:linClrLst>
+    <dgm:effectClrLst/>
+    <dgm:txLinClrLst/>
+    <dgm:txFillClrLst meth="repeat">
+      <a:schemeClr val="dk1"/>
+    </dgm:txFillClrLst>
+    <dgm:txEffectClrLst/>
+  </dgm:styleLbl>
+  <dgm:styleLbl name="dkBgShp">
+    <dgm:fillClrLst meth="repeat">
+      <a:schemeClr val="accent1">
+        <a:shade val="80000"/>
+      </a:schemeClr>
+    </dgm:fillClrLst>
+    <dgm:linClrLst meth="repeat">
+      <a:schemeClr val="accent1"/>
+    </dgm:linClrLst>
+    <dgm:effectClrLst/>
+    <dgm:txLinClrLst/>
+    <dgm:txFillClrLst meth="repeat">
+      <a:schemeClr val="lt1"/>
+    </dgm:txFillClrLst>
+    <dgm:txEffectClrLst/>
+  </dgm:styleLbl>
+  <dgm:styleLbl name="trBgShp">
+    <dgm:fillClrLst meth="repeat">
+      <a:schemeClr val="accent1">
+        <a:tint val="50000"/>
+        <a:alpha val="40000"/>
+      </a:schemeClr>
+    </dgm:fillClrLst>
+    <dgm:linClrLst meth="repeat">
+      <a:schemeClr val="accent1"/>
+    </dgm:linClrLst>
+    <dgm:effectClrLst/>
+    <dgm:txLinClrLst/>
+    <dgm:txFillClrLst meth="repeat">
+      <a:schemeClr val="lt1"/>
+    </dgm:txFillClrLst>
+    <dgm:txEffectClrLst/>
+  </dgm:styleLbl>
+  <dgm:styleLbl name="fgShp">
+    <dgm:fillClrLst meth="repeat">
+      <a:schemeClr val="accent1">
+        <a:tint val="60000"/>
+      </a:schemeClr>
+    </dgm:fillClrLst>
+    <dgm:linClrLst meth="repeat">
+      <a:schemeClr val="lt1"/>
+    </dgm:linClrLst>
+    <dgm:effectClrLst/>
+    <dgm:txLinClrLst/>
+    <dgm:txFillClrLst meth="repeat">
+      <a:schemeClr val="dk1"/>
+    </dgm:txFillClrLst>
+    <dgm:txEffectClrLst/>
+  </dgm:styleLbl>
+  <dgm:styleLbl name="revTx">
+    <dgm:fillClrLst meth="repeat">
+      <a:schemeClr val="lt1">
+        <a:alpha val="0"/>
+      </a:schemeClr>
+    </dgm:fillClrLst>
+    <dgm:linClrLst meth="repeat">
+      <a:schemeClr val="dk1">
+        <a:alpha val="0"/>
+      </a:schemeClr>
+    </dgm:linClrLst>
+    <dgm:effectClrLst/>
+    <dgm:txLinClrLst/>
+    <dgm:txFillClrLst meth="repeat">
+      <a:schemeClr val="tx1"/>
+    </dgm:txFillClrLst>
+    <dgm:txEffectClrLst/>
+  </dgm:styleLbl>
+</dgm:colorsDef>
+</file>
+
+<file path=ppt/diagrams/colors2.xml><?xml version="1.0" encoding="utf-8"?>
 <dgm:colorsDef xmlns:dgm="http://schemas.openxmlformats.org/drawingml/2006/diagram" xmlns:a="http://schemas.openxmlformats.org/drawingml/2006/main" uniqueId="urn:microsoft.com/office/officeart/2005/8/colors/accent1_2">
   <dgm:title val=""/>
   <dgm:desc val=""/>
@@ -1041,10 +1795,10 @@
             </a:lnSpc>
           </a:pPr>
           <a:r>
-            <a:rPr lang="en-GB"/>
+            <a:rPr lang="en-GB" dirty="0"/>
             <a:t>OpenCV – Computer Vision Library</a:t>
           </a:r>
-          <a:endParaRPr lang="en-US"/>
+          <a:endParaRPr lang="en-US" dirty="0"/>
         </a:p>
       </dgm:t>
     </dgm:pt>
@@ -1757,6 +2511,356 @@
 </dgm:dataModel>
 </file>
 
+<file path=ppt/diagrams/data2.xml><?xml version="1.0" encoding="utf-8"?>
+<dgm:dataModel xmlns:dgm="http://schemas.openxmlformats.org/drawingml/2006/diagram" xmlns:a="http://schemas.openxmlformats.org/drawingml/2006/main">
+  <dgm:ptLst>
+    <dgm:pt modelId="{310C5AED-499C-4509-A31A-3E770F80D6AC}" type="doc">
+      <dgm:prSet loTypeId="urn:microsoft.com/office/officeart/2005/8/layout/default" loCatId="list" qsTypeId="urn:microsoft.com/office/officeart/2005/8/quickstyle/simple1" qsCatId="simple" csTypeId="urn:microsoft.com/office/officeart/2005/8/colors/accent1_2" csCatId="accent1"/>
+      <dgm:spPr/>
+      <dgm:t>
+        <a:bodyPr/>
+        <a:lstStyle/>
+        <a:p>
+          <a:endParaRPr lang="en-US"/>
+        </a:p>
+      </dgm:t>
+    </dgm:pt>
+    <dgm:pt modelId="{0D794B57-6B83-4926-8AC7-B3E2B87F5D06}">
+      <dgm:prSet/>
+      <dgm:spPr/>
+      <dgm:t>
+        <a:bodyPr/>
+        <a:lstStyle/>
+        <a:p>
+          <a:r>
+            <a:rPr lang="en-GB"/>
+            <a:t>Finalised Technology</a:t>
+          </a:r>
+          <a:endParaRPr lang="en-US"/>
+        </a:p>
+      </dgm:t>
+    </dgm:pt>
+    <dgm:pt modelId="{615D1EAE-5C27-4E2B-83F9-67A3D7B1E161}" type="parTrans" cxnId="{848EFA6D-F77A-45EA-A76B-D766B2D21640}">
+      <dgm:prSet/>
+      <dgm:spPr/>
+      <dgm:t>
+        <a:bodyPr/>
+        <a:lstStyle/>
+        <a:p>
+          <a:endParaRPr lang="en-US"/>
+        </a:p>
+      </dgm:t>
+    </dgm:pt>
+    <dgm:pt modelId="{CAE3D534-0120-4446-9EA5-13C50498B81C}" type="sibTrans" cxnId="{848EFA6D-F77A-45EA-A76B-D766B2D21640}">
+      <dgm:prSet/>
+      <dgm:spPr/>
+      <dgm:t>
+        <a:bodyPr/>
+        <a:lstStyle/>
+        <a:p>
+          <a:endParaRPr lang="en-US"/>
+        </a:p>
+      </dgm:t>
+    </dgm:pt>
+    <dgm:pt modelId="{1A9563B8-02DA-4724-98BB-8C5A024A59FF}">
+      <dgm:prSet/>
+      <dgm:spPr/>
+      <dgm:t>
+        <a:bodyPr/>
+        <a:lstStyle/>
+        <a:p>
+          <a:r>
+            <a:rPr lang="en-GB"/>
+            <a:t>Reviewed Technology Documentation</a:t>
+          </a:r>
+          <a:endParaRPr lang="en-US"/>
+        </a:p>
+      </dgm:t>
+    </dgm:pt>
+    <dgm:pt modelId="{8AA16C7A-44F5-49BD-9250-8CA19EAE2231}" type="parTrans" cxnId="{505DBFA5-6429-48E8-A825-06A4AA69B869}">
+      <dgm:prSet/>
+      <dgm:spPr/>
+      <dgm:t>
+        <a:bodyPr/>
+        <a:lstStyle/>
+        <a:p>
+          <a:endParaRPr lang="en-US"/>
+        </a:p>
+      </dgm:t>
+    </dgm:pt>
+    <dgm:pt modelId="{36250D64-D81B-434B-B177-3C3F5B4751EF}" type="sibTrans" cxnId="{505DBFA5-6429-48E8-A825-06A4AA69B869}">
+      <dgm:prSet/>
+      <dgm:spPr/>
+      <dgm:t>
+        <a:bodyPr/>
+        <a:lstStyle/>
+        <a:p>
+          <a:endParaRPr lang="en-US"/>
+        </a:p>
+      </dgm:t>
+    </dgm:pt>
+    <dgm:pt modelId="{8653967F-5B3C-4416-BFD2-1D748B3E1364}">
+      <dgm:prSet/>
+      <dgm:spPr/>
+      <dgm:t>
+        <a:bodyPr/>
+        <a:lstStyle/>
+        <a:p>
+          <a:r>
+            <a:rPr lang="en-GB"/>
+            <a:t>Completed Tutorials</a:t>
+          </a:r>
+          <a:endParaRPr lang="en-US"/>
+        </a:p>
+      </dgm:t>
+    </dgm:pt>
+    <dgm:pt modelId="{C0B1D06F-1CEF-4185-94E9-718B10637605}" type="parTrans" cxnId="{7939A716-6D71-41DF-AE6E-000E8FB80EAE}">
+      <dgm:prSet/>
+      <dgm:spPr/>
+      <dgm:t>
+        <a:bodyPr/>
+        <a:lstStyle/>
+        <a:p>
+          <a:endParaRPr lang="en-US"/>
+        </a:p>
+      </dgm:t>
+    </dgm:pt>
+    <dgm:pt modelId="{8B5538BF-8737-4056-B8D4-E3B1FE1EC428}" type="sibTrans" cxnId="{7939A716-6D71-41DF-AE6E-000E8FB80EAE}">
+      <dgm:prSet/>
+      <dgm:spPr/>
+      <dgm:t>
+        <a:bodyPr/>
+        <a:lstStyle/>
+        <a:p>
+          <a:endParaRPr lang="en-US"/>
+        </a:p>
+      </dgm:t>
+    </dgm:pt>
+    <dgm:pt modelId="{C893DFC1-F8C4-4CC1-A314-60C8FC6231AE}">
+      <dgm:prSet/>
+      <dgm:spPr/>
+      <dgm:t>
+        <a:bodyPr/>
+        <a:lstStyle/>
+        <a:p>
+          <a:r>
+            <a:rPr lang="en-GB"/>
+            <a:t>Created Logo</a:t>
+          </a:r>
+          <a:endParaRPr lang="en-US"/>
+        </a:p>
+      </dgm:t>
+    </dgm:pt>
+    <dgm:pt modelId="{91A0CA44-5322-4E3E-BFA0-15057D8E9B39}" type="parTrans" cxnId="{3C4D95B8-2372-405D-9D1C-D3B1B4EE3A18}">
+      <dgm:prSet/>
+      <dgm:spPr/>
+      <dgm:t>
+        <a:bodyPr/>
+        <a:lstStyle/>
+        <a:p>
+          <a:endParaRPr lang="en-US"/>
+        </a:p>
+      </dgm:t>
+    </dgm:pt>
+    <dgm:pt modelId="{1DE609B7-48B5-42F9-9A28-AB08A0DBF257}" type="sibTrans" cxnId="{3C4D95B8-2372-405D-9D1C-D3B1B4EE3A18}">
+      <dgm:prSet/>
+      <dgm:spPr/>
+      <dgm:t>
+        <a:bodyPr/>
+        <a:lstStyle/>
+        <a:p>
+          <a:endParaRPr lang="en-US"/>
+        </a:p>
+      </dgm:t>
+    </dgm:pt>
+    <dgm:pt modelId="{E12C84DE-EE00-4C47-B7D8-4CF6B1859EDC}">
+      <dgm:prSet/>
+      <dgm:spPr/>
+      <dgm:t>
+        <a:bodyPr/>
+        <a:lstStyle/>
+        <a:p>
+          <a:r>
+            <a:rPr lang="en-GB"/>
+            <a:t>Detailed Project Specifications</a:t>
+          </a:r>
+          <a:endParaRPr lang="en-US"/>
+        </a:p>
+      </dgm:t>
+    </dgm:pt>
+    <dgm:pt modelId="{538EC088-219F-44AB-83EC-9A696279A0A0}" type="parTrans" cxnId="{96C84DBB-5EE2-4495-BF21-FD58C258A1C4}">
+      <dgm:prSet/>
+      <dgm:spPr/>
+      <dgm:t>
+        <a:bodyPr/>
+        <a:lstStyle/>
+        <a:p>
+          <a:endParaRPr lang="en-US"/>
+        </a:p>
+      </dgm:t>
+    </dgm:pt>
+    <dgm:pt modelId="{DF93DF6E-1B3A-47C8-AFC4-C2B323BC3096}" type="sibTrans" cxnId="{96C84DBB-5EE2-4495-BF21-FD58C258A1C4}">
+      <dgm:prSet/>
+      <dgm:spPr/>
+      <dgm:t>
+        <a:bodyPr/>
+        <a:lstStyle/>
+        <a:p>
+          <a:endParaRPr lang="en-US"/>
+        </a:p>
+      </dgm:t>
+    </dgm:pt>
+    <dgm:pt modelId="{2E58586B-EC3A-4B69-A668-E2191E93A2AB}">
+      <dgm:prSet/>
+      <dgm:spPr/>
+      <dgm:t>
+        <a:bodyPr/>
+        <a:lstStyle/>
+        <a:p>
+          <a:r>
+            <a:rPr lang="en-GB"/>
+            <a:t>Developed Project Poster</a:t>
+          </a:r>
+          <a:endParaRPr lang="en-US"/>
+        </a:p>
+      </dgm:t>
+    </dgm:pt>
+    <dgm:pt modelId="{E17F6674-B81E-4F0C-B525-FAE8A5021BC2}" type="parTrans" cxnId="{114B8138-CA57-4877-90AE-20CA26186514}">
+      <dgm:prSet/>
+      <dgm:spPr/>
+      <dgm:t>
+        <a:bodyPr/>
+        <a:lstStyle/>
+        <a:p>
+          <a:endParaRPr lang="en-US"/>
+        </a:p>
+      </dgm:t>
+    </dgm:pt>
+    <dgm:pt modelId="{8B384019-2C5D-4853-A3ED-79E835871008}" type="sibTrans" cxnId="{114B8138-CA57-4877-90AE-20CA26186514}">
+      <dgm:prSet/>
+      <dgm:spPr/>
+      <dgm:t>
+        <a:bodyPr/>
+        <a:lstStyle/>
+        <a:p>
+          <a:endParaRPr lang="en-US"/>
+        </a:p>
+      </dgm:t>
+    </dgm:pt>
+    <dgm:pt modelId="{CF08B7C5-0506-454E-9D26-92460E256643}" type="pres">
+      <dgm:prSet presAssocID="{310C5AED-499C-4509-A31A-3E770F80D6AC}" presName="diagram" presStyleCnt="0">
+        <dgm:presLayoutVars>
+          <dgm:dir/>
+          <dgm:resizeHandles val="exact"/>
+        </dgm:presLayoutVars>
+      </dgm:prSet>
+      <dgm:spPr/>
+    </dgm:pt>
+    <dgm:pt modelId="{2D38C828-CB07-4469-BC0B-1E161180A0A9}" type="pres">
+      <dgm:prSet presAssocID="{0D794B57-6B83-4926-8AC7-B3E2B87F5D06}" presName="node" presStyleLbl="node1" presStyleIdx="0" presStyleCnt="6">
+        <dgm:presLayoutVars>
+          <dgm:bulletEnabled val="1"/>
+        </dgm:presLayoutVars>
+      </dgm:prSet>
+      <dgm:spPr/>
+    </dgm:pt>
+    <dgm:pt modelId="{ED46FC4B-BEA2-4B40-86DA-086FC6359851}" type="pres">
+      <dgm:prSet presAssocID="{CAE3D534-0120-4446-9EA5-13C50498B81C}" presName="sibTrans" presStyleCnt="0"/>
+      <dgm:spPr/>
+    </dgm:pt>
+    <dgm:pt modelId="{6C6C46E8-A03E-4D96-86A6-7B852063940F}" type="pres">
+      <dgm:prSet presAssocID="{1A9563B8-02DA-4724-98BB-8C5A024A59FF}" presName="node" presStyleLbl="node1" presStyleIdx="1" presStyleCnt="6">
+        <dgm:presLayoutVars>
+          <dgm:bulletEnabled val="1"/>
+        </dgm:presLayoutVars>
+      </dgm:prSet>
+      <dgm:spPr/>
+    </dgm:pt>
+    <dgm:pt modelId="{C742B709-0859-4A7C-89A4-83F836376394}" type="pres">
+      <dgm:prSet presAssocID="{36250D64-D81B-434B-B177-3C3F5B4751EF}" presName="sibTrans" presStyleCnt="0"/>
+      <dgm:spPr/>
+    </dgm:pt>
+    <dgm:pt modelId="{E3F8B56D-B516-4856-AC07-859F1D459BEF}" type="pres">
+      <dgm:prSet presAssocID="{8653967F-5B3C-4416-BFD2-1D748B3E1364}" presName="node" presStyleLbl="node1" presStyleIdx="2" presStyleCnt="6">
+        <dgm:presLayoutVars>
+          <dgm:bulletEnabled val="1"/>
+        </dgm:presLayoutVars>
+      </dgm:prSet>
+      <dgm:spPr/>
+    </dgm:pt>
+    <dgm:pt modelId="{1A4A46A1-5EAD-4783-B207-44EB1C4706C3}" type="pres">
+      <dgm:prSet presAssocID="{8B5538BF-8737-4056-B8D4-E3B1FE1EC428}" presName="sibTrans" presStyleCnt="0"/>
+      <dgm:spPr/>
+    </dgm:pt>
+    <dgm:pt modelId="{D902EAD3-AC2A-44EF-A24B-DC92EC6DB0F5}" type="pres">
+      <dgm:prSet presAssocID="{C893DFC1-F8C4-4CC1-A314-60C8FC6231AE}" presName="node" presStyleLbl="node1" presStyleIdx="3" presStyleCnt="6">
+        <dgm:presLayoutVars>
+          <dgm:bulletEnabled val="1"/>
+        </dgm:presLayoutVars>
+      </dgm:prSet>
+      <dgm:spPr/>
+    </dgm:pt>
+    <dgm:pt modelId="{EADEA152-50CC-4459-8F7D-88E21BAB14C3}" type="pres">
+      <dgm:prSet presAssocID="{1DE609B7-48B5-42F9-9A28-AB08A0DBF257}" presName="sibTrans" presStyleCnt="0"/>
+      <dgm:spPr/>
+    </dgm:pt>
+    <dgm:pt modelId="{7CE73D57-F61E-479E-93B2-04470CB392B7}" type="pres">
+      <dgm:prSet presAssocID="{E12C84DE-EE00-4C47-B7D8-4CF6B1859EDC}" presName="node" presStyleLbl="node1" presStyleIdx="4" presStyleCnt="6">
+        <dgm:presLayoutVars>
+          <dgm:bulletEnabled val="1"/>
+        </dgm:presLayoutVars>
+      </dgm:prSet>
+      <dgm:spPr/>
+    </dgm:pt>
+    <dgm:pt modelId="{F9B0AF94-AC7F-4DA1-9A65-4E4085BB023A}" type="pres">
+      <dgm:prSet presAssocID="{DF93DF6E-1B3A-47C8-AFC4-C2B323BC3096}" presName="sibTrans" presStyleCnt="0"/>
+      <dgm:spPr/>
+    </dgm:pt>
+    <dgm:pt modelId="{8721C090-38C6-4C97-B221-EF6F0FB02030}" type="pres">
+      <dgm:prSet presAssocID="{2E58586B-EC3A-4B69-A668-E2191E93A2AB}" presName="node" presStyleLbl="node1" presStyleIdx="5" presStyleCnt="6">
+        <dgm:presLayoutVars>
+          <dgm:bulletEnabled val="1"/>
+        </dgm:presLayoutVars>
+      </dgm:prSet>
+      <dgm:spPr/>
+    </dgm:pt>
+  </dgm:ptLst>
+  <dgm:cxnLst>
+    <dgm:cxn modelId="{7939A716-6D71-41DF-AE6E-000E8FB80EAE}" srcId="{310C5AED-499C-4509-A31A-3E770F80D6AC}" destId="{8653967F-5B3C-4416-BFD2-1D748B3E1364}" srcOrd="2" destOrd="0" parTransId="{C0B1D06F-1CEF-4185-94E9-718B10637605}" sibTransId="{8B5538BF-8737-4056-B8D4-E3B1FE1EC428}"/>
+    <dgm:cxn modelId="{E2865036-5B0A-402A-AF36-AD8195066787}" type="presOf" srcId="{2E58586B-EC3A-4B69-A668-E2191E93A2AB}" destId="{8721C090-38C6-4C97-B221-EF6F0FB02030}" srcOrd="0" destOrd="0" presId="urn:microsoft.com/office/officeart/2005/8/layout/default"/>
+    <dgm:cxn modelId="{114B8138-CA57-4877-90AE-20CA26186514}" srcId="{310C5AED-499C-4509-A31A-3E770F80D6AC}" destId="{2E58586B-EC3A-4B69-A668-E2191E93A2AB}" srcOrd="5" destOrd="0" parTransId="{E17F6674-B81E-4F0C-B525-FAE8A5021BC2}" sibTransId="{8B384019-2C5D-4853-A3ED-79E835871008}"/>
+    <dgm:cxn modelId="{3AF7B13A-1EA8-4274-9BDC-81EB52558102}" type="presOf" srcId="{310C5AED-499C-4509-A31A-3E770F80D6AC}" destId="{CF08B7C5-0506-454E-9D26-92460E256643}" srcOrd="0" destOrd="0" presId="urn:microsoft.com/office/officeart/2005/8/layout/default"/>
+    <dgm:cxn modelId="{FC70C35B-ECD5-4547-85D3-D0F92D6D6CAC}" type="presOf" srcId="{0D794B57-6B83-4926-8AC7-B3E2B87F5D06}" destId="{2D38C828-CB07-4469-BC0B-1E161180A0A9}" srcOrd="0" destOrd="0" presId="urn:microsoft.com/office/officeart/2005/8/layout/default"/>
+    <dgm:cxn modelId="{9F0FA96D-5B91-405F-95C7-50C709FAB6FC}" type="presOf" srcId="{1A9563B8-02DA-4724-98BB-8C5A024A59FF}" destId="{6C6C46E8-A03E-4D96-86A6-7B852063940F}" srcOrd="0" destOrd="0" presId="urn:microsoft.com/office/officeart/2005/8/layout/default"/>
+    <dgm:cxn modelId="{848EFA6D-F77A-45EA-A76B-D766B2D21640}" srcId="{310C5AED-499C-4509-A31A-3E770F80D6AC}" destId="{0D794B57-6B83-4926-8AC7-B3E2B87F5D06}" srcOrd="0" destOrd="0" parTransId="{615D1EAE-5C27-4E2B-83F9-67A3D7B1E161}" sibTransId="{CAE3D534-0120-4446-9EA5-13C50498B81C}"/>
+    <dgm:cxn modelId="{89E39D9C-C1D2-4997-AC42-C5D07FD9DAEB}" type="presOf" srcId="{E12C84DE-EE00-4C47-B7D8-4CF6B1859EDC}" destId="{7CE73D57-F61E-479E-93B2-04470CB392B7}" srcOrd="0" destOrd="0" presId="urn:microsoft.com/office/officeart/2005/8/layout/default"/>
+    <dgm:cxn modelId="{505DBFA5-6429-48E8-A825-06A4AA69B869}" srcId="{310C5AED-499C-4509-A31A-3E770F80D6AC}" destId="{1A9563B8-02DA-4724-98BB-8C5A024A59FF}" srcOrd="1" destOrd="0" parTransId="{8AA16C7A-44F5-49BD-9250-8CA19EAE2231}" sibTransId="{36250D64-D81B-434B-B177-3C3F5B4751EF}"/>
+    <dgm:cxn modelId="{3C4D95B8-2372-405D-9D1C-D3B1B4EE3A18}" srcId="{310C5AED-499C-4509-A31A-3E770F80D6AC}" destId="{C893DFC1-F8C4-4CC1-A314-60C8FC6231AE}" srcOrd="3" destOrd="0" parTransId="{91A0CA44-5322-4E3E-BFA0-15057D8E9B39}" sibTransId="{1DE609B7-48B5-42F9-9A28-AB08A0DBF257}"/>
+    <dgm:cxn modelId="{96C84DBB-5EE2-4495-BF21-FD58C258A1C4}" srcId="{310C5AED-499C-4509-A31A-3E770F80D6AC}" destId="{E12C84DE-EE00-4C47-B7D8-4CF6B1859EDC}" srcOrd="4" destOrd="0" parTransId="{538EC088-219F-44AB-83EC-9A696279A0A0}" sibTransId="{DF93DF6E-1B3A-47C8-AFC4-C2B323BC3096}"/>
+    <dgm:cxn modelId="{B1775BBF-8E1F-4132-8168-2A992ED60C0C}" type="presOf" srcId="{8653967F-5B3C-4416-BFD2-1D748B3E1364}" destId="{E3F8B56D-B516-4856-AC07-859F1D459BEF}" srcOrd="0" destOrd="0" presId="urn:microsoft.com/office/officeart/2005/8/layout/default"/>
+    <dgm:cxn modelId="{FA015AE8-E2DB-4897-A2CC-DFA2240DFB28}" type="presOf" srcId="{C893DFC1-F8C4-4CC1-A314-60C8FC6231AE}" destId="{D902EAD3-AC2A-44EF-A24B-DC92EC6DB0F5}" srcOrd="0" destOrd="0" presId="urn:microsoft.com/office/officeart/2005/8/layout/default"/>
+    <dgm:cxn modelId="{5FC723F5-1105-40FC-8C8D-3700621D666D}" type="presParOf" srcId="{CF08B7C5-0506-454E-9D26-92460E256643}" destId="{2D38C828-CB07-4469-BC0B-1E161180A0A9}" srcOrd="0" destOrd="0" presId="urn:microsoft.com/office/officeart/2005/8/layout/default"/>
+    <dgm:cxn modelId="{2DE72387-46E1-4574-8B96-4B01DE776EB2}" type="presParOf" srcId="{CF08B7C5-0506-454E-9D26-92460E256643}" destId="{ED46FC4B-BEA2-4B40-86DA-086FC6359851}" srcOrd="1" destOrd="0" presId="urn:microsoft.com/office/officeart/2005/8/layout/default"/>
+    <dgm:cxn modelId="{8A32C71B-587E-4C7B-A999-6B98FEEF7E3C}" type="presParOf" srcId="{CF08B7C5-0506-454E-9D26-92460E256643}" destId="{6C6C46E8-A03E-4D96-86A6-7B852063940F}" srcOrd="2" destOrd="0" presId="urn:microsoft.com/office/officeart/2005/8/layout/default"/>
+    <dgm:cxn modelId="{757BC833-DDA0-425B-B15B-BD75309050CE}" type="presParOf" srcId="{CF08B7C5-0506-454E-9D26-92460E256643}" destId="{C742B709-0859-4A7C-89A4-83F836376394}" srcOrd="3" destOrd="0" presId="urn:microsoft.com/office/officeart/2005/8/layout/default"/>
+    <dgm:cxn modelId="{269A1018-8F6A-4215-9079-C708D8A7A5B3}" type="presParOf" srcId="{CF08B7C5-0506-454E-9D26-92460E256643}" destId="{E3F8B56D-B516-4856-AC07-859F1D459BEF}" srcOrd="4" destOrd="0" presId="urn:microsoft.com/office/officeart/2005/8/layout/default"/>
+    <dgm:cxn modelId="{6F0AB9F6-94D1-4052-BFD0-77B816A3BBF6}" type="presParOf" srcId="{CF08B7C5-0506-454E-9D26-92460E256643}" destId="{1A4A46A1-5EAD-4783-B207-44EB1C4706C3}" srcOrd="5" destOrd="0" presId="urn:microsoft.com/office/officeart/2005/8/layout/default"/>
+    <dgm:cxn modelId="{0077BF2E-D465-4A96-A7F8-D83A3B97E0D2}" type="presParOf" srcId="{CF08B7C5-0506-454E-9D26-92460E256643}" destId="{D902EAD3-AC2A-44EF-A24B-DC92EC6DB0F5}" srcOrd="6" destOrd="0" presId="urn:microsoft.com/office/officeart/2005/8/layout/default"/>
+    <dgm:cxn modelId="{6F9387E2-D485-4072-9328-A3465DA775D7}" type="presParOf" srcId="{CF08B7C5-0506-454E-9D26-92460E256643}" destId="{EADEA152-50CC-4459-8F7D-88E21BAB14C3}" srcOrd="7" destOrd="0" presId="urn:microsoft.com/office/officeart/2005/8/layout/default"/>
+    <dgm:cxn modelId="{483A02EA-5F85-4FFA-B560-D92BF8C8EDDD}" type="presParOf" srcId="{CF08B7C5-0506-454E-9D26-92460E256643}" destId="{7CE73D57-F61E-479E-93B2-04470CB392B7}" srcOrd="8" destOrd="0" presId="urn:microsoft.com/office/officeart/2005/8/layout/default"/>
+    <dgm:cxn modelId="{D7FB5051-42CC-4331-A842-40D56BC91B55}" type="presParOf" srcId="{CF08B7C5-0506-454E-9D26-92460E256643}" destId="{F9B0AF94-AC7F-4DA1-9A65-4E4085BB023A}" srcOrd="9" destOrd="0" presId="urn:microsoft.com/office/officeart/2005/8/layout/default"/>
+    <dgm:cxn modelId="{54AE6BD7-941A-4E6C-8FC3-4260A8D77300}" type="presParOf" srcId="{CF08B7C5-0506-454E-9D26-92460E256643}" destId="{8721C090-38C6-4C97-B221-EF6F0FB02030}" srcOrd="10" destOrd="0" presId="urn:microsoft.com/office/officeart/2005/8/layout/default"/>
+  </dgm:cxnLst>
+  <dgm:bg/>
+  <dgm:whole/>
+  <dgm:extLst>
+    <a:ext uri="http://schemas.microsoft.com/office/drawing/2008/diagram">
+      <dsp:dataModelExt xmlns:dsp="http://schemas.microsoft.com/office/drawing/2008/diagram" relId="rId6" minVer="http://schemas.openxmlformats.org/drawingml/2006/diagram"/>
+    </a:ext>
+  </dgm:extLst>
+</dgm:dataModel>
+</file>
+
 <file path=ppt/diagrams/drawing1.xml><?xml version="1.0" encoding="utf-8"?>
 <dsp:drawing xmlns:dgm="http://schemas.openxmlformats.org/drawingml/2006/diagram" xmlns:dsp="http://schemas.microsoft.com/office/drawing/2008/diagram" xmlns:a="http://schemas.openxmlformats.org/drawingml/2006/main">
   <dsp:spTree>
@@ -2386,10 +3490,10 @@
             <a:buNone/>
           </a:pPr>
           <a:r>
-            <a:rPr lang="en-GB" sz="1100" kern="1200"/>
+            <a:rPr lang="en-GB" sz="1100" kern="1200" dirty="0"/>
             <a:t>OpenCV – Computer Vision Library</a:t>
           </a:r>
-          <a:endParaRPr lang="en-US" sz="1100" kern="1200"/>
+          <a:endParaRPr lang="en-US" sz="1100" kern="1200" dirty="0"/>
         </a:p>
       </dsp:txBody>
       <dsp:txXfrm>
@@ -3033,6 +4137,492 @@
 </dsp:drawing>
 </file>
 
+<file path=ppt/diagrams/drawing2.xml><?xml version="1.0" encoding="utf-8"?>
+<dsp:drawing xmlns:dgm="http://schemas.openxmlformats.org/drawingml/2006/diagram" xmlns:dsp="http://schemas.microsoft.com/office/drawing/2008/diagram" xmlns:a="http://schemas.openxmlformats.org/drawingml/2006/main">
+  <dsp:spTree>
+    <dsp:nvGrpSpPr>
+      <dsp:cNvPr id="0" name=""/>
+      <dsp:cNvGrpSpPr/>
+    </dsp:nvGrpSpPr>
+    <dsp:grpSpPr/>
+    <dsp:sp modelId="{2D38C828-CB07-4469-BC0B-1E161180A0A9}">
+      <dsp:nvSpPr>
+        <dsp:cNvPr id="0" name=""/>
+        <dsp:cNvSpPr/>
+      </dsp:nvSpPr>
+      <dsp:spPr>
+        <a:xfrm>
+          <a:off x="0" y="39687"/>
+          <a:ext cx="3286125" cy="1971675"/>
+        </a:xfrm>
+        <a:prstGeom prst="rect">
+          <a:avLst/>
+        </a:prstGeom>
+        <a:solidFill>
+          <a:schemeClr val="accent1">
+            <a:hueOff val="0"/>
+            <a:satOff val="0"/>
+            <a:lumOff val="0"/>
+            <a:alphaOff val="0"/>
+          </a:schemeClr>
+        </a:solidFill>
+        <a:ln w="19050" cap="flat" cmpd="sng" algn="ctr">
+          <a:solidFill>
+            <a:schemeClr val="lt1">
+              <a:hueOff val="0"/>
+              <a:satOff val="0"/>
+              <a:lumOff val="0"/>
+              <a:alphaOff val="0"/>
+            </a:schemeClr>
+          </a:solidFill>
+          <a:prstDash val="solid"/>
+          <a:miter lim="800000"/>
+        </a:ln>
+        <a:effectLst/>
+      </dsp:spPr>
+      <dsp:style>
+        <a:lnRef idx="2">
+          <a:scrgbClr r="0" g="0" b="0"/>
+        </a:lnRef>
+        <a:fillRef idx="1">
+          <a:scrgbClr r="0" g="0" b="0"/>
+        </a:fillRef>
+        <a:effectRef idx="0">
+          <a:scrgbClr r="0" g="0" b="0"/>
+        </a:effectRef>
+        <a:fontRef idx="minor">
+          <a:schemeClr val="lt1"/>
+        </a:fontRef>
+      </dsp:style>
+      <dsp:txBody>
+        <a:bodyPr spcFirstLastPara="0" vert="horz" wrap="square" lIns="133350" tIns="133350" rIns="133350" bIns="133350" numCol="1" spcCol="1270" anchor="ctr" anchorCtr="0">
+          <a:noAutofit/>
+        </a:bodyPr>
+        <a:lstStyle/>
+        <a:p>
+          <a:pPr marL="0" lvl="0" indent="0" algn="ctr" defTabSz="1555750">
+            <a:lnSpc>
+              <a:spcPct val="90000"/>
+            </a:lnSpc>
+            <a:spcBef>
+              <a:spcPct val="0"/>
+            </a:spcBef>
+            <a:spcAft>
+              <a:spcPct val="35000"/>
+            </a:spcAft>
+            <a:buNone/>
+          </a:pPr>
+          <a:r>
+            <a:rPr lang="en-GB" sz="3500" kern="1200"/>
+            <a:t>Finalised Technology</a:t>
+          </a:r>
+          <a:endParaRPr lang="en-US" sz="3500" kern="1200"/>
+        </a:p>
+      </dsp:txBody>
+      <dsp:txXfrm>
+        <a:off x="0" y="39687"/>
+        <a:ext cx="3286125" cy="1971675"/>
+      </dsp:txXfrm>
+    </dsp:sp>
+    <dsp:sp modelId="{6C6C46E8-A03E-4D96-86A6-7B852063940F}">
+      <dsp:nvSpPr>
+        <dsp:cNvPr id="0" name=""/>
+        <dsp:cNvSpPr/>
+      </dsp:nvSpPr>
+      <dsp:spPr>
+        <a:xfrm>
+          <a:off x="3614737" y="39687"/>
+          <a:ext cx="3286125" cy="1971675"/>
+        </a:xfrm>
+        <a:prstGeom prst="rect">
+          <a:avLst/>
+        </a:prstGeom>
+        <a:solidFill>
+          <a:schemeClr val="accent1">
+            <a:hueOff val="0"/>
+            <a:satOff val="0"/>
+            <a:lumOff val="0"/>
+            <a:alphaOff val="0"/>
+          </a:schemeClr>
+        </a:solidFill>
+        <a:ln w="19050" cap="flat" cmpd="sng" algn="ctr">
+          <a:solidFill>
+            <a:schemeClr val="lt1">
+              <a:hueOff val="0"/>
+              <a:satOff val="0"/>
+              <a:lumOff val="0"/>
+              <a:alphaOff val="0"/>
+            </a:schemeClr>
+          </a:solidFill>
+          <a:prstDash val="solid"/>
+          <a:miter lim="800000"/>
+        </a:ln>
+        <a:effectLst/>
+      </dsp:spPr>
+      <dsp:style>
+        <a:lnRef idx="2">
+          <a:scrgbClr r="0" g="0" b="0"/>
+        </a:lnRef>
+        <a:fillRef idx="1">
+          <a:scrgbClr r="0" g="0" b="0"/>
+        </a:fillRef>
+        <a:effectRef idx="0">
+          <a:scrgbClr r="0" g="0" b="0"/>
+        </a:effectRef>
+        <a:fontRef idx="minor">
+          <a:schemeClr val="lt1"/>
+        </a:fontRef>
+      </dsp:style>
+      <dsp:txBody>
+        <a:bodyPr spcFirstLastPara="0" vert="horz" wrap="square" lIns="133350" tIns="133350" rIns="133350" bIns="133350" numCol="1" spcCol="1270" anchor="ctr" anchorCtr="0">
+          <a:noAutofit/>
+        </a:bodyPr>
+        <a:lstStyle/>
+        <a:p>
+          <a:pPr marL="0" lvl="0" indent="0" algn="ctr" defTabSz="1555750">
+            <a:lnSpc>
+              <a:spcPct val="90000"/>
+            </a:lnSpc>
+            <a:spcBef>
+              <a:spcPct val="0"/>
+            </a:spcBef>
+            <a:spcAft>
+              <a:spcPct val="35000"/>
+            </a:spcAft>
+            <a:buNone/>
+          </a:pPr>
+          <a:r>
+            <a:rPr lang="en-GB" sz="3500" kern="1200"/>
+            <a:t>Reviewed Technology Documentation</a:t>
+          </a:r>
+          <a:endParaRPr lang="en-US" sz="3500" kern="1200"/>
+        </a:p>
+      </dsp:txBody>
+      <dsp:txXfrm>
+        <a:off x="3614737" y="39687"/>
+        <a:ext cx="3286125" cy="1971675"/>
+      </dsp:txXfrm>
+    </dsp:sp>
+    <dsp:sp modelId="{E3F8B56D-B516-4856-AC07-859F1D459BEF}">
+      <dsp:nvSpPr>
+        <dsp:cNvPr id="0" name=""/>
+        <dsp:cNvSpPr/>
+      </dsp:nvSpPr>
+      <dsp:spPr>
+        <a:xfrm>
+          <a:off x="7229475" y="39687"/>
+          <a:ext cx="3286125" cy="1971675"/>
+        </a:xfrm>
+        <a:prstGeom prst="rect">
+          <a:avLst/>
+        </a:prstGeom>
+        <a:solidFill>
+          <a:schemeClr val="accent1">
+            <a:hueOff val="0"/>
+            <a:satOff val="0"/>
+            <a:lumOff val="0"/>
+            <a:alphaOff val="0"/>
+          </a:schemeClr>
+        </a:solidFill>
+        <a:ln w="19050" cap="flat" cmpd="sng" algn="ctr">
+          <a:solidFill>
+            <a:schemeClr val="lt1">
+              <a:hueOff val="0"/>
+              <a:satOff val="0"/>
+              <a:lumOff val="0"/>
+              <a:alphaOff val="0"/>
+            </a:schemeClr>
+          </a:solidFill>
+          <a:prstDash val="solid"/>
+          <a:miter lim="800000"/>
+        </a:ln>
+        <a:effectLst/>
+      </dsp:spPr>
+      <dsp:style>
+        <a:lnRef idx="2">
+          <a:scrgbClr r="0" g="0" b="0"/>
+        </a:lnRef>
+        <a:fillRef idx="1">
+          <a:scrgbClr r="0" g="0" b="0"/>
+        </a:fillRef>
+        <a:effectRef idx="0">
+          <a:scrgbClr r="0" g="0" b="0"/>
+        </a:effectRef>
+        <a:fontRef idx="minor">
+          <a:schemeClr val="lt1"/>
+        </a:fontRef>
+      </dsp:style>
+      <dsp:txBody>
+        <a:bodyPr spcFirstLastPara="0" vert="horz" wrap="square" lIns="133350" tIns="133350" rIns="133350" bIns="133350" numCol="1" spcCol="1270" anchor="ctr" anchorCtr="0">
+          <a:noAutofit/>
+        </a:bodyPr>
+        <a:lstStyle/>
+        <a:p>
+          <a:pPr marL="0" lvl="0" indent="0" algn="ctr" defTabSz="1555750">
+            <a:lnSpc>
+              <a:spcPct val="90000"/>
+            </a:lnSpc>
+            <a:spcBef>
+              <a:spcPct val="0"/>
+            </a:spcBef>
+            <a:spcAft>
+              <a:spcPct val="35000"/>
+            </a:spcAft>
+            <a:buNone/>
+          </a:pPr>
+          <a:r>
+            <a:rPr lang="en-GB" sz="3500" kern="1200"/>
+            <a:t>Completed Tutorials</a:t>
+          </a:r>
+          <a:endParaRPr lang="en-US" sz="3500" kern="1200"/>
+        </a:p>
+      </dsp:txBody>
+      <dsp:txXfrm>
+        <a:off x="7229475" y="39687"/>
+        <a:ext cx="3286125" cy="1971675"/>
+      </dsp:txXfrm>
+    </dsp:sp>
+    <dsp:sp modelId="{D902EAD3-AC2A-44EF-A24B-DC92EC6DB0F5}">
+      <dsp:nvSpPr>
+        <dsp:cNvPr id="0" name=""/>
+        <dsp:cNvSpPr/>
+      </dsp:nvSpPr>
+      <dsp:spPr>
+        <a:xfrm>
+          <a:off x="0" y="2339975"/>
+          <a:ext cx="3286125" cy="1971675"/>
+        </a:xfrm>
+        <a:prstGeom prst="rect">
+          <a:avLst/>
+        </a:prstGeom>
+        <a:solidFill>
+          <a:schemeClr val="accent1">
+            <a:hueOff val="0"/>
+            <a:satOff val="0"/>
+            <a:lumOff val="0"/>
+            <a:alphaOff val="0"/>
+          </a:schemeClr>
+        </a:solidFill>
+        <a:ln w="19050" cap="flat" cmpd="sng" algn="ctr">
+          <a:solidFill>
+            <a:schemeClr val="lt1">
+              <a:hueOff val="0"/>
+              <a:satOff val="0"/>
+              <a:lumOff val="0"/>
+              <a:alphaOff val="0"/>
+            </a:schemeClr>
+          </a:solidFill>
+          <a:prstDash val="solid"/>
+          <a:miter lim="800000"/>
+        </a:ln>
+        <a:effectLst/>
+      </dsp:spPr>
+      <dsp:style>
+        <a:lnRef idx="2">
+          <a:scrgbClr r="0" g="0" b="0"/>
+        </a:lnRef>
+        <a:fillRef idx="1">
+          <a:scrgbClr r="0" g="0" b="0"/>
+        </a:fillRef>
+        <a:effectRef idx="0">
+          <a:scrgbClr r="0" g="0" b="0"/>
+        </a:effectRef>
+        <a:fontRef idx="minor">
+          <a:schemeClr val="lt1"/>
+        </a:fontRef>
+      </dsp:style>
+      <dsp:txBody>
+        <a:bodyPr spcFirstLastPara="0" vert="horz" wrap="square" lIns="133350" tIns="133350" rIns="133350" bIns="133350" numCol="1" spcCol="1270" anchor="ctr" anchorCtr="0">
+          <a:noAutofit/>
+        </a:bodyPr>
+        <a:lstStyle/>
+        <a:p>
+          <a:pPr marL="0" lvl="0" indent="0" algn="ctr" defTabSz="1555750">
+            <a:lnSpc>
+              <a:spcPct val="90000"/>
+            </a:lnSpc>
+            <a:spcBef>
+              <a:spcPct val="0"/>
+            </a:spcBef>
+            <a:spcAft>
+              <a:spcPct val="35000"/>
+            </a:spcAft>
+            <a:buNone/>
+          </a:pPr>
+          <a:r>
+            <a:rPr lang="en-GB" sz="3500" kern="1200"/>
+            <a:t>Created Logo</a:t>
+          </a:r>
+          <a:endParaRPr lang="en-US" sz="3500" kern="1200"/>
+        </a:p>
+      </dsp:txBody>
+      <dsp:txXfrm>
+        <a:off x="0" y="2339975"/>
+        <a:ext cx="3286125" cy="1971675"/>
+      </dsp:txXfrm>
+    </dsp:sp>
+    <dsp:sp modelId="{7CE73D57-F61E-479E-93B2-04470CB392B7}">
+      <dsp:nvSpPr>
+        <dsp:cNvPr id="0" name=""/>
+        <dsp:cNvSpPr/>
+      </dsp:nvSpPr>
+      <dsp:spPr>
+        <a:xfrm>
+          <a:off x="3614737" y="2339975"/>
+          <a:ext cx="3286125" cy="1971675"/>
+        </a:xfrm>
+        <a:prstGeom prst="rect">
+          <a:avLst/>
+        </a:prstGeom>
+        <a:solidFill>
+          <a:schemeClr val="accent1">
+            <a:hueOff val="0"/>
+            <a:satOff val="0"/>
+            <a:lumOff val="0"/>
+            <a:alphaOff val="0"/>
+          </a:schemeClr>
+        </a:solidFill>
+        <a:ln w="19050" cap="flat" cmpd="sng" algn="ctr">
+          <a:solidFill>
+            <a:schemeClr val="lt1">
+              <a:hueOff val="0"/>
+              <a:satOff val="0"/>
+              <a:lumOff val="0"/>
+              <a:alphaOff val="0"/>
+            </a:schemeClr>
+          </a:solidFill>
+          <a:prstDash val="solid"/>
+          <a:miter lim="800000"/>
+        </a:ln>
+        <a:effectLst/>
+      </dsp:spPr>
+      <dsp:style>
+        <a:lnRef idx="2">
+          <a:scrgbClr r="0" g="0" b="0"/>
+        </a:lnRef>
+        <a:fillRef idx="1">
+          <a:scrgbClr r="0" g="0" b="0"/>
+        </a:fillRef>
+        <a:effectRef idx="0">
+          <a:scrgbClr r="0" g="0" b="0"/>
+        </a:effectRef>
+        <a:fontRef idx="minor">
+          <a:schemeClr val="lt1"/>
+        </a:fontRef>
+      </dsp:style>
+      <dsp:txBody>
+        <a:bodyPr spcFirstLastPara="0" vert="horz" wrap="square" lIns="133350" tIns="133350" rIns="133350" bIns="133350" numCol="1" spcCol="1270" anchor="ctr" anchorCtr="0">
+          <a:noAutofit/>
+        </a:bodyPr>
+        <a:lstStyle/>
+        <a:p>
+          <a:pPr marL="0" lvl="0" indent="0" algn="ctr" defTabSz="1555750">
+            <a:lnSpc>
+              <a:spcPct val="90000"/>
+            </a:lnSpc>
+            <a:spcBef>
+              <a:spcPct val="0"/>
+            </a:spcBef>
+            <a:spcAft>
+              <a:spcPct val="35000"/>
+            </a:spcAft>
+            <a:buNone/>
+          </a:pPr>
+          <a:r>
+            <a:rPr lang="en-GB" sz="3500" kern="1200"/>
+            <a:t>Detailed Project Specifications</a:t>
+          </a:r>
+          <a:endParaRPr lang="en-US" sz="3500" kern="1200"/>
+        </a:p>
+      </dsp:txBody>
+      <dsp:txXfrm>
+        <a:off x="3614737" y="2339975"/>
+        <a:ext cx="3286125" cy="1971675"/>
+      </dsp:txXfrm>
+    </dsp:sp>
+    <dsp:sp modelId="{8721C090-38C6-4C97-B221-EF6F0FB02030}">
+      <dsp:nvSpPr>
+        <dsp:cNvPr id="0" name=""/>
+        <dsp:cNvSpPr/>
+      </dsp:nvSpPr>
+      <dsp:spPr>
+        <a:xfrm>
+          <a:off x="7229475" y="2339975"/>
+          <a:ext cx="3286125" cy="1971675"/>
+        </a:xfrm>
+        <a:prstGeom prst="rect">
+          <a:avLst/>
+        </a:prstGeom>
+        <a:solidFill>
+          <a:schemeClr val="accent1">
+            <a:hueOff val="0"/>
+            <a:satOff val="0"/>
+            <a:lumOff val="0"/>
+            <a:alphaOff val="0"/>
+          </a:schemeClr>
+        </a:solidFill>
+        <a:ln w="19050" cap="flat" cmpd="sng" algn="ctr">
+          <a:solidFill>
+            <a:schemeClr val="lt1">
+              <a:hueOff val="0"/>
+              <a:satOff val="0"/>
+              <a:lumOff val="0"/>
+              <a:alphaOff val="0"/>
+            </a:schemeClr>
+          </a:solidFill>
+          <a:prstDash val="solid"/>
+          <a:miter lim="800000"/>
+        </a:ln>
+        <a:effectLst/>
+      </dsp:spPr>
+      <dsp:style>
+        <a:lnRef idx="2">
+          <a:scrgbClr r="0" g="0" b="0"/>
+        </a:lnRef>
+        <a:fillRef idx="1">
+          <a:scrgbClr r="0" g="0" b="0"/>
+        </a:fillRef>
+        <a:effectRef idx="0">
+          <a:scrgbClr r="0" g="0" b="0"/>
+        </a:effectRef>
+        <a:fontRef idx="minor">
+          <a:schemeClr val="lt1"/>
+        </a:fontRef>
+      </dsp:style>
+      <dsp:txBody>
+        <a:bodyPr spcFirstLastPara="0" vert="horz" wrap="square" lIns="133350" tIns="133350" rIns="133350" bIns="133350" numCol="1" spcCol="1270" anchor="ctr" anchorCtr="0">
+          <a:noAutofit/>
+        </a:bodyPr>
+        <a:lstStyle/>
+        <a:p>
+          <a:pPr marL="0" lvl="0" indent="0" algn="ctr" defTabSz="1555750">
+            <a:lnSpc>
+              <a:spcPct val="90000"/>
+            </a:lnSpc>
+            <a:spcBef>
+              <a:spcPct val="0"/>
+            </a:spcBef>
+            <a:spcAft>
+              <a:spcPct val="35000"/>
+            </a:spcAft>
+            <a:buNone/>
+          </a:pPr>
+          <a:r>
+            <a:rPr lang="en-GB" sz="3500" kern="1200"/>
+            <a:t>Developed Project Poster</a:t>
+          </a:r>
+          <a:endParaRPr lang="en-US" sz="3500" kern="1200"/>
+        </a:p>
+      </dsp:txBody>
+      <dsp:txXfrm>
+        <a:off x="7229475" y="2339975"/>
+        <a:ext cx="3286125" cy="1971675"/>
+      </dsp:txXfrm>
+    </dsp:sp>
+  </dsp:spTree>
+</dsp:drawing>
+</file>
+
 <file path=ppt/diagrams/layout1.xml><?xml version="1.0" encoding="utf-8"?>
 <dgm:layoutDef xmlns:dgm="http://schemas.openxmlformats.org/drawingml/2006/diagram" xmlns:a="http://schemas.openxmlformats.org/drawingml/2006/main" uniqueId="urn:microsoft.com/office/officeart/2018/2/layout/IconCircleList">
   <dgm:title val="Icon Circle List"/>
@@ -3245,6 +4835,153 @@
 </dgm:layoutDef>
 </file>
 
+<file path=ppt/diagrams/layout2.xml><?xml version="1.0" encoding="utf-8"?>
+<dgm:layoutDef xmlns:dgm="http://schemas.openxmlformats.org/drawingml/2006/diagram" xmlns:a="http://schemas.openxmlformats.org/drawingml/2006/main" uniqueId="urn:microsoft.com/office/officeart/2005/8/layout/default">
+  <dgm:title val=""/>
+  <dgm:desc val=""/>
+  <dgm:catLst>
+    <dgm:cat type="list" pri="400"/>
+  </dgm:catLst>
+  <dgm:sampData>
+    <dgm:dataModel>
+      <dgm:ptLst>
+        <dgm:pt modelId="0" type="doc"/>
+        <dgm:pt modelId="1">
+          <dgm:prSet phldr="1"/>
+        </dgm:pt>
+        <dgm:pt modelId="2">
+          <dgm:prSet phldr="1"/>
+        </dgm:pt>
+        <dgm:pt modelId="3">
+          <dgm:prSet phldr="1"/>
+        </dgm:pt>
+        <dgm:pt modelId="4">
+          <dgm:prSet phldr="1"/>
+        </dgm:pt>
+        <dgm:pt modelId="5">
+          <dgm:prSet phldr="1"/>
+        </dgm:pt>
+      </dgm:ptLst>
+      <dgm:cxnLst>
+        <dgm:cxn modelId="6" srcId="0" destId="1" srcOrd="0" destOrd="0"/>
+        <dgm:cxn modelId="7" srcId="0" destId="2" srcOrd="1" destOrd="0"/>
+        <dgm:cxn modelId="8" srcId="0" destId="3" srcOrd="2" destOrd="0"/>
+        <dgm:cxn modelId="9" srcId="0" destId="4" srcOrd="3" destOrd="0"/>
+        <dgm:cxn modelId="10" srcId="0" destId="5" srcOrd="4" destOrd="0"/>
+      </dgm:cxnLst>
+      <dgm:bg/>
+      <dgm:whole/>
+    </dgm:dataModel>
+  </dgm:sampData>
+  <dgm:styleData>
+    <dgm:dataModel>
+      <dgm:ptLst>
+        <dgm:pt modelId="0" type="doc"/>
+        <dgm:pt modelId="1"/>
+        <dgm:pt modelId="2"/>
+      </dgm:ptLst>
+      <dgm:cxnLst>
+        <dgm:cxn modelId="3" srcId="0" destId="1" srcOrd="0" destOrd="0"/>
+        <dgm:cxn modelId="4" srcId="0" destId="2" srcOrd="1" destOrd="0"/>
+      </dgm:cxnLst>
+      <dgm:bg/>
+      <dgm:whole/>
+    </dgm:dataModel>
+  </dgm:styleData>
+  <dgm:clrData>
+    <dgm:dataModel>
+      <dgm:ptLst>
+        <dgm:pt modelId="0" type="doc"/>
+        <dgm:pt modelId="1"/>
+        <dgm:pt modelId="2"/>
+        <dgm:pt modelId="3"/>
+        <dgm:pt modelId="4"/>
+        <dgm:pt modelId="5"/>
+        <dgm:pt modelId="6"/>
+      </dgm:ptLst>
+      <dgm:cxnLst>
+        <dgm:cxn modelId="7" srcId="0" destId="1" srcOrd="0" destOrd="0"/>
+        <dgm:cxn modelId="8" srcId="0" destId="2" srcOrd="1" destOrd="0"/>
+        <dgm:cxn modelId="9" srcId="0" destId="3" srcOrd="2" destOrd="0"/>
+        <dgm:cxn modelId="10" srcId="0" destId="4" srcOrd="3" destOrd="0"/>
+        <dgm:cxn modelId="11" srcId="0" destId="5" srcOrd="4" destOrd="0"/>
+        <dgm:cxn modelId="12" srcId="0" destId="6" srcOrd="5" destOrd="0"/>
+      </dgm:cxnLst>
+      <dgm:bg/>
+      <dgm:whole/>
+    </dgm:dataModel>
+  </dgm:clrData>
+  <dgm:layoutNode name="diagram">
+    <dgm:varLst>
+      <dgm:dir/>
+      <dgm:resizeHandles val="exact"/>
+    </dgm:varLst>
+    <dgm:choose name="Name0">
+      <dgm:if name="Name1" func="var" arg="dir" op="equ" val="norm">
+        <dgm:alg type="snake">
+          <dgm:param type="grDir" val="tL"/>
+          <dgm:param type="flowDir" val="row"/>
+          <dgm:param type="contDir" val="sameDir"/>
+          <dgm:param type="off" val="ctr"/>
+        </dgm:alg>
+      </dgm:if>
+      <dgm:else name="Name2">
+        <dgm:alg type="snake">
+          <dgm:param type="grDir" val="tR"/>
+          <dgm:param type="flowDir" val="row"/>
+          <dgm:param type="contDir" val="sameDir"/>
+          <dgm:param type="off" val="ctr"/>
+        </dgm:alg>
+      </dgm:else>
+    </dgm:choose>
+    <dgm:shape xmlns:r="http://schemas.openxmlformats.org/officeDocument/2006/relationships" r:blip="">
+      <dgm:adjLst/>
+    </dgm:shape>
+    <dgm:presOf/>
+    <dgm:constrLst>
+      <dgm:constr type="w" for="ch" forName="node" refType="w"/>
+      <dgm:constr type="h" for="ch" forName="node" refType="w" refFor="ch" refForName="node" fact="0.6"/>
+      <dgm:constr type="w" for="ch" forName="sibTrans" refType="w" refFor="ch" refForName="node" fact="0.1"/>
+      <dgm:constr type="sp" refType="w" refFor="ch" refForName="sibTrans"/>
+      <dgm:constr type="primFontSz" for="ch" forName="node" op="equ" val="65"/>
+    </dgm:constrLst>
+    <dgm:ruleLst/>
+    <dgm:forEach name="Name3" axis="ch" ptType="node">
+      <dgm:layoutNode name="node">
+        <dgm:varLst>
+          <dgm:bulletEnabled val="1"/>
+        </dgm:varLst>
+        <dgm:alg type="tx"/>
+        <dgm:shape xmlns:r="http://schemas.openxmlformats.org/officeDocument/2006/relationships" type="rect" r:blip="">
+          <dgm:adjLst/>
+        </dgm:shape>
+        <dgm:presOf axis="desOrSelf" ptType="node"/>
+        <dgm:constrLst>
+          <dgm:constr type="lMarg" refType="primFontSz" fact="0.3"/>
+          <dgm:constr type="rMarg" refType="primFontSz" fact="0.3"/>
+          <dgm:constr type="tMarg" refType="primFontSz" fact="0.3"/>
+          <dgm:constr type="bMarg" refType="primFontSz" fact="0.3"/>
+        </dgm:constrLst>
+        <dgm:ruleLst>
+          <dgm:rule type="primFontSz" val="5" fact="NaN" max="NaN"/>
+        </dgm:ruleLst>
+      </dgm:layoutNode>
+      <dgm:forEach name="Name4" axis="followSib" ptType="sibTrans" cnt="1">
+        <dgm:layoutNode name="sibTrans">
+          <dgm:alg type="sp"/>
+          <dgm:shape xmlns:r="http://schemas.openxmlformats.org/officeDocument/2006/relationships" r:blip="">
+            <dgm:adjLst/>
+          </dgm:shape>
+          <dgm:presOf/>
+          <dgm:constrLst/>
+          <dgm:ruleLst/>
+        </dgm:layoutNode>
+      </dgm:forEach>
+    </dgm:forEach>
+  </dgm:layoutNode>
+</dgm:layoutDef>
+</file>
+
 <file path=ppt/diagrams/quickStyle1.xml><?xml version="1.0" encoding="utf-8"?>
 <dgm:styleDef xmlns:dgm="http://schemas.openxmlformats.org/drawingml/2006/diagram" xmlns:a="http://schemas.openxmlformats.org/drawingml/2006/main" uniqueId="urn:microsoft.com/office/officeart/2005/8/quickstyle/simple1">
   <dgm:title val=""/>
@@ -4277,6 +6014,1390 @@
     </dgm:style>
   </dgm:styleLbl>
 </dgm:styleDef>
+</file>
+
+<file path=ppt/diagrams/quickStyle2.xml><?xml version="1.0" encoding="utf-8"?>
+<dgm:styleDef xmlns:dgm="http://schemas.openxmlformats.org/drawingml/2006/diagram" xmlns:a="http://schemas.openxmlformats.org/drawingml/2006/main" uniqueId="urn:microsoft.com/office/officeart/2005/8/quickstyle/simple1">
+  <dgm:title val=""/>
+  <dgm:desc val=""/>
+  <dgm:catLst>
+    <dgm:cat type="simple" pri="10100"/>
+  </dgm:catLst>
+  <dgm:scene3d>
+    <a:camera prst="orthographicFront"/>
+    <a:lightRig rig="threePt" dir="t"/>
+  </dgm:scene3d>
+  <dgm:styleLbl name="node0">
+    <dgm:scene3d>
+      <a:camera prst="orthographicFront"/>
+      <a:lightRig rig="threePt" dir="t"/>
+    </dgm:scene3d>
+    <dgm:sp3d/>
+    <dgm:txPr/>
+    <dgm:style>
+      <a:lnRef idx="2">
+        <a:scrgbClr r="0" g="0" b="0"/>
+      </a:lnRef>
+      <a:fillRef idx="1">
+        <a:scrgbClr r="0" g="0" b="0"/>
+      </a:fillRef>
+      <a:effectRef idx="0">
+        <a:scrgbClr r="0" g="0" b="0"/>
+      </a:effectRef>
+      <a:fontRef idx="minor">
+        <a:schemeClr val="lt1"/>
+      </a:fontRef>
+    </dgm:style>
+  </dgm:styleLbl>
+  <dgm:styleLbl name="lnNode1">
+    <dgm:scene3d>
+      <a:camera prst="orthographicFront"/>
+      <a:lightRig rig="threePt" dir="t"/>
+    </dgm:scene3d>
+    <dgm:sp3d/>
+    <dgm:txPr/>
+    <dgm:style>
+      <a:lnRef idx="2">
+        <a:scrgbClr r="0" g="0" b="0"/>
+      </a:lnRef>
+      <a:fillRef idx="1">
+        <a:scrgbClr r="0" g="0" b="0"/>
+      </a:fillRef>
+      <a:effectRef idx="0">
+        <a:scrgbClr r="0" g="0" b="0"/>
+      </a:effectRef>
+      <a:fontRef idx="minor">
+        <a:schemeClr val="lt1"/>
+      </a:fontRef>
+    </dgm:style>
+  </dgm:styleLbl>
+  <dgm:styleLbl name="vennNode1">
+    <dgm:scene3d>
+      <a:camera prst="orthographicFront"/>
+      <a:lightRig rig="threePt" dir="t"/>
+    </dgm:scene3d>
+    <dgm:sp3d/>
+    <dgm:txPr/>
+    <dgm:style>
+      <a:lnRef idx="2">
+        <a:scrgbClr r="0" g="0" b="0"/>
+      </a:lnRef>
+      <a:fillRef idx="1">
+        <a:scrgbClr r="0" g="0" b="0"/>
+      </a:fillRef>
+      <a:effectRef idx="0">
+        <a:scrgbClr r="0" g="0" b="0"/>
+      </a:effectRef>
+      <a:fontRef idx="minor">
+        <a:schemeClr val="tx1"/>
+      </a:fontRef>
+    </dgm:style>
+  </dgm:styleLbl>
+  <dgm:styleLbl name="alignNode1">
+    <dgm:scene3d>
+      <a:camera prst="orthographicFront"/>
+      <a:lightRig rig="threePt" dir="t"/>
+    </dgm:scene3d>
+    <dgm:sp3d/>
+    <dgm:txPr/>
+    <dgm:style>
+      <a:lnRef idx="2">
+        <a:scrgbClr r="0" g="0" b="0"/>
+      </a:lnRef>
+      <a:fillRef idx="1">
+        <a:scrgbClr r="0" g="0" b="0"/>
+      </a:fillRef>
+      <a:effectRef idx="0">
+        <a:scrgbClr r="0" g="0" b="0"/>
+      </a:effectRef>
+      <a:fontRef idx="minor">
+        <a:schemeClr val="lt1"/>
+      </a:fontRef>
+    </dgm:style>
+  </dgm:styleLbl>
+  <dgm:styleLbl name="node1">
+    <dgm:scene3d>
+      <a:camera prst="orthographicFront"/>
+      <a:lightRig rig="threePt" dir="t"/>
+    </dgm:scene3d>
+    <dgm:sp3d/>
+    <dgm:txPr/>
+    <dgm:style>
+      <a:lnRef idx="2">
+        <a:scrgbClr r="0" g="0" b="0"/>
+      </a:lnRef>
+      <a:fillRef idx="1">
+        <a:scrgbClr r="0" g="0" b="0"/>
+      </a:fillRef>
+      <a:effectRef idx="0">
+        <a:scrgbClr r="0" g="0" b="0"/>
+      </a:effectRef>
+      <a:fontRef idx="minor">
+        <a:schemeClr val="lt1"/>
+      </a:fontRef>
+    </dgm:style>
+  </dgm:styleLbl>
+  <dgm:styleLbl name="node2">
+    <dgm:scene3d>
+      <a:camera prst="orthographicFront"/>
+      <a:lightRig rig="threePt" dir="t"/>
+    </dgm:scene3d>
+    <dgm:sp3d/>
+    <dgm:txPr/>
+    <dgm:style>
+      <a:lnRef idx="2">
+        <a:scrgbClr r="0" g="0" b="0"/>
+      </a:lnRef>
+      <a:fillRef idx="1">
+        <a:scrgbClr r="0" g="0" b="0"/>
+      </a:fillRef>
+      <a:effectRef idx="0">
+        <a:scrgbClr r="0" g="0" b="0"/>
+      </a:effectRef>
+      <a:fontRef idx="minor">
+        <a:schemeClr val="lt1"/>
+      </a:fontRef>
+    </dgm:style>
+  </dgm:styleLbl>
+  <dgm:styleLbl name="node3">
+    <dgm:scene3d>
+      <a:camera prst="orthographicFront"/>
+      <a:lightRig rig="threePt" dir="t"/>
+    </dgm:scene3d>
+    <dgm:sp3d/>
+    <dgm:txPr/>
+    <dgm:style>
+      <a:lnRef idx="2">
+        <a:scrgbClr r="0" g="0" b="0"/>
+      </a:lnRef>
+      <a:fillRef idx="1">
+        <a:scrgbClr r="0" g="0" b="0"/>
+      </a:fillRef>
+      <a:effectRef idx="0">
+        <a:scrgbClr r="0" g="0" b="0"/>
+      </a:effectRef>
+      <a:fontRef idx="minor">
+        <a:schemeClr val="lt1"/>
+      </a:fontRef>
+    </dgm:style>
+  </dgm:styleLbl>
+  <dgm:styleLbl name="node4">
+    <dgm:scene3d>
+      <a:camera prst="orthographicFront"/>
+      <a:lightRig rig="threePt" dir="t"/>
+    </dgm:scene3d>
+    <dgm:sp3d/>
+    <dgm:txPr/>
+    <dgm:style>
+      <a:lnRef idx="2">
+        <a:scrgbClr r="0" g="0" b="0"/>
+      </a:lnRef>
+      <a:fillRef idx="1">
+        <a:scrgbClr r="0" g="0" b="0"/>
+      </a:fillRef>
+      <a:effectRef idx="0">
+        <a:scrgbClr r="0" g="0" b="0"/>
+      </a:effectRef>
+      <a:fontRef idx="minor">
+        <a:schemeClr val="lt1"/>
+      </a:fontRef>
+    </dgm:style>
+  </dgm:styleLbl>
+  <dgm:styleLbl name="fgImgPlace1">
+    <dgm:scene3d>
+      <a:camera prst="orthographicFront"/>
+      <a:lightRig rig="threePt" dir="t"/>
+    </dgm:scene3d>
+    <dgm:sp3d/>
+    <dgm:txPr/>
+    <dgm:style>
+      <a:lnRef idx="2">
+        <a:scrgbClr r="0" g="0" b="0"/>
+      </a:lnRef>
+      <a:fillRef idx="1">
+        <a:scrgbClr r="0" g="0" b="0"/>
+      </a:fillRef>
+      <a:effectRef idx="0">
+        <a:scrgbClr r="0" g="0" b="0"/>
+      </a:effectRef>
+      <a:fontRef idx="minor"/>
+    </dgm:style>
+  </dgm:styleLbl>
+  <dgm:styleLbl name="alignImgPlace1">
+    <dgm:scene3d>
+      <a:camera prst="orthographicFront"/>
+      <a:lightRig rig="threePt" dir="t"/>
+    </dgm:scene3d>
+    <dgm:sp3d/>
+    <dgm:txPr/>
+    <dgm:style>
+      <a:lnRef idx="2">
+        <a:scrgbClr r="0" g="0" b="0"/>
+      </a:lnRef>
+      <a:fillRef idx="1">
+        <a:scrgbClr r="0" g="0" b="0"/>
+      </a:fillRef>
+      <a:effectRef idx="0">
+        <a:scrgbClr r="0" g="0" b="0"/>
+      </a:effectRef>
+      <a:fontRef idx="minor"/>
+    </dgm:style>
+  </dgm:styleLbl>
+  <dgm:styleLbl name="bgImgPlace1">
+    <dgm:scene3d>
+      <a:camera prst="orthographicFront"/>
+      <a:lightRig rig="threePt" dir="t"/>
+    </dgm:scene3d>
+    <dgm:sp3d/>
+    <dgm:txPr/>
+    <dgm:style>
+      <a:lnRef idx="2">
+        <a:scrgbClr r="0" g="0" b="0"/>
+      </a:lnRef>
+      <a:fillRef idx="1">
+        <a:scrgbClr r="0" g="0" b="0"/>
+      </a:fillRef>
+      <a:effectRef idx="0">
+        <a:scrgbClr r="0" g="0" b="0"/>
+      </a:effectRef>
+      <a:fontRef idx="minor"/>
+    </dgm:style>
+  </dgm:styleLbl>
+  <dgm:styleLbl name="sibTrans2D1">
+    <dgm:scene3d>
+      <a:camera prst="orthographicFront"/>
+      <a:lightRig rig="threePt" dir="t"/>
+    </dgm:scene3d>
+    <dgm:sp3d/>
+    <dgm:txPr/>
+    <dgm:style>
+      <a:lnRef idx="0">
+        <a:scrgbClr r="0" g="0" b="0"/>
+      </a:lnRef>
+      <a:fillRef idx="1">
+        <a:scrgbClr r="0" g="0" b="0"/>
+      </a:fillRef>
+      <a:effectRef idx="0">
+        <a:scrgbClr r="0" g="0" b="0"/>
+      </a:effectRef>
+      <a:fontRef idx="minor">
+        <a:schemeClr val="lt1"/>
+      </a:fontRef>
+    </dgm:style>
+  </dgm:styleLbl>
+  <dgm:styleLbl name="fgSibTrans2D1">
+    <dgm:scene3d>
+      <a:camera prst="orthographicFront"/>
+      <a:lightRig rig="threePt" dir="t"/>
+    </dgm:scene3d>
+    <dgm:sp3d/>
+    <dgm:txPr/>
+    <dgm:style>
+      <a:lnRef idx="0">
+        <a:scrgbClr r="0" g="0" b="0"/>
+      </a:lnRef>
+      <a:fillRef idx="1">
+        <a:scrgbClr r="0" g="0" b="0"/>
+      </a:fillRef>
+      <a:effectRef idx="0">
+        <a:scrgbClr r="0" g="0" b="0"/>
+      </a:effectRef>
+      <a:fontRef idx="minor">
+        <a:schemeClr val="lt1"/>
+      </a:fontRef>
+    </dgm:style>
+  </dgm:styleLbl>
+  <dgm:styleLbl name="bgSibTrans2D1">
+    <dgm:scene3d>
+      <a:camera prst="orthographicFront"/>
+      <a:lightRig rig="threePt" dir="t"/>
+    </dgm:scene3d>
+    <dgm:sp3d/>
+    <dgm:txPr/>
+    <dgm:style>
+      <a:lnRef idx="0">
+        <a:scrgbClr r="0" g="0" b="0"/>
+      </a:lnRef>
+      <a:fillRef idx="1">
+        <a:scrgbClr r="0" g="0" b="0"/>
+      </a:fillRef>
+      <a:effectRef idx="0">
+        <a:scrgbClr r="0" g="0" b="0"/>
+      </a:effectRef>
+      <a:fontRef idx="minor">
+        <a:schemeClr val="lt1"/>
+      </a:fontRef>
+    </dgm:style>
+  </dgm:styleLbl>
+  <dgm:styleLbl name="sibTrans1D1">
+    <dgm:scene3d>
+      <a:camera prst="orthographicFront"/>
+      <a:lightRig rig="threePt" dir="t"/>
+    </dgm:scene3d>
+    <dgm:sp3d/>
+    <dgm:txPr/>
+    <dgm:style>
+      <a:lnRef idx="1">
+        <a:scrgbClr r="0" g="0" b="0"/>
+      </a:lnRef>
+      <a:fillRef idx="0">
+        <a:scrgbClr r="0" g="0" b="0"/>
+      </a:fillRef>
+      <a:effectRef idx="0">
+        <a:scrgbClr r="0" g="0" b="0"/>
+      </a:effectRef>
+      <a:fontRef idx="minor"/>
+    </dgm:style>
+  </dgm:styleLbl>
+  <dgm:styleLbl name="callout">
+    <dgm:scene3d>
+      <a:camera prst="orthographicFront"/>
+      <a:lightRig rig="threePt" dir="t"/>
+    </dgm:scene3d>
+    <dgm:sp3d/>
+    <dgm:txPr/>
+    <dgm:style>
+      <a:lnRef idx="2">
+        <a:scrgbClr r="0" g="0" b="0"/>
+      </a:lnRef>
+      <a:fillRef idx="1">
+        <a:scrgbClr r="0" g="0" b="0"/>
+      </a:fillRef>
+      <a:effectRef idx="0">
+        <a:scrgbClr r="0" g="0" b="0"/>
+      </a:effectRef>
+      <a:fontRef idx="minor"/>
+    </dgm:style>
+  </dgm:styleLbl>
+  <dgm:styleLbl name="asst0">
+    <dgm:scene3d>
+      <a:camera prst="orthographicFront"/>
+      <a:lightRig rig="threePt" dir="t"/>
+    </dgm:scene3d>
+    <dgm:sp3d/>
+    <dgm:txPr/>
+    <dgm:style>
+      <a:lnRef idx="2">
+        <a:scrgbClr r="0" g="0" b="0"/>
+      </a:lnRef>
+      <a:fillRef idx="1">
+        <a:scrgbClr r="0" g="0" b="0"/>
+      </a:fillRef>
+      <a:effectRef idx="0">
+        <a:scrgbClr r="0" g="0" b="0"/>
+      </a:effectRef>
+      <a:fontRef idx="minor">
+        <a:schemeClr val="lt1"/>
+      </a:fontRef>
+    </dgm:style>
+  </dgm:styleLbl>
+  <dgm:styleLbl name="asst1">
+    <dgm:scene3d>
+      <a:camera prst="orthographicFront"/>
+      <a:lightRig rig="threePt" dir="t"/>
+    </dgm:scene3d>
+    <dgm:sp3d/>
+    <dgm:txPr/>
+    <dgm:style>
+      <a:lnRef idx="2">
+        <a:scrgbClr r="0" g="0" b="0"/>
+      </a:lnRef>
+      <a:fillRef idx="1">
+        <a:scrgbClr r="0" g="0" b="0"/>
+      </a:fillRef>
+      <a:effectRef idx="0">
+        <a:scrgbClr r="0" g="0" b="0"/>
+      </a:effectRef>
+      <a:fontRef idx="minor">
+        <a:schemeClr val="lt1"/>
+      </a:fontRef>
+    </dgm:style>
+  </dgm:styleLbl>
+  <dgm:styleLbl name="asst2">
+    <dgm:scene3d>
+      <a:camera prst="orthographicFront"/>
+      <a:lightRig rig="threePt" dir="t"/>
+    </dgm:scene3d>
+    <dgm:sp3d/>
+    <dgm:txPr/>
+    <dgm:style>
+      <a:lnRef idx="2">
+        <a:scrgbClr r="0" g="0" b="0"/>
+      </a:lnRef>
+      <a:fillRef idx="1">
+        <a:scrgbClr r="0" g="0" b="0"/>
+      </a:fillRef>
+      <a:effectRef idx="0">
+        <a:scrgbClr r="0" g="0" b="0"/>
+      </a:effectRef>
+      <a:fontRef idx="minor">
+        <a:schemeClr val="lt1"/>
+      </a:fontRef>
+    </dgm:style>
+  </dgm:styleLbl>
+  <dgm:styleLbl name="asst3">
+    <dgm:scene3d>
+      <a:camera prst="orthographicFront"/>
+      <a:lightRig rig="threePt" dir="t"/>
+    </dgm:scene3d>
+    <dgm:sp3d/>
+    <dgm:txPr/>
+    <dgm:style>
+      <a:lnRef idx="2">
+        <a:scrgbClr r="0" g="0" b="0"/>
+      </a:lnRef>
+      <a:fillRef idx="1">
+        <a:scrgbClr r="0" g="0" b="0"/>
+      </a:fillRef>
+      <a:effectRef idx="0">
+        <a:scrgbClr r="0" g="0" b="0"/>
+      </a:effectRef>
+      <a:fontRef idx="minor">
+        <a:schemeClr val="lt1"/>
+      </a:fontRef>
+    </dgm:style>
+  </dgm:styleLbl>
+  <dgm:styleLbl name="asst4">
+    <dgm:scene3d>
+      <a:camera prst="orthographicFront"/>
+      <a:lightRig rig="threePt" dir="t"/>
+    </dgm:scene3d>
+    <dgm:sp3d/>
+    <dgm:txPr/>
+    <dgm:style>
+      <a:lnRef idx="2">
+        <a:scrgbClr r="0" g="0" b="0"/>
+      </a:lnRef>
+      <a:fillRef idx="1">
+        <a:scrgbClr r="0" g="0" b="0"/>
+      </a:fillRef>
+      <a:effectRef idx="0">
+        <a:scrgbClr r="0" g="0" b="0"/>
+      </a:effectRef>
+      <a:fontRef idx="minor">
+        <a:schemeClr val="lt1"/>
+      </a:fontRef>
+    </dgm:style>
+  </dgm:styleLbl>
+  <dgm:styleLbl name="parChTrans2D1">
+    <dgm:scene3d>
+      <a:camera prst="orthographicFront"/>
+      <a:lightRig rig="threePt" dir="t"/>
+    </dgm:scene3d>
+    <dgm:sp3d/>
+    <dgm:txPr/>
+    <dgm:style>
+      <a:lnRef idx="2">
+        <a:scrgbClr r="0" g="0" b="0"/>
+      </a:lnRef>
+      <a:fillRef idx="1">
+        <a:scrgbClr r="0" g="0" b="0"/>
+      </a:fillRef>
+      <a:effectRef idx="0">
+        <a:scrgbClr r="0" g="0" b="0"/>
+      </a:effectRef>
+      <a:fontRef idx="minor">
+        <a:schemeClr val="lt1"/>
+      </a:fontRef>
+    </dgm:style>
+  </dgm:styleLbl>
+  <dgm:styleLbl name="parChTrans2D2">
+    <dgm:scene3d>
+      <a:camera prst="orthographicFront"/>
+      <a:lightRig rig="threePt" dir="t"/>
+    </dgm:scene3d>
+    <dgm:sp3d/>
+    <dgm:txPr/>
+    <dgm:style>
+      <a:lnRef idx="2">
+        <a:scrgbClr r="0" g="0" b="0"/>
+      </a:lnRef>
+      <a:fillRef idx="1">
+        <a:scrgbClr r="0" g="0" b="0"/>
+      </a:fillRef>
+      <a:effectRef idx="0">
+        <a:scrgbClr r="0" g="0" b="0"/>
+      </a:effectRef>
+      <a:fontRef idx="minor">
+        <a:schemeClr val="lt1"/>
+      </a:fontRef>
+    </dgm:style>
+  </dgm:styleLbl>
+  <dgm:styleLbl name="parChTrans2D3">
+    <dgm:scene3d>
+      <a:camera prst="orthographicFront"/>
+      <a:lightRig rig="threePt" dir="t"/>
+    </dgm:scene3d>
+    <dgm:sp3d/>
+    <dgm:txPr/>
+    <dgm:style>
+      <a:lnRef idx="2">
+        <a:scrgbClr r="0" g="0" b="0"/>
+      </a:lnRef>
+      <a:fillRef idx="1">
+        <a:scrgbClr r="0" g="0" b="0"/>
+      </a:fillRef>
+      <a:effectRef idx="0">
+        <a:scrgbClr r="0" g="0" b="0"/>
+      </a:effectRef>
+      <a:fontRef idx="minor">
+        <a:schemeClr val="lt1"/>
+      </a:fontRef>
+    </dgm:style>
+  </dgm:styleLbl>
+  <dgm:styleLbl name="parChTrans2D4">
+    <dgm:scene3d>
+      <a:camera prst="orthographicFront"/>
+      <a:lightRig rig="threePt" dir="t"/>
+    </dgm:scene3d>
+    <dgm:sp3d/>
+    <dgm:txPr/>
+    <dgm:style>
+      <a:lnRef idx="2">
+        <a:scrgbClr r="0" g="0" b="0"/>
+      </a:lnRef>
+      <a:fillRef idx="1">
+        <a:scrgbClr r="0" g="0" b="0"/>
+      </a:fillRef>
+      <a:effectRef idx="0">
+        <a:scrgbClr r="0" g="0" b="0"/>
+      </a:effectRef>
+      <a:fontRef idx="minor">
+        <a:schemeClr val="lt1"/>
+      </a:fontRef>
+    </dgm:style>
+  </dgm:styleLbl>
+  <dgm:styleLbl name="parChTrans1D1">
+    <dgm:scene3d>
+      <a:camera prst="orthographicFront"/>
+      <a:lightRig rig="threePt" dir="t"/>
+    </dgm:scene3d>
+    <dgm:sp3d/>
+    <dgm:txPr/>
+    <dgm:style>
+      <a:lnRef idx="2">
+        <a:scrgbClr r="0" g="0" b="0"/>
+      </a:lnRef>
+      <a:fillRef idx="0">
+        <a:scrgbClr r="0" g="0" b="0"/>
+      </a:fillRef>
+      <a:effectRef idx="0">
+        <a:scrgbClr r="0" g="0" b="0"/>
+      </a:effectRef>
+      <a:fontRef idx="minor"/>
+    </dgm:style>
+  </dgm:styleLbl>
+  <dgm:styleLbl name="parChTrans1D2">
+    <dgm:scene3d>
+      <a:camera prst="orthographicFront"/>
+      <a:lightRig rig="threePt" dir="t"/>
+    </dgm:scene3d>
+    <dgm:sp3d/>
+    <dgm:txPr/>
+    <dgm:style>
+      <a:lnRef idx="2">
+        <a:scrgbClr r="0" g="0" b="0"/>
+      </a:lnRef>
+      <a:fillRef idx="0">
+        <a:scrgbClr r="0" g="0" b="0"/>
+      </a:fillRef>
+      <a:effectRef idx="0">
+        <a:scrgbClr r="0" g="0" b="0"/>
+      </a:effectRef>
+      <a:fontRef idx="minor"/>
+    </dgm:style>
+  </dgm:styleLbl>
+  <dgm:styleLbl name="parChTrans1D3">
+    <dgm:scene3d>
+      <a:camera prst="orthographicFront"/>
+      <a:lightRig rig="threePt" dir="t"/>
+    </dgm:scene3d>
+    <dgm:sp3d/>
+    <dgm:txPr/>
+    <dgm:style>
+      <a:lnRef idx="2">
+        <a:scrgbClr r="0" g="0" b="0"/>
+      </a:lnRef>
+      <a:fillRef idx="0">
+        <a:scrgbClr r="0" g="0" b="0"/>
+      </a:fillRef>
+      <a:effectRef idx="0">
+        <a:scrgbClr r="0" g="0" b="0"/>
+      </a:effectRef>
+      <a:fontRef idx="minor"/>
+    </dgm:style>
+  </dgm:styleLbl>
+  <dgm:styleLbl name="parChTrans1D4">
+    <dgm:scene3d>
+      <a:camera prst="orthographicFront"/>
+      <a:lightRig rig="threePt" dir="t"/>
+    </dgm:scene3d>
+    <dgm:sp3d/>
+    <dgm:txPr/>
+    <dgm:style>
+      <a:lnRef idx="2">
+        <a:scrgbClr r="0" g="0" b="0"/>
+      </a:lnRef>
+      <a:fillRef idx="0">
+        <a:scrgbClr r="0" g="0" b="0"/>
+      </a:fillRef>
+      <a:effectRef idx="0">
+        <a:scrgbClr r="0" g="0" b="0"/>
+      </a:effectRef>
+      <a:fontRef idx="minor"/>
+    </dgm:style>
+  </dgm:styleLbl>
+  <dgm:styleLbl name="fgAcc1">
+    <dgm:scene3d>
+      <a:camera prst="orthographicFront"/>
+      <a:lightRig rig="threePt" dir="t"/>
+    </dgm:scene3d>
+    <dgm:sp3d/>
+    <dgm:txPr/>
+    <dgm:style>
+      <a:lnRef idx="2">
+        <a:scrgbClr r="0" g="0" b="0"/>
+      </a:lnRef>
+      <a:fillRef idx="1">
+        <a:scrgbClr r="0" g="0" b="0"/>
+      </a:fillRef>
+      <a:effectRef idx="0">
+        <a:scrgbClr r="0" g="0" b="0"/>
+      </a:effectRef>
+      <a:fontRef idx="minor"/>
+    </dgm:style>
+  </dgm:styleLbl>
+  <dgm:styleLbl name="conFgAcc1">
+    <dgm:scene3d>
+      <a:camera prst="orthographicFront"/>
+      <a:lightRig rig="threePt" dir="t"/>
+    </dgm:scene3d>
+    <dgm:sp3d/>
+    <dgm:txPr/>
+    <dgm:style>
+      <a:lnRef idx="2">
+        <a:scrgbClr r="0" g="0" b="0"/>
+      </a:lnRef>
+      <a:fillRef idx="1">
+        <a:scrgbClr r="0" g="0" b="0"/>
+      </a:fillRef>
+      <a:effectRef idx="0">
+        <a:scrgbClr r="0" g="0" b="0"/>
+      </a:effectRef>
+      <a:fontRef idx="minor"/>
+    </dgm:style>
+  </dgm:styleLbl>
+  <dgm:styleLbl name="alignAcc1">
+    <dgm:scene3d>
+      <a:camera prst="orthographicFront"/>
+      <a:lightRig rig="threePt" dir="t"/>
+    </dgm:scene3d>
+    <dgm:sp3d/>
+    <dgm:txPr/>
+    <dgm:style>
+      <a:lnRef idx="2">
+        <a:scrgbClr r="0" g="0" b="0"/>
+      </a:lnRef>
+      <a:fillRef idx="1">
+        <a:scrgbClr r="0" g="0" b="0"/>
+      </a:fillRef>
+      <a:effectRef idx="0">
+        <a:scrgbClr r="0" g="0" b="0"/>
+      </a:effectRef>
+      <a:fontRef idx="minor"/>
+    </dgm:style>
+  </dgm:styleLbl>
+  <dgm:styleLbl name="trAlignAcc1">
+    <dgm:scene3d>
+      <a:camera prst="orthographicFront"/>
+      <a:lightRig rig="threePt" dir="t"/>
+    </dgm:scene3d>
+    <dgm:sp3d/>
+    <dgm:txPr/>
+    <dgm:style>
+      <a:lnRef idx="1">
+        <a:scrgbClr r="0" g="0" b="0"/>
+      </a:lnRef>
+      <a:fillRef idx="1">
+        <a:scrgbClr r="0" g="0" b="0"/>
+      </a:fillRef>
+      <a:effectRef idx="0">
+        <a:scrgbClr r="0" g="0" b="0"/>
+      </a:effectRef>
+      <a:fontRef idx="minor"/>
+    </dgm:style>
+  </dgm:styleLbl>
+  <dgm:styleLbl name="bgAcc1">
+    <dgm:scene3d>
+      <a:camera prst="orthographicFront"/>
+      <a:lightRig rig="threePt" dir="t"/>
+    </dgm:scene3d>
+    <dgm:sp3d/>
+    <dgm:txPr/>
+    <dgm:style>
+      <a:lnRef idx="2">
+        <a:scrgbClr r="0" g="0" b="0"/>
+      </a:lnRef>
+      <a:fillRef idx="1">
+        <a:scrgbClr r="0" g="0" b="0"/>
+      </a:fillRef>
+      <a:effectRef idx="0">
+        <a:scrgbClr r="0" g="0" b="0"/>
+      </a:effectRef>
+      <a:fontRef idx="minor"/>
+    </dgm:style>
+  </dgm:styleLbl>
+  <dgm:styleLbl name="solidFgAcc1">
+    <dgm:scene3d>
+      <a:camera prst="orthographicFront"/>
+      <a:lightRig rig="threePt" dir="t"/>
+    </dgm:scene3d>
+    <dgm:sp3d/>
+    <dgm:txPr/>
+    <dgm:style>
+      <a:lnRef idx="2">
+        <a:scrgbClr r="0" g="0" b="0"/>
+      </a:lnRef>
+      <a:fillRef idx="1">
+        <a:scrgbClr r="0" g="0" b="0"/>
+      </a:fillRef>
+      <a:effectRef idx="0">
+        <a:scrgbClr r="0" g="0" b="0"/>
+      </a:effectRef>
+      <a:fontRef idx="minor"/>
+    </dgm:style>
+  </dgm:styleLbl>
+  <dgm:styleLbl name="solidAlignAcc1">
+    <dgm:scene3d>
+      <a:camera prst="orthographicFront"/>
+      <a:lightRig rig="threePt" dir="t"/>
+    </dgm:scene3d>
+    <dgm:sp3d/>
+    <dgm:txPr/>
+    <dgm:style>
+      <a:lnRef idx="2">
+        <a:scrgbClr r="0" g="0" b="0"/>
+      </a:lnRef>
+      <a:fillRef idx="1">
+        <a:scrgbClr r="0" g="0" b="0"/>
+      </a:fillRef>
+      <a:effectRef idx="0">
+        <a:scrgbClr r="0" g="0" b="0"/>
+      </a:effectRef>
+      <a:fontRef idx="minor"/>
+    </dgm:style>
+  </dgm:styleLbl>
+  <dgm:styleLbl name="solidBgAcc1">
+    <dgm:scene3d>
+      <a:camera prst="orthographicFront"/>
+      <a:lightRig rig="threePt" dir="t"/>
+    </dgm:scene3d>
+    <dgm:sp3d/>
+    <dgm:txPr/>
+    <dgm:style>
+      <a:lnRef idx="2">
+        <a:scrgbClr r="0" g="0" b="0"/>
+      </a:lnRef>
+      <a:fillRef idx="1">
+        <a:scrgbClr r="0" g="0" b="0"/>
+      </a:fillRef>
+      <a:effectRef idx="0">
+        <a:scrgbClr r="0" g="0" b="0"/>
+      </a:effectRef>
+      <a:fontRef idx="minor"/>
+    </dgm:style>
+  </dgm:styleLbl>
+  <dgm:styleLbl name="fgAccFollowNode1">
+    <dgm:scene3d>
+      <a:camera prst="orthographicFront"/>
+      <a:lightRig rig="threePt" dir="t"/>
+    </dgm:scene3d>
+    <dgm:sp3d/>
+    <dgm:txPr/>
+    <dgm:style>
+      <a:lnRef idx="2">
+        <a:scrgbClr r="0" g="0" b="0"/>
+      </a:lnRef>
+      <a:fillRef idx="1">
+        <a:scrgbClr r="0" g="0" b="0"/>
+      </a:fillRef>
+      <a:effectRef idx="0">
+        <a:scrgbClr r="0" g="0" b="0"/>
+      </a:effectRef>
+      <a:fontRef idx="minor"/>
+    </dgm:style>
+  </dgm:styleLbl>
+  <dgm:styleLbl name="alignAccFollowNode1">
+    <dgm:scene3d>
+      <a:camera prst="orthographicFront"/>
+      <a:lightRig rig="threePt" dir="t"/>
+    </dgm:scene3d>
+    <dgm:sp3d/>
+    <dgm:txPr/>
+    <dgm:style>
+      <a:lnRef idx="2">
+        <a:scrgbClr r="0" g="0" b="0"/>
+      </a:lnRef>
+      <a:fillRef idx="1">
+        <a:scrgbClr r="0" g="0" b="0"/>
+      </a:fillRef>
+      <a:effectRef idx="0">
+        <a:scrgbClr r="0" g="0" b="0"/>
+      </a:effectRef>
+      <a:fontRef idx="minor"/>
+    </dgm:style>
+  </dgm:styleLbl>
+  <dgm:styleLbl name="bgAccFollowNode1">
+    <dgm:scene3d>
+      <a:camera prst="orthographicFront"/>
+      <a:lightRig rig="threePt" dir="t"/>
+    </dgm:scene3d>
+    <dgm:sp3d/>
+    <dgm:txPr/>
+    <dgm:style>
+      <a:lnRef idx="2">
+        <a:scrgbClr r="0" g="0" b="0"/>
+      </a:lnRef>
+      <a:fillRef idx="1">
+        <a:scrgbClr r="0" g="0" b="0"/>
+      </a:fillRef>
+      <a:effectRef idx="0">
+        <a:scrgbClr r="0" g="0" b="0"/>
+      </a:effectRef>
+      <a:fontRef idx="minor"/>
+    </dgm:style>
+  </dgm:styleLbl>
+  <dgm:styleLbl name="fgAcc0">
+    <dgm:scene3d>
+      <a:camera prst="orthographicFront"/>
+      <a:lightRig rig="threePt" dir="t"/>
+    </dgm:scene3d>
+    <dgm:sp3d/>
+    <dgm:txPr/>
+    <dgm:style>
+      <a:lnRef idx="2">
+        <a:scrgbClr r="0" g="0" b="0"/>
+      </a:lnRef>
+      <a:fillRef idx="1">
+        <a:scrgbClr r="0" g="0" b="0"/>
+      </a:fillRef>
+      <a:effectRef idx="0">
+        <a:scrgbClr r="0" g="0" b="0"/>
+      </a:effectRef>
+      <a:fontRef idx="minor"/>
+    </dgm:style>
+  </dgm:styleLbl>
+  <dgm:styleLbl name="fgAcc2">
+    <dgm:scene3d>
+      <a:camera prst="orthographicFront"/>
+      <a:lightRig rig="threePt" dir="t"/>
+    </dgm:scene3d>
+    <dgm:sp3d/>
+    <dgm:txPr/>
+    <dgm:style>
+      <a:lnRef idx="2">
+        <a:scrgbClr r="0" g="0" b="0"/>
+      </a:lnRef>
+      <a:fillRef idx="1">
+        <a:scrgbClr r="0" g="0" b="0"/>
+      </a:fillRef>
+      <a:effectRef idx="0">
+        <a:scrgbClr r="0" g="0" b="0"/>
+      </a:effectRef>
+      <a:fontRef idx="minor"/>
+    </dgm:style>
+  </dgm:styleLbl>
+  <dgm:styleLbl name="fgAcc3">
+    <dgm:scene3d>
+      <a:camera prst="orthographicFront"/>
+      <a:lightRig rig="threePt" dir="t"/>
+    </dgm:scene3d>
+    <dgm:sp3d/>
+    <dgm:txPr/>
+    <dgm:style>
+      <a:lnRef idx="2">
+        <a:scrgbClr r="0" g="0" b="0"/>
+      </a:lnRef>
+      <a:fillRef idx="1">
+        <a:scrgbClr r="0" g="0" b="0"/>
+      </a:fillRef>
+      <a:effectRef idx="0">
+        <a:scrgbClr r="0" g="0" b="0"/>
+      </a:effectRef>
+      <a:fontRef idx="minor"/>
+    </dgm:style>
+  </dgm:styleLbl>
+  <dgm:styleLbl name="fgAcc4">
+    <dgm:scene3d>
+      <a:camera prst="orthographicFront"/>
+      <a:lightRig rig="threePt" dir="t"/>
+    </dgm:scene3d>
+    <dgm:sp3d/>
+    <dgm:txPr/>
+    <dgm:style>
+      <a:lnRef idx="2">
+        <a:scrgbClr r="0" g="0" b="0"/>
+      </a:lnRef>
+      <a:fillRef idx="1">
+        <a:scrgbClr r="0" g="0" b="0"/>
+      </a:fillRef>
+      <a:effectRef idx="0">
+        <a:scrgbClr r="0" g="0" b="0"/>
+      </a:effectRef>
+      <a:fontRef idx="minor"/>
+    </dgm:style>
+  </dgm:styleLbl>
+  <dgm:styleLbl name="bgShp">
+    <dgm:scene3d>
+      <a:camera prst="orthographicFront"/>
+      <a:lightRig rig="threePt" dir="t"/>
+    </dgm:scene3d>
+    <dgm:sp3d/>
+    <dgm:txPr/>
+    <dgm:style>
+      <a:lnRef idx="0">
+        <a:scrgbClr r="0" g="0" b="0"/>
+      </a:lnRef>
+      <a:fillRef idx="1">
+        <a:scrgbClr r="0" g="0" b="0"/>
+      </a:fillRef>
+      <a:effectRef idx="0">
+        <a:scrgbClr r="0" g="0" b="0"/>
+      </a:effectRef>
+      <a:fontRef idx="minor"/>
+    </dgm:style>
+  </dgm:styleLbl>
+  <dgm:styleLbl name="dkBgShp">
+    <dgm:scene3d>
+      <a:camera prst="orthographicFront"/>
+      <a:lightRig rig="threePt" dir="t"/>
+    </dgm:scene3d>
+    <dgm:sp3d/>
+    <dgm:txPr/>
+    <dgm:style>
+      <a:lnRef idx="0">
+        <a:scrgbClr r="0" g="0" b="0"/>
+      </a:lnRef>
+      <a:fillRef idx="1">
+        <a:scrgbClr r="0" g="0" b="0"/>
+      </a:fillRef>
+      <a:effectRef idx="0">
+        <a:scrgbClr r="0" g="0" b="0"/>
+      </a:effectRef>
+      <a:fontRef idx="minor"/>
+    </dgm:style>
+  </dgm:styleLbl>
+  <dgm:styleLbl name="trBgShp">
+    <dgm:scene3d>
+      <a:camera prst="orthographicFront"/>
+      <a:lightRig rig="threePt" dir="t"/>
+    </dgm:scene3d>
+    <dgm:sp3d/>
+    <dgm:txPr/>
+    <dgm:style>
+      <a:lnRef idx="0">
+        <a:scrgbClr r="0" g="0" b="0"/>
+      </a:lnRef>
+      <a:fillRef idx="1">
+        <a:scrgbClr r="0" g="0" b="0"/>
+      </a:fillRef>
+      <a:effectRef idx="0">
+        <a:scrgbClr r="0" g="0" b="0"/>
+      </a:effectRef>
+      <a:fontRef idx="minor"/>
+    </dgm:style>
+  </dgm:styleLbl>
+  <dgm:styleLbl name="fgShp">
+    <dgm:scene3d>
+      <a:camera prst="orthographicFront"/>
+      <a:lightRig rig="threePt" dir="t"/>
+    </dgm:scene3d>
+    <dgm:sp3d/>
+    <dgm:txPr/>
+    <dgm:style>
+      <a:lnRef idx="2">
+        <a:scrgbClr r="0" g="0" b="0"/>
+      </a:lnRef>
+      <a:fillRef idx="1">
+        <a:scrgbClr r="0" g="0" b="0"/>
+      </a:fillRef>
+      <a:effectRef idx="0">
+        <a:scrgbClr r="0" g="0" b="0"/>
+      </a:effectRef>
+      <a:fontRef idx="minor"/>
+    </dgm:style>
+  </dgm:styleLbl>
+  <dgm:styleLbl name="revTx">
+    <dgm:scene3d>
+      <a:camera prst="orthographicFront"/>
+      <a:lightRig rig="threePt" dir="t"/>
+    </dgm:scene3d>
+    <dgm:sp3d/>
+    <dgm:txPr/>
+    <dgm:style>
+      <a:lnRef idx="0">
+        <a:scrgbClr r="0" g="0" b="0"/>
+      </a:lnRef>
+      <a:fillRef idx="0">
+        <a:scrgbClr r="0" g="0" b="0"/>
+      </a:fillRef>
+      <a:effectRef idx="0">
+        <a:scrgbClr r="0" g="0" b="0"/>
+      </a:effectRef>
+      <a:fontRef idx="minor"/>
+    </dgm:style>
+  </dgm:styleLbl>
+</dgm:styleDef>
+</file>
+
+<file path=ppt/notesMasters/notesMaster1.xml><?xml version="1.0" encoding="utf-8"?>
+<p:notesMaster xmlns:a="http://schemas.openxmlformats.org/drawingml/2006/main" xmlns:r="http://schemas.openxmlformats.org/officeDocument/2006/relationships" xmlns:p="http://schemas.openxmlformats.org/presentationml/2006/main">
+  <p:cSld>
+    <p:bg>
+      <p:bgRef idx="1001">
+        <a:schemeClr val="bg1"/>
+      </p:bgRef>
+    </p:bg>
+    <p:spTree>
+      <p:nvGrpSpPr>
+        <p:cNvPr id="1" name=""/>
+        <p:cNvGrpSpPr/>
+        <p:nvPr/>
+      </p:nvGrpSpPr>
+      <p:grpSpPr>
+        <a:xfrm>
+          <a:off x="0" y="0"/>
+          <a:ext cx="0" cy="0"/>
+          <a:chOff x="0" y="0"/>
+          <a:chExt cx="0" cy="0"/>
+        </a:xfrm>
+      </p:grpSpPr>
+      <p:sp>
+        <p:nvSpPr>
+          <p:cNvPr id="2" name="Header Placeholder 1"/>
+          <p:cNvSpPr>
+            <a:spLocks noGrp="1"/>
+          </p:cNvSpPr>
+          <p:nvPr>
+            <p:ph type="hdr" sz="quarter"/>
+          </p:nvPr>
+        </p:nvSpPr>
+        <p:spPr>
+          <a:xfrm>
+            <a:off x="0" y="0"/>
+            <a:ext cx="2971800" cy="458788"/>
+          </a:xfrm>
+          <a:prstGeom prst="rect">
+            <a:avLst/>
+          </a:prstGeom>
+        </p:spPr>
+        <p:txBody>
+          <a:bodyPr vert="horz" lIns="91440" tIns="45720" rIns="91440" bIns="45720" rtlCol="0"/>
+          <a:lstStyle>
+            <a:lvl1pPr algn="l">
+              <a:defRPr sz="1200"/>
+            </a:lvl1pPr>
+          </a:lstStyle>
+          <a:p>
+            <a:endParaRPr lang="en-GB"/>
+          </a:p>
+        </p:txBody>
+      </p:sp>
+      <p:sp>
+        <p:nvSpPr>
+          <p:cNvPr id="3" name="Date Placeholder 2"/>
+          <p:cNvSpPr>
+            <a:spLocks noGrp="1"/>
+          </p:cNvSpPr>
+          <p:nvPr>
+            <p:ph type="dt" idx="1"/>
+          </p:nvPr>
+        </p:nvSpPr>
+        <p:spPr>
+          <a:xfrm>
+            <a:off x="3884613" y="0"/>
+            <a:ext cx="2971800" cy="458788"/>
+          </a:xfrm>
+          <a:prstGeom prst="rect">
+            <a:avLst/>
+          </a:prstGeom>
+        </p:spPr>
+        <p:txBody>
+          <a:bodyPr vert="horz" lIns="91440" tIns="45720" rIns="91440" bIns="45720" rtlCol="0"/>
+          <a:lstStyle>
+            <a:lvl1pPr algn="r">
+              <a:defRPr sz="1200"/>
+            </a:lvl1pPr>
+          </a:lstStyle>
+          <a:p>
+            <a:fld id="{74FCF980-36E5-46BF-A02A-756B7FE0A693}" type="datetimeFigureOut">
+              <a:rPr lang="en-GB" smtClean="0"/>
+              <a:t>25/10/2024</a:t>
+            </a:fld>
+            <a:endParaRPr lang="en-GB"/>
+          </a:p>
+        </p:txBody>
+      </p:sp>
+      <p:sp>
+        <p:nvSpPr>
+          <p:cNvPr id="4" name="Slide Image Placeholder 3"/>
+          <p:cNvSpPr>
+            <a:spLocks noGrp="1" noRot="1" noChangeAspect="1"/>
+          </p:cNvSpPr>
+          <p:nvPr>
+            <p:ph type="sldImg" idx="2"/>
+          </p:nvPr>
+        </p:nvSpPr>
+        <p:spPr>
+          <a:xfrm>
+            <a:off x="685800" y="1143000"/>
+            <a:ext cx="5486400" cy="3086100"/>
+          </a:xfrm>
+          <a:prstGeom prst="rect">
+            <a:avLst/>
+          </a:prstGeom>
+          <a:noFill/>
+          <a:ln w="12700">
+            <a:solidFill>
+              <a:prstClr val="black"/>
+            </a:solidFill>
+          </a:ln>
+        </p:spPr>
+        <p:txBody>
+          <a:bodyPr vert="horz" lIns="91440" tIns="45720" rIns="91440" bIns="45720" rtlCol="0" anchor="ctr"/>
+          <a:lstStyle/>
+          <a:p>
+            <a:endParaRPr lang="en-GB"/>
+          </a:p>
+        </p:txBody>
+      </p:sp>
+      <p:sp>
+        <p:nvSpPr>
+          <p:cNvPr id="5" name="Notes Placeholder 4"/>
+          <p:cNvSpPr>
+            <a:spLocks noGrp="1"/>
+          </p:cNvSpPr>
+          <p:nvPr>
+            <p:ph type="body" sz="quarter" idx="3"/>
+          </p:nvPr>
+        </p:nvSpPr>
+        <p:spPr>
+          <a:xfrm>
+            <a:off x="685800" y="4400550"/>
+            <a:ext cx="5486400" cy="3600450"/>
+          </a:xfrm>
+          <a:prstGeom prst="rect">
+            <a:avLst/>
+          </a:prstGeom>
+        </p:spPr>
+        <p:txBody>
+          <a:bodyPr vert="horz" lIns="91440" tIns="45720" rIns="91440" bIns="45720" rtlCol="0"/>
+          <a:lstStyle/>
+          <a:p>
+            <a:pPr lvl="0"/>
+            <a:r>
+              <a:rPr lang="en-US"/>
+              <a:t>Click to edit Master text styles</a:t>
+            </a:r>
+          </a:p>
+          <a:p>
+            <a:pPr lvl="1"/>
+            <a:r>
+              <a:rPr lang="en-US"/>
+              <a:t>Second level</a:t>
+            </a:r>
+          </a:p>
+          <a:p>
+            <a:pPr lvl="2"/>
+            <a:r>
+              <a:rPr lang="en-US"/>
+              <a:t>Third level</a:t>
+            </a:r>
+          </a:p>
+          <a:p>
+            <a:pPr lvl="3"/>
+            <a:r>
+              <a:rPr lang="en-US"/>
+              <a:t>Fourth level</a:t>
+            </a:r>
+          </a:p>
+          <a:p>
+            <a:pPr lvl="4"/>
+            <a:r>
+              <a:rPr lang="en-US"/>
+              <a:t>Fifth level</a:t>
+            </a:r>
+            <a:endParaRPr lang="en-GB"/>
+          </a:p>
+        </p:txBody>
+      </p:sp>
+      <p:sp>
+        <p:nvSpPr>
+          <p:cNvPr id="6" name="Footer Placeholder 5"/>
+          <p:cNvSpPr>
+            <a:spLocks noGrp="1"/>
+          </p:cNvSpPr>
+          <p:nvPr>
+            <p:ph type="ftr" sz="quarter" idx="4"/>
+          </p:nvPr>
+        </p:nvSpPr>
+        <p:spPr>
+          <a:xfrm>
+            <a:off x="0" y="8685213"/>
+            <a:ext cx="2971800" cy="458787"/>
+          </a:xfrm>
+          <a:prstGeom prst="rect">
+            <a:avLst/>
+          </a:prstGeom>
+        </p:spPr>
+        <p:txBody>
+          <a:bodyPr vert="horz" lIns="91440" tIns="45720" rIns="91440" bIns="45720" rtlCol="0" anchor="b"/>
+          <a:lstStyle>
+            <a:lvl1pPr algn="l">
+              <a:defRPr sz="1200"/>
+            </a:lvl1pPr>
+          </a:lstStyle>
+          <a:p>
+            <a:endParaRPr lang="en-GB"/>
+          </a:p>
+        </p:txBody>
+      </p:sp>
+      <p:sp>
+        <p:nvSpPr>
+          <p:cNvPr id="7" name="Slide Number Placeholder 6"/>
+          <p:cNvSpPr>
+            <a:spLocks noGrp="1"/>
+          </p:cNvSpPr>
+          <p:nvPr>
+            <p:ph type="sldNum" sz="quarter" idx="5"/>
+          </p:nvPr>
+        </p:nvSpPr>
+        <p:spPr>
+          <a:xfrm>
+            <a:off x="3884613" y="8685213"/>
+            <a:ext cx="2971800" cy="458787"/>
+          </a:xfrm>
+          <a:prstGeom prst="rect">
+            <a:avLst/>
+          </a:prstGeom>
+        </p:spPr>
+        <p:txBody>
+          <a:bodyPr vert="horz" lIns="91440" tIns="45720" rIns="91440" bIns="45720" rtlCol="0" anchor="b"/>
+          <a:lstStyle>
+            <a:lvl1pPr algn="r">
+              <a:defRPr sz="1200"/>
+            </a:lvl1pPr>
+          </a:lstStyle>
+          <a:p>
+            <a:fld id="{386FF374-010C-4816-AA2D-4F7FC83D95B1}" type="slidenum">
+              <a:rPr lang="en-GB" smtClean="0"/>
+              <a:t>‹#›</a:t>
+            </a:fld>
+            <a:endParaRPr lang="en-GB"/>
+          </a:p>
+        </p:txBody>
+      </p:sp>
+    </p:spTree>
+    <p:extLst>
+      <p:ext uri="{BB962C8B-B14F-4D97-AF65-F5344CB8AC3E}">
+        <p14:creationId xmlns:p14="http://schemas.microsoft.com/office/powerpoint/2010/main" val="870029832"/>
+      </p:ext>
+    </p:extLst>
+  </p:cSld>
+  <p:clrMap bg1="lt1" tx1="dk1" bg2="lt2" tx2="dk2" accent1="accent1" accent2="accent2" accent3="accent3" accent4="accent4" accent5="accent5" accent6="accent6" hlink="hlink" folHlink="folHlink"/>
+  <p:notesStyle>
+    <a:lvl1pPr marL="0" algn="l" defTabSz="914400" rtl="0" eaLnBrk="1" latinLnBrk="0" hangingPunct="1">
+      <a:defRPr sz="1200" kern="1200">
+        <a:solidFill>
+          <a:schemeClr val="tx1"/>
+        </a:solidFill>
+        <a:latin typeface="+mn-lt"/>
+        <a:ea typeface="+mn-ea"/>
+        <a:cs typeface="+mn-cs"/>
+      </a:defRPr>
+    </a:lvl1pPr>
+    <a:lvl2pPr marL="457200" algn="l" defTabSz="914400" rtl="0" eaLnBrk="1" latinLnBrk="0" hangingPunct="1">
+      <a:defRPr sz="1200" kern="1200">
+        <a:solidFill>
+          <a:schemeClr val="tx1"/>
+        </a:solidFill>
+        <a:latin typeface="+mn-lt"/>
+        <a:ea typeface="+mn-ea"/>
+        <a:cs typeface="+mn-cs"/>
+      </a:defRPr>
+    </a:lvl2pPr>
+    <a:lvl3pPr marL="914400" algn="l" defTabSz="914400" rtl="0" eaLnBrk="1" latinLnBrk="0" hangingPunct="1">
+      <a:defRPr sz="1200" kern="1200">
+        <a:solidFill>
+          <a:schemeClr val="tx1"/>
+        </a:solidFill>
+        <a:latin typeface="+mn-lt"/>
+        <a:ea typeface="+mn-ea"/>
+        <a:cs typeface="+mn-cs"/>
+      </a:defRPr>
+    </a:lvl3pPr>
+    <a:lvl4pPr marL="1371600" algn="l" defTabSz="914400" rtl="0" eaLnBrk="1" latinLnBrk="0" hangingPunct="1">
+      <a:defRPr sz="1200" kern="1200">
+        <a:solidFill>
+          <a:schemeClr val="tx1"/>
+        </a:solidFill>
+        <a:latin typeface="+mn-lt"/>
+        <a:ea typeface="+mn-ea"/>
+        <a:cs typeface="+mn-cs"/>
+      </a:defRPr>
+    </a:lvl4pPr>
+    <a:lvl5pPr marL="1828800" algn="l" defTabSz="914400" rtl="0" eaLnBrk="1" latinLnBrk="0" hangingPunct="1">
+      <a:defRPr sz="1200" kern="1200">
+        <a:solidFill>
+          <a:schemeClr val="tx1"/>
+        </a:solidFill>
+        <a:latin typeface="+mn-lt"/>
+        <a:ea typeface="+mn-ea"/>
+        <a:cs typeface="+mn-cs"/>
+      </a:defRPr>
+    </a:lvl5pPr>
+    <a:lvl6pPr marL="2286000" algn="l" defTabSz="914400" rtl="0" eaLnBrk="1" latinLnBrk="0" hangingPunct="1">
+      <a:defRPr sz="1200" kern="1200">
+        <a:solidFill>
+          <a:schemeClr val="tx1"/>
+        </a:solidFill>
+        <a:latin typeface="+mn-lt"/>
+        <a:ea typeface="+mn-ea"/>
+        <a:cs typeface="+mn-cs"/>
+      </a:defRPr>
+    </a:lvl6pPr>
+    <a:lvl7pPr marL="2743200" algn="l" defTabSz="914400" rtl="0" eaLnBrk="1" latinLnBrk="0" hangingPunct="1">
+      <a:defRPr sz="1200" kern="1200">
+        <a:solidFill>
+          <a:schemeClr val="tx1"/>
+        </a:solidFill>
+        <a:latin typeface="+mn-lt"/>
+        <a:ea typeface="+mn-ea"/>
+        <a:cs typeface="+mn-cs"/>
+      </a:defRPr>
+    </a:lvl7pPr>
+    <a:lvl8pPr marL="3200400" algn="l" defTabSz="914400" rtl="0" eaLnBrk="1" latinLnBrk="0" hangingPunct="1">
+      <a:defRPr sz="1200" kern="1200">
+        <a:solidFill>
+          <a:schemeClr val="tx1"/>
+        </a:solidFill>
+        <a:latin typeface="+mn-lt"/>
+        <a:ea typeface="+mn-ea"/>
+        <a:cs typeface="+mn-cs"/>
+      </a:defRPr>
+    </a:lvl8pPr>
+    <a:lvl9pPr marL="3657600" algn="l" defTabSz="914400" rtl="0" eaLnBrk="1" latinLnBrk="0" hangingPunct="1">
+      <a:defRPr sz="1200" kern="1200">
+        <a:solidFill>
+          <a:schemeClr val="tx1"/>
+        </a:solidFill>
+        <a:latin typeface="+mn-lt"/>
+        <a:ea typeface="+mn-ea"/>
+        <a:cs typeface="+mn-cs"/>
+      </a:defRPr>
+    </a:lvl9pPr>
+  </p:notesStyle>
+</p:notesMaster>
 </file>
 
 <file path=ppt/slideLayouts/slideLayout1.xml><?xml version="1.0" encoding="utf-8"?>
@@ -4426,9 +7547,9 @@
           <a:bodyPr/>
           <a:lstStyle/>
           <a:p>
-            <a:fld id="{9A2EB819-CB84-4A80-81F0-571853621D68}" type="datetimeFigureOut">
+            <a:fld id="{7E55B3EA-B30C-4CE3-B538-BC7F603EE92A}" type="datetime1">
               <a:rPr lang="en-GB" smtClean="0"/>
-              <a:t>22/10/2024</a:t>
+              <a:t>25/10/2024</a:t>
             </a:fld>
             <a:endParaRPr lang="en-GB"/>
           </a:p>
@@ -4484,7 +7605,7 @@
               <a:rPr lang="en-GB" smtClean="0"/>
               <a:t>‹#›</a:t>
             </a:fld>
-            <a:endParaRPr lang="en-GB"/>
+            <a:endParaRPr lang="en-GB" dirty="0"/>
           </a:p>
         </p:txBody>
       </p:sp>
@@ -4626,9 +7747,9 @@
           <a:bodyPr/>
           <a:lstStyle/>
           <a:p>
-            <a:fld id="{9A2EB819-CB84-4A80-81F0-571853621D68}" type="datetimeFigureOut">
+            <a:fld id="{908DF4FF-43EB-43ED-BF8E-EF1421EE1B33}" type="datetime1">
               <a:rPr lang="en-GB" smtClean="0"/>
-              <a:t>22/10/2024</a:t>
+              <a:t>25/10/2024</a:t>
             </a:fld>
             <a:endParaRPr lang="en-GB"/>
           </a:p>
@@ -4836,9 +7957,9 @@
           <a:bodyPr/>
           <a:lstStyle/>
           <a:p>
-            <a:fld id="{9A2EB819-CB84-4A80-81F0-571853621D68}" type="datetimeFigureOut">
+            <a:fld id="{F5FB5ABF-7BF5-4383-BD15-C04E1EF89981}" type="datetime1">
               <a:rPr lang="en-GB" smtClean="0"/>
-              <a:t>22/10/2024</a:t>
+              <a:t>25/10/2024</a:t>
             </a:fld>
             <a:endParaRPr lang="en-GB"/>
           </a:p>
@@ -4980,38 +8101,38 @@
           <a:p>
             <a:pPr lvl="0"/>
             <a:r>
-              <a:rPr lang="en-US"/>
+              <a:rPr lang="en-US" dirty="0"/>
               <a:t>Click to edit Master text styles</a:t>
             </a:r>
           </a:p>
           <a:p>
             <a:pPr lvl="1"/>
             <a:r>
-              <a:rPr lang="en-US"/>
+              <a:rPr lang="en-US" dirty="0"/>
               <a:t>Second level</a:t>
             </a:r>
           </a:p>
           <a:p>
             <a:pPr lvl="2"/>
             <a:r>
-              <a:rPr lang="en-US"/>
+              <a:rPr lang="en-US" dirty="0"/>
               <a:t>Third level</a:t>
             </a:r>
           </a:p>
           <a:p>
             <a:pPr lvl="3"/>
             <a:r>
-              <a:rPr lang="en-US"/>
+              <a:rPr lang="en-US" dirty="0"/>
               <a:t>Fourth level</a:t>
             </a:r>
           </a:p>
           <a:p>
             <a:pPr lvl="4"/>
             <a:r>
-              <a:rPr lang="en-US"/>
+              <a:rPr lang="en-US" dirty="0"/>
               <a:t>Fifth level</a:t>
             </a:r>
-            <a:endParaRPr lang="en-GB"/>
+            <a:endParaRPr lang="en-GB" dirty="0"/>
           </a:p>
         </p:txBody>
       </p:sp>
@@ -5036,11 +8157,11 @@
           <a:bodyPr/>
           <a:lstStyle/>
           <a:p>
-            <a:fld id="{9A2EB819-CB84-4A80-81F0-571853621D68}" type="datetimeFigureOut">
+            <a:fld id="{3249EB88-2E63-470B-B5AE-ED8F04DEB571}" type="datetime1">
               <a:rPr lang="en-GB" smtClean="0"/>
-              <a:t>22/10/2024</a:t>
+              <a:t>25/10/2024</a:t>
             </a:fld>
-            <a:endParaRPr lang="en-GB"/>
+            <a:endParaRPr lang="en-GB" dirty="0"/>
           </a:p>
         </p:txBody>
       </p:sp>
@@ -5065,7 +8186,7 @@
           <a:bodyPr/>
           <a:lstStyle/>
           <a:p>
-            <a:endParaRPr lang="en-GB"/>
+            <a:endParaRPr lang="en-GB" dirty="0"/>
           </a:p>
         </p:txBody>
       </p:sp>
@@ -5088,13 +8209,18 @@
         <p:spPr/>
         <p:txBody>
           <a:bodyPr/>
-          <a:lstStyle/>
+          <a:lstStyle>
+            <a:lvl1pPr>
+              <a:defRPr sz="2000"/>
+            </a:lvl1pPr>
+          </a:lstStyle>
           <a:p>
             <a:fld id="{39DC44A4-4954-4CC0-AE95-AFC3F00E7214}" type="slidenum">
               <a:rPr lang="en-GB" smtClean="0"/>
+              <a:pPr/>
               <a:t>‹#›</a:t>
             </a:fld>
-            <a:endParaRPr lang="en-GB"/>
+            <a:endParaRPr lang="en-GB" dirty="0"/>
           </a:p>
         </p:txBody>
       </p:sp>
@@ -5108,6 +8234,22 @@
   <p:clrMapOvr>
     <a:masterClrMapping/>
   </p:clrMapOvr>
+  <p:extLst>
+    <p:ext uri="{DCECCB84-F9BA-43D5-87BE-67443E8EF086}">
+      <p15:sldGuideLst xmlns:p15="http://schemas.microsoft.com/office/powerpoint/2012/main">
+        <p15:guide id="1" orient="horz" pos="2160" userDrawn="1">
+          <p15:clr>
+            <a:srgbClr val="FBAE40"/>
+          </p15:clr>
+        </p15:guide>
+        <p15:guide id="2" pos="3840" userDrawn="1">
+          <p15:clr>
+            <a:srgbClr val="FBAE40"/>
+          </p15:clr>
+        </p15:guide>
+      </p15:sldGuideLst>
+    </p:ext>
+  </p:extLst>
 </p:sldLayout>
 </file>
 
@@ -5312,9 +8454,9 @@
           <a:bodyPr/>
           <a:lstStyle/>
           <a:p>
-            <a:fld id="{9A2EB819-CB84-4A80-81F0-571853621D68}" type="datetimeFigureOut">
+            <a:fld id="{8A25558C-F5C9-425F-A937-DAD336474D19}" type="datetime1">
               <a:rPr lang="en-GB" smtClean="0"/>
-              <a:t>22/10/2024</a:t>
+              <a:t>25/10/2024</a:t>
             </a:fld>
             <a:endParaRPr lang="en-GB"/>
           </a:p>
@@ -5580,9 +8722,9 @@
           <a:bodyPr/>
           <a:lstStyle/>
           <a:p>
-            <a:fld id="{9A2EB819-CB84-4A80-81F0-571853621D68}" type="datetimeFigureOut">
+            <a:fld id="{78F23361-B348-4CBC-9D98-FFEC573232E9}" type="datetime1">
               <a:rPr lang="en-GB" smtClean="0"/>
-              <a:t>22/10/2024</a:t>
+              <a:t>25/10/2024</a:t>
             </a:fld>
             <a:endParaRPr lang="en-GB"/>
           </a:p>
@@ -5638,7 +8780,7 @@
               <a:rPr lang="en-GB" smtClean="0"/>
               <a:t>‹#›</a:t>
             </a:fld>
-            <a:endParaRPr lang="en-GB"/>
+            <a:endParaRPr lang="en-GB" dirty="0"/>
           </a:p>
         </p:txBody>
       </p:sp>
@@ -5995,9 +9137,9 @@
           <a:bodyPr/>
           <a:lstStyle/>
           <a:p>
-            <a:fld id="{9A2EB819-CB84-4A80-81F0-571853621D68}" type="datetimeFigureOut">
+            <a:fld id="{209E1356-F7A0-4DDA-9B79-8677F0203A36}" type="datetime1">
               <a:rPr lang="en-GB" smtClean="0"/>
-              <a:t>22/10/2024</a:t>
+              <a:t>25/10/2024</a:t>
             </a:fld>
             <a:endParaRPr lang="en-GB"/>
           </a:p>
@@ -6137,9 +9279,9 @@
           <a:bodyPr/>
           <a:lstStyle/>
           <a:p>
-            <a:fld id="{9A2EB819-CB84-4A80-81F0-571853621D68}" type="datetimeFigureOut">
+            <a:fld id="{7B0BD8A4-DB30-4644-BD53-95B03F580EBF}" type="datetime1">
               <a:rPr lang="en-GB" smtClean="0"/>
-              <a:t>22/10/2024</a:t>
+              <a:t>25/10/2024</a:t>
             </a:fld>
             <a:endParaRPr lang="en-GB"/>
           </a:p>
@@ -6250,9 +9392,9 @@
           <a:bodyPr/>
           <a:lstStyle/>
           <a:p>
-            <a:fld id="{9A2EB819-CB84-4A80-81F0-571853621D68}" type="datetimeFigureOut">
+            <a:fld id="{EBE70D1A-1D8E-4DCC-9397-026B2065BFC1}" type="datetime1">
               <a:rPr lang="en-GB" smtClean="0"/>
-              <a:t>22/10/2024</a:t>
+              <a:t>25/10/2024</a:t>
             </a:fld>
             <a:endParaRPr lang="en-GB"/>
           </a:p>
@@ -6563,9 +9705,9 @@
           <a:bodyPr/>
           <a:lstStyle/>
           <a:p>
-            <a:fld id="{9A2EB819-CB84-4A80-81F0-571853621D68}" type="datetimeFigureOut">
+            <a:fld id="{1D27C71C-4D63-45B1-B210-A6E88395339E}" type="datetime1">
               <a:rPr lang="en-GB" smtClean="0"/>
-              <a:t>22/10/2024</a:t>
+              <a:t>25/10/2024</a:t>
             </a:fld>
             <a:endParaRPr lang="en-GB"/>
           </a:p>
@@ -6852,9 +9994,9 @@
           <a:bodyPr/>
           <a:lstStyle/>
           <a:p>
-            <a:fld id="{9A2EB819-CB84-4A80-81F0-571853621D68}" type="datetimeFigureOut">
+            <a:fld id="{CE4A0315-D938-4806-831E-5BEF87E79DEC}" type="datetime1">
               <a:rPr lang="en-GB" smtClean="0"/>
-              <a:t>22/10/2024</a:t>
+              <a:t>25/10/2024</a:t>
             </a:fld>
             <a:endParaRPr lang="en-GB"/>
           </a:p>
@@ -7021,38 +10163,38 @@
           <a:p>
             <a:pPr lvl="0"/>
             <a:r>
-              <a:rPr lang="en-US"/>
+              <a:rPr lang="en-US" dirty="0"/>
               <a:t>Click to edit Master text styles</a:t>
             </a:r>
           </a:p>
           <a:p>
             <a:pPr lvl="1"/>
             <a:r>
-              <a:rPr lang="en-US"/>
+              <a:rPr lang="en-US" dirty="0"/>
               <a:t>Second level</a:t>
             </a:r>
           </a:p>
           <a:p>
             <a:pPr lvl="2"/>
             <a:r>
-              <a:rPr lang="en-US"/>
+              <a:rPr lang="en-US" dirty="0"/>
               <a:t>Third level</a:t>
             </a:r>
           </a:p>
           <a:p>
             <a:pPr lvl="3"/>
             <a:r>
-              <a:rPr lang="en-US"/>
+              <a:rPr lang="en-US" dirty="0"/>
               <a:t>Fourth level</a:t>
             </a:r>
           </a:p>
           <a:p>
             <a:pPr lvl="4"/>
             <a:r>
-              <a:rPr lang="en-US"/>
+              <a:rPr lang="en-US" dirty="0"/>
               <a:t>Fifth level</a:t>
             </a:r>
-            <a:endParaRPr lang="en-GB"/>
+            <a:endParaRPr lang="en-GB" dirty="0"/>
           </a:p>
         </p:txBody>
       </p:sp>
@@ -7095,9 +10237,9 @@
             </a:lvl1pPr>
           </a:lstStyle>
           <a:p>
-            <a:fld id="{9A2EB819-CB84-4A80-81F0-571853621D68}" type="datetimeFigureOut">
+            <a:fld id="{EDF9EF3A-9B5C-4F8E-BE21-1A9759F13C31}" type="datetime1">
               <a:rPr lang="en-GB" smtClean="0"/>
-              <a:t>22/10/2024</a:t>
+              <a:t>25/10/2024</a:t>
             </a:fld>
             <a:endParaRPr lang="en-GB"/>
           </a:p>
@@ -7164,7 +10306,7 @@
         </p:nvSpPr>
         <p:spPr>
           <a:xfrm>
-            <a:off x="8610600" y="6356350"/>
+            <a:off x="8858250" y="6176963"/>
             <a:ext cx="2743200" cy="365125"/>
           </a:xfrm>
           <a:prstGeom prst="rect">
@@ -7175,7 +10317,7 @@
           <a:bodyPr vert="horz" lIns="91440" tIns="45720" rIns="91440" bIns="45720" rtlCol="0" anchor="ctr"/>
           <a:lstStyle>
             <a:lvl1pPr algn="r">
-              <a:defRPr sz="1200">
+              <a:defRPr sz="2000">
                 <a:solidFill>
                   <a:schemeClr val="tx1">
                     <a:tint val="82000"/>
@@ -7187,9 +10329,10 @@
           <a:p>
             <a:fld id="{39DC44A4-4954-4CC0-AE95-AFC3F00E7214}" type="slidenum">
               <a:rPr lang="en-GB" smtClean="0"/>
+              <a:pPr/>
               <a:t>‹#›</a:t>
             </a:fld>
-            <a:endParaRPr lang="en-GB"/>
+            <a:endParaRPr lang="en-GB" dirty="0"/>
           </a:p>
         </p:txBody>
       </p:sp>
@@ -7214,6 +10357,7 @@
     <p:sldLayoutId id="2147483658" r:id="rId10"/>
     <p:sldLayoutId id="2147483659" r:id="rId11"/>
   </p:sldLayoutIdLst>
+  <p:hf hdr="0" ftr="0" dt="0"/>
   <p:txStyles>
     <p:titleStyle>
       <a:lvl1pPr algn="l" defTabSz="914400" rtl="0" eaLnBrk="1" latinLnBrk="0" hangingPunct="1">
@@ -7494,6 +10638,22 @@
       </a:lvl9pPr>
     </p:otherStyle>
   </p:txStyles>
+  <p:extLst>
+    <p:ext uri="{27BBF7A9-308A-43DC-89C8-2F10F3537804}">
+      <p15:sldGuideLst xmlns:p15="http://schemas.microsoft.com/office/powerpoint/2012/main">
+        <p15:guide id="1" orient="horz" pos="2160" userDrawn="1">
+          <p15:clr>
+            <a:srgbClr val="F26B43"/>
+          </p15:clr>
+        </p15:guide>
+        <p15:guide id="2" pos="3840" userDrawn="1">
+          <p15:clr>
+            <a:srgbClr val="F26B43"/>
+          </p15:clr>
+        </p15:guide>
+      </p15:sldGuideLst>
+    </p:ext>
+  </p:extLst>
 </p:sldMaster>
 </file>
 
@@ -8751,7 +11911,7 @@
               <a:rPr lang="en-US" sz="2000" spc="-50" dirty="0">
                 <a:effectLst/>
               </a:rPr>
-              <a:t>Supervisor: Oisin Cawley</a:t>
+              <a:t>Supervisor: Dr Oisin Cawley</a:t>
             </a:r>
           </a:p>
           <a:p>
@@ -9014,24 +12174,22 @@
         </p:nvSpPr>
         <p:spPr>
           <a:xfrm>
-            <a:off x="1060088" y="1017458"/>
-            <a:ext cx="3543443" cy="1299411"/>
+            <a:off x="1060088" y="642999"/>
+            <a:ext cx="5533752" cy="1299411"/>
           </a:xfrm>
         </p:spPr>
         <p:txBody>
           <a:bodyPr vert="horz" lIns="91440" tIns="45720" rIns="91440" bIns="45720" rtlCol="0">
-            <a:normAutofit/>
+            <a:noAutofit/>
           </a:bodyPr>
           <a:lstStyle/>
           <a:p>
             <a:r>
-              <a:rPr lang="en-US" sz="3600" kern="1200" dirty="0">
+              <a:rPr lang="en-US" sz="5400" kern="1200" dirty="0">
                 <a:solidFill>
                   <a:schemeClr val="tx2"/>
                 </a:solidFill>
-                <a:latin typeface="+mj-lt"/>
-                <a:ea typeface="+mj-ea"/>
-                <a:cs typeface="+mj-cs"/>
+                <a:latin typeface="Ariel"/>
               </a:rPr>
               <a:t>My Background</a:t>
             </a:r>
@@ -11440,6 +14598,38 @@
           </p:txBody>
         </p:sp>
       </p:grpSp>
+      <p:sp>
+        <p:nvSpPr>
+          <p:cNvPr id="3" name="Slide Number Placeholder 2">
+            <a:extLst>
+              <a:ext uri="{FF2B5EF4-FFF2-40B4-BE49-F238E27FC236}">
+                <a16:creationId xmlns:a16="http://schemas.microsoft.com/office/drawing/2014/main" id="{CD8D2787-1117-F03B-C6EF-2F5E259A49D9}"/>
+              </a:ext>
+            </a:extLst>
+          </p:cNvPr>
+          <p:cNvSpPr>
+            <a:spLocks noGrp="1"/>
+          </p:cNvSpPr>
+          <p:nvPr>
+            <p:ph type="sldNum" sz="quarter" idx="12"/>
+          </p:nvPr>
+        </p:nvSpPr>
+        <p:spPr/>
+        <p:txBody>
+          <a:bodyPr/>
+          <a:lstStyle/>
+          <a:p>
+            <a:fld id="{39DC44A4-4954-4CC0-AE95-AFC3F00E7214}" type="slidenum">
+              <a:rPr lang="en-GB" sz="2000" smtClean="0"/>
+              <a:t>2</a:t>
+            </a:fld>
+            <a:r>
+              <a:rPr lang="en-GB" sz="2000" dirty="0"/>
+              <a:t>/8</a:t>
+            </a:r>
+          </a:p>
+        </p:txBody>
+      </p:sp>
     </p:spTree>
     <p:extLst>
       <p:ext uri="{BB962C8B-B14F-4D97-AF65-F5344CB8AC3E}">
@@ -11454,6 +14644,4296 @@
 </file>
 
 <file path=ppt/slides/slide3.xml><?xml version="1.0" encoding="utf-8"?>
+<p:sld xmlns:a="http://schemas.openxmlformats.org/drawingml/2006/main" xmlns:r="http://schemas.openxmlformats.org/officeDocument/2006/relationships" xmlns:p="http://schemas.openxmlformats.org/presentationml/2006/main">
+  <p:cSld>
+    <p:bg>
+      <p:bgPr>
+        <a:solidFill>
+          <a:schemeClr val="bg1"/>
+        </a:solidFill>
+        <a:effectLst/>
+      </p:bgPr>
+    </p:bg>
+    <p:spTree>
+      <p:nvGrpSpPr>
+        <p:cNvPr id="1" name=""/>
+        <p:cNvGrpSpPr/>
+        <p:nvPr/>
+      </p:nvGrpSpPr>
+      <p:grpSpPr>
+        <a:xfrm>
+          <a:off x="0" y="0"/>
+          <a:ext cx="0" cy="0"/>
+          <a:chOff x="0" y="0"/>
+          <a:chExt cx="0" cy="0"/>
+        </a:xfrm>
+      </p:grpSpPr>
+      <p:sp>
+        <p:nvSpPr>
+          <p:cNvPr id="9" name="Rectangle 8">
+            <a:extLst>
+              <a:ext uri="{FF2B5EF4-FFF2-40B4-BE49-F238E27FC236}">
+                <a16:creationId xmlns:a16="http://schemas.microsoft.com/office/drawing/2014/main" id="{4C608BEB-860E-4094-8511-78603564A75E}"/>
+              </a:ext>
+              <a:ext uri="{C183D7F6-B498-43B3-948B-1728B52AA6E4}">
+                <adec:decorative xmlns:adec="http://schemas.microsoft.com/office/drawing/2017/decorative" val="1"/>
+              </a:ext>
+            </a:extLst>
+          </p:cNvPr>
+          <p:cNvSpPr>
+            <a:spLocks noGrp="1" noRot="1" noChangeAspect="1" noMove="1" noResize="1" noEditPoints="1" noAdjustHandles="1" noChangeArrowheads="1" noChangeShapeType="1" noTextEdit="1"/>
+          </p:cNvSpPr>
+          <p:nvPr>
+            <p:extLst>
+              <p:ext uri="{386F3935-93C4-4BCD-93E2-E3B085C9AB24}">
+                <p16:designElem xmlns:p16="http://schemas.microsoft.com/office/powerpoint/2015/main" val="1"/>
+              </p:ext>
+            </p:extLst>
+          </p:nvPr>
+        </p:nvSpPr>
+        <p:spPr>
+          <a:xfrm>
+            <a:off x="0" y="0"/>
+            <a:ext cx="4059050" cy="6858000"/>
+          </a:xfrm>
+          <a:prstGeom prst="rect">
+            <a:avLst/>
+          </a:prstGeom>
+          <a:solidFill>
+            <a:srgbClr val="404040"/>
+          </a:solidFill>
+          <a:ln>
+            <a:noFill/>
+          </a:ln>
+        </p:spPr>
+        <p:style>
+          <a:lnRef idx="2">
+            <a:schemeClr val="accent1">
+              <a:shade val="50000"/>
+            </a:schemeClr>
+          </a:lnRef>
+          <a:fillRef idx="1">
+            <a:schemeClr val="accent1"/>
+          </a:fillRef>
+          <a:effectRef idx="0">
+            <a:schemeClr val="accent1"/>
+          </a:effectRef>
+          <a:fontRef idx="minor">
+            <a:schemeClr val="lt1"/>
+          </a:fontRef>
+        </p:style>
+        <p:txBody>
+          <a:bodyPr rtlCol="0" anchor="ctr"/>
+          <a:lstStyle/>
+          <a:p>
+            <a:pPr marL="0" marR="0" lvl="0" indent="0" algn="ctr" defTabSz="914400" rtl="0" eaLnBrk="1" fontAlgn="auto" latinLnBrk="0" hangingPunct="1">
+              <a:lnSpc>
+                <a:spcPct val="100000"/>
+              </a:lnSpc>
+              <a:spcBef>
+                <a:spcPts val="0"/>
+              </a:spcBef>
+              <a:spcAft>
+                <a:spcPts val="0"/>
+              </a:spcAft>
+              <a:buClrTx/>
+              <a:buSzTx/>
+              <a:buFontTx/>
+              <a:buNone/>
+              <a:tabLst/>
+              <a:defRPr/>
+            </a:pPr>
+            <a:endParaRPr kumimoji="0" lang="en-US" sz="1800" b="0" i="0" u="none" strike="noStrike" kern="1200" cap="none" spc="0" normalizeH="0" baseline="0" noProof="0">
+              <a:ln>
+                <a:noFill/>
+              </a:ln>
+              <a:solidFill>
+                <a:prstClr val="white"/>
+              </a:solidFill>
+              <a:effectLst/>
+              <a:uLnTx/>
+              <a:uFillTx/>
+              <a:latin typeface="Calibri" panose="020F0502020204030204"/>
+              <a:ea typeface="+mn-ea"/>
+              <a:cs typeface="+mn-cs"/>
+            </a:endParaRPr>
+          </a:p>
+        </p:txBody>
+      </p:sp>
+      <p:sp>
+        <p:nvSpPr>
+          <p:cNvPr id="2" name="Title 1">
+            <a:extLst>
+              <a:ext uri="{FF2B5EF4-FFF2-40B4-BE49-F238E27FC236}">
+                <a16:creationId xmlns:a16="http://schemas.microsoft.com/office/drawing/2014/main" id="{269ED137-CD94-2534-A4ED-2F2A7973F6B8}"/>
+              </a:ext>
+            </a:extLst>
+          </p:cNvPr>
+          <p:cNvSpPr>
+            <a:spLocks noGrp="1"/>
+          </p:cNvSpPr>
+          <p:nvPr>
+            <p:ph type="title"/>
+          </p:nvPr>
+        </p:nvSpPr>
+        <p:spPr>
+          <a:xfrm>
+            <a:off x="838200" y="1412488"/>
+            <a:ext cx="2899189" cy="4363844"/>
+          </a:xfrm>
+        </p:spPr>
+        <p:txBody>
+          <a:bodyPr anchor="t">
+            <a:normAutofit/>
+          </a:bodyPr>
+          <a:lstStyle/>
+          <a:p>
+            <a:r>
+              <a:rPr lang="en-GB" sz="4000">
+                <a:solidFill>
+                  <a:srgbClr val="FFFFFF"/>
+                </a:solidFill>
+                <a:latin typeface="Ariel"/>
+              </a:rPr>
+              <a:t>Industry Perspective</a:t>
+            </a:r>
+          </a:p>
+        </p:txBody>
+      </p:sp>
+      <p:sp>
+        <p:nvSpPr>
+          <p:cNvPr id="3" name="Content Placeholder 2">
+            <a:extLst>
+              <a:ext uri="{FF2B5EF4-FFF2-40B4-BE49-F238E27FC236}">
+                <a16:creationId xmlns:a16="http://schemas.microsoft.com/office/drawing/2014/main" id="{B4A46364-0590-0E0B-8D37-EB0F55912CC1}"/>
+              </a:ext>
+            </a:extLst>
+          </p:cNvPr>
+          <p:cNvSpPr>
+            <a:spLocks noGrp="1"/>
+          </p:cNvSpPr>
+          <p:nvPr>
+            <p:ph sz="half" idx="1"/>
+          </p:nvPr>
+        </p:nvSpPr>
+        <p:spPr>
+          <a:xfrm>
+            <a:off x="4380855" y="1412489"/>
+            <a:ext cx="3427283" cy="4363844"/>
+          </a:xfrm>
+        </p:spPr>
+        <p:txBody>
+          <a:bodyPr>
+            <a:normAutofit/>
+          </a:bodyPr>
+          <a:lstStyle/>
+          <a:p>
+            <a:pPr marL="0" indent="0">
+              <a:buNone/>
+            </a:pPr>
+            <a:r>
+              <a:rPr lang="en-GB" b="1" dirty="0">
+                <a:latin typeface="Ariel"/>
+              </a:rPr>
+              <a:t>Paul McGrath</a:t>
+            </a:r>
+          </a:p>
+          <a:p>
+            <a:pPr marL="0" indent="0">
+              <a:buNone/>
+            </a:pPr>
+            <a:r>
+              <a:rPr lang="en-GB" sz="2000" b="1" dirty="0">
+                <a:latin typeface="Ariel"/>
+              </a:rPr>
+              <a:t>Construction Site Manager @ Frisby Homes</a:t>
+            </a:r>
+          </a:p>
+          <a:p>
+            <a:pPr marL="0" indent="0">
+              <a:buNone/>
+            </a:pPr>
+            <a:endParaRPr lang="en-GB" sz="2000" b="0" i="0" dirty="0">
+              <a:effectLst/>
+              <a:latin typeface="Ariel"/>
+            </a:endParaRPr>
+          </a:p>
+          <a:p>
+            <a:pPr marL="0" indent="0">
+              <a:buNone/>
+            </a:pPr>
+            <a:r>
+              <a:rPr lang="en-GB" sz="2000" b="0" i="0" dirty="0">
+                <a:effectLst/>
+                <a:latin typeface="Ariel"/>
+              </a:rPr>
+              <a:t>“</a:t>
+            </a:r>
+            <a:r>
+              <a:rPr lang="en-GB" sz="2000" dirty="0"/>
+              <a:t>This project has real potential to make a difference in construction safety. By detecting safety issues in real-time, it could actively support compliance and help prevent accidents before they happen.”</a:t>
+            </a:r>
+            <a:endParaRPr lang="en-GB" sz="2000" dirty="0">
+              <a:latin typeface="Ariel"/>
+            </a:endParaRPr>
+          </a:p>
+          <a:p>
+            <a:endParaRPr lang="en-GB" sz="2000" dirty="0"/>
+          </a:p>
+        </p:txBody>
+      </p:sp>
+      <p:cxnSp>
+        <p:nvCxnSpPr>
+          <p:cNvPr id="11" name="Straight Connector 10">
+            <a:extLst>
+              <a:ext uri="{FF2B5EF4-FFF2-40B4-BE49-F238E27FC236}">
+                <a16:creationId xmlns:a16="http://schemas.microsoft.com/office/drawing/2014/main" id="{1F16A8D4-FE87-4604-88B2-394B5D1EB437}"/>
+              </a:ext>
+              <a:ext uri="{C183D7F6-B498-43B3-948B-1728B52AA6E4}">
+                <adec:decorative xmlns:adec="http://schemas.microsoft.com/office/drawing/2017/decorative" val="1"/>
+              </a:ext>
+            </a:extLst>
+          </p:cNvPr>
+          <p:cNvCxnSpPr>
+            <a:cxnSpLocks noGrp="1" noRot="1" noChangeAspect="1" noMove="1" noResize="1" noEditPoints="1" noAdjustHandles="1" noChangeArrowheads="1" noChangeShapeType="1"/>
+          </p:cNvCxnSpPr>
+          <p:nvPr>
+            <p:extLst>
+              <p:ext uri="{386F3935-93C4-4BCD-93E2-E3B085C9AB24}">
+                <p16:designElem xmlns:p16="http://schemas.microsoft.com/office/powerpoint/2015/main" val="1"/>
+              </p:ext>
+            </p:extLst>
+          </p:nvPr>
+        </p:nvCxnSpPr>
+        <p:spPr>
+          <a:xfrm>
+            <a:off x="8129871" y="1412488"/>
+            <a:ext cx="0" cy="3657600"/>
+          </a:xfrm>
+          <a:prstGeom prst="line">
+            <a:avLst/>
+          </a:prstGeom>
+          <a:ln w="12700">
+            <a:solidFill>
+              <a:schemeClr val="tx1">
+                <a:lumMod val="50000"/>
+                <a:lumOff val="50000"/>
+              </a:schemeClr>
+            </a:solidFill>
+          </a:ln>
+        </p:spPr>
+        <p:style>
+          <a:lnRef idx="1">
+            <a:schemeClr val="accent1"/>
+          </a:lnRef>
+          <a:fillRef idx="0">
+            <a:schemeClr val="accent1"/>
+          </a:fillRef>
+          <a:effectRef idx="0">
+            <a:schemeClr val="accent1"/>
+          </a:effectRef>
+          <a:fontRef idx="minor">
+            <a:schemeClr val="tx1"/>
+          </a:fontRef>
+        </p:style>
+      </p:cxnSp>
+      <p:sp>
+        <p:nvSpPr>
+          <p:cNvPr id="4" name="Content Placeholder 3">
+            <a:extLst>
+              <a:ext uri="{FF2B5EF4-FFF2-40B4-BE49-F238E27FC236}">
+                <a16:creationId xmlns:a16="http://schemas.microsoft.com/office/drawing/2014/main" id="{2AEAEC1E-866A-9CF0-E8F0-96DDB4C95CB9}"/>
+              </a:ext>
+            </a:extLst>
+          </p:cNvPr>
+          <p:cNvSpPr>
+            <a:spLocks noGrp="1"/>
+          </p:cNvSpPr>
+          <p:nvPr>
+            <p:ph sz="half" idx="2"/>
+          </p:nvPr>
+        </p:nvSpPr>
+        <p:spPr>
+          <a:xfrm>
+            <a:off x="8451604" y="1412489"/>
+            <a:ext cx="3197701" cy="4363844"/>
+          </a:xfrm>
+        </p:spPr>
+        <p:txBody>
+          <a:bodyPr>
+            <a:normAutofit/>
+          </a:bodyPr>
+          <a:lstStyle/>
+          <a:p>
+            <a:pPr marL="0" indent="0">
+              <a:buNone/>
+            </a:pPr>
+            <a:r>
+              <a:rPr lang="en-GB" b="1" dirty="0">
+                <a:latin typeface="Ariel"/>
+              </a:rPr>
+              <a:t>Eoin Malone</a:t>
+            </a:r>
+          </a:p>
+          <a:p>
+            <a:pPr marL="0" indent="0">
+              <a:buNone/>
+            </a:pPr>
+            <a:r>
+              <a:rPr lang="en-GB" sz="2000" b="1" dirty="0">
+                <a:latin typeface="Ariel"/>
+              </a:rPr>
+              <a:t>Live Monitoring Specialist</a:t>
+            </a:r>
+          </a:p>
+          <a:p>
+            <a:pPr marL="0" indent="0">
+              <a:buNone/>
+            </a:pPr>
+            <a:endParaRPr lang="en-GB" sz="2000" b="1" dirty="0">
+              <a:latin typeface="Ariel"/>
+            </a:endParaRPr>
+          </a:p>
+          <a:p>
+            <a:pPr marL="0" indent="0">
+              <a:buNone/>
+            </a:pPr>
+            <a:endParaRPr lang="en-GB" sz="2000" b="1" dirty="0">
+              <a:latin typeface="Ariel"/>
+            </a:endParaRPr>
+          </a:p>
+          <a:p>
+            <a:pPr marL="0" indent="0">
+              <a:buNone/>
+            </a:pPr>
+            <a:r>
+              <a:rPr lang="en-GB" sz="2000" b="0" i="0" dirty="0">
+                <a:effectLst/>
+                <a:latin typeface="Ariel"/>
+              </a:rPr>
+              <a:t>“Excellent idea. </a:t>
+            </a:r>
+            <a:r>
+              <a:rPr lang="en-GB" sz="2000" dirty="0">
+                <a:latin typeface="Ariel"/>
+              </a:rPr>
+              <a:t>It would be helpful in identifying helmets and high visibility jackets on construction sites.”</a:t>
+            </a:r>
+          </a:p>
+          <a:p>
+            <a:pPr marL="0" indent="0">
+              <a:buNone/>
+            </a:pPr>
+            <a:endParaRPr lang="en-GB" sz="2000" b="1" dirty="0">
+              <a:latin typeface="Bell MT" panose="02020503060305020303" pitchFamily="18" charset="0"/>
+            </a:endParaRPr>
+          </a:p>
+          <a:p>
+            <a:endParaRPr lang="en-GB" sz="2000" dirty="0"/>
+          </a:p>
+        </p:txBody>
+      </p:sp>
+      <p:pic>
+        <p:nvPicPr>
+          <p:cNvPr id="8" name="Picture 7" descr="A logo on a black background&#10;&#10;Description automatically generated">
+            <a:extLst>
+              <a:ext uri="{FF2B5EF4-FFF2-40B4-BE49-F238E27FC236}">
+                <a16:creationId xmlns:a16="http://schemas.microsoft.com/office/drawing/2014/main" id="{71B0A4A0-8E30-9533-A058-B2E368282E16}"/>
+              </a:ext>
+            </a:extLst>
+          </p:cNvPr>
+          <p:cNvPicPr>
+            <a:picLocks noChangeAspect="1"/>
+          </p:cNvPicPr>
+          <p:nvPr/>
+        </p:nvPicPr>
+        <p:blipFill>
+          <a:blip r:embed="rId2">
+            <a:extLst>
+              <a:ext uri="{28A0092B-C50C-407E-A947-70E740481C1C}">
+                <a14:useLocalDpi xmlns:a14="http://schemas.microsoft.com/office/drawing/2010/main" val="0"/>
+              </a:ext>
+            </a:extLst>
+          </a:blip>
+          <a:stretch>
+            <a:fillRect/>
+          </a:stretch>
+        </p:blipFill>
+        <p:spPr>
+          <a:xfrm>
+            <a:off x="655529" y="4118827"/>
+            <a:ext cx="2483503" cy="1639112"/>
+          </a:xfrm>
+          <a:prstGeom prst="rect">
+            <a:avLst/>
+          </a:prstGeom>
+        </p:spPr>
+      </p:pic>
+      <p:sp>
+        <p:nvSpPr>
+          <p:cNvPr id="10" name="Slide Number Placeholder 9">
+            <a:extLst>
+              <a:ext uri="{FF2B5EF4-FFF2-40B4-BE49-F238E27FC236}">
+                <a16:creationId xmlns:a16="http://schemas.microsoft.com/office/drawing/2014/main" id="{11D60EB2-514E-5F7C-7983-5093E84FDF0D}"/>
+              </a:ext>
+            </a:extLst>
+          </p:cNvPr>
+          <p:cNvSpPr>
+            <a:spLocks noGrp="1"/>
+          </p:cNvSpPr>
+          <p:nvPr>
+            <p:ph type="sldNum" sz="quarter" idx="12"/>
+          </p:nvPr>
+        </p:nvSpPr>
+        <p:spPr/>
+        <p:txBody>
+          <a:bodyPr/>
+          <a:lstStyle/>
+          <a:p>
+            <a:fld id="{39DC44A4-4954-4CC0-AE95-AFC3F00E7214}" type="slidenum">
+              <a:rPr lang="en-GB" smtClean="0"/>
+              <a:t>3</a:t>
+            </a:fld>
+            <a:r>
+              <a:rPr lang="en-GB" dirty="0"/>
+              <a:t>/8</a:t>
+            </a:r>
+          </a:p>
+        </p:txBody>
+      </p:sp>
+    </p:spTree>
+    <p:extLst>
+      <p:ext uri="{BB962C8B-B14F-4D97-AF65-F5344CB8AC3E}">
+        <p14:creationId xmlns:p14="http://schemas.microsoft.com/office/powerpoint/2010/main" val="4105563857"/>
+      </p:ext>
+    </p:extLst>
+  </p:cSld>
+  <p:clrMapOvr>
+    <a:masterClrMapping/>
+  </p:clrMapOvr>
+</p:sld>
+</file>
+
+<file path=ppt/slides/slide4.xml><?xml version="1.0" encoding="utf-8"?>
+<p:sld xmlns:a="http://schemas.openxmlformats.org/drawingml/2006/main" xmlns:r="http://schemas.openxmlformats.org/officeDocument/2006/relationships" xmlns:p="http://schemas.openxmlformats.org/presentationml/2006/main">
+  <p:cSld>
+    <p:bg>
+      <p:bgPr>
+        <a:solidFill>
+          <a:schemeClr val="bg1"/>
+        </a:solidFill>
+        <a:effectLst/>
+      </p:bgPr>
+    </p:bg>
+    <p:spTree>
+      <p:nvGrpSpPr>
+        <p:cNvPr id="1" name=""/>
+        <p:cNvGrpSpPr/>
+        <p:nvPr/>
+      </p:nvGrpSpPr>
+      <p:grpSpPr>
+        <a:xfrm>
+          <a:off x="0" y="0"/>
+          <a:ext cx="0" cy="0"/>
+          <a:chOff x="0" y="0"/>
+          <a:chExt cx="0" cy="0"/>
+        </a:xfrm>
+      </p:grpSpPr>
+      <p:sp useBgFill="1">
+        <p:nvSpPr>
+          <p:cNvPr id="24" name="Rectangle 23">
+            <a:extLst>
+              <a:ext uri="{FF2B5EF4-FFF2-40B4-BE49-F238E27FC236}">
+                <a16:creationId xmlns:a16="http://schemas.microsoft.com/office/drawing/2014/main" id="{18873D23-2DCF-4B31-A009-95721C06E8E1}"/>
+              </a:ext>
+              <a:ext uri="{C183D7F6-B498-43B3-948B-1728B52AA6E4}">
+                <adec:decorative xmlns:adec="http://schemas.microsoft.com/office/drawing/2017/decorative" val="1"/>
+              </a:ext>
+            </a:extLst>
+          </p:cNvPr>
+          <p:cNvSpPr>
+            <a:spLocks noGrp="1" noRot="1" noChangeAspect="1" noMove="1" noResize="1" noEditPoints="1" noAdjustHandles="1" noChangeArrowheads="1" noChangeShapeType="1" noTextEdit="1"/>
+          </p:cNvSpPr>
+          <p:nvPr>
+            <p:extLst>
+              <p:ext uri="{386F3935-93C4-4BCD-93E2-E3B085C9AB24}">
+                <p16:designElem xmlns:p16="http://schemas.microsoft.com/office/powerpoint/2015/main" val="1"/>
+              </p:ext>
+            </p:extLst>
+          </p:nvPr>
+        </p:nvSpPr>
+        <p:spPr>
+          <a:xfrm>
+            <a:off x="0" y="1"/>
+            <a:ext cx="12191695" cy="6858000"/>
+          </a:xfrm>
+          <a:prstGeom prst="rect">
+            <a:avLst/>
+          </a:prstGeom>
+          <a:ln>
+            <a:noFill/>
+          </a:ln>
+        </p:spPr>
+        <p:style>
+          <a:lnRef idx="2">
+            <a:schemeClr val="accent1">
+              <a:shade val="50000"/>
+            </a:schemeClr>
+          </a:lnRef>
+          <a:fillRef idx="1">
+            <a:schemeClr val="accent1"/>
+          </a:fillRef>
+          <a:effectRef idx="0">
+            <a:schemeClr val="accent1"/>
+          </a:effectRef>
+          <a:fontRef idx="minor">
+            <a:schemeClr val="lt1"/>
+          </a:fontRef>
+        </p:style>
+        <p:txBody>
+          <a:bodyPr rtlCol="0" anchor="ctr"/>
+          <a:lstStyle/>
+          <a:p>
+            <a:pPr algn="ctr"/>
+            <a:endParaRPr lang="en-US"/>
+          </a:p>
+        </p:txBody>
+      </p:sp>
+      <p:sp>
+        <p:nvSpPr>
+          <p:cNvPr id="25" name="Rectangle 24">
+            <a:extLst>
+              <a:ext uri="{FF2B5EF4-FFF2-40B4-BE49-F238E27FC236}">
+                <a16:creationId xmlns:a16="http://schemas.microsoft.com/office/drawing/2014/main" id="{C13EF075-D4EF-4929-ADBC-91B27DA19955}"/>
+              </a:ext>
+              <a:ext uri="{C183D7F6-B498-43B3-948B-1728B52AA6E4}">
+                <adec:decorative xmlns:adec="http://schemas.microsoft.com/office/drawing/2017/decorative" val="1"/>
+              </a:ext>
+            </a:extLst>
+          </p:cNvPr>
+          <p:cNvSpPr>
+            <a:spLocks noGrp="1" noRot="1" noChangeAspect="1" noMove="1" noResize="1" noEditPoints="1" noAdjustHandles="1" noChangeArrowheads="1" noChangeShapeType="1" noTextEdit="1"/>
+          </p:cNvSpPr>
+          <p:nvPr>
+            <p:extLst>
+              <p:ext uri="{386F3935-93C4-4BCD-93E2-E3B085C9AB24}">
+                <p16:designElem xmlns:p16="http://schemas.microsoft.com/office/powerpoint/2015/main" val="1"/>
+              </p:ext>
+            </p:extLst>
+          </p:nvPr>
+        </p:nvSpPr>
+        <p:spPr>
+          <a:xfrm>
+            <a:off x="305" y="0"/>
+            <a:ext cx="12191695" cy="6858000"/>
+          </a:xfrm>
+          <a:prstGeom prst="rect">
+            <a:avLst/>
+          </a:prstGeom>
+          <a:solidFill>
+            <a:schemeClr val="bg1"/>
+          </a:solidFill>
+          <a:ln>
+            <a:noFill/>
+          </a:ln>
+        </p:spPr>
+        <p:style>
+          <a:lnRef idx="2">
+            <a:schemeClr val="accent1">
+              <a:shade val="50000"/>
+            </a:schemeClr>
+          </a:lnRef>
+          <a:fillRef idx="1">
+            <a:schemeClr val="accent1"/>
+          </a:fillRef>
+          <a:effectRef idx="0">
+            <a:schemeClr val="accent1"/>
+          </a:effectRef>
+          <a:fontRef idx="minor">
+            <a:schemeClr val="lt1"/>
+          </a:fontRef>
+        </p:style>
+        <p:txBody>
+          <a:bodyPr rtlCol="0" anchor="ctr"/>
+          <a:lstStyle/>
+          <a:p>
+            <a:pPr algn="ctr"/>
+            <a:endParaRPr lang="en-US" sz="800"/>
+          </a:p>
+        </p:txBody>
+      </p:sp>
+      <p:grpSp>
+        <p:nvGrpSpPr>
+          <p:cNvPr id="26" name="Group 25">
+            <a:extLst>
+              <a:ext uri="{FF2B5EF4-FFF2-40B4-BE49-F238E27FC236}">
+                <a16:creationId xmlns:a16="http://schemas.microsoft.com/office/drawing/2014/main" id="{DAA26DFA-AAB2-4973-9C17-16D587C7B198}"/>
+              </a:ext>
+              <a:ext uri="{C183D7F6-B498-43B3-948B-1728B52AA6E4}">
+                <adec:decorative xmlns:adec="http://schemas.microsoft.com/office/drawing/2017/decorative" val="1"/>
+              </a:ext>
+            </a:extLst>
+          </p:cNvPr>
+          <p:cNvGrpSpPr>
+            <a:grpSpLocks noGrp="1" noUngrp="1" noRot="1" noChangeAspect="1" noMove="1" noResize="1"/>
+          </p:cNvGrpSpPr>
+          <p:nvPr>
+            <p:extLst>
+              <p:ext uri="{386F3935-93C4-4BCD-93E2-E3B085C9AB24}">
+                <p16:designElem xmlns:p16="http://schemas.microsoft.com/office/powerpoint/2015/main" val="1"/>
+              </p:ext>
+            </p:extLst>
+          </p:nvPr>
+        </p:nvGrpSpPr>
+        <p:grpSpPr>
+          <a:xfrm>
+            <a:off x="-21863" y="508838"/>
+            <a:ext cx="5217958" cy="6239661"/>
+            <a:chOff x="-19221" y="251144"/>
+            <a:chExt cx="5217958" cy="6239661"/>
+          </a:xfrm>
+        </p:grpSpPr>
+        <p:sp>
+          <p:nvSpPr>
+            <p:cNvPr id="15" name="Freeform: Shape 14">
+              <a:extLst>
+                <a:ext uri="{FF2B5EF4-FFF2-40B4-BE49-F238E27FC236}">
+                  <a16:creationId xmlns:a16="http://schemas.microsoft.com/office/drawing/2014/main" id="{3F407F11-7321-4BF6-8536-CCE8E342454B}"/>
+                </a:ext>
+                <a:ext uri="{C183D7F6-B498-43B3-948B-1728B52AA6E4}">
+                  <adec:decorative xmlns:adec="http://schemas.microsoft.com/office/drawing/2017/decorative" val="1"/>
+                </a:ext>
+              </a:extLst>
+            </p:cNvPr>
+            <p:cNvSpPr/>
+            <p:nvPr>
+              <p:extLst>
+                <p:ext uri="{386F3935-93C4-4BCD-93E2-E3B085C9AB24}">
+                  <p16:designElem xmlns:p16="http://schemas.microsoft.com/office/powerpoint/2015/main" val="1"/>
+                </p:ext>
+              </p:extLst>
+            </p:nvPr>
+          </p:nvSpPr>
+          <p:spPr>
+            <a:xfrm>
+              <a:off x="-19221" y="251144"/>
+              <a:ext cx="5187198" cy="6239661"/>
+            </a:xfrm>
+            <a:custGeom>
+              <a:avLst/>
+              <a:gdLst>
+                <a:gd name="connsiteX0" fmla="*/ 2011811 w 5187198"/>
+                <a:gd name="connsiteY0" fmla="*/ 4 h 6239661"/>
+                <a:gd name="connsiteX1" fmla="*/ 2617011 w 5187198"/>
+                <a:gd name="connsiteY1" fmla="*/ 70590 h 6239661"/>
+                <a:gd name="connsiteX2" fmla="*/ 2690321 w 5187198"/>
+                <a:gd name="connsiteY2" fmla="*/ 88146 h 6239661"/>
+                <a:gd name="connsiteX3" fmla="*/ 2726863 w 5187198"/>
+                <a:gd name="connsiteY3" fmla="*/ 97127 h 6239661"/>
+                <a:gd name="connsiteX4" fmla="*/ 2762951 w 5187198"/>
+                <a:gd name="connsiteY4" fmla="*/ 107375 h 6239661"/>
+                <a:gd name="connsiteX5" fmla="*/ 2834843 w 5187198"/>
+                <a:gd name="connsiteY5" fmla="*/ 128493 h 6239661"/>
+                <a:gd name="connsiteX6" fmla="*/ 2906574 w 5187198"/>
+                <a:gd name="connsiteY6" fmla="*/ 151076 h 6239661"/>
+                <a:gd name="connsiteX7" fmla="*/ 3049504 w 5187198"/>
+                <a:gd name="connsiteY7" fmla="*/ 202124 h 6239661"/>
+                <a:gd name="connsiteX8" fmla="*/ 3189518 w 5187198"/>
+                <a:gd name="connsiteY8" fmla="*/ 260159 h 6239661"/>
+                <a:gd name="connsiteX9" fmla="*/ 3326048 w 5187198"/>
+                <a:gd name="connsiteY9" fmla="*/ 325143 h 6239661"/>
+                <a:gd name="connsiteX10" fmla="*/ 3459166 w 5187198"/>
+                <a:gd name="connsiteY10" fmla="*/ 395936 h 6239661"/>
+                <a:gd name="connsiteX11" fmla="*/ 3588578 w 5187198"/>
+                <a:gd name="connsiteY11" fmla="*/ 472343 h 6239661"/>
+                <a:gd name="connsiteX12" fmla="*/ 3651864 w 5187198"/>
+                <a:gd name="connsiteY12" fmla="*/ 512600 h 6239661"/>
+                <a:gd name="connsiteX13" fmla="*/ 3714514 w 5187198"/>
+                <a:gd name="connsiteY13" fmla="*/ 553499 h 6239661"/>
+                <a:gd name="connsiteX14" fmla="*/ 4181221 w 5187198"/>
+                <a:gd name="connsiteY14" fmla="*/ 922912 h 6239661"/>
+                <a:gd name="connsiteX15" fmla="*/ 4582963 w 5187198"/>
+                <a:gd name="connsiteY15" fmla="*/ 1358264 h 6239661"/>
+                <a:gd name="connsiteX16" fmla="*/ 4670721 w 5187198"/>
+                <a:gd name="connsiteY16" fmla="*/ 1477644 h 6239661"/>
+                <a:gd name="connsiteX17" fmla="*/ 4752378 w 5187198"/>
+                <a:gd name="connsiteY17" fmla="*/ 1601187 h 6239661"/>
+                <a:gd name="connsiteX18" fmla="*/ 4772168 w 5187198"/>
+                <a:gd name="connsiteY18" fmla="*/ 1632456 h 6239661"/>
+                <a:gd name="connsiteX19" fmla="*/ 4782117 w 5187198"/>
+                <a:gd name="connsiteY19" fmla="*/ 1648104 h 6239661"/>
+                <a:gd name="connsiteX20" fmla="*/ 4791381 w 5187198"/>
+                <a:gd name="connsiteY20" fmla="*/ 1664150 h 6239661"/>
+                <a:gd name="connsiteX21" fmla="*/ 4828190 w 5187198"/>
+                <a:gd name="connsiteY21" fmla="*/ 1728379 h 6239661"/>
+                <a:gd name="connsiteX22" fmla="*/ 4864832 w 5187198"/>
+                <a:gd name="connsiteY22" fmla="*/ 1792796 h 6239661"/>
+                <a:gd name="connsiteX23" fmla="*/ 4899201 w 5187198"/>
+                <a:gd name="connsiteY23" fmla="*/ 1858342 h 6239661"/>
+                <a:gd name="connsiteX24" fmla="*/ 4933266 w 5187198"/>
+                <a:gd name="connsiteY24" fmla="*/ 1924155 h 6239661"/>
+                <a:gd name="connsiteX25" fmla="*/ 4964403 w 5187198"/>
+                <a:gd name="connsiteY25" fmla="*/ 1991384 h 6239661"/>
+                <a:gd name="connsiteX26" fmla="*/ 4995019 w 5187198"/>
+                <a:gd name="connsiteY26" fmla="*/ 2058823 h 6239661"/>
+                <a:gd name="connsiteX27" fmla="*/ 5021999 w 5187198"/>
+                <a:gd name="connsiteY27" fmla="*/ 2127723 h 6239661"/>
+                <a:gd name="connsiteX28" fmla="*/ 5048321 w 5187198"/>
+                <a:gd name="connsiteY28" fmla="*/ 2196908 h 6239661"/>
+                <a:gd name="connsiteX29" fmla="*/ 5070546 w 5187198"/>
+                <a:gd name="connsiteY29" fmla="*/ 2267547 h 6239661"/>
+                <a:gd name="connsiteX30" fmla="*/ 5092171 w 5187198"/>
+                <a:gd name="connsiteY30" fmla="*/ 2338256 h 6239661"/>
+                <a:gd name="connsiteX31" fmla="*/ 5110305 w 5187198"/>
+                <a:gd name="connsiteY31" fmla="*/ 2409886 h 6239661"/>
+                <a:gd name="connsiteX32" fmla="*/ 5186393 w 5187198"/>
+                <a:gd name="connsiteY32" fmla="*/ 2992022 h 6239661"/>
+                <a:gd name="connsiteX33" fmla="*/ 5149045 w 5187198"/>
+                <a:gd name="connsiteY33" fmla="*/ 3571816 h 6239661"/>
+                <a:gd name="connsiteX34" fmla="*/ 5126572 w 5187198"/>
+                <a:gd name="connsiteY34" fmla="*/ 3714520 h 6239661"/>
+                <a:gd name="connsiteX35" fmla="*/ 5099067 w 5187198"/>
+                <a:gd name="connsiteY35" fmla="*/ 3856108 h 6239661"/>
+                <a:gd name="connsiteX36" fmla="*/ 5095699 w 5187198"/>
+                <a:gd name="connsiteY36" fmla="*/ 3873868 h 6239661"/>
+                <a:gd name="connsiteX37" fmla="*/ 5091573 w 5187198"/>
+                <a:gd name="connsiteY37" fmla="*/ 3891426 h 6239661"/>
+                <a:gd name="connsiteX38" fmla="*/ 5083324 w 5187198"/>
+                <a:gd name="connsiteY38" fmla="*/ 3926541 h 6239661"/>
+                <a:gd name="connsiteX39" fmla="*/ 5067256 w 5187198"/>
+                <a:gd name="connsiteY39" fmla="*/ 3996889 h 6239661"/>
+                <a:gd name="connsiteX40" fmla="*/ 5059194 w 5187198"/>
+                <a:gd name="connsiteY40" fmla="*/ 4032171 h 6239661"/>
+                <a:gd name="connsiteX41" fmla="*/ 5049522 w 5187198"/>
+                <a:gd name="connsiteY41" fmla="*/ 4067833 h 6239661"/>
+                <a:gd name="connsiteX42" fmla="*/ 5040067 w 5187198"/>
+                <a:gd name="connsiteY42" fmla="*/ 4103553 h 6239661"/>
+                <a:gd name="connsiteX43" fmla="*/ 5028960 w 5187198"/>
+                <a:gd name="connsiteY43" fmla="*/ 4138946 h 6239661"/>
+                <a:gd name="connsiteX44" fmla="*/ 4917351 w 5187198"/>
+                <a:gd name="connsiteY44" fmla="*/ 4417041 h 6239661"/>
+                <a:gd name="connsiteX45" fmla="*/ 4756163 w 5187198"/>
+                <a:gd name="connsiteY45" fmla="*/ 4676402 h 6239661"/>
+                <a:gd name="connsiteX46" fmla="*/ 4322493 w 5187198"/>
+                <a:gd name="connsiteY46" fmla="*/ 5105604 h 6239661"/>
+                <a:gd name="connsiteX47" fmla="*/ 3840510 w 5187198"/>
+                <a:gd name="connsiteY47" fmla="*/ 5429590 h 6239661"/>
+                <a:gd name="connsiteX48" fmla="*/ 3606447 w 5187198"/>
+                <a:gd name="connsiteY48" fmla="*/ 5572862 h 6239661"/>
+                <a:gd name="connsiteX49" fmla="*/ 3488814 w 5187198"/>
+                <a:gd name="connsiteY49" fmla="*/ 5647178 h 6239661"/>
+                <a:gd name="connsiteX50" fmla="*/ 3365864 w 5187198"/>
+                <a:gd name="connsiteY50" fmla="*/ 5722735 h 6239661"/>
+                <a:gd name="connsiteX51" fmla="*/ 2839486 w 5187198"/>
+                <a:gd name="connsiteY51" fmla="*/ 5999120 h 6239661"/>
+                <a:gd name="connsiteX52" fmla="*/ 2242423 w 5187198"/>
+                <a:gd name="connsiteY52" fmla="*/ 6192346 h 6239661"/>
+                <a:gd name="connsiteX53" fmla="*/ 1589380 w 5187198"/>
+                <a:gd name="connsiteY53" fmla="*/ 6230657 h 6239661"/>
+                <a:gd name="connsiteX54" fmla="*/ 1548244 w 5187198"/>
+                <a:gd name="connsiteY54" fmla="*/ 6226706 h 6239661"/>
+                <a:gd name="connsiteX55" fmla="*/ 1507348 w 5187198"/>
+                <a:gd name="connsiteY55" fmla="*/ 6221428 h 6239661"/>
+                <a:gd name="connsiteX56" fmla="*/ 1466401 w 5187198"/>
+                <a:gd name="connsiteY56" fmla="*/ 6215904 h 6239661"/>
+                <a:gd name="connsiteX57" fmla="*/ 1425773 w 5187198"/>
+                <a:gd name="connsiteY57" fmla="*/ 6209191 h 6239661"/>
+                <a:gd name="connsiteX58" fmla="*/ 1344960 w 5187198"/>
+                <a:gd name="connsiteY58" fmla="*/ 6193681 h 6239661"/>
+                <a:gd name="connsiteX59" fmla="*/ 1265007 w 5187198"/>
+                <a:gd name="connsiteY59" fmla="*/ 6175388 h 6239661"/>
+                <a:gd name="connsiteX60" fmla="*/ 1225415 w 5187198"/>
+                <a:gd name="connsiteY60" fmla="*/ 6165243 h 6239661"/>
+                <a:gd name="connsiteX61" fmla="*/ 1186567 w 5187198"/>
+                <a:gd name="connsiteY61" fmla="*/ 6154486 h 6239661"/>
+                <a:gd name="connsiteX62" fmla="*/ 1111158 w 5187198"/>
+                <a:gd name="connsiteY62" fmla="*/ 6130918 h 6239661"/>
+                <a:gd name="connsiteX63" fmla="*/ 1035915 w 5187198"/>
+                <a:gd name="connsiteY63" fmla="*/ 6107163 h 6239661"/>
+                <a:gd name="connsiteX64" fmla="*/ 961579 w 5187198"/>
+                <a:gd name="connsiteY64" fmla="*/ 6079594 h 6239661"/>
+                <a:gd name="connsiteX65" fmla="*/ 395297 w 5187198"/>
+                <a:gd name="connsiteY65" fmla="*/ 5792812 h 6239661"/>
+                <a:gd name="connsiteX66" fmla="*/ 265239 w 5187198"/>
+                <a:gd name="connsiteY66" fmla="*/ 5701511 h 6239661"/>
+                <a:gd name="connsiteX67" fmla="*/ 233756 w 5187198"/>
+                <a:gd name="connsiteY67" fmla="*/ 5677542 h 6239661"/>
+                <a:gd name="connsiteX68" fmla="*/ 202800 w 5187198"/>
+                <a:gd name="connsiteY68" fmla="*/ 5652902 h 6239661"/>
+                <a:gd name="connsiteX69" fmla="*/ 140918 w 5187198"/>
+                <a:gd name="connsiteY69" fmla="*/ 5603515 h 6239661"/>
+                <a:gd name="connsiteX70" fmla="*/ 110625 w 5187198"/>
+                <a:gd name="connsiteY70" fmla="*/ 5578127 h 6239661"/>
+                <a:gd name="connsiteX71" fmla="*/ 95631 w 5187198"/>
+                <a:gd name="connsiteY71" fmla="*/ 5565299 h 6239661"/>
+                <a:gd name="connsiteX72" fmla="*/ 81966 w 5187198"/>
+                <a:gd name="connsiteY72" fmla="*/ 5550973 h 6239661"/>
+                <a:gd name="connsiteX73" fmla="*/ 27991 w 5187198"/>
+                <a:gd name="connsiteY73" fmla="*/ 5493272 h 6239661"/>
+                <a:gd name="connsiteX74" fmla="*/ 1454 w 5187198"/>
+                <a:gd name="connsiteY74" fmla="*/ 5464252 h 6239661"/>
+                <a:gd name="connsiteX75" fmla="*/ 0 w 5187198"/>
+                <a:gd name="connsiteY75" fmla="*/ 5462518 h 6239661"/>
+                <a:gd name="connsiteX76" fmla="*/ 0 w 5187198"/>
+                <a:gd name="connsiteY76" fmla="*/ 4720187 h 6239661"/>
+                <a:gd name="connsiteX77" fmla="*/ 109684 w 5187198"/>
+                <a:gd name="connsiteY77" fmla="*/ 4836724 h 6239661"/>
+                <a:gd name="connsiteX78" fmla="*/ 306959 w 5187198"/>
+                <a:gd name="connsiteY78" fmla="*/ 5007200 h 6239661"/>
+                <a:gd name="connsiteX79" fmla="*/ 358101 w 5187198"/>
+                <a:gd name="connsiteY79" fmla="*/ 5046057 h 6239661"/>
+                <a:gd name="connsiteX80" fmla="*/ 383328 w 5187198"/>
+                <a:gd name="connsiteY80" fmla="*/ 5065684 h 6239661"/>
+                <a:gd name="connsiteX81" fmla="*/ 409503 w 5187198"/>
+                <a:gd name="connsiteY81" fmla="*/ 5083942 h 6239661"/>
+                <a:gd name="connsiteX82" fmla="*/ 461889 w 5187198"/>
+                <a:gd name="connsiteY82" fmla="*/ 5119888 h 6239661"/>
+                <a:gd name="connsiteX83" fmla="*/ 474883 w 5187198"/>
+                <a:gd name="connsiteY83" fmla="*/ 5128933 h 6239661"/>
+                <a:gd name="connsiteX84" fmla="*/ 486410 w 5187198"/>
+                <a:gd name="connsiteY84" fmla="*/ 5139557 h 6239661"/>
+                <a:gd name="connsiteX85" fmla="*/ 510852 w 5187198"/>
+                <a:gd name="connsiteY85" fmla="*/ 5159089 h 6239661"/>
+                <a:gd name="connsiteX86" fmla="*/ 560653 w 5187198"/>
+                <a:gd name="connsiteY86" fmla="*/ 5196893 h 6239661"/>
+                <a:gd name="connsiteX87" fmla="*/ 585485 w 5187198"/>
+                <a:gd name="connsiteY87" fmla="*/ 5215834 h 6239661"/>
+                <a:gd name="connsiteX88" fmla="*/ 610707 w 5187198"/>
+                <a:gd name="connsiteY88" fmla="*/ 5234185 h 6239661"/>
+                <a:gd name="connsiteX89" fmla="*/ 714768 w 5187198"/>
+                <a:gd name="connsiteY89" fmla="*/ 5303103 h 6239661"/>
+                <a:gd name="connsiteX90" fmla="*/ 1166634 w 5187198"/>
+                <a:gd name="connsiteY90" fmla="*/ 5513322 h 6239661"/>
+                <a:gd name="connsiteX91" fmla="*/ 1225991 w 5187198"/>
+                <a:gd name="connsiteY91" fmla="*/ 5533632 h 6239661"/>
+                <a:gd name="connsiteX92" fmla="*/ 1286680 w 5187198"/>
+                <a:gd name="connsiteY92" fmla="*/ 5550705 h 6239661"/>
+                <a:gd name="connsiteX93" fmla="*/ 1347310 w 5187198"/>
+                <a:gd name="connsiteY93" fmla="*/ 5567995 h 6239661"/>
+                <a:gd name="connsiteX94" fmla="*/ 1377002 w 5187198"/>
+                <a:gd name="connsiteY94" fmla="*/ 5575719 h 6239661"/>
+                <a:gd name="connsiteX95" fmla="*/ 1406328 w 5187198"/>
+                <a:gd name="connsiteY95" fmla="*/ 5582649 h 6239661"/>
+                <a:gd name="connsiteX96" fmla="*/ 1465060 w 5187198"/>
+                <a:gd name="connsiteY96" fmla="*/ 5594909 h 6239661"/>
+                <a:gd name="connsiteX97" fmla="*/ 1523881 w 5187198"/>
+                <a:gd name="connsiteY97" fmla="*/ 5605105 h 6239661"/>
+                <a:gd name="connsiteX98" fmla="*/ 1553325 w 5187198"/>
+                <a:gd name="connsiteY98" fmla="*/ 5609865 h 6239661"/>
+                <a:gd name="connsiteX99" fmla="*/ 1582813 w 5187198"/>
+                <a:gd name="connsiteY99" fmla="*/ 5613593 h 6239661"/>
+                <a:gd name="connsiteX100" fmla="*/ 1612301 w 5187198"/>
+                <a:gd name="connsiteY100" fmla="*/ 5617321 h 6239661"/>
+                <a:gd name="connsiteX101" fmla="*/ 1641863 w 5187198"/>
+                <a:gd name="connsiteY101" fmla="*/ 5619910 h 6239661"/>
+                <a:gd name="connsiteX102" fmla="*/ 2117508 w 5187198"/>
+                <a:gd name="connsiteY102" fmla="*/ 5595156 h 6239661"/>
+                <a:gd name="connsiteX103" fmla="*/ 2597368 w 5187198"/>
+                <a:gd name="connsiteY103" fmla="*/ 5447381 h 6239661"/>
+                <a:gd name="connsiteX104" fmla="*/ 3082968 w 5187198"/>
+                <a:gd name="connsiteY104" fmla="*/ 5223245 h 6239661"/>
+                <a:gd name="connsiteX105" fmla="*/ 3334855 w 5187198"/>
+                <a:gd name="connsiteY105" fmla="*/ 5097383 h 6239661"/>
+                <a:gd name="connsiteX106" fmla="*/ 3599509 w 5187198"/>
+                <a:gd name="connsiteY106" fmla="*/ 4976217 h 6239661"/>
+                <a:gd name="connsiteX107" fmla="*/ 4112002 w 5187198"/>
+                <a:gd name="connsiteY107" fmla="*/ 4766359 h 6239661"/>
+                <a:gd name="connsiteX108" fmla="*/ 4348983 w 5187198"/>
+                <a:gd name="connsiteY108" fmla="*/ 4649833 h 6239661"/>
+                <a:gd name="connsiteX109" fmla="*/ 4560505 w 5187198"/>
+                <a:gd name="connsiteY109" fmla="*/ 4501564 h 6239661"/>
+                <a:gd name="connsiteX110" fmla="*/ 4731963 w 5187198"/>
+                <a:gd name="connsiteY110" fmla="*/ 4309870 h 6239661"/>
+                <a:gd name="connsiteX111" fmla="*/ 4852344 w 5187198"/>
+                <a:gd name="connsiteY111" fmla="*/ 4078640 h 6239661"/>
+                <a:gd name="connsiteX112" fmla="*/ 4863972 w 5187198"/>
+                <a:gd name="connsiteY112" fmla="*/ 4047790 h 6239661"/>
+                <a:gd name="connsiteX113" fmla="*/ 4874144 w 5187198"/>
+                <a:gd name="connsiteY113" fmla="*/ 4016320 h 6239661"/>
+                <a:gd name="connsiteX114" fmla="*/ 4884127 w 5187198"/>
+                <a:gd name="connsiteY114" fmla="*/ 3984682 h 6239661"/>
+                <a:gd name="connsiteX115" fmla="*/ 4892800 w 5187198"/>
+                <a:gd name="connsiteY115" fmla="*/ 3951883 h 6239661"/>
+                <a:gd name="connsiteX116" fmla="*/ 4909526 w 5187198"/>
+                <a:gd name="connsiteY116" fmla="*/ 3886001 h 6239661"/>
+                <a:gd name="connsiteX117" fmla="*/ 4917687 w 5187198"/>
+                <a:gd name="connsiteY117" fmla="*/ 3852948 h 6239661"/>
+                <a:gd name="connsiteX118" fmla="*/ 4921768 w 5187198"/>
+                <a:gd name="connsiteY118" fmla="*/ 3836422 h 6239661"/>
+                <a:gd name="connsiteX119" fmla="*/ 4924845 w 5187198"/>
+                <a:gd name="connsiteY119" fmla="*/ 3819742 h 6239661"/>
+                <a:gd name="connsiteX120" fmla="*/ 4948230 w 5187198"/>
+                <a:gd name="connsiteY120" fmla="*/ 3685744 h 6239661"/>
+                <a:gd name="connsiteX121" fmla="*/ 4962782 w 5187198"/>
+                <a:gd name="connsiteY121" fmla="*/ 3550540 h 6239661"/>
+                <a:gd name="connsiteX122" fmla="*/ 4939468 w 5187198"/>
+                <a:gd name="connsiteY122" fmla="*/ 3010249 h 6239661"/>
+                <a:gd name="connsiteX123" fmla="*/ 4816901 w 5187198"/>
+                <a:gd name="connsiteY123" fmla="*/ 2488224 h 6239661"/>
+                <a:gd name="connsiteX124" fmla="*/ 4797005 w 5187198"/>
+                <a:gd name="connsiteY124" fmla="*/ 2424470 h 6239661"/>
+                <a:gd name="connsiteX125" fmla="*/ 4774433 w 5187198"/>
+                <a:gd name="connsiteY125" fmla="*/ 2361620 h 6239661"/>
+                <a:gd name="connsiteX126" fmla="*/ 4752459 w 5187198"/>
+                <a:gd name="connsiteY126" fmla="*/ 2298700 h 6239661"/>
+                <a:gd name="connsiteX127" fmla="*/ 4728083 w 5187198"/>
+                <a:gd name="connsiteY127" fmla="*/ 2236526 h 6239661"/>
+                <a:gd name="connsiteX128" fmla="*/ 4704471 w 5187198"/>
+                <a:gd name="connsiteY128" fmla="*/ 2174095 h 6239661"/>
+                <a:gd name="connsiteX129" fmla="*/ 4678399 w 5187198"/>
+                <a:gd name="connsiteY129" fmla="*/ 2112626 h 6239661"/>
+                <a:gd name="connsiteX130" fmla="*/ 4652601 w 5187198"/>
+                <a:gd name="connsiteY130" fmla="*/ 2050999 h 6239661"/>
+                <a:gd name="connsiteX131" fmla="*/ 4624205 w 5187198"/>
+                <a:gd name="connsiteY131" fmla="*/ 1990415 h 6239661"/>
+                <a:gd name="connsiteX132" fmla="*/ 4595398 w 5187198"/>
+                <a:gd name="connsiteY132" fmla="*/ 1930069 h 6239661"/>
+                <a:gd name="connsiteX133" fmla="*/ 4563827 w 5187198"/>
+                <a:gd name="connsiteY133" fmla="*/ 1870952 h 6239661"/>
+                <a:gd name="connsiteX134" fmla="*/ 4531433 w 5187198"/>
+                <a:gd name="connsiteY134" fmla="*/ 1812311 h 6239661"/>
+                <a:gd name="connsiteX135" fmla="*/ 4523315 w 5187198"/>
+                <a:gd name="connsiteY135" fmla="*/ 1797616 h 6239661"/>
+                <a:gd name="connsiteX136" fmla="*/ 4514482 w 5187198"/>
+                <a:gd name="connsiteY136" fmla="*/ 1783425 h 6239661"/>
+                <a:gd name="connsiteX137" fmla="*/ 4496845 w 5187198"/>
+                <a:gd name="connsiteY137" fmla="*/ 1754936 h 6239661"/>
+                <a:gd name="connsiteX138" fmla="*/ 4461463 w 5187198"/>
+                <a:gd name="connsiteY138" fmla="*/ 1697929 h 6239661"/>
+                <a:gd name="connsiteX139" fmla="*/ 4452660 w 5187198"/>
+                <a:gd name="connsiteY139" fmla="*/ 1683629 h 6239661"/>
+                <a:gd name="connsiteX140" fmla="*/ 4443141 w 5187198"/>
+                <a:gd name="connsiteY140" fmla="*/ 1669834 h 6239661"/>
+                <a:gd name="connsiteX141" fmla="*/ 4424241 w 5187198"/>
+                <a:gd name="connsiteY141" fmla="*/ 1642166 h 6239661"/>
+                <a:gd name="connsiteX142" fmla="*/ 4346886 w 5187198"/>
+                <a:gd name="connsiteY142" fmla="*/ 1532412 h 6239661"/>
+                <a:gd name="connsiteX143" fmla="*/ 3985497 w 5187198"/>
+                <a:gd name="connsiteY143" fmla="*/ 1134649 h 6239661"/>
+                <a:gd name="connsiteX144" fmla="*/ 3545665 w 5187198"/>
+                <a:gd name="connsiteY144" fmla="*/ 825877 h 6239661"/>
+                <a:gd name="connsiteX145" fmla="*/ 3486190 w 5187198"/>
+                <a:gd name="connsiteY145" fmla="*/ 794756 h 6239661"/>
+                <a:gd name="connsiteX146" fmla="*/ 3426182 w 5187198"/>
+                <a:gd name="connsiteY146" fmla="*/ 764765 h 6239661"/>
+                <a:gd name="connsiteX147" fmla="*/ 3365044 w 5187198"/>
+                <a:gd name="connsiteY147" fmla="*/ 737255 h 6239661"/>
+                <a:gd name="connsiteX148" fmla="*/ 3334529 w 5187198"/>
+                <a:gd name="connsiteY148" fmla="*/ 723514 h 6239661"/>
+                <a:gd name="connsiteX149" fmla="*/ 3303733 w 5187198"/>
+                <a:gd name="connsiteY149" fmla="*/ 710395 h 6239661"/>
+                <a:gd name="connsiteX150" fmla="*/ 3179033 w 5187198"/>
+                <a:gd name="connsiteY150" fmla="*/ 662259 h 6239661"/>
+                <a:gd name="connsiteX151" fmla="*/ 3052408 w 5187198"/>
+                <a:gd name="connsiteY151" fmla="*/ 620447 h 6239661"/>
+                <a:gd name="connsiteX152" fmla="*/ 2924325 w 5187198"/>
+                <a:gd name="connsiteY152" fmla="*/ 584505 h 6239661"/>
+                <a:gd name="connsiteX153" fmla="*/ 2859667 w 5187198"/>
+                <a:gd name="connsiteY153" fmla="*/ 569266 h 6239661"/>
+                <a:gd name="connsiteX154" fmla="*/ 2795226 w 5187198"/>
+                <a:gd name="connsiteY154" fmla="*/ 554085 h 6239661"/>
+                <a:gd name="connsiteX155" fmla="*/ 2729702 w 5187198"/>
+                <a:gd name="connsiteY155" fmla="*/ 540354 h 6239661"/>
+                <a:gd name="connsiteX156" fmla="*/ 2663758 w 5187198"/>
+                <a:gd name="connsiteY156" fmla="*/ 527322 h 6239661"/>
+                <a:gd name="connsiteX157" fmla="*/ 2630927 w 5187198"/>
+                <a:gd name="connsiteY157" fmla="*/ 520495 h 6239661"/>
+                <a:gd name="connsiteX158" fmla="*/ 2597965 w 5187198"/>
+                <a:gd name="connsiteY158" fmla="*/ 515024 h 6239661"/>
+                <a:gd name="connsiteX159" fmla="*/ 2532205 w 5187198"/>
+                <a:gd name="connsiteY159" fmla="*/ 503895 h 6239661"/>
+                <a:gd name="connsiteX160" fmla="*/ 2010064 w 5187198"/>
+                <a:gd name="connsiteY160" fmla="*/ 452552 h 6239661"/>
+                <a:gd name="connsiteX161" fmla="*/ 1494552 w 5187198"/>
+                <a:gd name="connsiteY161" fmla="*/ 485055 h 6239661"/>
+                <a:gd name="connsiteX162" fmla="*/ 1366896 w 5187198"/>
+                <a:gd name="connsiteY162" fmla="*/ 509389 h 6239661"/>
+                <a:gd name="connsiteX163" fmla="*/ 1240175 w 5187198"/>
+                <a:gd name="connsiteY163" fmla="*/ 541045 h 6239661"/>
+                <a:gd name="connsiteX164" fmla="*/ 1177438 w 5187198"/>
+                <a:gd name="connsiteY164" fmla="*/ 560170 h 6239661"/>
+                <a:gd name="connsiteX165" fmla="*/ 1145987 w 5187198"/>
+                <a:gd name="connsiteY165" fmla="*/ 569826 h 6239661"/>
+                <a:gd name="connsiteX166" fmla="*/ 1130315 w 5187198"/>
+                <a:gd name="connsiteY166" fmla="*/ 574669 h 6239661"/>
+                <a:gd name="connsiteX167" fmla="*/ 1114873 w 5187198"/>
+                <a:gd name="connsiteY167" fmla="*/ 580384 h 6239661"/>
+                <a:gd name="connsiteX168" fmla="*/ 1052839 w 5187198"/>
+                <a:gd name="connsiteY168" fmla="*/ 602943 h 6239661"/>
+                <a:gd name="connsiteX169" fmla="*/ 991135 w 5187198"/>
+                <a:gd name="connsiteY169" fmla="*/ 626866 h 6239661"/>
+                <a:gd name="connsiteX170" fmla="*/ 930179 w 5187198"/>
+                <a:gd name="connsiteY170" fmla="*/ 653191 h 6239661"/>
+                <a:gd name="connsiteX171" fmla="*/ 869768 w 5187198"/>
+                <a:gd name="connsiteY171" fmla="*/ 680937 h 6239661"/>
+                <a:gd name="connsiteX172" fmla="*/ 810085 w 5187198"/>
+                <a:gd name="connsiteY172" fmla="*/ 710734 h 6239661"/>
+                <a:gd name="connsiteX173" fmla="*/ 751220 w 5187198"/>
+                <a:gd name="connsiteY173" fmla="*/ 741794 h 6239661"/>
+                <a:gd name="connsiteX174" fmla="*/ 532669 w 5187198"/>
+                <a:gd name="connsiteY174" fmla="*/ 881688 h 6239661"/>
+                <a:gd name="connsiteX175" fmla="*/ 354185 w 5187198"/>
+                <a:gd name="connsiteY175" fmla="*/ 1050286 h 6239661"/>
+                <a:gd name="connsiteX176" fmla="*/ 315980 w 5187198"/>
+                <a:gd name="connsiteY176" fmla="*/ 1098125 h 6239661"/>
+                <a:gd name="connsiteX177" fmla="*/ 280345 w 5187198"/>
+                <a:gd name="connsiteY177" fmla="*/ 1149782 h 6239661"/>
+                <a:gd name="connsiteX178" fmla="*/ 245890 w 5187198"/>
+                <a:gd name="connsiteY178" fmla="*/ 1203959 h 6239661"/>
+                <a:gd name="connsiteX179" fmla="*/ 212162 w 5187198"/>
+                <a:gd name="connsiteY179" fmla="*/ 1260184 h 6239661"/>
+                <a:gd name="connsiteX180" fmla="*/ 80716 w 5187198"/>
+                <a:gd name="connsiteY180" fmla="*/ 1502476 h 6239661"/>
+                <a:gd name="connsiteX181" fmla="*/ 0 w 5187198"/>
+                <a:gd name="connsiteY181" fmla="*/ 1648841 h 6239661"/>
+                <a:gd name="connsiteX182" fmla="*/ 0 w 5187198"/>
+                <a:gd name="connsiteY182" fmla="*/ 954863 h 6239661"/>
+                <a:gd name="connsiteX183" fmla="*/ 43491 w 5187198"/>
+                <a:gd name="connsiteY183" fmla="*/ 895513 h 6239661"/>
+                <a:gd name="connsiteX184" fmla="*/ 93923 w 5187198"/>
+                <a:gd name="connsiteY184" fmla="*/ 834489 h 6239661"/>
+                <a:gd name="connsiteX185" fmla="*/ 323465 w 5187198"/>
+                <a:gd name="connsiteY185" fmla="*/ 617671 h 6239661"/>
+                <a:gd name="connsiteX186" fmla="*/ 574777 w 5187198"/>
+                <a:gd name="connsiteY186" fmla="*/ 446794 h 6239661"/>
+                <a:gd name="connsiteX187" fmla="*/ 638943 w 5187198"/>
+                <a:gd name="connsiteY187" fmla="*/ 408925 h 6239661"/>
+                <a:gd name="connsiteX188" fmla="*/ 703505 w 5187198"/>
+                <a:gd name="connsiteY188" fmla="*/ 371742 h 6239661"/>
+                <a:gd name="connsiteX189" fmla="*/ 769262 w 5187198"/>
+                <a:gd name="connsiteY189" fmla="*/ 336154 h 6239661"/>
+                <a:gd name="connsiteX190" fmla="*/ 835552 w 5187198"/>
+                <a:gd name="connsiteY190" fmla="*/ 301173 h 6239661"/>
+                <a:gd name="connsiteX191" fmla="*/ 902979 w 5187198"/>
+                <a:gd name="connsiteY191" fmla="*/ 268004 h 6239661"/>
+                <a:gd name="connsiteX192" fmla="*/ 971127 w 5187198"/>
+                <a:gd name="connsiteY192" fmla="*/ 235607 h 6239661"/>
+                <a:gd name="connsiteX193" fmla="*/ 988238 w 5187198"/>
+                <a:gd name="connsiteY193" fmla="*/ 227556 h 6239661"/>
+                <a:gd name="connsiteX194" fmla="*/ 1005744 w 5187198"/>
+                <a:gd name="connsiteY194" fmla="*/ 220191 h 6239661"/>
+                <a:gd name="connsiteX195" fmla="*/ 1040729 w 5187198"/>
+                <a:gd name="connsiteY195" fmla="*/ 205569 h 6239661"/>
+                <a:gd name="connsiteX196" fmla="*/ 1110835 w 5187198"/>
+                <a:gd name="connsiteY196" fmla="*/ 176248 h 6239661"/>
+                <a:gd name="connsiteX197" fmla="*/ 1254256 w 5187198"/>
+                <a:gd name="connsiteY197" fmla="*/ 123796 h 6239661"/>
+                <a:gd name="connsiteX198" fmla="*/ 1401310 w 5187198"/>
+                <a:gd name="connsiteY198" fmla="*/ 79852 h 6239661"/>
+                <a:gd name="connsiteX199" fmla="*/ 2011811 w 5187198"/>
+                <a:gd name="connsiteY199" fmla="*/ 4 h 6239661"/>
+              </a:gdLst>
+              <a:ahLst/>
+              <a:cxnLst>
+                <a:cxn ang="0">
+                  <a:pos x="connsiteX0" y="connsiteY0"/>
+                </a:cxn>
+                <a:cxn ang="0">
+                  <a:pos x="connsiteX1" y="connsiteY1"/>
+                </a:cxn>
+                <a:cxn ang="0">
+                  <a:pos x="connsiteX2" y="connsiteY2"/>
+                </a:cxn>
+                <a:cxn ang="0">
+                  <a:pos x="connsiteX3" y="connsiteY3"/>
+                </a:cxn>
+                <a:cxn ang="0">
+                  <a:pos x="connsiteX4" y="connsiteY4"/>
+                </a:cxn>
+                <a:cxn ang="0">
+                  <a:pos x="connsiteX5" y="connsiteY5"/>
+                </a:cxn>
+                <a:cxn ang="0">
+                  <a:pos x="connsiteX6" y="connsiteY6"/>
+                </a:cxn>
+                <a:cxn ang="0">
+                  <a:pos x="connsiteX7" y="connsiteY7"/>
+                </a:cxn>
+                <a:cxn ang="0">
+                  <a:pos x="connsiteX8" y="connsiteY8"/>
+                </a:cxn>
+                <a:cxn ang="0">
+                  <a:pos x="connsiteX9" y="connsiteY9"/>
+                </a:cxn>
+                <a:cxn ang="0">
+                  <a:pos x="connsiteX10" y="connsiteY10"/>
+                </a:cxn>
+                <a:cxn ang="0">
+                  <a:pos x="connsiteX11" y="connsiteY11"/>
+                </a:cxn>
+                <a:cxn ang="0">
+                  <a:pos x="connsiteX12" y="connsiteY12"/>
+                </a:cxn>
+                <a:cxn ang="0">
+                  <a:pos x="connsiteX13" y="connsiteY13"/>
+                </a:cxn>
+                <a:cxn ang="0">
+                  <a:pos x="connsiteX14" y="connsiteY14"/>
+                </a:cxn>
+                <a:cxn ang="0">
+                  <a:pos x="connsiteX15" y="connsiteY15"/>
+                </a:cxn>
+                <a:cxn ang="0">
+                  <a:pos x="connsiteX16" y="connsiteY16"/>
+                </a:cxn>
+                <a:cxn ang="0">
+                  <a:pos x="connsiteX17" y="connsiteY17"/>
+                </a:cxn>
+                <a:cxn ang="0">
+                  <a:pos x="connsiteX18" y="connsiteY18"/>
+                </a:cxn>
+                <a:cxn ang="0">
+                  <a:pos x="connsiteX19" y="connsiteY19"/>
+                </a:cxn>
+                <a:cxn ang="0">
+                  <a:pos x="connsiteX20" y="connsiteY20"/>
+                </a:cxn>
+                <a:cxn ang="0">
+                  <a:pos x="connsiteX21" y="connsiteY21"/>
+                </a:cxn>
+                <a:cxn ang="0">
+                  <a:pos x="connsiteX22" y="connsiteY22"/>
+                </a:cxn>
+                <a:cxn ang="0">
+                  <a:pos x="connsiteX23" y="connsiteY23"/>
+                </a:cxn>
+                <a:cxn ang="0">
+                  <a:pos x="connsiteX24" y="connsiteY24"/>
+                </a:cxn>
+                <a:cxn ang="0">
+                  <a:pos x="connsiteX25" y="connsiteY25"/>
+                </a:cxn>
+                <a:cxn ang="0">
+                  <a:pos x="connsiteX26" y="connsiteY26"/>
+                </a:cxn>
+                <a:cxn ang="0">
+                  <a:pos x="connsiteX27" y="connsiteY27"/>
+                </a:cxn>
+                <a:cxn ang="0">
+                  <a:pos x="connsiteX28" y="connsiteY28"/>
+                </a:cxn>
+                <a:cxn ang="0">
+                  <a:pos x="connsiteX29" y="connsiteY29"/>
+                </a:cxn>
+                <a:cxn ang="0">
+                  <a:pos x="connsiteX30" y="connsiteY30"/>
+                </a:cxn>
+                <a:cxn ang="0">
+                  <a:pos x="connsiteX31" y="connsiteY31"/>
+                </a:cxn>
+                <a:cxn ang="0">
+                  <a:pos x="connsiteX32" y="connsiteY32"/>
+                </a:cxn>
+                <a:cxn ang="0">
+                  <a:pos x="connsiteX33" y="connsiteY33"/>
+                </a:cxn>
+                <a:cxn ang="0">
+                  <a:pos x="connsiteX34" y="connsiteY34"/>
+                </a:cxn>
+                <a:cxn ang="0">
+                  <a:pos x="connsiteX35" y="connsiteY35"/>
+                </a:cxn>
+                <a:cxn ang="0">
+                  <a:pos x="connsiteX36" y="connsiteY36"/>
+                </a:cxn>
+                <a:cxn ang="0">
+                  <a:pos x="connsiteX37" y="connsiteY37"/>
+                </a:cxn>
+                <a:cxn ang="0">
+                  <a:pos x="connsiteX38" y="connsiteY38"/>
+                </a:cxn>
+                <a:cxn ang="0">
+                  <a:pos x="connsiteX39" y="connsiteY39"/>
+                </a:cxn>
+                <a:cxn ang="0">
+                  <a:pos x="connsiteX40" y="connsiteY40"/>
+                </a:cxn>
+                <a:cxn ang="0">
+                  <a:pos x="connsiteX41" y="connsiteY41"/>
+                </a:cxn>
+                <a:cxn ang="0">
+                  <a:pos x="connsiteX42" y="connsiteY42"/>
+                </a:cxn>
+                <a:cxn ang="0">
+                  <a:pos x="connsiteX43" y="connsiteY43"/>
+                </a:cxn>
+                <a:cxn ang="0">
+                  <a:pos x="connsiteX44" y="connsiteY44"/>
+                </a:cxn>
+                <a:cxn ang="0">
+                  <a:pos x="connsiteX45" y="connsiteY45"/>
+                </a:cxn>
+                <a:cxn ang="0">
+                  <a:pos x="connsiteX46" y="connsiteY46"/>
+                </a:cxn>
+                <a:cxn ang="0">
+                  <a:pos x="connsiteX47" y="connsiteY47"/>
+                </a:cxn>
+                <a:cxn ang="0">
+                  <a:pos x="connsiteX48" y="connsiteY48"/>
+                </a:cxn>
+                <a:cxn ang="0">
+                  <a:pos x="connsiteX49" y="connsiteY49"/>
+                </a:cxn>
+                <a:cxn ang="0">
+                  <a:pos x="connsiteX50" y="connsiteY50"/>
+                </a:cxn>
+                <a:cxn ang="0">
+                  <a:pos x="connsiteX51" y="connsiteY51"/>
+                </a:cxn>
+                <a:cxn ang="0">
+                  <a:pos x="connsiteX52" y="connsiteY52"/>
+                </a:cxn>
+                <a:cxn ang="0">
+                  <a:pos x="connsiteX53" y="connsiteY53"/>
+                </a:cxn>
+                <a:cxn ang="0">
+                  <a:pos x="connsiteX54" y="connsiteY54"/>
+                </a:cxn>
+                <a:cxn ang="0">
+                  <a:pos x="connsiteX55" y="connsiteY55"/>
+                </a:cxn>
+                <a:cxn ang="0">
+                  <a:pos x="connsiteX56" y="connsiteY56"/>
+                </a:cxn>
+                <a:cxn ang="0">
+                  <a:pos x="connsiteX57" y="connsiteY57"/>
+                </a:cxn>
+                <a:cxn ang="0">
+                  <a:pos x="connsiteX58" y="connsiteY58"/>
+                </a:cxn>
+                <a:cxn ang="0">
+                  <a:pos x="connsiteX59" y="connsiteY59"/>
+                </a:cxn>
+                <a:cxn ang="0">
+                  <a:pos x="connsiteX60" y="connsiteY60"/>
+                </a:cxn>
+                <a:cxn ang="0">
+                  <a:pos x="connsiteX61" y="connsiteY61"/>
+                </a:cxn>
+                <a:cxn ang="0">
+                  <a:pos x="connsiteX62" y="connsiteY62"/>
+                </a:cxn>
+                <a:cxn ang="0">
+                  <a:pos x="connsiteX63" y="connsiteY63"/>
+                </a:cxn>
+                <a:cxn ang="0">
+                  <a:pos x="connsiteX64" y="connsiteY64"/>
+                </a:cxn>
+                <a:cxn ang="0">
+                  <a:pos x="connsiteX65" y="connsiteY65"/>
+                </a:cxn>
+                <a:cxn ang="0">
+                  <a:pos x="connsiteX66" y="connsiteY66"/>
+                </a:cxn>
+                <a:cxn ang="0">
+                  <a:pos x="connsiteX67" y="connsiteY67"/>
+                </a:cxn>
+                <a:cxn ang="0">
+                  <a:pos x="connsiteX68" y="connsiteY68"/>
+                </a:cxn>
+                <a:cxn ang="0">
+                  <a:pos x="connsiteX69" y="connsiteY69"/>
+                </a:cxn>
+                <a:cxn ang="0">
+                  <a:pos x="connsiteX70" y="connsiteY70"/>
+                </a:cxn>
+                <a:cxn ang="0">
+                  <a:pos x="connsiteX71" y="connsiteY71"/>
+                </a:cxn>
+                <a:cxn ang="0">
+                  <a:pos x="connsiteX72" y="connsiteY72"/>
+                </a:cxn>
+                <a:cxn ang="0">
+                  <a:pos x="connsiteX73" y="connsiteY73"/>
+                </a:cxn>
+                <a:cxn ang="0">
+                  <a:pos x="connsiteX74" y="connsiteY74"/>
+                </a:cxn>
+                <a:cxn ang="0">
+                  <a:pos x="connsiteX75" y="connsiteY75"/>
+                </a:cxn>
+                <a:cxn ang="0">
+                  <a:pos x="connsiteX76" y="connsiteY76"/>
+                </a:cxn>
+                <a:cxn ang="0">
+                  <a:pos x="connsiteX77" y="connsiteY77"/>
+                </a:cxn>
+                <a:cxn ang="0">
+                  <a:pos x="connsiteX78" y="connsiteY78"/>
+                </a:cxn>
+                <a:cxn ang="0">
+                  <a:pos x="connsiteX79" y="connsiteY79"/>
+                </a:cxn>
+                <a:cxn ang="0">
+                  <a:pos x="connsiteX80" y="connsiteY80"/>
+                </a:cxn>
+                <a:cxn ang="0">
+                  <a:pos x="connsiteX81" y="connsiteY81"/>
+                </a:cxn>
+                <a:cxn ang="0">
+                  <a:pos x="connsiteX82" y="connsiteY82"/>
+                </a:cxn>
+                <a:cxn ang="0">
+                  <a:pos x="connsiteX83" y="connsiteY83"/>
+                </a:cxn>
+                <a:cxn ang="0">
+                  <a:pos x="connsiteX84" y="connsiteY84"/>
+                </a:cxn>
+                <a:cxn ang="0">
+                  <a:pos x="connsiteX85" y="connsiteY85"/>
+                </a:cxn>
+                <a:cxn ang="0">
+                  <a:pos x="connsiteX86" y="connsiteY86"/>
+                </a:cxn>
+                <a:cxn ang="0">
+                  <a:pos x="connsiteX87" y="connsiteY87"/>
+                </a:cxn>
+                <a:cxn ang="0">
+                  <a:pos x="connsiteX88" y="connsiteY88"/>
+                </a:cxn>
+                <a:cxn ang="0">
+                  <a:pos x="connsiteX89" y="connsiteY89"/>
+                </a:cxn>
+                <a:cxn ang="0">
+                  <a:pos x="connsiteX90" y="connsiteY90"/>
+                </a:cxn>
+                <a:cxn ang="0">
+                  <a:pos x="connsiteX91" y="connsiteY91"/>
+                </a:cxn>
+                <a:cxn ang="0">
+                  <a:pos x="connsiteX92" y="connsiteY92"/>
+                </a:cxn>
+                <a:cxn ang="0">
+                  <a:pos x="connsiteX93" y="connsiteY93"/>
+                </a:cxn>
+                <a:cxn ang="0">
+                  <a:pos x="connsiteX94" y="connsiteY94"/>
+                </a:cxn>
+                <a:cxn ang="0">
+                  <a:pos x="connsiteX95" y="connsiteY95"/>
+                </a:cxn>
+                <a:cxn ang="0">
+                  <a:pos x="connsiteX96" y="connsiteY96"/>
+                </a:cxn>
+                <a:cxn ang="0">
+                  <a:pos x="connsiteX97" y="connsiteY97"/>
+                </a:cxn>
+                <a:cxn ang="0">
+                  <a:pos x="connsiteX98" y="connsiteY98"/>
+                </a:cxn>
+                <a:cxn ang="0">
+                  <a:pos x="connsiteX99" y="connsiteY99"/>
+                </a:cxn>
+                <a:cxn ang="0">
+                  <a:pos x="connsiteX100" y="connsiteY100"/>
+                </a:cxn>
+                <a:cxn ang="0">
+                  <a:pos x="connsiteX101" y="connsiteY101"/>
+                </a:cxn>
+                <a:cxn ang="0">
+                  <a:pos x="connsiteX102" y="connsiteY102"/>
+                </a:cxn>
+                <a:cxn ang="0">
+                  <a:pos x="connsiteX103" y="connsiteY103"/>
+                </a:cxn>
+                <a:cxn ang="0">
+                  <a:pos x="connsiteX104" y="connsiteY104"/>
+                </a:cxn>
+                <a:cxn ang="0">
+                  <a:pos x="connsiteX105" y="connsiteY105"/>
+                </a:cxn>
+                <a:cxn ang="0">
+                  <a:pos x="connsiteX106" y="connsiteY106"/>
+                </a:cxn>
+                <a:cxn ang="0">
+                  <a:pos x="connsiteX107" y="connsiteY107"/>
+                </a:cxn>
+                <a:cxn ang="0">
+                  <a:pos x="connsiteX108" y="connsiteY108"/>
+                </a:cxn>
+                <a:cxn ang="0">
+                  <a:pos x="connsiteX109" y="connsiteY109"/>
+                </a:cxn>
+                <a:cxn ang="0">
+                  <a:pos x="connsiteX110" y="connsiteY110"/>
+                </a:cxn>
+                <a:cxn ang="0">
+                  <a:pos x="connsiteX111" y="connsiteY111"/>
+                </a:cxn>
+                <a:cxn ang="0">
+                  <a:pos x="connsiteX112" y="connsiteY112"/>
+                </a:cxn>
+                <a:cxn ang="0">
+                  <a:pos x="connsiteX113" y="connsiteY113"/>
+                </a:cxn>
+                <a:cxn ang="0">
+                  <a:pos x="connsiteX114" y="connsiteY114"/>
+                </a:cxn>
+                <a:cxn ang="0">
+                  <a:pos x="connsiteX115" y="connsiteY115"/>
+                </a:cxn>
+                <a:cxn ang="0">
+                  <a:pos x="connsiteX116" y="connsiteY116"/>
+                </a:cxn>
+                <a:cxn ang="0">
+                  <a:pos x="connsiteX117" y="connsiteY117"/>
+                </a:cxn>
+                <a:cxn ang="0">
+                  <a:pos x="connsiteX118" y="connsiteY118"/>
+                </a:cxn>
+                <a:cxn ang="0">
+                  <a:pos x="connsiteX119" y="connsiteY119"/>
+                </a:cxn>
+                <a:cxn ang="0">
+                  <a:pos x="connsiteX120" y="connsiteY120"/>
+                </a:cxn>
+                <a:cxn ang="0">
+                  <a:pos x="connsiteX121" y="connsiteY121"/>
+                </a:cxn>
+                <a:cxn ang="0">
+                  <a:pos x="connsiteX122" y="connsiteY122"/>
+                </a:cxn>
+                <a:cxn ang="0">
+                  <a:pos x="connsiteX123" y="connsiteY123"/>
+                </a:cxn>
+                <a:cxn ang="0">
+                  <a:pos x="connsiteX124" y="connsiteY124"/>
+                </a:cxn>
+                <a:cxn ang="0">
+                  <a:pos x="connsiteX125" y="connsiteY125"/>
+                </a:cxn>
+                <a:cxn ang="0">
+                  <a:pos x="connsiteX126" y="connsiteY126"/>
+                </a:cxn>
+                <a:cxn ang="0">
+                  <a:pos x="connsiteX127" y="connsiteY127"/>
+                </a:cxn>
+                <a:cxn ang="0">
+                  <a:pos x="connsiteX128" y="connsiteY128"/>
+                </a:cxn>
+                <a:cxn ang="0">
+                  <a:pos x="connsiteX129" y="connsiteY129"/>
+                </a:cxn>
+                <a:cxn ang="0">
+                  <a:pos x="connsiteX130" y="connsiteY130"/>
+                </a:cxn>
+                <a:cxn ang="0">
+                  <a:pos x="connsiteX131" y="connsiteY131"/>
+                </a:cxn>
+                <a:cxn ang="0">
+                  <a:pos x="connsiteX132" y="connsiteY132"/>
+                </a:cxn>
+                <a:cxn ang="0">
+                  <a:pos x="connsiteX133" y="connsiteY133"/>
+                </a:cxn>
+                <a:cxn ang="0">
+                  <a:pos x="connsiteX134" y="connsiteY134"/>
+                </a:cxn>
+                <a:cxn ang="0">
+                  <a:pos x="connsiteX135" y="connsiteY135"/>
+                </a:cxn>
+                <a:cxn ang="0">
+                  <a:pos x="connsiteX136" y="connsiteY136"/>
+                </a:cxn>
+                <a:cxn ang="0">
+                  <a:pos x="connsiteX137" y="connsiteY137"/>
+                </a:cxn>
+                <a:cxn ang="0">
+                  <a:pos x="connsiteX138" y="connsiteY138"/>
+                </a:cxn>
+                <a:cxn ang="0">
+                  <a:pos x="connsiteX139" y="connsiteY139"/>
+                </a:cxn>
+                <a:cxn ang="0">
+                  <a:pos x="connsiteX140" y="connsiteY140"/>
+                </a:cxn>
+                <a:cxn ang="0">
+                  <a:pos x="connsiteX141" y="connsiteY141"/>
+                </a:cxn>
+                <a:cxn ang="0">
+                  <a:pos x="connsiteX142" y="connsiteY142"/>
+                </a:cxn>
+                <a:cxn ang="0">
+                  <a:pos x="connsiteX143" y="connsiteY143"/>
+                </a:cxn>
+                <a:cxn ang="0">
+                  <a:pos x="connsiteX144" y="connsiteY144"/>
+                </a:cxn>
+                <a:cxn ang="0">
+                  <a:pos x="connsiteX145" y="connsiteY145"/>
+                </a:cxn>
+                <a:cxn ang="0">
+                  <a:pos x="connsiteX146" y="connsiteY146"/>
+                </a:cxn>
+                <a:cxn ang="0">
+                  <a:pos x="connsiteX147" y="connsiteY147"/>
+                </a:cxn>
+                <a:cxn ang="0">
+                  <a:pos x="connsiteX148" y="connsiteY148"/>
+                </a:cxn>
+                <a:cxn ang="0">
+                  <a:pos x="connsiteX149" y="connsiteY149"/>
+                </a:cxn>
+                <a:cxn ang="0">
+                  <a:pos x="connsiteX150" y="connsiteY150"/>
+                </a:cxn>
+                <a:cxn ang="0">
+                  <a:pos x="connsiteX151" y="connsiteY151"/>
+                </a:cxn>
+                <a:cxn ang="0">
+                  <a:pos x="connsiteX152" y="connsiteY152"/>
+                </a:cxn>
+                <a:cxn ang="0">
+                  <a:pos x="connsiteX153" y="connsiteY153"/>
+                </a:cxn>
+                <a:cxn ang="0">
+                  <a:pos x="connsiteX154" y="connsiteY154"/>
+                </a:cxn>
+                <a:cxn ang="0">
+                  <a:pos x="connsiteX155" y="connsiteY155"/>
+                </a:cxn>
+                <a:cxn ang="0">
+                  <a:pos x="connsiteX156" y="connsiteY156"/>
+                </a:cxn>
+                <a:cxn ang="0">
+                  <a:pos x="connsiteX157" y="connsiteY157"/>
+                </a:cxn>
+                <a:cxn ang="0">
+                  <a:pos x="connsiteX158" y="connsiteY158"/>
+                </a:cxn>
+                <a:cxn ang="0">
+                  <a:pos x="connsiteX159" y="connsiteY159"/>
+                </a:cxn>
+                <a:cxn ang="0">
+                  <a:pos x="connsiteX160" y="connsiteY160"/>
+                </a:cxn>
+                <a:cxn ang="0">
+                  <a:pos x="connsiteX161" y="connsiteY161"/>
+                </a:cxn>
+                <a:cxn ang="0">
+                  <a:pos x="connsiteX162" y="connsiteY162"/>
+                </a:cxn>
+                <a:cxn ang="0">
+                  <a:pos x="connsiteX163" y="connsiteY163"/>
+                </a:cxn>
+                <a:cxn ang="0">
+                  <a:pos x="connsiteX164" y="connsiteY164"/>
+                </a:cxn>
+                <a:cxn ang="0">
+                  <a:pos x="connsiteX165" y="connsiteY165"/>
+                </a:cxn>
+                <a:cxn ang="0">
+                  <a:pos x="connsiteX166" y="connsiteY166"/>
+                </a:cxn>
+                <a:cxn ang="0">
+                  <a:pos x="connsiteX167" y="connsiteY167"/>
+                </a:cxn>
+                <a:cxn ang="0">
+                  <a:pos x="connsiteX168" y="connsiteY168"/>
+                </a:cxn>
+                <a:cxn ang="0">
+                  <a:pos x="connsiteX169" y="connsiteY169"/>
+                </a:cxn>
+                <a:cxn ang="0">
+                  <a:pos x="connsiteX170" y="connsiteY170"/>
+                </a:cxn>
+                <a:cxn ang="0">
+                  <a:pos x="connsiteX171" y="connsiteY171"/>
+                </a:cxn>
+                <a:cxn ang="0">
+                  <a:pos x="connsiteX172" y="connsiteY172"/>
+                </a:cxn>
+                <a:cxn ang="0">
+                  <a:pos x="connsiteX173" y="connsiteY173"/>
+                </a:cxn>
+                <a:cxn ang="0">
+                  <a:pos x="connsiteX174" y="connsiteY174"/>
+                </a:cxn>
+                <a:cxn ang="0">
+                  <a:pos x="connsiteX175" y="connsiteY175"/>
+                </a:cxn>
+                <a:cxn ang="0">
+                  <a:pos x="connsiteX176" y="connsiteY176"/>
+                </a:cxn>
+                <a:cxn ang="0">
+                  <a:pos x="connsiteX177" y="connsiteY177"/>
+                </a:cxn>
+                <a:cxn ang="0">
+                  <a:pos x="connsiteX178" y="connsiteY178"/>
+                </a:cxn>
+                <a:cxn ang="0">
+                  <a:pos x="connsiteX179" y="connsiteY179"/>
+                </a:cxn>
+                <a:cxn ang="0">
+                  <a:pos x="connsiteX180" y="connsiteY180"/>
+                </a:cxn>
+                <a:cxn ang="0">
+                  <a:pos x="connsiteX181" y="connsiteY181"/>
+                </a:cxn>
+                <a:cxn ang="0">
+                  <a:pos x="connsiteX182" y="connsiteY182"/>
+                </a:cxn>
+                <a:cxn ang="0">
+                  <a:pos x="connsiteX183" y="connsiteY183"/>
+                </a:cxn>
+                <a:cxn ang="0">
+                  <a:pos x="connsiteX184" y="connsiteY184"/>
+                </a:cxn>
+                <a:cxn ang="0">
+                  <a:pos x="connsiteX185" y="connsiteY185"/>
+                </a:cxn>
+                <a:cxn ang="0">
+                  <a:pos x="connsiteX186" y="connsiteY186"/>
+                </a:cxn>
+                <a:cxn ang="0">
+                  <a:pos x="connsiteX187" y="connsiteY187"/>
+                </a:cxn>
+                <a:cxn ang="0">
+                  <a:pos x="connsiteX188" y="connsiteY188"/>
+                </a:cxn>
+                <a:cxn ang="0">
+                  <a:pos x="connsiteX189" y="connsiteY189"/>
+                </a:cxn>
+                <a:cxn ang="0">
+                  <a:pos x="connsiteX190" y="connsiteY190"/>
+                </a:cxn>
+                <a:cxn ang="0">
+                  <a:pos x="connsiteX191" y="connsiteY191"/>
+                </a:cxn>
+                <a:cxn ang="0">
+                  <a:pos x="connsiteX192" y="connsiteY192"/>
+                </a:cxn>
+                <a:cxn ang="0">
+                  <a:pos x="connsiteX193" y="connsiteY193"/>
+                </a:cxn>
+                <a:cxn ang="0">
+                  <a:pos x="connsiteX194" y="connsiteY194"/>
+                </a:cxn>
+                <a:cxn ang="0">
+                  <a:pos x="connsiteX195" y="connsiteY195"/>
+                </a:cxn>
+                <a:cxn ang="0">
+                  <a:pos x="connsiteX196" y="connsiteY196"/>
+                </a:cxn>
+                <a:cxn ang="0">
+                  <a:pos x="connsiteX197" y="connsiteY197"/>
+                </a:cxn>
+                <a:cxn ang="0">
+                  <a:pos x="connsiteX198" y="connsiteY198"/>
+                </a:cxn>
+                <a:cxn ang="0">
+                  <a:pos x="connsiteX199" y="connsiteY199"/>
+                </a:cxn>
+              </a:cxnLst>
+              <a:rect l="l" t="t" r="r" b="b"/>
+              <a:pathLst>
+                <a:path w="5187198" h="6239661">
+                  <a:moveTo>
+                    <a:pt x="2011811" y="4"/>
+                  </a:moveTo>
+                  <a:cubicBezTo>
+                    <a:pt x="2217306" y="120"/>
+                    <a:pt x="2420903" y="25925"/>
+                    <a:pt x="2617011" y="70590"/>
+                  </a:cubicBezTo>
+                  <a:lnTo>
+                    <a:pt x="2690321" y="88146"/>
+                  </a:lnTo>
+                  <a:lnTo>
+                    <a:pt x="2726863" y="97127"/>
+                  </a:lnTo>
+                  <a:lnTo>
+                    <a:pt x="2762951" y="107375"/>
+                  </a:lnTo>
+                  <a:lnTo>
+                    <a:pt x="2834843" y="128493"/>
+                  </a:lnTo>
+                  <a:cubicBezTo>
+                    <a:pt x="2858788" y="135605"/>
+                    <a:pt x="2882632" y="142226"/>
+                    <a:pt x="2906574" y="151076"/>
+                  </a:cubicBezTo>
+                  <a:cubicBezTo>
+                    <a:pt x="2954475" y="167852"/>
+                    <a:pt x="3002363" y="183813"/>
+                    <a:pt x="3049504" y="202124"/>
+                  </a:cubicBezTo>
+                  <a:lnTo>
+                    <a:pt x="3189518" y="260159"/>
+                  </a:lnTo>
+                  <a:lnTo>
+                    <a:pt x="3326048" y="325143"/>
+                  </a:lnTo>
+                  <a:cubicBezTo>
+                    <a:pt x="3370687" y="348464"/>
+                    <a:pt x="3414908" y="372485"/>
+                    <a:pt x="3459166" y="395936"/>
+                  </a:cubicBezTo>
+                  <a:cubicBezTo>
+                    <a:pt x="3502947" y="420302"/>
+                    <a:pt x="3545491" y="447118"/>
+                    <a:pt x="3588578" y="472343"/>
+                  </a:cubicBezTo>
+                  <a:cubicBezTo>
+                    <a:pt x="3610346" y="484551"/>
+                    <a:pt x="3630797" y="499072"/>
+                    <a:pt x="3651864" y="512600"/>
+                  </a:cubicBezTo>
+                  <a:lnTo>
+                    <a:pt x="3714514" y="553499"/>
+                  </a:lnTo>
+                  <a:cubicBezTo>
+                    <a:pt x="3880005" y="664844"/>
+                    <a:pt x="4036083" y="788388"/>
+                    <a:pt x="4181221" y="922912"/>
+                  </a:cubicBezTo>
+                  <a:cubicBezTo>
+                    <a:pt x="4326221" y="1057515"/>
+                    <a:pt x="4461955" y="1202038"/>
+                    <a:pt x="4582963" y="1358264"/>
+                  </a:cubicBezTo>
+                  <a:cubicBezTo>
+                    <a:pt x="4614206" y="1396543"/>
+                    <a:pt x="4642091" y="1437400"/>
+                    <a:pt x="4670721" y="1477644"/>
+                  </a:cubicBezTo>
+                  <a:cubicBezTo>
+                    <a:pt x="4700172" y="1517414"/>
+                    <a:pt x="4725864" y="1559538"/>
+                    <a:pt x="4752378" y="1601187"/>
+                  </a:cubicBezTo>
+                  <a:lnTo>
+                    <a:pt x="4772168" y="1632456"/>
+                  </a:lnTo>
+                  <a:lnTo>
+                    <a:pt x="4782117" y="1648104"/>
+                  </a:lnTo>
+                  <a:lnTo>
+                    <a:pt x="4791381" y="1664150"/>
+                  </a:lnTo>
+                  <a:lnTo>
+                    <a:pt x="4828190" y="1728379"/>
+                  </a:lnTo>
+                  <a:cubicBezTo>
+                    <a:pt x="4840266" y="1749930"/>
+                    <a:pt x="4853470" y="1770740"/>
+                    <a:pt x="4864832" y="1792796"/>
+                  </a:cubicBezTo>
+                  <a:lnTo>
+                    <a:pt x="4899201" y="1858342"/>
+                  </a:lnTo>
+                  <a:cubicBezTo>
+                    <a:pt x="4910484" y="1880260"/>
+                    <a:pt x="4922532" y="1901920"/>
+                    <a:pt x="4933266" y="1924155"/>
+                  </a:cubicBezTo>
+                  <a:lnTo>
+                    <a:pt x="4964403" y="1991384"/>
+                  </a:lnTo>
+                  <a:cubicBezTo>
+                    <a:pt x="4974618" y="2013829"/>
+                    <a:pt x="4985323" y="2036171"/>
+                    <a:pt x="4995019" y="2058823"/>
+                  </a:cubicBezTo>
+                  <a:lnTo>
+                    <a:pt x="5021999" y="2127723"/>
+                  </a:lnTo>
+                  <a:lnTo>
+                    <a:pt x="5048321" y="2196908"/>
+                  </a:lnTo>
+                  <a:lnTo>
+                    <a:pt x="5070546" y="2267547"/>
+                  </a:lnTo>
+                  <a:cubicBezTo>
+                    <a:pt x="5078054" y="2291004"/>
+                    <a:pt x="5085044" y="2314670"/>
+                    <a:pt x="5092171" y="2338256"/>
+                  </a:cubicBezTo>
+                  <a:cubicBezTo>
+                    <a:pt x="5098670" y="2362023"/>
+                    <a:pt x="5104296" y="2386019"/>
+                    <a:pt x="5110305" y="2409886"/>
+                  </a:cubicBezTo>
+                  <a:cubicBezTo>
+                    <a:pt x="5158097" y="2600976"/>
+                    <a:pt x="5182068" y="2797044"/>
+                    <a:pt x="5186393" y="2992022"/>
+                  </a:cubicBezTo>
+                  <a:cubicBezTo>
+                    <a:pt x="5191013" y="3187195"/>
+                    <a:pt x="5175397" y="3380886"/>
+                    <a:pt x="5149045" y="3571816"/>
+                  </a:cubicBezTo>
+                  <a:cubicBezTo>
+                    <a:pt x="5141154" y="3619431"/>
+                    <a:pt x="5133539" y="3666889"/>
+                    <a:pt x="5126572" y="3714520"/>
+                  </a:cubicBezTo>
+                  <a:cubicBezTo>
+                    <a:pt x="5117276" y="3761759"/>
+                    <a:pt x="5107793" y="3808831"/>
+                    <a:pt x="5099067" y="3856108"/>
+                  </a:cubicBezTo>
+                  <a:lnTo>
+                    <a:pt x="5095699" y="3873868"/>
+                  </a:lnTo>
+                  <a:lnTo>
+                    <a:pt x="5091573" y="3891426"/>
+                  </a:lnTo>
+                  <a:lnTo>
+                    <a:pt x="5083324" y="3926541"/>
+                  </a:lnTo>
+                  <a:lnTo>
+                    <a:pt x="5067256" y="3996889"/>
+                  </a:lnTo>
+                  <a:cubicBezTo>
+                    <a:pt x="5064451" y="4008657"/>
+                    <a:pt x="5062244" y="4020353"/>
+                    <a:pt x="5059194" y="4032171"/>
+                  </a:cubicBezTo>
+                  <a:lnTo>
+                    <a:pt x="5049522" y="4067833"/>
+                  </a:lnTo>
+                  <a:lnTo>
+                    <a:pt x="5040067" y="4103553"/>
+                  </a:lnTo>
+                  <a:cubicBezTo>
+                    <a:pt x="5036554" y="4115363"/>
+                    <a:pt x="5032689" y="4127194"/>
+                    <a:pt x="5028960" y="4138946"/>
+                  </a:cubicBezTo>
+                  <a:cubicBezTo>
+                    <a:pt x="4999693" y="4233462"/>
+                    <a:pt x="4962869" y="4326764"/>
+                    <a:pt x="4917351" y="4417041"/>
+                  </a:cubicBezTo>
+                  <a:cubicBezTo>
+                    <a:pt x="4871860" y="4507209"/>
+                    <a:pt x="4817597" y="4594215"/>
+                    <a:pt x="4756163" y="4676402"/>
+                  </a:cubicBezTo>
+                  <a:cubicBezTo>
+                    <a:pt x="4632803" y="4840875"/>
+                    <a:pt x="4480597" y="4982783"/>
+                    <a:pt x="4322493" y="5105604"/>
+                  </a:cubicBezTo>
+                  <a:cubicBezTo>
+                    <a:pt x="4163928" y="5228420"/>
+                    <a:pt x="3999564" y="5332640"/>
+                    <a:pt x="3840510" y="5429590"/>
+                  </a:cubicBezTo>
+                  <a:cubicBezTo>
+                    <a:pt x="3760954" y="5478172"/>
+                    <a:pt x="3682353" y="5524924"/>
+                    <a:pt x="3606447" y="5572862"/>
+                  </a:cubicBezTo>
+                  <a:lnTo>
+                    <a:pt x="3488814" y="5647178"/>
+                  </a:lnTo>
+                  <a:cubicBezTo>
+                    <a:pt x="3448270" y="5672597"/>
+                    <a:pt x="3407323" y="5697792"/>
+                    <a:pt x="3365864" y="5722735"/>
+                  </a:cubicBezTo>
+                  <a:cubicBezTo>
+                    <a:pt x="3200163" y="5822424"/>
+                    <a:pt x="3026125" y="5917328"/>
+                    <a:pt x="2839486" y="5999120"/>
+                  </a:cubicBezTo>
+                  <a:cubicBezTo>
+                    <a:pt x="2653201" y="6080891"/>
+                    <a:pt x="2453560" y="6149344"/>
+                    <a:pt x="2242423" y="6192346"/>
+                  </a:cubicBezTo>
+                  <a:cubicBezTo>
+                    <a:pt x="2031719" y="6235463"/>
+                    <a:pt x="1808952" y="6251353"/>
+                    <a:pt x="1589380" y="6230657"/>
+                  </a:cubicBezTo>
+                  <a:lnTo>
+                    <a:pt x="1548244" y="6226706"/>
+                  </a:lnTo>
+                  <a:cubicBezTo>
+                    <a:pt x="1534528" y="6225117"/>
+                    <a:pt x="1520898" y="6223203"/>
+                    <a:pt x="1507348" y="6221428"/>
+                  </a:cubicBezTo>
+                  <a:lnTo>
+                    <a:pt x="1466401" y="6215904"/>
+                  </a:lnTo>
+                  <a:cubicBezTo>
+                    <a:pt x="1452772" y="6213991"/>
+                    <a:pt x="1439316" y="6211428"/>
+                    <a:pt x="1425773" y="6209191"/>
+                  </a:cubicBezTo>
+                  <a:cubicBezTo>
+                    <a:pt x="1398775" y="6204391"/>
+                    <a:pt x="1371610" y="6199779"/>
+                    <a:pt x="1344960" y="6193681"/>
+                  </a:cubicBezTo>
+                  <a:cubicBezTo>
+                    <a:pt x="1318251" y="6187799"/>
+                    <a:pt x="1291260" y="6182538"/>
+                    <a:pt x="1265007" y="6175388"/>
+                  </a:cubicBezTo>
+                  <a:lnTo>
+                    <a:pt x="1225415" y="6165243"/>
+                  </a:lnTo>
+                  <a:cubicBezTo>
+                    <a:pt x="1212163" y="6161924"/>
+                    <a:pt x="1198939" y="6158496"/>
+                    <a:pt x="1186567" y="6154486"/>
+                  </a:cubicBezTo>
+                  <a:lnTo>
+                    <a:pt x="1111158" y="6130918"/>
+                  </a:lnTo>
+                  <a:lnTo>
+                    <a:pt x="1035915" y="6107163"/>
+                  </a:lnTo>
+                  <a:cubicBezTo>
+                    <a:pt x="1010846" y="6099055"/>
+                    <a:pt x="986357" y="6088784"/>
+                    <a:pt x="961579" y="6079594"/>
+                  </a:cubicBezTo>
+                  <a:cubicBezTo>
+                    <a:pt x="763709" y="6005594"/>
+                    <a:pt x="572401" y="5909703"/>
+                    <a:pt x="395297" y="5792812"/>
+                  </a:cubicBezTo>
+                  <a:lnTo>
+                    <a:pt x="265239" y="5701511"/>
+                  </a:lnTo>
+                  <a:cubicBezTo>
+                    <a:pt x="254227" y="5694155"/>
+                    <a:pt x="244103" y="5685646"/>
+                    <a:pt x="233756" y="5677542"/>
+                  </a:cubicBezTo>
+                  <a:lnTo>
+                    <a:pt x="202800" y="5652902"/>
+                  </a:lnTo>
+                  <a:lnTo>
+                    <a:pt x="140918" y="5603515"/>
+                  </a:lnTo>
+                  <a:cubicBezTo>
+                    <a:pt x="130598" y="5595302"/>
+                    <a:pt x="120280" y="5587089"/>
+                    <a:pt x="110625" y="5578127"/>
+                  </a:cubicBezTo>
+                  <a:cubicBezTo>
+                    <a:pt x="105647" y="5573779"/>
+                    <a:pt x="100444" y="5569834"/>
+                    <a:pt x="95631" y="5565299"/>
+                  </a:cubicBezTo>
+                  <a:cubicBezTo>
+                    <a:pt x="90955" y="5560684"/>
+                    <a:pt x="86505" y="5555666"/>
+                    <a:pt x="81966" y="5550973"/>
+                  </a:cubicBezTo>
+                  <a:lnTo>
+                    <a:pt x="27991" y="5493272"/>
+                  </a:lnTo>
+                  <a:cubicBezTo>
+                    <a:pt x="19109" y="5483589"/>
+                    <a:pt x="9758" y="5474359"/>
+                    <a:pt x="1454" y="5464252"/>
+                  </a:cubicBezTo>
+                  <a:lnTo>
+                    <a:pt x="0" y="5462518"/>
+                  </a:lnTo>
+                  <a:lnTo>
+                    <a:pt x="0" y="4720187"/>
+                  </a:lnTo>
+                  <a:lnTo>
+                    <a:pt x="109684" y="4836724"/>
+                  </a:lnTo>
+                  <a:cubicBezTo>
+                    <a:pt x="173316" y="4897375"/>
+                    <a:pt x="239447" y="4954160"/>
+                    <a:pt x="306959" y="5007200"/>
+                  </a:cubicBezTo>
+                  <a:lnTo>
+                    <a:pt x="358101" y="5046057"/>
+                  </a:lnTo>
+                  <a:lnTo>
+                    <a:pt x="383328" y="5065684"/>
+                  </a:lnTo>
+                  <a:cubicBezTo>
+                    <a:pt x="391637" y="5072316"/>
+                    <a:pt x="400805" y="5077902"/>
+                    <a:pt x="409503" y="5083942"/>
+                  </a:cubicBezTo>
+                  <a:lnTo>
+                    <a:pt x="461889" y="5119888"/>
+                  </a:lnTo>
+                  <a:cubicBezTo>
+                    <a:pt x="466184" y="5122893"/>
+                    <a:pt x="470616" y="5125820"/>
+                    <a:pt x="474883" y="5128933"/>
+                  </a:cubicBezTo>
+                  <a:cubicBezTo>
+                    <a:pt x="478982" y="5132235"/>
+                    <a:pt x="482476" y="5136069"/>
+                    <a:pt x="486410" y="5139557"/>
+                  </a:cubicBezTo>
+                  <a:cubicBezTo>
+                    <a:pt x="494140" y="5146613"/>
+                    <a:pt x="502565" y="5152812"/>
+                    <a:pt x="510852" y="5159089"/>
+                  </a:cubicBezTo>
+                  <a:lnTo>
+                    <a:pt x="560653" y="5196893"/>
+                  </a:lnTo>
+                  <a:lnTo>
+                    <a:pt x="585485" y="5215834"/>
+                  </a:lnTo>
+                  <a:cubicBezTo>
+                    <a:pt x="593773" y="5222111"/>
+                    <a:pt x="601864" y="5228685"/>
+                    <a:pt x="610707" y="5234185"/>
+                  </a:cubicBezTo>
+                  <a:lnTo>
+                    <a:pt x="714768" y="5303103"/>
+                  </a:lnTo>
+                  <a:cubicBezTo>
+                    <a:pt x="856162" y="5390603"/>
+                    <a:pt x="1008099" y="5459947"/>
+                    <a:pt x="1166634" y="5513322"/>
+                  </a:cubicBezTo>
+                  <a:cubicBezTo>
+                    <a:pt x="1186540" y="5519932"/>
+                    <a:pt x="1205774" y="5527751"/>
+                    <a:pt x="1225991" y="5533632"/>
+                  </a:cubicBezTo>
+                  <a:lnTo>
+                    <a:pt x="1286680" y="5550705"/>
+                  </a:lnTo>
+                  <a:lnTo>
+                    <a:pt x="1347310" y="5567995"/>
+                  </a:lnTo>
+                  <a:cubicBezTo>
+                    <a:pt x="1357469" y="5571180"/>
+                    <a:pt x="1367261" y="5573572"/>
+                    <a:pt x="1377002" y="5575719"/>
+                  </a:cubicBezTo>
+                  <a:lnTo>
+                    <a:pt x="1406328" y="5582649"/>
+                  </a:lnTo>
+                  <a:cubicBezTo>
+                    <a:pt x="1425825" y="5587757"/>
+                    <a:pt x="1445490" y="5590939"/>
+                    <a:pt x="1465060" y="5594909"/>
+                  </a:cubicBezTo>
+                  <a:cubicBezTo>
+                    <a:pt x="1484652" y="5599231"/>
+                    <a:pt x="1504324" y="5601952"/>
+                    <a:pt x="1523881" y="5605105"/>
+                  </a:cubicBezTo>
+                  <a:cubicBezTo>
+                    <a:pt x="1533660" y="5606682"/>
+                    <a:pt x="1543460" y="5608613"/>
+                    <a:pt x="1553325" y="5609865"/>
+                  </a:cubicBezTo>
+                  <a:lnTo>
+                    <a:pt x="1582813" y="5613593"/>
+                  </a:lnTo>
+                  <a:lnTo>
+                    <a:pt x="1612301" y="5617321"/>
+                  </a:lnTo>
+                  <a:lnTo>
+                    <a:pt x="1641863" y="5619910"/>
+                  </a:lnTo>
+                  <a:cubicBezTo>
+                    <a:pt x="1799348" y="5633940"/>
+                    <a:pt x="1957913" y="5625770"/>
+                    <a:pt x="2117508" y="5595156"/>
+                  </a:cubicBezTo>
+                  <a:cubicBezTo>
+                    <a:pt x="2277124" y="5564895"/>
+                    <a:pt x="2437004" y="5512449"/>
+                    <a:pt x="2597368" y="5447381"/>
+                  </a:cubicBezTo>
+                  <a:cubicBezTo>
+                    <a:pt x="2757791" y="5382096"/>
+                    <a:pt x="2918855" y="5304464"/>
+                    <a:pt x="3082968" y="5223245"/>
+                  </a:cubicBezTo>
+                  <a:lnTo>
+                    <a:pt x="3334855" y="5097383"/>
+                  </a:lnTo>
+                  <a:cubicBezTo>
+                    <a:pt x="3423528" y="5054142"/>
+                    <a:pt x="3511773" y="5013798"/>
+                    <a:pt x="3599509" y="4976217"/>
+                  </a:cubicBezTo>
+                  <a:cubicBezTo>
+                    <a:pt x="3774960" y="4900701"/>
+                    <a:pt x="3948276" y="4837481"/>
+                    <a:pt x="4112002" y="4766359"/>
+                  </a:cubicBezTo>
+                  <a:cubicBezTo>
+                    <a:pt x="4193972" y="4730827"/>
+                    <a:pt x="4273429" y="4692997"/>
+                    <a:pt x="4348983" y="4649833"/>
+                  </a:cubicBezTo>
+                  <a:cubicBezTo>
+                    <a:pt x="4424508" y="4606778"/>
+                    <a:pt x="4496050" y="4558250"/>
+                    <a:pt x="4560505" y="4501564"/>
+                  </a:cubicBezTo>
+                  <a:cubicBezTo>
+                    <a:pt x="4625198" y="4445289"/>
+                    <a:pt x="4682991" y="4381021"/>
+                    <a:pt x="4731963" y="4309870"/>
+                  </a:cubicBezTo>
+                  <a:cubicBezTo>
+                    <a:pt x="4781043" y="4238747"/>
+                    <a:pt x="4821275" y="4160848"/>
+                    <a:pt x="4852344" y="4078640"/>
+                  </a:cubicBezTo>
+                  <a:lnTo>
+                    <a:pt x="4863972" y="4047790"/>
+                  </a:lnTo>
+                  <a:lnTo>
+                    <a:pt x="4874144" y="4016320"/>
+                  </a:lnTo>
+                  <a:lnTo>
+                    <a:pt x="4884127" y="3984682"/>
+                  </a:lnTo>
+                  <a:cubicBezTo>
+                    <a:pt x="4887242" y="3973925"/>
+                    <a:pt x="4889981" y="3962835"/>
+                    <a:pt x="4892800" y="3951883"/>
+                  </a:cubicBezTo>
+                  <a:lnTo>
+                    <a:pt x="4909526" y="3886001"/>
+                  </a:lnTo>
+                  <a:lnTo>
+                    <a:pt x="4917687" y="3852948"/>
+                  </a:lnTo>
+                  <a:lnTo>
+                    <a:pt x="4921768" y="3836422"/>
+                  </a:lnTo>
+                  <a:lnTo>
+                    <a:pt x="4924845" y="3819742"/>
+                  </a:lnTo>
+                  <a:cubicBezTo>
+                    <a:pt x="4933092" y="3775120"/>
+                    <a:pt x="4941231" y="3730469"/>
+                    <a:pt x="4948230" y="3685744"/>
+                  </a:cubicBezTo>
+                  <a:cubicBezTo>
+                    <a:pt x="4953579" y="3640694"/>
+                    <a:pt x="4958249" y="3595577"/>
+                    <a:pt x="4962782" y="3550540"/>
+                  </a:cubicBezTo>
+                  <a:cubicBezTo>
+                    <a:pt x="4976580" y="3369692"/>
+                    <a:pt x="4965812" y="3187942"/>
+                    <a:pt x="4939468" y="3010249"/>
+                  </a:cubicBezTo>
+                  <a:cubicBezTo>
+                    <a:pt x="4912965" y="2832281"/>
+                    <a:pt x="4870237" y="2658196"/>
+                    <a:pt x="4816901" y="2488224"/>
+                  </a:cubicBezTo>
+                  <a:cubicBezTo>
+                    <a:pt x="4810197" y="2466954"/>
+                    <a:pt x="4803984" y="2445582"/>
+                    <a:pt x="4797005" y="2424470"/>
+                  </a:cubicBezTo>
+                  <a:cubicBezTo>
+                    <a:pt x="4789399" y="2403537"/>
+                    <a:pt x="4781686" y="2382574"/>
+                    <a:pt x="4774433" y="2361620"/>
+                  </a:cubicBezTo>
+                  <a:lnTo>
+                    <a:pt x="4752459" y="2298700"/>
+                  </a:lnTo>
+                  <a:lnTo>
+                    <a:pt x="4728083" y="2236526"/>
+                  </a:lnTo>
+                  <a:cubicBezTo>
+                    <a:pt x="4719957" y="2215802"/>
+                    <a:pt x="4712352" y="2194869"/>
+                    <a:pt x="4704471" y="2174095"/>
+                  </a:cubicBezTo>
+                  <a:lnTo>
+                    <a:pt x="4678399" y="2112626"/>
+                  </a:lnTo>
+                  <a:lnTo>
+                    <a:pt x="4652601" y="2050999"/>
+                  </a:lnTo>
+                  <a:cubicBezTo>
+                    <a:pt x="4643711" y="2030533"/>
+                    <a:pt x="4633616" y="2010672"/>
+                    <a:pt x="4624205" y="1990415"/>
+                  </a:cubicBezTo>
+                  <a:lnTo>
+                    <a:pt x="4595398" y="1930069"/>
+                  </a:lnTo>
+                  <a:cubicBezTo>
+                    <a:pt x="4585714" y="1909969"/>
+                    <a:pt x="4574413" y="1890713"/>
+                    <a:pt x="4563827" y="1870952"/>
+                  </a:cubicBezTo>
+                  <a:lnTo>
+                    <a:pt x="4531433" y="1812311"/>
+                  </a:lnTo>
+                  <a:lnTo>
+                    <a:pt x="4523315" y="1797616"/>
+                  </a:lnTo>
+                  <a:lnTo>
+                    <a:pt x="4514482" y="1783425"/>
+                  </a:lnTo>
+                  <a:lnTo>
+                    <a:pt x="4496845" y="1754936"/>
+                  </a:lnTo>
+                  <a:lnTo>
+                    <a:pt x="4461463" y="1697929"/>
+                  </a:lnTo>
+                  <a:lnTo>
+                    <a:pt x="4452660" y="1683629"/>
+                  </a:lnTo>
+                  <a:lnTo>
+                    <a:pt x="4443141" y="1669834"/>
+                  </a:lnTo>
+                  <a:lnTo>
+                    <a:pt x="4424241" y="1642166"/>
+                  </a:lnTo>
+                  <a:cubicBezTo>
+                    <a:pt x="4399005" y="1605265"/>
+                    <a:pt x="4374512" y="1567751"/>
+                    <a:pt x="4346886" y="1532412"/>
+                  </a:cubicBezTo>
+                  <a:cubicBezTo>
+                    <a:pt x="4240477" y="1388328"/>
+                    <a:pt x="4120362" y="1253437"/>
+                    <a:pt x="3985497" y="1134649"/>
+                  </a:cubicBezTo>
+                  <a:cubicBezTo>
+                    <a:pt x="3850799" y="1015675"/>
+                    <a:pt x="3702920" y="911715"/>
+                    <a:pt x="3545665" y="825877"/>
+                  </a:cubicBezTo>
+                  <a:lnTo>
+                    <a:pt x="3486190" y="794756"/>
+                  </a:lnTo>
+                  <a:cubicBezTo>
+                    <a:pt x="3466181" y="784640"/>
+                    <a:pt x="3446893" y="773560"/>
+                    <a:pt x="3426182" y="764765"/>
+                  </a:cubicBezTo>
+                  <a:lnTo>
+                    <a:pt x="3365044" y="737255"/>
+                  </a:lnTo>
+                  <a:lnTo>
+                    <a:pt x="3334529" y="723514"/>
+                  </a:lnTo>
+                  <a:cubicBezTo>
+                    <a:pt x="3324394" y="718943"/>
+                    <a:pt x="3314287" y="714265"/>
+                    <a:pt x="3303733" y="710395"/>
+                  </a:cubicBezTo>
+                  <a:cubicBezTo>
+                    <a:pt x="3262013" y="694346"/>
+                    <a:pt x="3220711" y="677599"/>
+                    <a:pt x="3179033" y="662259"/>
+                  </a:cubicBezTo>
+                  <a:lnTo>
+                    <a:pt x="3052408" y="620447"/>
+                  </a:lnTo>
+                  <a:lnTo>
+                    <a:pt x="2924325" y="584505"/>
+                  </a:lnTo>
+                  <a:cubicBezTo>
+                    <a:pt x="2903106" y="578471"/>
+                    <a:pt x="2881119" y="574434"/>
+                    <a:pt x="2859667" y="569266"/>
+                  </a:cubicBezTo>
+                  <a:lnTo>
+                    <a:pt x="2795226" y="554085"/>
+                  </a:lnTo>
+                  <a:cubicBezTo>
+                    <a:pt x="2774078" y="548652"/>
+                    <a:pt x="2751709" y="544744"/>
+                    <a:pt x="2729702" y="540354"/>
+                  </a:cubicBezTo>
+                  <a:lnTo>
+                    <a:pt x="2663758" y="527322"/>
+                  </a:lnTo>
+                  <a:lnTo>
+                    <a:pt x="2630927" y="520495"/>
+                  </a:lnTo>
+                  <a:lnTo>
+                    <a:pt x="2597965" y="515024"/>
+                  </a:lnTo>
+                  <a:cubicBezTo>
+                    <a:pt x="2575970" y="511449"/>
+                    <a:pt x="2554112" y="507795"/>
+                    <a:pt x="2532205" y="503895"/>
+                  </a:cubicBezTo>
+                  <a:cubicBezTo>
+                    <a:pt x="2357016" y="475037"/>
+                    <a:pt x="2182954" y="456682"/>
+                    <a:pt x="2010064" y="452552"/>
+                  </a:cubicBezTo>
+                  <a:cubicBezTo>
+                    <a:pt x="1837255" y="448558"/>
+                    <a:pt x="1665388" y="457916"/>
+                    <a:pt x="1494552" y="485055"/>
+                  </a:cubicBezTo>
+                  <a:cubicBezTo>
+                    <a:pt x="1452133" y="492816"/>
+                    <a:pt x="1409569" y="501117"/>
+                    <a:pt x="1366896" y="509389"/>
+                  </a:cubicBezTo>
+                  <a:cubicBezTo>
+                    <a:pt x="1324862" y="520035"/>
+                    <a:pt x="1282333" y="529505"/>
+                    <a:pt x="1240175" y="541045"/>
+                  </a:cubicBezTo>
+                  <a:lnTo>
+                    <a:pt x="1177438" y="560170"/>
+                  </a:lnTo>
+                  <a:lnTo>
+                    <a:pt x="1145987" y="569826"/>
+                  </a:lnTo>
+                  <a:lnTo>
+                    <a:pt x="1130315" y="574669"/>
+                  </a:lnTo>
+                  <a:lnTo>
+                    <a:pt x="1114873" y="580384"/>
+                  </a:lnTo>
+                  <a:lnTo>
+                    <a:pt x="1052839" y="602943"/>
+                  </a:lnTo>
+                  <a:cubicBezTo>
+                    <a:pt x="1032151" y="610499"/>
+                    <a:pt x="1011255" y="617535"/>
+                    <a:pt x="991135" y="626866"/>
+                  </a:cubicBezTo>
+                  <a:lnTo>
+                    <a:pt x="930179" y="653191"/>
+                  </a:lnTo>
+                  <a:cubicBezTo>
+                    <a:pt x="909850" y="662002"/>
+                    <a:pt x="889443" y="670676"/>
+                    <a:pt x="869768" y="680937"/>
+                  </a:cubicBezTo>
+                  <a:lnTo>
+                    <a:pt x="810085" y="710734"/>
+                  </a:lnTo>
+                  <a:cubicBezTo>
+                    <a:pt x="790331" y="720859"/>
+                    <a:pt x="770124" y="730514"/>
+                    <a:pt x="751220" y="741794"/>
+                  </a:cubicBezTo>
+                  <a:cubicBezTo>
+                    <a:pt x="673929" y="784955"/>
+                    <a:pt x="598827" y="830326"/>
+                    <a:pt x="532669" y="881688"/>
+                  </a:cubicBezTo>
+                  <a:cubicBezTo>
+                    <a:pt x="464226" y="931625"/>
+                    <a:pt x="406969" y="988270"/>
+                    <a:pt x="354185" y="1050286"/>
+                  </a:cubicBezTo>
+                  <a:lnTo>
+                    <a:pt x="315980" y="1098125"/>
+                  </a:lnTo>
+                  <a:lnTo>
+                    <a:pt x="280345" y="1149782"/>
+                  </a:lnTo>
+                  <a:cubicBezTo>
+                    <a:pt x="268144" y="1166335"/>
+                    <a:pt x="257438" y="1185955"/>
+                    <a:pt x="245890" y="1203959"/>
+                  </a:cubicBezTo>
+                  <a:cubicBezTo>
+                    <a:pt x="234552" y="1222481"/>
+                    <a:pt x="223171" y="1240298"/>
+                    <a:pt x="212162" y="1260184"/>
+                  </a:cubicBezTo>
+                  <a:cubicBezTo>
+                    <a:pt x="168299" y="1337574"/>
+                    <a:pt x="125055" y="1419360"/>
+                    <a:pt x="80716" y="1502476"/>
+                  </a:cubicBezTo>
+                  <a:lnTo>
+                    <a:pt x="0" y="1648841"/>
+                  </a:lnTo>
+                  <a:lnTo>
+                    <a:pt x="0" y="954863"/>
+                  </a:lnTo>
+                  <a:lnTo>
+                    <a:pt x="43491" y="895513"/>
+                  </a:lnTo>
+                  <a:cubicBezTo>
+                    <a:pt x="59888" y="874984"/>
+                    <a:pt x="77014" y="854766"/>
+                    <a:pt x="93923" y="834489"/>
+                  </a:cubicBezTo>
+                  <a:cubicBezTo>
+                    <a:pt x="163245" y="754880"/>
+                    <a:pt x="240806" y="679565"/>
+                    <a:pt x="323465" y="617671"/>
+                  </a:cubicBezTo>
+                  <a:cubicBezTo>
+                    <a:pt x="405002" y="553042"/>
+                    <a:pt x="490132" y="499230"/>
+                    <a:pt x="574777" y="446794"/>
+                  </a:cubicBezTo>
+                  <a:cubicBezTo>
+                    <a:pt x="595733" y="433050"/>
+                    <a:pt x="617442" y="421248"/>
+                    <a:pt x="638943" y="408925"/>
+                  </a:cubicBezTo>
+                  <a:lnTo>
+                    <a:pt x="703505" y="371742"/>
+                  </a:lnTo>
+                  <a:cubicBezTo>
+                    <a:pt x="724798" y="358900"/>
+                    <a:pt x="747120" y="347842"/>
+                    <a:pt x="769262" y="336154"/>
+                  </a:cubicBezTo>
+                  <a:lnTo>
+                    <a:pt x="835552" y="301173"/>
+                  </a:lnTo>
+                  <a:cubicBezTo>
+                    <a:pt x="857427" y="289183"/>
+                    <a:pt x="880470" y="278896"/>
+                    <a:pt x="902979" y="268004"/>
+                  </a:cubicBezTo>
+                  <a:lnTo>
+                    <a:pt x="971127" y="235607"/>
+                  </a:lnTo>
+                  <a:lnTo>
+                    <a:pt x="988238" y="227556"/>
+                  </a:lnTo>
+                  <a:lnTo>
+                    <a:pt x="1005744" y="220191"/>
+                  </a:lnTo>
+                  <a:lnTo>
+                    <a:pt x="1040729" y="205569"/>
+                  </a:lnTo>
+                  <a:lnTo>
+                    <a:pt x="1110835" y="176248"/>
+                  </a:lnTo>
+                  <a:cubicBezTo>
+                    <a:pt x="1157999" y="157703"/>
+                    <a:pt x="1206322" y="141323"/>
+                    <a:pt x="1254256" y="123796"/>
+                  </a:cubicBezTo>
+                  <a:cubicBezTo>
+                    <a:pt x="1302938" y="108671"/>
+                    <a:pt x="1352074" y="94017"/>
+                    <a:pt x="1401310" y="79852"/>
+                  </a:cubicBezTo>
+                  <a:cubicBezTo>
+                    <a:pt x="1599497" y="26774"/>
+                    <a:pt x="1806373" y="-329"/>
+                    <a:pt x="2011811" y="4"/>
+                  </a:cubicBezTo>
+                  <a:close/>
+                </a:path>
+              </a:pathLst>
+            </a:custGeom>
+            <a:gradFill>
+              <a:gsLst>
+                <a:gs pos="2000">
+                  <a:schemeClr val="bg1">
+                    <a:alpha val="10000"/>
+                  </a:schemeClr>
+                </a:gs>
+                <a:gs pos="16000">
+                  <a:schemeClr val="accent6">
+                    <a:alpha val="10000"/>
+                  </a:schemeClr>
+                </a:gs>
+                <a:gs pos="100000">
+                  <a:schemeClr val="bg1">
+                    <a:alpha val="10000"/>
+                  </a:schemeClr>
+                </a:gs>
+                <a:gs pos="85000">
+                  <a:schemeClr val="accent1">
+                    <a:alpha val="10000"/>
+                  </a:schemeClr>
+                </a:gs>
+              </a:gsLst>
+              <a:lin ang="12000000" scaled="0"/>
+            </a:gradFill>
+            <a:ln>
+              <a:noFill/>
+            </a:ln>
+          </p:spPr>
+          <p:style>
+            <a:lnRef idx="2">
+              <a:schemeClr val="accent1">
+                <a:shade val="50000"/>
+              </a:schemeClr>
+            </a:lnRef>
+            <a:fillRef idx="1">
+              <a:schemeClr val="accent1"/>
+            </a:fillRef>
+            <a:effectRef idx="0">
+              <a:schemeClr val="accent1"/>
+            </a:effectRef>
+            <a:fontRef idx="minor">
+              <a:schemeClr val="lt1"/>
+            </a:fontRef>
+          </p:style>
+          <p:txBody>
+            <a:bodyPr wrap="square" rtlCol="0" anchor="ctr">
+              <a:noAutofit/>
+            </a:bodyPr>
+            <a:lstStyle/>
+            <a:p>
+              <a:pPr algn="ctr"/>
+              <a:endParaRPr lang="en-US"/>
+            </a:p>
+          </p:txBody>
+        </p:sp>
+        <p:sp>
+          <p:nvSpPr>
+            <p:cNvPr id="27" name="Freeform: Shape 26">
+              <a:extLst>
+                <a:ext uri="{FF2B5EF4-FFF2-40B4-BE49-F238E27FC236}">
+                  <a16:creationId xmlns:a16="http://schemas.microsoft.com/office/drawing/2014/main" id="{06AC5DCC-C3CC-4FD5-AD4E-13A1BE5F7F68}"/>
+                </a:ext>
+                <a:ext uri="{C183D7F6-B498-43B3-948B-1728B52AA6E4}">
+                  <adec:decorative xmlns:adec="http://schemas.microsoft.com/office/drawing/2017/decorative" val="1"/>
+                </a:ext>
+              </a:extLst>
+            </p:cNvPr>
+            <p:cNvSpPr/>
+            <p:nvPr>
+              <p:extLst>
+                <p:ext uri="{386F3935-93C4-4BCD-93E2-E3B085C9AB24}">
+                  <p16:designElem xmlns:p16="http://schemas.microsoft.com/office/powerpoint/2015/main" val="1"/>
+                </p:ext>
+              </p:extLst>
+            </p:nvPr>
+          </p:nvSpPr>
+          <p:spPr>
+            <a:xfrm>
+              <a:off x="-19220" y="297400"/>
+              <a:ext cx="5215811" cy="6107388"/>
+            </a:xfrm>
+            <a:custGeom>
+              <a:avLst/>
+              <a:gdLst>
+                <a:gd name="connsiteX0" fmla="*/ 1869139 w 5215811"/>
+                <a:gd name="connsiteY0" fmla="*/ 9 h 6107388"/>
+                <a:gd name="connsiteX1" fmla="*/ 2791149 w 5215811"/>
+                <a:gd name="connsiteY1" fmla="*/ 130229 h 6107388"/>
+                <a:gd name="connsiteX2" fmla="*/ 4760307 w 5215811"/>
+                <a:gd name="connsiteY2" fmla="*/ 1608408 h 6107388"/>
+                <a:gd name="connsiteX3" fmla="*/ 5108574 w 5215811"/>
+                <a:gd name="connsiteY3" fmla="*/ 4050383 h 6107388"/>
+                <a:gd name="connsiteX4" fmla="*/ 3434916 w 5215811"/>
+                <a:gd name="connsiteY4" fmla="*/ 5503134 h 6107388"/>
+                <a:gd name="connsiteX5" fmla="*/ 1137841 w 5215811"/>
+                <a:gd name="connsiteY5" fmla="*/ 6033968 h 6107388"/>
+                <a:gd name="connsiteX6" fmla="*/ 217555 w 5215811"/>
+                <a:gd name="connsiteY6" fmla="*/ 5598945 h 6107388"/>
+                <a:gd name="connsiteX7" fmla="*/ 0 w 5215811"/>
+                <a:gd name="connsiteY7" fmla="*/ 5419622 h 6107388"/>
+                <a:gd name="connsiteX8" fmla="*/ 0 w 5215811"/>
+                <a:gd name="connsiteY8" fmla="*/ 4571683 h 6107388"/>
+                <a:gd name="connsiteX9" fmla="*/ 18056 w 5215811"/>
+                <a:gd name="connsiteY9" fmla="*/ 4599282 h 6107388"/>
+                <a:gd name="connsiteX10" fmla="*/ 358324 w 5215811"/>
+                <a:gd name="connsiteY10" fmla="*/ 4988154 h 6107388"/>
+                <a:gd name="connsiteX11" fmla="*/ 1282741 w 5215811"/>
+                <a:gd name="connsiteY11" fmla="*/ 5493193 h 6107388"/>
+                <a:gd name="connsiteX12" fmla="*/ 2172794 w 5215811"/>
+                <a:gd name="connsiteY12" fmla="*/ 5470630 h 6107388"/>
+                <a:gd name="connsiteX13" fmla="*/ 3146893 w 5215811"/>
+                <a:gd name="connsiteY13" fmla="*/ 5016296 h 6107388"/>
+                <a:gd name="connsiteX14" fmla="*/ 3574114 w 5215811"/>
+                <a:gd name="connsiteY14" fmla="*/ 4791124 h 6107388"/>
+                <a:gd name="connsiteX15" fmla="*/ 4244948 w 5215811"/>
+                <a:gd name="connsiteY15" fmla="*/ 4392664 h 6107388"/>
+                <a:gd name="connsiteX16" fmla="*/ 4556385 w 5215811"/>
+                <a:gd name="connsiteY16" fmla="*/ 3902656 h 6107388"/>
+                <a:gd name="connsiteX17" fmla="*/ 4616354 w 5215811"/>
+                <a:gd name="connsiteY17" fmla="*/ 2851680 h 6107388"/>
+                <a:gd name="connsiteX18" fmla="*/ 4269266 w 5215811"/>
+                <a:gd name="connsiteY18" fmla="*/ 1889625 h 6107388"/>
+                <a:gd name="connsiteX19" fmla="*/ 2645976 w 5215811"/>
+                <a:gd name="connsiteY19" fmla="*/ 671162 h 6107388"/>
+                <a:gd name="connsiteX20" fmla="*/ 1648930 w 5215811"/>
+                <a:gd name="connsiteY20" fmla="*/ 573017 h 6107388"/>
+                <a:gd name="connsiteX21" fmla="*/ 771768 w 5215811"/>
+                <a:gd name="connsiteY21" fmla="*/ 865882 h 6107388"/>
+                <a:gd name="connsiteX22" fmla="*/ 433617 w 5215811"/>
+                <a:gd name="connsiteY22" fmla="*/ 1119441 h 6107388"/>
+                <a:gd name="connsiteX23" fmla="*/ 200571 w 5215811"/>
+                <a:gd name="connsiteY23" fmla="*/ 1486480 h 6107388"/>
+                <a:gd name="connsiteX24" fmla="*/ 47077 w 5215811"/>
+                <a:gd name="connsiteY24" fmla="*/ 1753604 h 6107388"/>
+                <a:gd name="connsiteX25" fmla="*/ 0 w 5215811"/>
+                <a:gd name="connsiteY25" fmla="*/ 1831655 h 6107388"/>
+                <a:gd name="connsiteX26" fmla="*/ 0 w 5215811"/>
+                <a:gd name="connsiteY26" fmla="*/ 751112 h 6107388"/>
+                <a:gd name="connsiteX27" fmla="*/ 6994 w 5215811"/>
+                <a:gd name="connsiteY27" fmla="*/ 742614 h 6107388"/>
+                <a:gd name="connsiteX28" fmla="*/ 484047 w 5215811"/>
+                <a:gd name="connsiteY28" fmla="*/ 378777 h 6107388"/>
+                <a:gd name="connsiteX29" fmla="*/ 1869139 w 5215811"/>
+                <a:gd name="connsiteY29" fmla="*/ 9 h 6107388"/>
+              </a:gdLst>
+              <a:ahLst/>
+              <a:cxnLst>
+                <a:cxn ang="0">
+                  <a:pos x="connsiteX0" y="connsiteY0"/>
+                </a:cxn>
+                <a:cxn ang="0">
+                  <a:pos x="connsiteX1" y="connsiteY1"/>
+                </a:cxn>
+                <a:cxn ang="0">
+                  <a:pos x="connsiteX2" y="connsiteY2"/>
+                </a:cxn>
+                <a:cxn ang="0">
+                  <a:pos x="connsiteX3" y="connsiteY3"/>
+                </a:cxn>
+                <a:cxn ang="0">
+                  <a:pos x="connsiteX4" y="connsiteY4"/>
+                </a:cxn>
+                <a:cxn ang="0">
+                  <a:pos x="connsiteX5" y="connsiteY5"/>
+                </a:cxn>
+                <a:cxn ang="0">
+                  <a:pos x="connsiteX6" y="connsiteY6"/>
+                </a:cxn>
+                <a:cxn ang="0">
+                  <a:pos x="connsiteX7" y="connsiteY7"/>
+                </a:cxn>
+                <a:cxn ang="0">
+                  <a:pos x="connsiteX8" y="connsiteY8"/>
+                </a:cxn>
+                <a:cxn ang="0">
+                  <a:pos x="connsiteX9" y="connsiteY9"/>
+                </a:cxn>
+                <a:cxn ang="0">
+                  <a:pos x="connsiteX10" y="connsiteY10"/>
+                </a:cxn>
+                <a:cxn ang="0">
+                  <a:pos x="connsiteX11" y="connsiteY11"/>
+                </a:cxn>
+                <a:cxn ang="0">
+                  <a:pos x="connsiteX12" y="connsiteY12"/>
+                </a:cxn>
+                <a:cxn ang="0">
+                  <a:pos x="connsiteX13" y="connsiteY13"/>
+                </a:cxn>
+                <a:cxn ang="0">
+                  <a:pos x="connsiteX14" y="connsiteY14"/>
+                </a:cxn>
+                <a:cxn ang="0">
+                  <a:pos x="connsiteX15" y="connsiteY15"/>
+                </a:cxn>
+                <a:cxn ang="0">
+                  <a:pos x="connsiteX16" y="connsiteY16"/>
+                </a:cxn>
+                <a:cxn ang="0">
+                  <a:pos x="connsiteX17" y="connsiteY17"/>
+                </a:cxn>
+                <a:cxn ang="0">
+                  <a:pos x="connsiteX18" y="connsiteY18"/>
+                </a:cxn>
+                <a:cxn ang="0">
+                  <a:pos x="connsiteX19" y="connsiteY19"/>
+                </a:cxn>
+                <a:cxn ang="0">
+                  <a:pos x="connsiteX20" y="connsiteY20"/>
+                </a:cxn>
+                <a:cxn ang="0">
+                  <a:pos x="connsiteX21" y="connsiteY21"/>
+                </a:cxn>
+                <a:cxn ang="0">
+                  <a:pos x="connsiteX22" y="connsiteY22"/>
+                </a:cxn>
+                <a:cxn ang="0">
+                  <a:pos x="connsiteX23" y="connsiteY23"/>
+                </a:cxn>
+                <a:cxn ang="0">
+                  <a:pos x="connsiteX24" y="connsiteY24"/>
+                </a:cxn>
+                <a:cxn ang="0">
+                  <a:pos x="connsiteX25" y="connsiteY25"/>
+                </a:cxn>
+                <a:cxn ang="0">
+                  <a:pos x="connsiteX26" y="connsiteY26"/>
+                </a:cxn>
+                <a:cxn ang="0">
+                  <a:pos x="connsiteX27" y="connsiteY27"/>
+                </a:cxn>
+                <a:cxn ang="0">
+                  <a:pos x="connsiteX28" y="connsiteY28"/>
+                </a:cxn>
+                <a:cxn ang="0">
+                  <a:pos x="connsiteX29" y="connsiteY29"/>
+                </a:cxn>
+              </a:cxnLst>
+              <a:rect l="l" t="t" r="r" b="b"/>
+              <a:pathLst>
+                <a:path w="5215811" h="6107388">
+                  <a:moveTo>
+                    <a:pt x="1869139" y="9"/>
+                  </a:moveTo>
+                  <a:cubicBezTo>
+                    <a:pt x="2160924" y="-706"/>
+                    <a:pt x="2465752" y="43039"/>
+                    <a:pt x="2791149" y="130229"/>
+                  </a:cubicBezTo>
+                  <a:cubicBezTo>
+                    <a:pt x="3651198" y="360678"/>
+                    <a:pt x="4339884" y="907924"/>
+                    <a:pt x="4760307" y="1608408"/>
+                  </a:cubicBezTo>
+                  <a:cubicBezTo>
+                    <a:pt x="5188180" y="2321320"/>
+                    <a:pt x="5338357" y="3192822"/>
+                    <a:pt x="5108574" y="4050383"/>
+                  </a:cubicBezTo>
+                  <a:cubicBezTo>
+                    <a:pt x="4880820" y="4900373"/>
+                    <a:pt x="4152841" y="5098512"/>
+                    <a:pt x="3434916" y="5503134"/>
+                  </a:cubicBezTo>
+                  <a:cubicBezTo>
+                    <a:pt x="2717099" y="5907783"/>
+                    <a:pt x="2005568" y="6266474"/>
+                    <a:pt x="1137841" y="6033968"/>
+                  </a:cubicBezTo>
+                  <a:cubicBezTo>
+                    <a:pt x="783079" y="5938910"/>
+                    <a:pt x="479573" y="5790114"/>
+                    <a:pt x="217555" y="5598945"/>
+                  </a:cubicBezTo>
+                  <a:lnTo>
+                    <a:pt x="0" y="5419622"/>
+                  </a:lnTo>
+                  <a:lnTo>
+                    <a:pt x="0" y="4571683"/>
+                  </a:lnTo>
+                  <a:lnTo>
+                    <a:pt x="18056" y="4599282"/>
+                  </a:lnTo>
+                  <a:cubicBezTo>
+                    <a:pt x="124071" y="4746782"/>
+                    <a:pt x="237002" y="4875718"/>
+                    <a:pt x="358324" y="4988154"/>
+                  </a:cubicBezTo>
+                  <a:cubicBezTo>
+                    <a:pt x="621323" y="5231809"/>
+                    <a:pt x="923667" y="5396979"/>
+                    <a:pt x="1282741" y="5493193"/>
+                  </a:cubicBezTo>
+                  <a:cubicBezTo>
+                    <a:pt x="1573894" y="5571207"/>
+                    <a:pt x="1856732" y="5563878"/>
+                    <a:pt x="2172794" y="5470630"/>
+                  </a:cubicBezTo>
+                  <a:cubicBezTo>
+                    <a:pt x="2498985" y="5374183"/>
+                    <a:pt x="2832844" y="5193315"/>
+                    <a:pt x="3146893" y="5016296"/>
+                  </a:cubicBezTo>
+                  <a:cubicBezTo>
+                    <a:pt x="3293538" y="4933641"/>
+                    <a:pt x="3436182" y="4861160"/>
+                    <a:pt x="3574114" y="4791124"/>
+                  </a:cubicBezTo>
+                  <a:cubicBezTo>
+                    <a:pt x="3841238" y="4655550"/>
+                    <a:pt x="4071901" y="4538375"/>
+                    <a:pt x="4244948" y="4392664"/>
+                  </a:cubicBezTo>
+                  <a:cubicBezTo>
+                    <a:pt x="4405844" y="4257259"/>
+                    <a:pt x="4501845" y="4106204"/>
+                    <a:pt x="4556385" y="3902656"/>
+                  </a:cubicBezTo>
+                  <a:cubicBezTo>
+                    <a:pt x="4649063" y="3556776"/>
+                    <a:pt x="4669271" y="3203187"/>
+                    <a:pt x="4616354" y="2851680"/>
+                  </a:cubicBezTo>
+                  <a:cubicBezTo>
+                    <a:pt x="4565198" y="2511774"/>
+                    <a:pt x="4448474" y="2188147"/>
+                    <a:pt x="4269266" y="1889625"/>
+                  </a:cubicBezTo>
+                  <a:cubicBezTo>
+                    <a:pt x="3907781" y="1287586"/>
+                    <a:pt x="3331245" y="854780"/>
+                    <a:pt x="2645976" y="671162"/>
+                  </a:cubicBezTo>
+                  <a:cubicBezTo>
+                    <a:pt x="2278249" y="572630"/>
+                    <a:pt x="1952074" y="540526"/>
+                    <a:pt x="1648930" y="573017"/>
+                  </a:cubicBezTo>
+                  <a:cubicBezTo>
+                    <a:pt x="1351746" y="604901"/>
+                    <a:pt x="1064785" y="700731"/>
+                    <a:pt x="771768" y="865882"/>
+                  </a:cubicBezTo>
+                  <a:cubicBezTo>
+                    <a:pt x="568061" y="980657"/>
+                    <a:pt x="486465" y="1058486"/>
+                    <a:pt x="433617" y="1119441"/>
+                  </a:cubicBezTo>
+                  <a:cubicBezTo>
+                    <a:pt x="358307" y="1206256"/>
+                    <a:pt x="292149" y="1323808"/>
+                    <a:pt x="200571" y="1486480"/>
+                  </a:cubicBezTo>
+                  <a:cubicBezTo>
+                    <a:pt x="156644" y="1564432"/>
+                    <a:pt x="106654" y="1653214"/>
+                    <a:pt x="47077" y="1753604"/>
+                  </a:cubicBezTo>
+                  <a:lnTo>
+                    <a:pt x="0" y="1831655"/>
+                  </a:lnTo>
+                  <a:lnTo>
+                    <a:pt x="0" y="751112"/>
+                  </a:lnTo>
+                  <a:lnTo>
+                    <a:pt x="6994" y="742614"/>
+                  </a:lnTo>
+                  <a:cubicBezTo>
+                    <a:pt x="117721" y="617683"/>
+                    <a:pt x="259696" y="505222"/>
+                    <a:pt x="484047" y="378777"/>
+                  </a:cubicBezTo>
+                  <a:cubicBezTo>
+                    <a:pt x="932751" y="125890"/>
+                    <a:pt x="1382831" y="1200"/>
+                    <a:pt x="1869139" y="9"/>
+                  </a:cubicBezTo>
+                  <a:close/>
+                </a:path>
+              </a:pathLst>
+            </a:custGeom>
+            <a:gradFill>
+              <a:gsLst>
+                <a:gs pos="2000">
+                  <a:schemeClr val="bg1">
+                    <a:alpha val="10000"/>
+                  </a:schemeClr>
+                </a:gs>
+                <a:gs pos="16000">
+                  <a:schemeClr val="accent6">
+                    <a:alpha val="10000"/>
+                  </a:schemeClr>
+                </a:gs>
+                <a:gs pos="100000">
+                  <a:schemeClr val="bg1">
+                    <a:alpha val="10000"/>
+                  </a:schemeClr>
+                </a:gs>
+                <a:gs pos="85000">
+                  <a:schemeClr val="accent1">
+                    <a:alpha val="10000"/>
+                  </a:schemeClr>
+                </a:gs>
+              </a:gsLst>
+              <a:lin ang="12000000" scaled="0"/>
+            </a:gradFill>
+            <a:ln>
+              <a:noFill/>
+            </a:ln>
+          </p:spPr>
+          <p:style>
+            <a:lnRef idx="2">
+              <a:schemeClr val="accent1">
+                <a:shade val="50000"/>
+              </a:schemeClr>
+            </a:lnRef>
+            <a:fillRef idx="1">
+              <a:schemeClr val="accent1"/>
+            </a:fillRef>
+            <a:effectRef idx="0">
+              <a:schemeClr val="accent1"/>
+            </a:effectRef>
+            <a:fontRef idx="minor">
+              <a:schemeClr val="lt1"/>
+            </a:fontRef>
+          </p:style>
+          <p:txBody>
+            <a:bodyPr wrap="square" rtlCol="0" anchor="ctr">
+              <a:noAutofit/>
+            </a:bodyPr>
+            <a:lstStyle/>
+            <a:p>
+              <a:pPr algn="ctr"/>
+              <a:endParaRPr lang="en-US"/>
+            </a:p>
+          </p:txBody>
+        </p:sp>
+        <p:sp>
+          <p:nvSpPr>
+            <p:cNvPr id="17" name="Freeform: Shape 16">
+              <a:extLst>
+                <a:ext uri="{FF2B5EF4-FFF2-40B4-BE49-F238E27FC236}">
+                  <a16:creationId xmlns:a16="http://schemas.microsoft.com/office/drawing/2014/main" id="{4BBCC2F4-EFA7-4AF4-B538-AC4022D90F47}"/>
+                </a:ext>
+                <a:ext uri="{C183D7F6-B498-43B3-948B-1728B52AA6E4}">
+                  <adec:decorative xmlns:adec="http://schemas.microsoft.com/office/drawing/2017/decorative" val="1"/>
+                </a:ext>
+              </a:extLst>
+            </p:cNvPr>
+            <p:cNvSpPr/>
+            <p:nvPr>
+              <p:extLst>
+                <p:ext uri="{386F3935-93C4-4BCD-93E2-E3B085C9AB24}">
+                  <p16:designElem xmlns:p16="http://schemas.microsoft.com/office/powerpoint/2015/main" val="1"/>
+                </p:ext>
+              </p:extLst>
+            </p:nvPr>
+          </p:nvSpPr>
+          <p:spPr>
+            <a:xfrm>
+              <a:off x="-19221" y="319367"/>
+              <a:ext cx="5217956" cy="6100079"/>
+            </a:xfrm>
+            <a:custGeom>
+              <a:avLst/>
+              <a:gdLst>
+                <a:gd name="connsiteX0" fmla="*/ 1951393 w 5217956"/>
+                <a:gd name="connsiteY0" fmla="*/ 82 h 6100079"/>
+                <a:gd name="connsiteX1" fmla="*/ 2855177 w 5217956"/>
+                <a:gd name="connsiteY1" fmla="*/ 125419 h 6100079"/>
+                <a:gd name="connsiteX2" fmla="*/ 4779341 w 5217956"/>
+                <a:gd name="connsiteY2" fmla="*/ 1591542 h 6100079"/>
+                <a:gd name="connsiteX3" fmla="*/ 5108573 w 5217956"/>
+                <a:gd name="connsiteY3" fmla="*/ 4028416 h 6100079"/>
+                <a:gd name="connsiteX4" fmla="*/ 3459358 w 5217956"/>
+                <a:gd name="connsiteY4" fmla="*/ 5487716 h 6100079"/>
+                <a:gd name="connsiteX5" fmla="*/ 1203274 w 5217956"/>
+                <a:gd name="connsiteY5" fmla="*/ 6029534 h 6100079"/>
+                <a:gd name="connsiteX6" fmla="*/ 59920 w 5217956"/>
+                <a:gd name="connsiteY6" fmla="*/ 5396467 h 6100079"/>
+                <a:gd name="connsiteX7" fmla="*/ 0 w 5217956"/>
+                <a:gd name="connsiteY7" fmla="*/ 5333382 h 6100079"/>
+                <a:gd name="connsiteX8" fmla="*/ 0 w 5217956"/>
+                <a:gd name="connsiteY8" fmla="*/ 4205833 h 6100079"/>
+                <a:gd name="connsiteX9" fmla="*/ 58036 w 5217956"/>
+                <a:gd name="connsiteY9" fmla="*/ 4310048 h 6100079"/>
+                <a:gd name="connsiteX10" fmla="*/ 520779 w 5217956"/>
+                <a:gd name="connsiteY10" fmla="*/ 4907591 h 6100079"/>
+                <a:gd name="connsiteX11" fmla="*/ 1377154 w 5217956"/>
+                <a:gd name="connsiteY11" fmla="*/ 5380604 h 6100079"/>
+                <a:gd name="connsiteX12" fmla="*/ 3123340 w 5217956"/>
+                <a:gd name="connsiteY12" fmla="*/ 4905715 h 6100079"/>
+                <a:gd name="connsiteX13" fmla="*/ 3547863 w 5217956"/>
+                <a:gd name="connsiteY13" fmla="*/ 4676342 h 6100079"/>
+                <a:gd name="connsiteX14" fmla="*/ 4186753 w 5217956"/>
+                <a:gd name="connsiteY14" fmla="*/ 4289376 h 6100079"/>
+                <a:gd name="connsiteX15" fmla="*/ 4459565 w 5217956"/>
+                <a:gd name="connsiteY15" fmla="*/ 3854399 h 6100079"/>
+                <a:gd name="connsiteX16" fmla="*/ 4521015 w 5217956"/>
+                <a:gd name="connsiteY16" fmla="*/ 2849377 h 6100079"/>
+                <a:gd name="connsiteX17" fmla="*/ 4199723 w 5217956"/>
+                <a:gd name="connsiteY17" fmla="*/ 1931213 h 6100079"/>
+                <a:gd name="connsiteX18" fmla="*/ 2681217 w 5217956"/>
+                <a:gd name="connsiteY18" fmla="*/ 774211 h 6100079"/>
+                <a:gd name="connsiteX19" fmla="*/ 926547 w 5217956"/>
+                <a:gd name="connsiteY19" fmla="*/ 967112 h 6100079"/>
+                <a:gd name="connsiteX20" fmla="*/ 622677 w 5217956"/>
+                <a:gd name="connsiteY20" fmla="*/ 1197863 h 6100079"/>
+                <a:gd name="connsiteX21" fmla="*/ 404892 w 5217956"/>
+                <a:gd name="connsiteY21" fmla="*/ 1547314 h 6100079"/>
+                <a:gd name="connsiteX22" fmla="*/ 40135 w 5217956"/>
+                <a:gd name="connsiteY22" fmla="*/ 2159090 h 6100079"/>
+                <a:gd name="connsiteX23" fmla="*/ 0 w 5217956"/>
+                <a:gd name="connsiteY23" fmla="*/ 2219367 h 6100079"/>
+                <a:gd name="connsiteX24" fmla="*/ 0 w 5217956"/>
+                <a:gd name="connsiteY24" fmla="*/ 915659 h 6100079"/>
+                <a:gd name="connsiteX25" fmla="*/ 58609 w 5217956"/>
+                <a:gd name="connsiteY25" fmla="*/ 828051 h 6100079"/>
+                <a:gd name="connsiteX26" fmla="*/ 590688 w 5217956"/>
+                <a:gd name="connsiteY26" fmla="*/ 385385 h 6100079"/>
+                <a:gd name="connsiteX27" fmla="*/ 1951393 w 5217956"/>
+                <a:gd name="connsiteY27" fmla="*/ 82 h 6100079"/>
+              </a:gdLst>
+              <a:ahLst/>
+              <a:cxnLst>
+                <a:cxn ang="0">
+                  <a:pos x="connsiteX0" y="connsiteY0"/>
+                </a:cxn>
+                <a:cxn ang="0">
+                  <a:pos x="connsiteX1" y="connsiteY1"/>
+                </a:cxn>
+                <a:cxn ang="0">
+                  <a:pos x="connsiteX2" y="connsiteY2"/>
+                </a:cxn>
+                <a:cxn ang="0">
+                  <a:pos x="connsiteX3" y="connsiteY3"/>
+                </a:cxn>
+                <a:cxn ang="0">
+                  <a:pos x="connsiteX4" y="connsiteY4"/>
+                </a:cxn>
+                <a:cxn ang="0">
+                  <a:pos x="connsiteX5" y="connsiteY5"/>
+                </a:cxn>
+                <a:cxn ang="0">
+                  <a:pos x="connsiteX6" y="connsiteY6"/>
+                </a:cxn>
+                <a:cxn ang="0">
+                  <a:pos x="connsiteX7" y="connsiteY7"/>
+                </a:cxn>
+                <a:cxn ang="0">
+                  <a:pos x="connsiteX8" y="connsiteY8"/>
+                </a:cxn>
+                <a:cxn ang="0">
+                  <a:pos x="connsiteX9" y="connsiteY9"/>
+                </a:cxn>
+                <a:cxn ang="0">
+                  <a:pos x="connsiteX10" y="connsiteY10"/>
+                </a:cxn>
+                <a:cxn ang="0">
+                  <a:pos x="connsiteX11" y="connsiteY11"/>
+                </a:cxn>
+                <a:cxn ang="0">
+                  <a:pos x="connsiteX12" y="connsiteY12"/>
+                </a:cxn>
+                <a:cxn ang="0">
+                  <a:pos x="connsiteX13" y="connsiteY13"/>
+                </a:cxn>
+                <a:cxn ang="0">
+                  <a:pos x="connsiteX14" y="connsiteY14"/>
+                </a:cxn>
+                <a:cxn ang="0">
+                  <a:pos x="connsiteX15" y="connsiteY15"/>
+                </a:cxn>
+                <a:cxn ang="0">
+                  <a:pos x="connsiteX16" y="connsiteY16"/>
+                </a:cxn>
+                <a:cxn ang="0">
+                  <a:pos x="connsiteX17" y="connsiteY17"/>
+                </a:cxn>
+                <a:cxn ang="0">
+                  <a:pos x="connsiteX18" y="connsiteY18"/>
+                </a:cxn>
+                <a:cxn ang="0">
+                  <a:pos x="connsiteX19" y="connsiteY19"/>
+                </a:cxn>
+                <a:cxn ang="0">
+                  <a:pos x="connsiteX20" y="connsiteY20"/>
+                </a:cxn>
+                <a:cxn ang="0">
+                  <a:pos x="connsiteX21" y="connsiteY21"/>
+                </a:cxn>
+                <a:cxn ang="0">
+                  <a:pos x="connsiteX22" y="connsiteY22"/>
+                </a:cxn>
+                <a:cxn ang="0">
+                  <a:pos x="connsiteX23" y="connsiteY23"/>
+                </a:cxn>
+                <a:cxn ang="0">
+                  <a:pos x="connsiteX24" y="connsiteY24"/>
+                </a:cxn>
+                <a:cxn ang="0">
+                  <a:pos x="connsiteX25" y="connsiteY25"/>
+                </a:cxn>
+                <a:cxn ang="0">
+                  <a:pos x="connsiteX26" y="connsiteY26"/>
+                </a:cxn>
+                <a:cxn ang="0">
+                  <a:pos x="connsiteX27" y="connsiteY27"/>
+                </a:cxn>
+              </a:cxnLst>
+              <a:rect l="l" t="t" r="r" b="b"/>
+              <a:pathLst>
+                <a:path w="5217956" h="6100079">
+                  <a:moveTo>
+                    <a:pt x="1951393" y="82"/>
+                  </a:moveTo>
+                  <a:cubicBezTo>
+                    <a:pt x="2237631" y="-2119"/>
+                    <a:pt x="2536431" y="40011"/>
+                    <a:pt x="2855177" y="125419"/>
+                  </a:cubicBezTo>
+                  <a:cubicBezTo>
+                    <a:pt x="3697704" y="351173"/>
+                    <a:pt x="4370490" y="894159"/>
+                    <a:pt x="4779341" y="1591542"/>
+                  </a:cubicBezTo>
+                  <a:cubicBezTo>
+                    <a:pt x="5195534" y="2301324"/>
+                    <a:pt x="5338356" y="3170855"/>
+                    <a:pt x="5108573" y="4028416"/>
+                  </a:cubicBezTo>
+                  <a:cubicBezTo>
+                    <a:pt x="4880819" y="4878406"/>
+                    <a:pt x="4165603" y="5079965"/>
+                    <a:pt x="3459358" y="5487716"/>
+                  </a:cubicBezTo>
+                  <a:cubicBezTo>
+                    <a:pt x="2753114" y="5895466"/>
+                    <a:pt x="2053264" y="6257288"/>
+                    <a:pt x="1203274" y="6029534"/>
+                  </a:cubicBezTo>
+                  <a:cubicBezTo>
+                    <a:pt x="739884" y="5905369"/>
+                    <a:pt x="366399" y="5685345"/>
+                    <a:pt x="59920" y="5396467"/>
+                  </a:cubicBezTo>
+                  <a:lnTo>
+                    <a:pt x="0" y="5333382"/>
+                  </a:lnTo>
+                  <a:lnTo>
+                    <a:pt x="0" y="4205833"/>
+                  </a:lnTo>
+                  <a:lnTo>
+                    <a:pt x="58036" y="4310048"/>
+                  </a:lnTo>
+                  <a:cubicBezTo>
+                    <a:pt x="197935" y="4550245"/>
+                    <a:pt x="350594" y="4747142"/>
+                    <a:pt x="520779" y="4907591"/>
+                  </a:cubicBezTo>
+                  <a:cubicBezTo>
+                    <a:pt x="763600" y="5136565"/>
+                    <a:pt x="1043821" y="5291288"/>
+                    <a:pt x="1377154" y="5380604"/>
+                  </a:cubicBezTo>
+                  <a:cubicBezTo>
+                    <a:pt x="1963029" y="5537589"/>
+                    <a:pt x="2470519" y="5282804"/>
+                    <a:pt x="3123340" y="4905715"/>
+                  </a:cubicBezTo>
+                  <a:cubicBezTo>
+                    <a:pt x="3269800" y="4821157"/>
+                    <a:pt x="3411134" y="4747512"/>
+                    <a:pt x="3547863" y="4676342"/>
+                  </a:cubicBezTo>
+                  <a:cubicBezTo>
+                    <a:pt x="3804497" y="4542710"/>
+                    <a:pt x="4026085" y="4427393"/>
+                    <a:pt x="4186753" y="4289376"/>
+                  </a:cubicBezTo>
+                  <a:cubicBezTo>
+                    <a:pt x="4329009" y="4167293"/>
+                    <a:pt x="4410589" y="4037181"/>
+                    <a:pt x="4459565" y="3854399"/>
+                  </a:cubicBezTo>
+                  <a:cubicBezTo>
+                    <a:pt x="4548302" y="3523229"/>
+                    <a:pt x="4568981" y="3185183"/>
+                    <a:pt x="4521015" y="2849377"/>
+                  </a:cubicBezTo>
+                  <a:cubicBezTo>
+                    <a:pt x="4474709" y="2524680"/>
+                    <a:pt x="4366564" y="2215756"/>
+                    <a:pt x="4199723" y="1931213"/>
+                  </a:cubicBezTo>
+                  <a:cubicBezTo>
+                    <a:pt x="3863270" y="1357325"/>
+                    <a:pt x="3323982" y="946439"/>
+                    <a:pt x="2681217" y="774211"/>
+                  </a:cubicBezTo>
+                  <a:cubicBezTo>
+                    <a:pt x="2001139" y="591984"/>
+                    <a:pt x="1476322" y="649699"/>
+                    <a:pt x="926547" y="967112"/>
+                  </a:cubicBezTo>
+                  <a:cubicBezTo>
+                    <a:pt x="740730" y="1074393"/>
+                    <a:pt x="668642" y="1143989"/>
+                    <a:pt x="622677" y="1197863"/>
+                  </a:cubicBezTo>
+                  <a:cubicBezTo>
+                    <a:pt x="555599" y="1276450"/>
+                    <a:pt x="492360" y="1390031"/>
+                    <a:pt x="404892" y="1547314"/>
+                  </a:cubicBezTo>
+                  <a:cubicBezTo>
+                    <a:pt x="317047" y="1705133"/>
+                    <a:pt x="204816" y="1906756"/>
+                    <a:pt x="40135" y="2159090"/>
+                  </a:cubicBezTo>
+                  <a:lnTo>
+                    <a:pt x="0" y="2219367"/>
+                  </a:lnTo>
+                  <a:lnTo>
+                    <a:pt x="0" y="915659"/>
+                  </a:lnTo>
+                  <a:lnTo>
+                    <a:pt x="58609" y="828051"/>
+                  </a:lnTo>
+                  <a:cubicBezTo>
+                    <a:pt x="177453" y="670481"/>
+                    <a:pt x="325846" y="538291"/>
+                    <a:pt x="590688" y="385385"/>
+                  </a:cubicBezTo>
+                  <a:cubicBezTo>
+                    <a:pt x="1032158" y="130559"/>
+                    <a:pt x="1474329" y="3750"/>
+                    <a:pt x="1951393" y="82"/>
+                  </a:cubicBezTo>
+                  <a:close/>
+                </a:path>
+              </a:pathLst>
+            </a:custGeom>
+            <a:gradFill>
+              <a:gsLst>
+                <a:gs pos="2000">
+                  <a:schemeClr val="bg1">
+                    <a:alpha val="10000"/>
+                  </a:schemeClr>
+                </a:gs>
+                <a:gs pos="16000">
+                  <a:schemeClr val="accent6">
+                    <a:alpha val="10000"/>
+                  </a:schemeClr>
+                </a:gs>
+                <a:gs pos="100000">
+                  <a:schemeClr val="bg1">
+                    <a:alpha val="10000"/>
+                  </a:schemeClr>
+                </a:gs>
+                <a:gs pos="85000">
+                  <a:schemeClr val="accent1">
+                    <a:alpha val="10000"/>
+                  </a:schemeClr>
+                </a:gs>
+              </a:gsLst>
+              <a:lin ang="12000000" scaled="0"/>
+            </a:gradFill>
+            <a:ln>
+              <a:noFill/>
+            </a:ln>
+          </p:spPr>
+          <p:style>
+            <a:lnRef idx="2">
+              <a:schemeClr val="accent1">
+                <a:shade val="50000"/>
+              </a:schemeClr>
+            </a:lnRef>
+            <a:fillRef idx="1">
+              <a:schemeClr val="accent1"/>
+            </a:fillRef>
+            <a:effectRef idx="0">
+              <a:schemeClr val="accent1"/>
+            </a:effectRef>
+            <a:fontRef idx="minor">
+              <a:schemeClr val="lt1"/>
+            </a:fontRef>
+          </p:style>
+          <p:txBody>
+            <a:bodyPr wrap="square" rtlCol="0" anchor="ctr">
+              <a:noAutofit/>
+            </a:bodyPr>
+            <a:lstStyle/>
+            <a:p>
+              <a:pPr algn="ctr"/>
+              <a:endParaRPr lang="en-US"/>
+            </a:p>
+          </p:txBody>
+        </p:sp>
+        <p:sp>
+          <p:nvSpPr>
+            <p:cNvPr id="28" name="Freeform: Shape 27">
+              <a:extLst>
+                <a:ext uri="{FF2B5EF4-FFF2-40B4-BE49-F238E27FC236}">
+                  <a16:creationId xmlns:a16="http://schemas.microsoft.com/office/drawing/2014/main" id="{2A9D1364-B6A3-44CB-9FBA-C528F0CE909D}"/>
+                </a:ext>
+                <a:ext uri="{C183D7F6-B498-43B3-948B-1728B52AA6E4}">
+                  <adec:decorative xmlns:adec="http://schemas.microsoft.com/office/drawing/2017/decorative" val="1"/>
+                </a:ext>
+              </a:extLst>
+            </p:cNvPr>
+            <p:cNvSpPr/>
+            <p:nvPr>
+              <p:extLst>
+                <p:ext uri="{386F3935-93C4-4BCD-93E2-E3B085C9AB24}">
+                  <p16:designElem xmlns:p16="http://schemas.microsoft.com/office/powerpoint/2015/main" val="1"/>
+                </p:ext>
+              </p:extLst>
+            </p:nvPr>
+          </p:nvSpPr>
+          <p:spPr>
+            <a:xfrm>
+              <a:off x="-19220" y="319367"/>
+              <a:ext cx="5217957" cy="6100079"/>
+            </a:xfrm>
+            <a:custGeom>
+              <a:avLst/>
+              <a:gdLst>
+                <a:gd name="connsiteX0" fmla="*/ 1951394 w 5217957"/>
+                <a:gd name="connsiteY0" fmla="*/ 82 h 6100079"/>
+                <a:gd name="connsiteX1" fmla="*/ 2855178 w 5217957"/>
+                <a:gd name="connsiteY1" fmla="*/ 125419 h 6100079"/>
+                <a:gd name="connsiteX2" fmla="*/ 4779341 w 5217957"/>
+                <a:gd name="connsiteY2" fmla="*/ 1591542 h 6100079"/>
+                <a:gd name="connsiteX3" fmla="*/ 5108574 w 5217957"/>
+                <a:gd name="connsiteY3" fmla="*/ 4028416 h 6100079"/>
+                <a:gd name="connsiteX4" fmla="*/ 3459359 w 5217957"/>
+                <a:gd name="connsiteY4" fmla="*/ 5487716 h 6100079"/>
+                <a:gd name="connsiteX5" fmla="*/ 1203275 w 5217957"/>
+                <a:gd name="connsiteY5" fmla="*/ 6029534 h 6100079"/>
+                <a:gd name="connsiteX6" fmla="*/ 59921 w 5217957"/>
+                <a:gd name="connsiteY6" fmla="*/ 5396467 h 6100079"/>
+                <a:gd name="connsiteX7" fmla="*/ 0 w 5217957"/>
+                <a:gd name="connsiteY7" fmla="*/ 5333381 h 6100079"/>
+                <a:gd name="connsiteX8" fmla="*/ 0 w 5217957"/>
+                <a:gd name="connsiteY8" fmla="*/ 4427327 h 6100079"/>
+                <a:gd name="connsiteX9" fmla="*/ 112056 w 5217957"/>
+                <a:gd name="connsiteY9" fmla="*/ 4602502 h 6100079"/>
+                <a:gd name="connsiteX10" fmla="*/ 443875 w 5217957"/>
+                <a:gd name="connsiteY10" fmla="*/ 4989110 h 6100079"/>
+                <a:gd name="connsiteX11" fmla="*/ 1348175 w 5217957"/>
+                <a:gd name="connsiteY11" fmla="*/ 5488759 h 6100079"/>
+                <a:gd name="connsiteX12" fmla="*/ 2221463 w 5217957"/>
+                <a:gd name="connsiteY12" fmla="*/ 5461704 h 6100079"/>
+                <a:gd name="connsiteX13" fmla="*/ 3179339 w 5217957"/>
+                <a:gd name="connsiteY13" fmla="*/ 5003023 h 6100079"/>
+                <a:gd name="connsiteX14" fmla="*/ 3599638 w 5217957"/>
+                <a:gd name="connsiteY14" fmla="*/ 4775996 h 6100079"/>
+                <a:gd name="connsiteX15" fmla="*/ 4259765 w 5217957"/>
+                <a:gd name="connsiteY15" fmla="*/ 4374667 h 6100079"/>
+                <a:gd name="connsiteX16" fmla="*/ 4567742 w 5217957"/>
+                <a:gd name="connsiteY16" fmla="*/ 3883732 h 6100079"/>
+                <a:gd name="connsiteX17" fmla="*/ 4631929 w 5217957"/>
+                <a:gd name="connsiteY17" fmla="*/ 2833886 h 6100079"/>
+                <a:gd name="connsiteX18" fmla="*/ 4296412 w 5217957"/>
+                <a:gd name="connsiteY18" fmla="*/ 1874932 h 6100079"/>
+                <a:gd name="connsiteX19" fmla="*/ 2710219 w 5217957"/>
+                <a:gd name="connsiteY19" fmla="*/ 666410 h 6100079"/>
+                <a:gd name="connsiteX20" fmla="*/ 1732642 w 5217957"/>
+                <a:gd name="connsiteY20" fmla="*/ 573480 h 6100079"/>
+                <a:gd name="connsiteX21" fmla="*/ 870621 w 5217957"/>
+                <a:gd name="connsiteY21" fmla="*/ 870402 h 6100079"/>
+                <a:gd name="connsiteX22" fmla="*/ 537555 w 5217957"/>
+                <a:gd name="connsiteY22" fmla="*/ 1125324 h 6100079"/>
+                <a:gd name="connsiteX23" fmla="*/ 306995 w 5217957"/>
+                <a:gd name="connsiteY23" fmla="*/ 1493030 h 6100079"/>
+                <a:gd name="connsiteX24" fmla="*/ 23579 w 5217957"/>
+                <a:gd name="connsiteY24" fmla="*/ 1977465 h 6100079"/>
+                <a:gd name="connsiteX25" fmla="*/ 0 w 5217957"/>
+                <a:gd name="connsiteY25" fmla="*/ 2014291 h 6100079"/>
+                <a:gd name="connsiteX26" fmla="*/ 0 w 5217957"/>
+                <a:gd name="connsiteY26" fmla="*/ 915660 h 6100079"/>
+                <a:gd name="connsiteX27" fmla="*/ 58609 w 5217957"/>
+                <a:gd name="connsiteY27" fmla="*/ 828051 h 6100079"/>
+                <a:gd name="connsiteX28" fmla="*/ 590689 w 5217957"/>
+                <a:gd name="connsiteY28" fmla="*/ 385385 h 6100079"/>
+                <a:gd name="connsiteX29" fmla="*/ 1951394 w 5217957"/>
+                <a:gd name="connsiteY29" fmla="*/ 82 h 6100079"/>
+              </a:gdLst>
+              <a:ahLst/>
+              <a:cxnLst>
+                <a:cxn ang="0">
+                  <a:pos x="connsiteX0" y="connsiteY0"/>
+                </a:cxn>
+                <a:cxn ang="0">
+                  <a:pos x="connsiteX1" y="connsiteY1"/>
+                </a:cxn>
+                <a:cxn ang="0">
+                  <a:pos x="connsiteX2" y="connsiteY2"/>
+                </a:cxn>
+                <a:cxn ang="0">
+                  <a:pos x="connsiteX3" y="connsiteY3"/>
+                </a:cxn>
+                <a:cxn ang="0">
+                  <a:pos x="connsiteX4" y="connsiteY4"/>
+                </a:cxn>
+                <a:cxn ang="0">
+                  <a:pos x="connsiteX5" y="connsiteY5"/>
+                </a:cxn>
+                <a:cxn ang="0">
+                  <a:pos x="connsiteX6" y="connsiteY6"/>
+                </a:cxn>
+                <a:cxn ang="0">
+                  <a:pos x="connsiteX7" y="connsiteY7"/>
+                </a:cxn>
+                <a:cxn ang="0">
+                  <a:pos x="connsiteX8" y="connsiteY8"/>
+                </a:cxn>
+                <a:cxn ang="0">
+                  <a:pos x="connsiteX9" y="connsiteY9"/>
+                </a:cxn>
+                <a:cxn ang="0">
+                  <a:pos x="connsiteX10" y="connsiteY10"/>
+                </a:cxn>
+                <a:cxn ang="0">
+                  <a:pos x="connsiteX11" y="connsiteY11"/>
+                </a:cxn>
+                <a:cxn ang="0">
+                  <a:pos x="connsiteX12" y="connsiteY12"/>
+                </a:cxn>
+                <a:cxn ang="0">
+                  <a:pos x="connsiteX13" y="connsiteY13"/>
+                </a:cxn>
+                <a:cxn ang="0">
+                  <a:pos x="connsiteX14" y="connsiteY14"/>
+                </a:cxn>
+                <a:cxn ang="0">
+                  <a:pos x="connsiteX15" y="connsiteY15"/>
+                </a:cxn>
+                <a:cxn ang="0">
+                  <a:pos x="connsiteX16" y="connsiteY16"/>
+                </a:cxn>
+                <a:cxn ang="0">
+                  <a:pos x="connsiteX17" y="connsiteY17"/>
+                </a:cxn>
+                <a:cxn ang="0">
+                  <a:pos x="connsiteX18" y="connsiteY18"/>
+                </a:cxn>
+                <a:cxn ang="0">
+                  <a:pos x="connsiteX19" y="connsiteY19"/>
+                </a:cxn>
+                <a:cxn ang="0">
+                  <a:pos x="connsiteX20" y="connsiteY20"/>
+                </a:cxn>
+                <a:cxn ang="0">
+                  <a:pos x="connsiteX21" y="connsiteY21"/>
+                </a:cxn>
+                <a:cxn ang="0">
+                  <a:pos x="connsiteX22" y="connsiteY22"/>
+                </a:cxn>
+                <a:cxn ang="0">
+                  <a:pos x="connsiteX23" y="connsiteY23"/>
+                </a:cxn>
+                <a:cxn ang="0">
+                  <a:pos x="connsiteX24" y="connsiteY24"/>
+                </a:cxn>
+                <a:cxn ang="0">
+                  <a:pos x="connsiteX25" y="connsiteY25"/>
+                </a:cxn>
+                <a:cxn ang="0">
+                  <a:pos x="connsiteX26" y="connsiteY26"/>
+                </a:cxn>
+                <a:cxn ang="0">
+                  <a:pos x="connsiteX27" y="connsiteY27"/>
+                </a:cxn>
+                <a:cxn ang="0">
+                  <a:pos x="connsiteX28" y="connsiteY28"/>
+                </a:cxn>
+                <a:cxn ang="0">
+                  <a:pos x="connsiteX29" y="connsiteY29"/>
+                </a:cxn>
+              </a:cxnLst>
+              <a:rect l="l" t="t" r="r" b="b"/>
+              <a:pathLst>
+                <a:path w="5217957" h="6100079">
+                  <a:moveTo>
+                    <a:pt x="1951394" y="82"/>
+                  </a:moveTo>
+                  <a:cubicBezTo>
+                    <a:pt x="2237632" y="-2119"/>
+                    <a:pt x="2536431" y="40011"/>
+                    <a:pt x="2855178" y="125419"/>
+                  </a:cubicBezTo>
+                  <a:cubicBezTo>
+                    <a:pt x="3697704" y="351173"/>
+                    <a:pt x="4370491" y="894159"/>
+                    <a:pt x="4779341" y="1591542"/>
+                  </a:cubicBezTo>
+                  <a:cubicBezTo>
+                    <a:pt x="5195535" y="2301324"/>
+                    <a:pt x="5338357" y="3170855"/>
+                    <a:pt x="5108574" y="4028416"/>
+                  </a:cubicBezTo>
+                  <a:cubicBezTo>
+                    <a:pt x="4880820" y="4878406"/>
+                    <a:pt x="4165604" y="5079965"/>
+                    <a:pt x="3459359" y="5487716"/>
+                  </a:cubicBezTo>
+                  <a:cubicBezTo>
+                    <a:pt x="2753115" y="5895466"/>
+                    <a:pt x="2053265" y="6257288"/>
+                    <a:pt x="1203275" y="6029534"/>
+                  </a:cubicBezTo>
+                  <a:cubicBezTo>
+                    <a:pt x="739885" y="5905369"/>
+                    <a:pt x="366400" y="5685345"/>
+                    <a:pt x="59921" y="5396467"/>
+                  </a:cubicBezTo>
+                  <a:lnTo>
+                    <a:pt x="0" y="5333381"/>
+                  </a:lnTo>
+                  <a:lnTo>
+                    <a:pt x="0" y="4427327"/>
+                  </a:lnTo>
+                  <a:lnTo>
+                    <a:pt x="112056" y="4602502"/>
+                  </a:lnTo>
+                  <a:cubicBezTo>
+                    <a:pt x="215300" y="4749260"/>
+                    <a:pt x="325419" y="4877443"/>
+                    <a:pt x="443875" y="4989110"/>
+                  </a:cubicBezTo>
+                  <a:cubicBezTo>
+                    <a:pt x="700709" y="5231113"/>
+                    <a:pt x="996455" y="5394516"/>
+                    <a:pt x="1348175" y="5488759"/>
+                  </a:cubicBezTo>
+                  <a:cubicBezTo>
+                    <a:pt x="1633379" y="5565179"/>
+                    <a:pt x="1910917" y="5556430"/>
+                    <a:pt x="2221463" y="5461704"/>
+                  </a:cubicBezTo>
+                  <a:cubicBezTo>
+                    <a:pt x="2541923" y="5363721"/>
+                    <a:pt x="2870374" y="5181404"/>
+                    <a:pt x="3179339" y="5003023"/>
+                  </a:cubicBezTo>
+                  <a:cubicBezTo>
+                    <a:pt x="3323713" y="4919760"/>
+                    <a:pt x="3463978" y="4846641"/>
+                    <a:pt x="3599638" y="4775996"/>
+                  </a:cubicBezTo>
+                  <a:cubicBezTo>
+                    <a:pt x="3862436" y="4639263"/>
+                    <a:pt x="4089314" y="4521074"/>
+                    <a:pt x="4259765" y="4374667"/>
+                  </a:cubicBezTo>
+                  <a:cubicBezTo>
+                    <a:pt x="4418282" y="4238625"/>
+                    <a:pt x="4513201" y="4087280"/>
+                    <a:pt x="4567742" y="3883732"/>
+                  </a:cubicBezTo>
+                  <a:cubicBezTo>
+                    <a:pt x="4660420" y="3537853"/>
+                    <a:pt x="4682033" y="3184640"/>
+                    <a:pt x="4631929" y="2833886"/>
+                  </a:cubicBezTo>
+                  <a:cubicBezTo>
+                    <a:pt x="4583584" y="2494734"/>
+                    <a:pt x="4470646" y="2172121"/>
+                    <a:pt x="4296412" y="1874932"/>
+                  </a:cubicBezTo>
+                  <a:cubicBezTo>
+                    <a:pt x="3944879" y="1275559"/>
+                    <a:pt x="3381537" y="846289"/>
+                    <a:pt x="2710219" y="666410"/>
+                  </a:cubicBezTo>
+                  <a:cubicBezTo>
+                    <a:pt x="2349955" y="569877"/>
+                    <a:pt x="2030161" y="539483"/>
+                    <a:pt x="1732642" y="573480"/>
+                  </a:cubicBezTo>
+                  <a:cubicBezTo>
+                    <a:pt x="1440866" y="606814"/>
+                    <a:pt x="1158880" y="703976"/>
+                    <a:pt x="870621" y="870402"/>
+                  </a:cubicBezTo>
+                  <a:cubicBezTo>
+                    <a:pt x="670160" y="986048"/>
+                    <a:pt x="589753" y="1064195"/>
+                    <a:pt x="537555" y="1125324"/>
+                  </a:cubicBezTo>
+                  <a:cubicBezTo>
+                    <a:pt x="463218" y="1212400"/>
+                    <a:pt x="397708" y="1330125"/>
+                    <a:pt x="306995" y="1493030"/>
+                  </a:cubicBezTo>
+                  <a:cubicBezTo>
+                    <a:pt x="234596" y="1623167"/>
+                    <a:pt x="145436" y="1783409"/>
+                    <a:pt x="23579" y="1977465"/>
+                  </a:cubicBezTo>
+                  <a:lnTo>
+                    <a:pt x="0" y="2014291"/>
+                  </a:lnTo>
+                  <a:lnTo>
+                    <a:pt x="0" y="915660"/>
+                  </a:lnTo>
+                  <a:lnTo>
+                    <a:pt x="58609" y="828051"/>
+                  </a:lnTo>
+                  <a:cubicBezTo>
+                    <a:pt x="177453" y="670481"/>
+                    <a:pt x="325847" y="538291"/>
+                    <a:pt x="590689" y="385385"/>
+                  </a:cubicBezTo>
+                  <a:cubicBezTo>
+                    <a:pt x="1032159" y="130559"/>
+                    <a:pt x="1474330" y="3750"/>
+                    <a:pt x="1951394" y="82"/>
+                  </a:cubicBezTo>
+                  <a:close/>
+                </a:path>
+              </a:pathLst>
+            </a:custGeom>
+            <a:gradFill>
+              <a:gsLst>
+                <a:gs pos="2000">
+                  <a:schemeClr val="bg1">
+                    <a:alpha val="10000"/>
+                  </a:schemeClr>
+                </a:gs>
+                <a:gs pos="16000">
+                  <a:schemeClr val="accent6">
+                    <a:alpha val="10000"/>
+                  </a:schemeClr>
+                </a:gs>
+                <a:gs pos="100000">
+                  <a:schemeClr val="bg1">
+                    <a:alpha val="10000"/>
+                  </a:schemeClr>
+                </a:gs>
+                <a:gs pos="85000">
+                  <a:schemeClr val="accent1">
+                    <a:alpha val="10000"/>
+                  </a:schemeClr>
+                </a:gs>
+              </a:gsLst>
+              <a:lin ang="12000000" scaled="0"/>
+            </a:gradFill>
+            <a:ln>
+              <a:noFill/>
+            </a:ln>
+          </p:spPr>
+          <p:style>
+            <a:lnRef idx="2">
+              <a:schemeClr val="accent1">
+                <a:shade val="50000"/>
+              </a:schemeClr>
+            </a:lnRef>
+            <a:fillRef idx="1">
+              <a:schemeClr val="accent1"/>
+            </a:fillRef>
+            <a:effectRef idx="0">
+              <a:schemeClr val="accent1"/>
+            </a:effectRef>
+            <a:fontRef idx="minor">
+              <a:schemeClr val="lt1"/>
+            </a:fontRef>
+          </p:style>
+          <p:txBody>
+            <a:bodyPr wrap="square" rtlCol="0" anchor="ctr">
+              <a:noAutofit/>
+            </a:bodyPr>
+            <a:lstStyle/>
+            <a:p>
+              <a:pPr algn="ctr"/>
+              <a:endParaRPr lang="en-US"/>
+            </a:p>
+          </p:txBody>
+        </p:sp>
+      </p:grpSp>
+      <p:sp>
+        <p:nvSpPr>
+          <p:cNvPr id="2" name="Title 1">
+            <a:extLst>
+              <a:ext uri="{FF2B5EF4-FFF2-40B4-BE49-F238E27FC236}">
+                <a16:creationId xmlns:a16="http://schemas.microsoft.com/office/drawing/2014/main" id="{54D56F72-D2BF-182C-4255-367279F53A19}"/>
+              </a:ext>
+            </a:extLst>
+          </p:cNvPr>
+          <p:cNvSpPr>
+            <a:spLocks noGrp="1"/>
+          </p:cNvSpPr>
+          <p:nvPr>
+            <p:ph type="title"/>
+          </p:nvPr>
+        </p:nvSpPr>
+        <p:spPr>
+          <a:xfrm>
+            <a:off x="640080" y="1243013"/>
+            <a:ext cx="3855720" cy="4371974"/>
+          </a:xfrm>
+        </p:spPr>
+        <p:txBody>
+          <a:bodyPr>
+            <a:normAutofit/>
+          </a:bodyPr>
+          <a:lstStyle/>
+          <a:p>
+            <a:r>
+              <a:rPr lang="en-GB" sz="4000" dirty="0" err="1">
+                <a:solidFill>
+                  <a:schemeClr val="tx2"/>
+                </a:solidFill>
+                <a:latin typeface="Ariel"/>
+              </a:rPr>
+              <a:t>SiteSafeAI</a:t>
+            </a:r>
+            <a:r>
+              <a:rPr lang="en-GB" sz="4000" dirty="0">
+                <a:solidFill>
+                  <a:schemeClr val="tx2"/>
+                </a:solidFill>
+                <a:latin typeface="Ariel"/>
+              </a:rPr>
+              <a:t> is there anything similar?</a:t>
+            </a:r>
+          </a:p>
+        </p:txBody>
+      </p:sp>
+      <p:sp>
+        <p:nvSpPr>
+          <p:cNvPr id="5" name="Rectangle 2">
+            <a:extLst>
+              <a:ext uri="{FF2B5EF4-FFF2-40B4-BE49-F238E27FC236}">
+                <a16:creationId xmlns:a16="http://schemas.microsoft.com/office/drawing/2014/main" id="{1C99BDB6-E666-28C1-106E-B862A77A39FE}"/>
+              </a:ext>
+            </a:extLst>
+          </p:cNvPr>
+          <p:cNvSpPr>
+            <a:spLocks noGrp="1" noChangeArrowheads="1"/>
+          </p:cNvSpPr>
+          <p:nvPr>
+            <p:ph idx="1"/>
+          </p:nvPr>
+        </p:nvSpPr>
+        <p:spPr bwMode="auto">
+          <a:xfrm>
+            <a:off x="6172200" y="804672"/>
+            <a:ext cx="5221224" cy="5230368"/>
+          </a:xfrm>
+          <a:prstGeom prst="rect">
+            <a:avLst/>
+          </a:prstGeom>
+          <a:extLst>
+            <a:ext uri="{909E8E84-426E-40DD-AFC4-6F175D3DCCD1}">
+              <a14:hiddenFill xmlns:a14="http://schemas.microsoft.com/office/drawing/2010/main">
+                <a:solidFill>
+                  <a:schemeClr val="accent1"/>
+                </a:solidFill>
+              </a14:hiddenFill>
+            </a:ext>
+            <a:ext uri="{91240B29-F687-4F45-9708-019B960494DF}">
+              <a14:hiddenLine xmlns:a14="http://schemas.microsoft.com/office/drawing/2010/main" w="9525">
+                <a:solidFill>
+                  <a:schemeClr val="tx1"/>
+                </a:solidFill>
+                <a:miter lim="800000"/>
+                <a:headEnd/>
+                <a:tailEnd/>
+              </a14:hiddenLine>
+            </a:ext>
+            <a:ext uri="{AF507438-7753-43E0-B8FC-AC1667EBCBE1}">
+              <a14:hiddenEffects xmlns:a14="http://schemas.microsoft.com/office/drawing/2010/main">
+                <a:effectLst>
+                  <a:outerShdw dist="35921" dir="2700000" algn="ctr" rotWithShape="0">
+                    <a:schemeClr val="bg2"/>
+                  </a:outerShdw>
+                </a:effectLst>
+              </a14:hiddenEffects>
+            </a:ext>
+          </a:extLst>
+        </p:spPr>
+        <p:txBody>
+          <a:bodyPr vert="horz" lIns="91440" tIns="45720" rIns="91440" bIns="45720" numCol="1" anchor="ctr" anchorCtr="0" compatLnSpc="1">
+            <a:prstTxWarp prst="textNoShape">
+              <a:avLst/>
+            </a:prstTxWarp>
+            <a:normAutofit/>
+          </a:bodyPr>
+          <a:lstStyle/>
+          <a:p>
+            <a:pPr marL="0" marR="0" lvl="0" indent="0" defTabSz="914400" rtl="0" eaLnBrk="0" fontAlgn="base" latinLnBrk="0" hangingPunct="0">
+              <a:spcBef>
+                <a:spcPct val="0"/>
+              </a:spcBef>
+              <a:spcAft>
+                <a:spcPts val="600"/>
+              </a:spcAft>
+              <a:buClrTx/>
+              <a:buSzTx/>
+              <a:buFontTx/>
+              <a:buNone/>
+              <a:tabLst/>
+            </a:pPr>
+            <a:endParaRPr kumimoji="0" lang="en-US" altLang="en-US" sz="1800" b="0" i="0" u="none" strike="noStrike" cap="none" normalizeH="0" baseline="0" dirty="0">
+              <a:ln>
+                <a:noFill/>
+              </a:ln>
+              <a:solidFill>
+                <a:schemeClr val="tx2"/>
+              </a:solidFill>
+              <a:effectLst/>
+              <a:latin typeface="Arial" panose="020B0604020202020204" pitchFamily="34" charset="0"/>
+            </a:endParaRPr>
+          </a:p>
+          <a:p>
+            <a:pPr marL="0" marR="0" lvl="0" indent="0" defTabSz="914400" rtl="0" eaLnBrk="0" fontAlgn="base" latinLnBrk="0" hangingPunct="0">
+              <a:spcBef>
+                <a:spcPct val="0"/>
+              </a:spcBef>
+              <a:spcAft>
+                <a:spcPts val="600"/>
+              </a:spcAft>
+              <a:buClrTx/>
+              <a:buSzTx/>
+              <a:buFontTx/>
+              <a:buChar char="•"/>
+              <a:tabLst/>
+            </a:pPr>
+            <a:r>
+              <a:rPr kumimoji="0" lang="en-US" altLang="en-US" sz="1800" b="0" i="0" u="none" strike="noStrike" cap="none" normalizeH="0" baseline="0" dirty="0">
+                <a:ln>
+                  <a:noFill/>
+                </a:ln>
+                <a:solidFill>
+                  <a:schemeClr val="tx2"/>
+                </a:solidFill>
+                <a:effectLst/>
+                <a:latin typeface="Arial" panose="020B0604020202020204" pitchFamily="34" charset="0"/>
+              </a:rPr>
+              <a:t> Currently, there is no solution like this in Ireland.</a:t>
+            </a:r>
+          </a:p>
+          <a:p>
+            <a:pPr marL="0" marR="0" lvl="0" indent="0" defTabSz="914400" rtl="0" eaLnBrk="0" fontAlgn="base" latinLnBrk="0" hangingPunct="0">
+              <a:spcBef>
+                <a:spcPct val="0"/>
+              </a:spcBef>
+              <a:spcAft>
+                <a:spcPts val="600"/>
+              </a:spcAft>
+              <a:buClrTx/>
+              <a:buSzTx/>
+              <a:buFontTx/>
+              <a:buChar char="•"/>
+              <a:tabLst/>
+            </a:pPr>
+            <a:endParaRPr kumimoji="0" lang="en-US" altLang="en-US" sz="1800" b="0" i="0" u="none" strike="noStrike" cap="none" normalizeH="0" baseline="0" dirty="0">
+              <a:ln>
+                <a:noFill/>
+              </a:ln>
+              <a:solidFill>
+                <a:schemeClr val="tx2"/>
+              </a:solidFill>
+              <a:effectLst/>
+              <a:latin typeface="Arial" panose="020B0604020202020204" pitchFamily="34" charset="0"/>
+            </a:endParaRPr>
+          </a:p>
+          <a:p>
+            <a:pPr marL="0" marR="0" lvl="0" indent="0" defTabSz="914400" rtl="0" eaLnBrk="0" fontAlgn="base" latinLnBrk="0" hangingPunct="0">
+              <a:spcBef>
+                <a:spcPct val="0"/>
+              </a:spcBef>
+              <a:spcAft>
+                <a:spcPts val="600"/>
+              </a:spcAft>
+              <a:buClrTx/>
+              <a:buSzTx/>
+              <a:buFontTx/>
+              <a:buChar char="•"/>
+              <a:tabLst/>
+            </a:pPr>
+            <a:r>
+              <a:rPr kumimoji="0" lang="en-US" altLang="en-US" sz="1800" b="0" i="0" u="none" strike="noStrike" cap="none" normalizeH="0" baseline="0" dirty="0">
+                <a:ln>
+                  <a:noFill/>
+                </a:ln>
+                <a:solidFill>
+                  <a:schemeClr val="tx2"/>
+                </a:solidFill>
+                <a:effectLst/>
+                <a:latin typeface="Arial" panose="020B0604020202020204" pitchFamily="34" charset="0"/>
+              </a:rPr>
+              <a:t> Globally, a company called </a:t>
+            </a:r>
+            <a:r>
+              <a:rPr kumimoji="0" lang="en-US" altLang="en-US" sz="1800" b="0" i="0" u="none" strike="noStrike" cap="none" normalizeH="0" baseline="0" dirty="0" err="1">
+                <a:ln>
+                  <a:noFill/>
+                </a:ln>
+                <a:solidFill>
+                  <a:schemeClr val="tx2"/>
+                </a:solidFill>
+                <a:effectLst/>
+                <a:latin typeface="Arial" panose="020B0604020202020204" pitchFamily="34" charset="0"/>
+              </a:rPr>
+              <a:t>Synaedge</a:t>
+            </a:r>
+            <a:r>
+              <a:rPr kumimoji="0" lang="en-US" altLang="en-US" sz="1800" b="0" i="0" u="none" strike="noStrike" cap="none" normalizeH="0" baseline="0" dirty="0">
+                <a:ln>
+                  <a:noFill/>
+                </a:ln>
+                <a:solidFill>
+                  <a:schemeClr val="tx2"/>
+                </a:solidFill>
+                <a:effectLst/>
+                <a:latin typeface="Arial" panose="020B0604020202020204" pitchFamily="34" charset="0"/>
+              </a:rPr>
+              <a:t>, based in Switzerland, offers AI-based video surveillance that includes PPE detection.</a:t>
+            </a:r>
+          </a:p>
+          <a:p>
+            <a:pPr marL="0" marR="0" lvl="0" indent="0" defTabSz="914400" rtl="0" eaLnBrk="0" fontAlgn="base" latinLnBrk="0" hangingPunct="0">
+              <a:spcBef>
+                <a:spcPct val="0"/>
+              </a:spcBef>
+              <a:spcAft>
+                <a:spcPts val="600"/>
+              </a:spcAft>
+              <a:buClrTx/>
+              <a:buSzTx/>
+              <a:buFontTx/>
+              <a:buChar char="•"/>
+              <a:tabLst/>
+            </a:pPr>
+            <a:endParaRPr kumimoji="0" lang="en-US" altLang="en-US" sz="1800" b="0" i="0" u="none" strike="noStrike" cap="none" normalizeH="0" baseline="0" dirty="0">
+              <a:ln>
+                <a:noFill/>
+              </a:ln>
+              <a:solidFill>
+                <a:schemeClr val="tx2"/>
+              </a:solidFill>
+              <a:effectLst/>
+              <a:latin typeface="Arial" panose="020B0604020202020204" pitchFamily="34" charset="0"/>
+            </a:endParaRPr>
+          </a:p>
+          <a:p>
+            <a:pPr marL="0" marR="0" lvl="0" indent="0" defTabSz="914400" rtl="0" eaLnBrk="0" fontAlgn="base" latinLnBrk="0" hangingPunct="0">
+              <a:spcBef>
+                <a:spcPct val="0"/>
+              </a:spcBef>
+              <a:spcAft>
+                <a:spcPts val="600"/>
+              </a:spcAft>
+              <a:buClrTx/>
+              <a:buSzTx/>
+              <a:buFontTx/>
+              <a:buChar char="•"/>
+              <a:tabLst/>
+            </a:pPr>
+            <a:r>
+              <a:rPr kumimoji="0" lang="en-US" altLang="en-US" sz="1800" b="0" i="0" u="none" strike="noStrike" cap="none" normalizeH="0" baseline="0" dirty="0">
+                <a:ln>
+                  <a:noFill/>
+                </a:ln>
+                <a:solidFill>
+                  <a:schemeClr val="tx2"/>
+                </a:solidFill>
+                <a:effectLst/>
+                <a:latin typeface="Arial" panose="020B0604020202020204" pitchFamily="34" charset="0"/>
+              </a:rPr>
+              <a:t> </a:t>
+            </a:r>
+            <a:r>
+              <a:rPr kumimoji="0" lang="en-US" altLang="en-US" sz="1800" b="0" i="0" u="none" strike="noStrike" cap="none" normalizeH="0" baseline="0" dirty="0" err="1">
+                <a:ln>
+                  <a:noFill/>
+                </a:ln>
+                <a:solidFill>
+                  <a:schemeClr val="tx2"/>
+                </a:solidFill>
+                <a:effectLst/>
+                <a:latin typeface="Arial" panose="020B0604020202020204" pitchFamily="34" charset="0"/>
+              </a:rPr>
+              <a:t>Synaedge</a:t>
+            </a:r>
+            <a:r>
+              <a:rPr kumimoji="0" lang="en-US" altLang="en-US" sz="1800" b="0" i="0" u="none" strike="noStrike" cap="none" normalizeH="0" baseline="0" dirty="0">
+                <a:ln>
+                  <a:noFill/>
+                </a:ln>
+                <a:solidFill>
+                  <a:schemeClr val="tx2"/>
+                </a:solidFill>
+                <a:effectLst/>
+                <a:latin typeface="Arial" panose="020B0604020202020204" pitchFamily="34" charset="0"/>
+              </a:rPr>
+              <a:t> provides this service through their AI-powered analytics, but the exact workings of their PPE detection system remain unclear.</a:t>
+            </a:r>
+          </a:p>
+          <a:p>
+            <a:pPr marL="0" marR="0" lvl="0" indent="0" defTabSz="914400" rtl="0" eaLnBrk="0" fontAlgn="base" latinLnBrk="0" hangingPunct="0">
+              <a:spcBef>
+                <a:spcPct val="0"/>
+              </a:spcBef>
+              <a:spcAft>
+                <a:spcPts val="600"/>
+              </a:spcAft>
+              <a:buClrTx/>
+              <a:buSzTx/>
+              <a:buFontTx/>
+              <a:buChar char="•"/>
+              <a:tabLst/>
+            </a:pPr>
+            <a:endParaRPr kumimoji="0" lang="en-US" altLang="en-US" sz="1800" b="0" i="0" u="none" strike="noStrike" cap="none" normalizeH="0" baseline="0" dirty="0">
+              <a:ln>
+                <a:noFill/>
+              </a:ln>
+              <a:solidFill>
+                <a:schemeClr val="tx2"/>
+              </a:solidFill>
+              <a:effectLst/>
+              <a:latin typeface="Arial" panose="020B0604020202020204" pitchFamily="34" charset="0"/>
+            </a:endParaRPr>
+          </a:p>
+          <a:p>
+            <a:pPr marL="0" marR="0" lvl="0" indent="0" defTabSz="914400" rtl="0" eaLnBrk="0" fontAlgn="base" latinLnBrk="0" hangingPunct="0">
+              <a:spcBef>
+                <a:spcPct val="0"/>
+              </a:spcBef>
+              <a:spcAft>
+                <a:spcPts val="600"/>
+              </a:spcAft>
+              <a:buClrTx/>
+              <a:buSzTx/>
+              <a:buFontTx/>
+              <a:buChar char="•"/>
+              <a:tabLst/>
+            </a:pPr>
+            <a:r>
+              <a:rPr kumimoji="0" lang="en-US" altLang="en-US" sz="1800" b="0" i="0" u="none" strike="noStrike" cap="none" normalizeH="0" baseline="0" dirty="0">
+                <a:ln>
+                  <a:noFill/>
+                </a:ln>
+                <a:solidFill>
+                  <a:schemeClr val="tx2"/>
+                </a:solidFill>
+                <a:effectLst/>
+                <a:latin typeface="Arial" panose="020B0604020202020204" pitchFamily="34" charset="0"/>
+              </a:rPr>
+              <a:t> My system uses live video processing and can trigger immediate alerts when a safety violation occurs, providing more actionable insights. </a:t>
+            </a:r>
+          </a:p>
+        </p:txBody>
+      </p:sp>
+      <p:sp>
+        <p:nvSpPr>
+          <p:cNvPr id="6" name="Slide Number Placeholder 5">
+            <a:extLst>
+              <a:ext uri="{FF2B5EF4-FFF2-40B4-BE49-F238E27FC236}">
+                <a16:creationId xmlns:a16="http://schemas.microsoft.com/office/drawing/2014/main" id="{F3FD4CC5-CB04-F48B-AA03-54E013827259}"/>
+              </a:ext>
+            </a:extLst>
+          </p:cNvPr>
+          <p:cNvSpPr>
+            <a:spLocks noGrp="1"/>
+          </p:cNvSpPr>
+          <p:nvPr>
+            <p:ph type="sldNum" sz="quarter" idx="12"/>
+          </p:nvPr>
+        </p:nvSpPr>
+        <p:spPr/>
+        <p:txBody>
+          <a:bodyPr/>
+          <a:lstStyle/>
+          <a:p>
+            <a:fld id="{39DC44A4-4954-4CC0-AE95-AFC3F00E7214}" type="slidenum">
+              <a:rPr lang="en-GB" sz="2000" smtClean="0"/>
+              <a:t>4</a:t>
+            </a:fld>
+            <a:r>
+              <a:rPr lang="en-GB" sz="2000" dirty="0"/>
+              <a:t>/8</a:t>
+            </a:r>
+          </a:p>
+        </p:txBody>
+      </p:sp>
+    </p:spTree>
+    <p:extLst>
+      <p:ext uri="{BB962C8B-B14F-4D97-AF65-F5344CB8AC3E}">
+        <p14:creationId xmlns:p14="http://schemas.microsoft.com/office/powerpoint/2010/main" val="1158156737"/>
+      </p:ext>
+    </p:extLst>
+  </p:cSld>
+  <p:clrMapOvr>
+    <a:masterClrMapping/>
+  </p:clrMapOvr>
+</p:sld>
+</file>
+
+<file path=ppt/slides/slide5.xml><?xml version="1.0" encoding="utf-8"?>
+<p:sld xmlns:a="http://schemas.openxmlformats.org/drawingml/2006/main" xmlns:r="http://schemas.openxmlformats.org/officeDocument/2006/relationships" xmlns:p="http://schemas.openxmlformats.org/presentationml/2006/main">
+  <p:cSld>
+    <p:bg>
+      <p:bgPr>
+        <a:solidFill>
+          <a:schemeClr val="bg1"/>
+        </a:solidFill>
+        <a:effectLst/>
+      </p:bgPr>
+    </p:bg>
+    <p:spTree>
+      <p:nvGrpSpPr>
+        <p:cNvPr id="1" name=""/>
+        <p:cNvGrpSpPr/>
+        <p:nvPr/>
+      </p:nvGrpSpPr>
+      <p:grpSpPr>
+        <a:xfrm>
+          <a:off x="0" y="0"/>
+          <a:ext cx="0" cy="0"/>
+          <a:chOff x="0" y="0"/>
+          <a:chExt cx="0" cy="0"/>
+        </a:xfrm>
+      </p:grpSpPr>
+      <p:sp>
+        <p:nvSpPr>
+          <p:cNvPr id="2" name="Title 1">
+            <a:extLst>
+              <a:ext uri="{FF2B5EF4-FFF2-40B4-BE49-F238E27FC236}">
+                <a16:creationId xmlns:a16="http://schemas.microsoft.com/office/drawing/2014/main" id="{9F999554-208B-64D8-7B68-56B824DB930E}"/>
+              </a:ext>
+            </a:extLst>
+          </p:cNvPr>
+          <p:cNvSpPr>
+            <a:spLocks noGrp="1"/>
+          </p:cNvSpPr>
+          <p:nvPr>
+            <p:ph type="title"/>
+          </p:nvPr>
+        </p:nvSpPr>
+        <p:spPr>
+          <a:xfrm>
+            <a:off x="640080" y="2074363"/>
+            <a:ext cx="2649658" cy="2709275"/>
+          </a:xfrm>
+          <a:prstGeom prst="ellipse">
+            <a:avLst/>
+          </a:prstGeom>
+          <a:solidFill>
+            <a:schemeClr val="tx1">
+              <a:lumMod val="85000"/>
+              <a:lumOff val="15000"/>
+            </a:schemeClr>
+          </a:solidFill>
+          <a:ln w="174625" cmpd="thinThick">
+            <a:solidFill>
+              <a:schemeClr val="tx1">
+                <a:lumMod val="85000"/>
+                <a:lumOff val="15000"/>
+              </a:schemeClr>
+            </a:solidFill>
+          </a:ln>
+        </p:spPr>
+        <p:txBody>
+          <a:bodyPr vert="horz" lIns="91440" tIns="45720" rIns="91440" bIns="45720" rtlCol="0" anchor="ctr">
+            <a:normAutofit/>
+          </a:bodyPr>
+          <a:lstStyle/>
+          <a:p>
+            <a:pPr algn="ctr"/>
+            <a:r>
+              <a:rPr lang="en-US" sz="2600" kern="1200" dirty="0">
+                <a:solidFill>
+                  <a:schemeClr val="bg1"/>
+                </a:solidFill>
+                <a:latin typeface="+mj-lt"/>
+                <a:ea typeface="+mj-ea"/>
+                <a:cs typeface="+mj-cs"/>
+              </a:rPr>
+              <a:t>How Will </a:t>
+            </a:r>
+            <a:r>
+              <a:rPr lang="en-US" sz="2600" kern="1200" dirty="0" err="1">
+                <a:solidFill>
+                  <a:schemeClr val="bg1"/>
+                </a:solidFill>
+                <a:latin typeface="+mj-lt"/>
+                <a:ea typeface="+mj-ea"/>
+                <a:cs typeface="+mj-cs"/>
+              </a:rPr>
+              <a:t>SiteSafeAI</a:t>
+            </a:r>
+            <a:r>
+              <a:rPr lang="en-US" sz="2600" kern="1200" dirty="0">
+                <a:solidFill>
+                  <a:schemeClr val="bg1"/>
+                </a:solidFill>
+                <a:latin typeface="+mj-lt"/>
+                <a:ea typeface="+mj-ea"/>
+                <a:cs typeface="+mj-cs"/>
+              </a:rPr>
+              <a:t> Work?</a:t>
+            </a:r>
+          </a:p>
+        </p:txBody>
+      </p:sp>
+      <p:pic>
+        <p:nvPicPr>
+          <p:cNvPr id="5" name="Content Placeholder 4" descr="A diagram of a system&#10;&#10;Description automatically generated">
+            <a:extLst>
+              <a:ext uri="{FF2B5EF4-FFF2-40B4-BE49-F238E27FC236}">
+                <a16:creationId xmlns:a16="http://schemas.microsoft.com/office/drawing/2014/main" id="{16F6E025-6C55-0E98-1FA6-E55BF3E74A01}"/>
+              </a:ext>
+            </a:extLst>
+          </p:cNvPr>
+          <p:cNvPicPr>
+            <a:picLocks noGrp="1" noChangeAspect="1"/>
+          </p:cNvPicPr>
+          <p:nvPr>
+            <p:ph sz="half" idx="1"/>
+          </p:nvPr>
+        </p:nvPicPr>
+        <p:blipFill>
+          <a:blip r:embed="rId2">
+            <a:extLst>
+              <a:ext uri="{28A0092B-C50C-407E-A947-70E740481C1C}">
+                <a14:useLocalDpi xmlns:a14="http://schemas.microsoft.com/office/drawing/2010/main" val="0"/>
+              </a:ext>
+            </a:extLst>
+          </a:blip>
+          <a:stretch>
+            <a:fillRect/>
+          </a:stretch>
+        </p:blipFill>
+        <p:spPr>
+          <a:xfrm>
+            <a:off x="3631814" y="938048"/>
+            <a:ext cx="8479837" cy="4981903"/>
+          </a:xfrm>
+          <a:prstGeom prst="rect">
+            <a:avLst/>
+          </a:prstGeom>
+        </p:spPr>
+      </p:pic>
+      <p:sp>
+        <p:nvSpPr>
+          <p:cNvPr id="3" name="Slide Number Placeholder 2">
+            <a:extLst>
+              <a:ext uri="{FF2B5EF4-FFF2-40B4-BE49-F238E27FC236}">
+                <a16:creationId xmlns:a16="http://schemas.microsoft.com/office/drawing/2014/main" id="{B2204767-0C01-7EBB-A07D-3A2DD34A361B}"/>
+              </a:ext>
+            </a:extLst>
+          </p:cNvPr>
+          <p:cNvSpPr>
+            <a:spLocks noGrp="1"/>
+          </p:cNvSpPr>
+          <p:nvPr>
+            <p:ph type="sldNum" sz="quarter" idx="12"/>
+          </p:nvPr>
+        </p:nvSpPr>
+        <p:spPr/>
+        <p:txBody>
+          <a:bodyPr/>
+          <a:lstStyle/>
+          <a:p>
+            <a:fld id="{39DC44A4-4954-4CC0-AE95-AFC3F00E7214}" type="slidenum">
+              <a:rPr lang="en-GB" smtClean="0"/>
+              <a:t>5</a:t>
+            </a:fld>
+            <a:r>
+              <a:rPr lang="en-GB" dirty="0"/>
+              <a:t>/8</a:t>
+            </a:r>
+          </a:p>
+        </p:txBody>
+      </p:sp>
+    </p:spTree>
+    <p:extLst>
+      <p:ext uri="{BB962C8B-B14F-4D97-AF65-F5344CB8AC3E}">
+        <p14:creationId xmlns:p14="http://schemas.microsoft.com/office/powerpoint/2010/main" val="1672748841"/>
+      </p:ext>
+    </p:extLst>
+  </p:cSld>
+  <p:clrMapOvr>
+    <a:masterClrMapping/>
+  </p:clrMapOvr>
+</p:sld>
+</file>
+
+<file path=ppt/slides/slide6.xml><?xml version="1.0" encoding="utf-8"?>
 <p:sld xmlns:a="http://schemas.openxmlformats.org/drawingml/2006/main" xmlns:r="http://schemas.openxmlformats.org/officeDocument/2006/relationships" xmlns:p="http://schemas.openxmlformats.org/presentationml/2006/main">
   <p:cSld>
     <p:bg>
@@ -11629,17 +19109,22 @@
           </a:bodyPr>
           <a:lstStyle/>
           <a:p>
+            <a:pPr algn="ctr"/>
             <a:r>
-              <a:rPr lang="en-US" sz="4000" kern="1200">
-                <a:solidFill>
-                  <a:schemeClr val="tx2"/>
-                </a:solidFill>
-                <a:latin typeface="+mj-lt"/>
-                <a:ea typeface="+mj-ea"/>
-                <a:cs typeface="+mj-cs"/>
+              <a:rPr lang="en-US" sz="5400" kern="1200" dirty="0">
+                <a:latin typeface="Ariel"/>
               </a:rPr>
-              <a:t>Technologies Used</a:t>
+              <a:t>Technologies used in </a:t>
             </a:r>
+            <a:r>
+              <a:rPr lang="en-US" sz="5400" kern="1200" dirty="0" err="1">
+                <a:latin typeface="Ariel"/>
+              </a:rPr>
+              <a:t>SiteSafeAI</a:t>
+            </a:r>
+            <a:endParaRPr lang="en-US" sz="5400" kern="1200" dirty="0">
+              <a:latin typeface="Ariel"/>
+            </a:endParaRPr>
           </a:p>
         </p:txBody>
       </p:sp>
@@ -14250,7 +21735,7 @@
         </p:blipFill>
         <p:spPr>
           <a:xfrm>
-            <a:off x="8486457" y="4195941"/>
+            <a:off x="8343053" y="4267170"/>
             <a:ext cx="1152668" cy="1049663"/>
           </a:xfrm>
           <a:prstGeom prst="rect">
@@ -14340,7 +21825,7 @@
         </p:blipFill>
         <p:spPr>
           <a:xfrm>
-            <a:off x="8567992" y="5516339"/>
+            <a:off x="8356899" y="5494397"/>
             <a:ext cx="1151262" cy="721627"/>
           </a:xfrm>
           <a:prstGeom prst="rect">
@@ -14379,6 +21864,38 @@
           </a:graphicData>
         </a:graphic>
       </p:graphicFrame>
+      <p:sp>
+        <p:nvSpPr>
+          <p:cNvPr id="3" name="Slide Number Placeholder 2">
+            <a:extLst>
+              <a:ext uri="{FF2B5EF4-FFF2-40B4-BE49-F238E27FC236}">
+                <a16:creationId xmlns:a16="http://schemas.microsoft.com/office/drawing/2014/main" id="{82F0BA8C-ADF5-2D34-FF1C-55CC9576DDFC}"/>
+              </a:ext>
+            </a:extLst>
+          </p:cNvPr>
+          <p:cNvSpPr>
+            <a:spLocks noGrp="1"/>
+          </p:cNvSpPr>
+          <p:nvPr>
+            <p:ph type="sldNum" sz="quarter" idx="12"/>
+          </p:nvPr>
+        </p:nvSpPr>
+        <p:spPr/>
+        <p:txBody>
+          <a:bodyPr/>
+          <a:lstStyle/>
+          <a:p>
+            <a:fld id="{39DC44A4-4954-4CC0-AE95-AFC3F00E7214}" type="slidenum">
+              <a:rPr lang="en-GB" smtClean="0"/>
+              <a:t>6</a:t>
+            </a:fld>
+            <a:r>
+              <a:rPr lang="en-GB" dirty="0"/>
+              <a:t>/8</a:t>
+            </a:r>
+          </a:p>
+        </p:txBody>
+      </p:sp>
     </p:spTree>
     <p:extLst>
       <p:ext uri="{BB962C8B-B14F-4D97-AF65-F5344CB8AC3E}">
@@ -14392,17 +21909,9 @@
 </p:sld>
 </file>
 
-<file path=ppt/slides/slide4.xml><?xml version="1.0" encoding="utf-8"?>
+<file path=ppt/slides/slide7.xml><?xml version="1.0" encoding="utf-8"?>
 <p:sld xmlns:a="http://schemas.openxmlformats.org/drawingml/2006/main" xmlns:r="http://schemas.openxmlformats.org/officeDocument/2006/relationships" xmlns:p="http://schemas.openxmlformats.org/presentationml/2006/main">
   <p:cSld>
-    <p:bg>
-      <p:bgPr>
-        <a:solidFill>
-          <a:schemeClr val="bg1"/>
-        </a:solidFill>
-        <a:effectLst/>
-      </p:bgPr>
-    </p:bg>
     <p:spTree>
       <p:nvGrpSpPr>
         <p:cNvPr id="1" name=""/>
@@ -14422,7 +21931,7 @@
           <p:cNvPr id="2" name="Title 1">
             <a:extLst>
               <a:ext uri="{FF2B5EF4-FFF2-40B4-BE49-F238E27FC236}">
-                <a16:creationId xmlns:a16="http://schemas.microsoft.com/office/drawing/2014/main" id="{9F999554-208B-64D8-7B68-56B824DB930E}"/>
+                <a16:creationId xmlns:a16="http://schemas.microsoft.com/office/drawing/2014/main" id="{FCAC947E-6760-15B4-3A40-7A3F2DD151FE}"/>
               </a:ext>
             </a:extLst>
           </p:cNvPr>
@@ -14433,92 +21942,357 @@
             <p:ph type="title"/>
           </p:nvPr>
         </p:nvSpPr>
-        <p:spPr>
-          <a:xfrm>
-            <a:off x="640080" y="2074363"/>
-            <a:ext cx="2649658" cy="2709275"/>
-          </a:xfrm>
-          <a:prstGeom prst="ellipse">
-            <a:avLst/>
-          </a:prstGeom>
-          <a:solidFill>
-            <a:schemeClr val="tx1">
-              <a:lumMod val="85000"/>
-              <a:lumOff val="15000"/>
-            </a:schemeClr>
-          </a:solidFill>
-          <a:ln w="174625" cmpd="thinThick">
-            <a:solidFill>
-              <a:schemeClr val="tx1">
-                <a:lumMod val="85000"/>
-                <a:lumOff val="15000"/>
-              </a:schemeClr>
-            </a:solidFill>
-          </a:ln>
-        </p:spPr>
+        <p:spPr/>
         <p:txBody>
-          <a:bodyPr vert="horz" lIns="91440" tIns="45720" rIns="91440" bIns="45720" rtlCol="0" anchor="ctr">
+          <a:bodyPr>
             <a:normAutofit/>
           </a:bodyPr>
           <a:lstStyle/>
           <a:p>
             <a:pPr algn="ctr"/>
             <a:r>
-              <a:rPr lang="en-US" sz="2600" kern="1200" dirty="0">
-                <a:solidFill>
-                  <a:schemeClr val="bg1"/>
-                </a:solidFill>
-                <a:latin typeface="+mj-lt"/>
-                <a:ea typeface="+mj-ea"/>
-                <a:cs typeface="+mj-cs"/>
+              <a:rPr lang="en-GB" sz="5400" dirty="0">
+                <a:latin typeface="Ariel"/>
               </a:rPr>
-              <a:t>Context Diagram</a:t>
+              <a:t>Progress so far in </a:t>
+            </a:r>
+            <a:r>
+              <a:rPr lang="en-GB" sz="5400" dirty="0" err="1">
+                <a:latin typeface="Ariel"/>
+              </a:rPr>
+              <a:t>SiteSafeAI</a:t>
+            </a:r>
+            <a:endParaRPr lang="en-GB" sz="5400" dirty="0">
+              <a:latin typeface="Ariel"/>
+            </a:endParaRPr>
+          </a:p>
+        </p:txBody>
+      </p:sp>
+      <p:graphicFrame>
+        <p:nvGraphicFramePr>
+          <p:cNvPr id="5" name="Content Placeholder 2">
+            <a:extLst>
+              <a:ext uri="{FF2B5EF4-FFF2-40B4-BE49-F238E27FC236}">
+                <a16:creationId xmlns:a16="http://schemas.microsoft.com/office/drawing/2014/main" id="{3DF077BF-3271-16A3-F65B-9D7428BD0896}"/>
+              </a:ext>
+            </a:extLst>
+          </p:cNvPr>
+          <p:cNvGraphicFramePr>
+            <a:graphicFrameLocks noGrp="1"/>
+          </p:cNvGraphicFramePr>
+          <p:nvPr>
+            <p:ph idx="1"/>
+          </p:nvPr>
+        </p:nvGraphicFramePr>
+        <p:xfrm>
+          <a:off x="838200" y="1825625"/>
+          <a:ext cx="10515600" cy="4351338"/>
+        </p:xfrm>
+        <a:graphic>
+          <a:graphicData uri="http://schemas.openxmlformats.org/drawingml/2006/diagram">
+            <dgm:relIds xmlns:dgm="http://schemas.openxmlformats.org/drawingml/2006/diagram" xmlns:r="http://schemas.openxmlformats.org/officeDocument/2006/relationships" r:dm="rId2" r:lo="rId3" r:qs="rId4" r:cs="rId5"/>
+          </a:graphicData>
+        </a:graphic>
+      </p:graphicFrame>
+      <p:sp>
+        <p:nvSpPr>
+          <p:cNvPr id="6" name="Slide Number Placeholder 5">
+            <a:extLst>
+              <a:ext uri="{FF2B5EF4-FFF2-40B4-BE49-F238E27FC236}">
+                <a16:creationId xmlns:a16="http://schemas.microsoft.com/office/drawing/2014/main" id="{3C07B640-53DC-14EC-C556-9F807C94C338}"/>
+              </a:ext>
+            </a:extLst>
+          </p:cNvPr>
+          <p:cNvSpPr>
+            <a:spLocks noGrp="1"/>
+          </p:cNvSpPr>
+          <p:nvPr>
+            <p:ph type="sldNum" sz="quarter" idx="12"/>
+          </p:nvPr>
+        </p:nvSpPr>
+        <p:spPr/>
+        <p:txBody>
+          <a:bodyPr/>
+          <a:lstStyle/>
+          <a:p>
+            <a:fld id="{39DC44A4-4954-4CC0-AE95-AFC3F00E7214}" type="slidenum">
+              <a:rPr lang="en-GB" sz="2000" smtClean="0"/>
+              <a:t>7</a:t>
+            </a:fld>
+            <a:r>
+              <a:rPr lang="en-GB" sz="2000" dirty="0"/>
+              <a:t>/8</a:t>
             </a:r>
           </a:p>
         </p:txBody>
       </p:sp>
-      <p:pic>
-        <p:nvPicPr>
-          <p:cNvPr id="5" name="Content Placeholder 4" descr="A diagram of a system&#10;&#10;Description automatically generated">
+    </p:spTree>
+    <p:extLst>
+      <p:ext uri="{BB962C8B-B14F-4D97-AF65-F5344CB8AC3E}">
+        <p14:creationId xmlns:p14="http://schemas.microsoft.com/office/powerpoint/2010/main" val="2721986727"/>
+      </p:ext>
+    </p:extLst>
+  </p:cSld>
+  <p:clrMapOvr>
+    <a:masterClrMapping/>
+  </p:clrMapOvr>
+</p:sld>
+</file>
+
+<file path=ppt/slides/slide8.xml><?xml version="1.0" encoding="utf-8"?>
+<p:sld xmlns:a="http://schemas.openxmlformats.org/drawingml/2006/main" xmlns:r="http://schemas.openxmlformats.org/officeDocument/2006/relationships" xmlns:p="http://schemas.openxmlformats.org/presentationml/2006/main">
+  <p:cSld>
+    <p:spTree>
+      <p:nvGrpSpPr>
+        <p:cNvPr id="1" name=""/>
+        <p:cNvGrpSpPr/>
+        <p:nvPr/>
+      </p:nvGrpSpPr>
+      <p:grpSpPr>
+        <a:xfrm>
+          <a:off x="0" y="0"/>
+          <a:ext cx="0" cy="0"/>
+          <a:chOff x="0" y="0"/>
+          <a:chExt cx="0" cy="0"/>
+        </a:xfrm>
+      </p:grpSpPr>
+      <p:sp>
+        <p:nvSpPr>
+          <p:cNvPr id="2" name="Title 1">
             <a:extLst>
               <a:ext uri="{FF2B5EF4-FFF2-40B4-BE49-F238E27FC236}">
-                <a16:creationId xmlns:a16="http://schemas.microsoft.com/office/drawing/2014/main" id="{16F6E025-6C55-0E98-1FA6-E55BF3E74A01}"/>
+                <a16:creationId xmlns:a16="http://schemas.microsoft.com/office/drawing/2014/main" id="{08622DBE-D8DD-63A5-C52C-D121F11531EE}"/>
               </a:ext>
             </a:extLst>
           </p:cNvPr>
-          <p:cNvPicPr>
-            <a:picLocks noGrp="1" noChangeAspect="1"/>
-          </p:cNvPicPr>
+          <p:cNvSpPr>
+            <a:spLocks noGrp="1"/>
+          </p:cNvSpPr>
           <p:nvPr>
-            <p:ph sz="half" idx="1"/>
+            <p:ph type="title"/>
           </p:nvPr>
-        </p:nvPicPr>
-        <p:blipFill>
-          <a:blip r:embed="rId2">
+        </p:nvSpPr>
+        <p:spPr/>
+        <p:txBody>
+          <a:bodyPr>
+            <a:normAutofit/>
+          </a:bodyPr>
+          <a:lstStyle/>
+          <a:p>
+            <a:pPr algn="ctr"/>
+            <a:r>
+              <a:rPr lang="en-GB" sz="5400" dirty="0">
+                <a:latin typeface="Ariel"/>
+              </a:rPr>
+              <a:t>References</a:t>
+            </a:r>
+          </a:p>
+        </p:txBody>
+      </p:sp>
+      <p:sp>
+        <p:nvSpPr>
+          <p:cNvPr id="3" name="Content Placeholder 2">
             <a:extLst>
-              <a:ext uri="{28A0092B-C50C-407E-A947-70E740481C1C}">
-                <a14:useLocalDpi xmlns:a14="http://schemas.microsoft.com/office/drawing/2010/main" val="0"/>
+              <a:ext uri="{FF2B5EF4-FFF2-40B4-BE49-F238E27FC236}">
+                <a16:creationId xmlns:a16="http://schemas.microsoft.com/office/drawing/2014/main" id="{0CC22812-BC64-0B8D-C5D5-6D71D740C123}"/>
               </a:ext>
             </a:extLst>
-          </a:blip>
-          <a:stretch>
-            <a:fillRect/>
-          </a:stretch>
-        </p:blipFill>
-        <p:spPr>
-          <a:xfrm>
-            <a:off x="3631814" y="938048"/>
-            <a:ext cx="8479837" cy="4981903"/>
-          </a:xfrm>
-          <a:prstGeom prst="rect">
-            <a:avLst/>
-          </a:prstGeom>
-        </p:spPr>
-      </p:pic>
+          </p:cNvPr>
+          <p:cNvSpPr>
+            <a:spLocks noGrp="1"/>
+          </p:cNvSpPr>
+          <p:nvPr>
+            <p:ph idx="1"/>
+          </p:nvPr>
+        </p:nvSpPr>
+        <p:spPr/>
+        <p:txBody>
+          <a:bodyPr/>
+          <a:lstStyle/>
+          <a:p>
+            <a:r>
+              <a:rPr lang="en-GB" dirty="0" err="1">
+                <a:latin typeface="Ariel"/>
+              </a:rPr>
+              <a:t>Netwatch</a:t>
+            </a:r>
+            <a:r>
+              <a:rPr lang="en-GB" dirty="0">
+                <a:latin typeface="Ariel"/>
+              </a:rPr>
+              <a:t> logo: </a:t>
+            </a:r>
+            <a:r>
+              <a:rPr lang="en-GB" dirty="0">
+                <a:latin typeface="Ariel"/>
+                <a:hlinkClick r:id="rId2"/>
+              </a:rPr>
+              <a:t>www.netwatchsystem.com</a:t>
+            </a:r>
+            <a:endParaRPr lang="en-GB" dirty="0">
+              <a:latin typeface="Ariel"/>
+            </a:endParaRPr>
+          </a:p>
+          <a:p>
+            <a:r>
+              <a:rPr lang="en-GB" dirty="0" err="1">
+                <a:latin typeface="Ariel"/>
+              </a:rPr>
+              <a:t>SiteSafeAi</a:t>
+            </a:r>
+            <a:r>
+              <a:rPr lang="en-GB" dirty="0">
+                <a:latin typeface="Ariel"/>
+              </a:rPr>
+              <a:t> logo creation: </a:t>
+            </a:r>
+            <a:r>
+              <a:rPr lang="en-GB" dirty="0">
+                <a:latin typeface="Ariel"/>
+                <a:hlinkClick r:id="rId3"/>
+              </a:rPr>
+              <a:t>www.canva.com</a:t>
+            </a:r>
+            <a:endParaRPr lang="en-GB" dirty="0">
+              <a:latin typeface="Ariel"/>
+            </a:endParaRPr>
+          </a:p>
+          <a:p>
+            <a:r>
+              <a:rPr lang="en-GB" dirty="0">
+                <a:latin typeface="Ariel"/>
+              </a:rPr>
+              <a:t>Context diagram creation: </a:t>
+            </a:r>
+            <a:r>
+              <a:rPr lang="en-GB" dirty="0">
+                <a:latin typeface="Ariel"/>
+                <a:hlinkClick r:id="rId4"/>
+              </a:rPr>
+              <a:t>www.creately.com</a:t>
+            </a:r>
+            <a:endParaRPr lang="en-GB" dirty="0">
+              <a:latin typeface="Ariel"/>
+            </a:endParaRPr>
+          </a:p>
+          <a:p>
+            <a:r>
+              <a:rPr lang="en-GB" dirty="0">
+                <a:latin typeface="Ariel"/>
+              </a:rPr>
+              <a:t>Technology logos: </a:t>
+            </a:r>
+            <a:r>
+              <a:rPr lang="en-GB" dirty="0">
+                <a:latin typeface="Ariel"/>
+                <a:hlinkClick r:id="rId5"/>
+              </a:rPr>
+              <a:t>www.iconscout.com</a:t>
+            </a:r>
+            <a:endParaRPr lang="en-GB" dirty="0">
+              <a:latin typeface="Ariel"/>
+            </a:endParaRPr>
+          </a:p>
+          <a:p>
+            <a:r>
+              <a:rPr lang="en-GB" dirty="0">
+                <a:latin typeface="Ariel"/>
+              </a:rPr>
+              <a:t>Similar company: </a:t>
+            </a:r>
+            <a:r>
+              <a:rPr lang="en-GB" dirty="0">
+                <a:latin typeface="Ariel"/>
+                <a:hlinkClick r:id="rId6"/>
+              </a:rPr>
+              <a:t>www.synaedge.com/en</a:t>
+            </a:r>
+            <a:endParaRPr lang="en-GB" dirty="0">
+              <a:latin typeface="Ariel"/>
+            </a:endParaRPr>
+          </a:p>
+          <a:p>
+            <a:r>
+              <a:rPr lang="en-GB" dirty="0" err="1">
+                <a:latin typeface="Ariel"/>
+              </a:rPr>
+              <a:t>Frisbys</a:t>
+            </a:r>
+            <a:r>
+              <a:rPr lang="en-GB" dirty="0">
+                <a:latin typeface="Ariel"/>
+              </a:rPr>
+              <a:t> Homes logo: </a:t>
+            </a:r>
+            <a:r>
+              <a:rPr lang="en-GB" dirty="0">
+                <a:latin typeface="Ariel"/>
+                <a:hlinkClick r:id="rId7"/>
+              </a:rPr>
+              <a:t>www.frisbyhomes.com</a:t>
+            </a:r>
+            <a:endParaRPr lang="en-GB" dirty="0">
+              <a:latin typeface="Ariel"/>
+            </a:endParaRPr>
+          </a:p>
+          <a:p>
+            <a:endParaRPr lang="en-GB" dirty="0">
+              <a:latin typeface="Ariel"/>
+            </a:endParaRPr>
+          </a:p>
+          <a:p>
+            <a:endParaRPr lang="en-GB" dirty="0"/>
+          </a:p>
+          <a:p>
+            <a:endParaRPr lang="en-GB" dirty="0"/>
+          </a:p>
+          <a:p>
+            <a:endParaRPr lang="en-GB" dirty="0"/>
+          </a:p>
+          <a:p>
+            <a:endParaRPr lang="en-GB" dirty="0"/>
+          </a:p>
+          <a:p>
+            <a:endParaRPr lang="en-GB" dirty="0"/>
+          </a:p>
+        </p:txBody>
+      </p:sp>
+      <p:sp>
+        <p:nvSpPr>
+          <p:cNvPr id="4" name="Slide Number Placeholder 3">
+            <a:extLst>
+              <a:ext uri="{FF2B5EF4-FFF2-40B4-BE49-F238E27FC236}">
+                <a16:creationId xmlns:a16="http://schemas.microsoft.com/office/drawing/2014/main" id="{B616E4FB-7E25-CE30-CF26-5AAEC72188FD}"/>
+              </a:ext>
+            </a:extLst>
+          </p:cNvPr>
+          <p:cNvSpPr>
+            <a:spLocks noGrp="1"/>
+          </p:cNvSpPr>
+          <p:nvPr>
+            <p:ph type="sldNum" sz="quarter" idx="12"/>
+          </p:nvPr>
+        </p:nvSpPr>
+        <p:spPr/>
+        <p:txBody>
+          <a:bodyPr/>
+          <a:lstStyle/>
+          <a:p>
+            <a:fld id="{39DC44A4-4954-4CC0-AE95-AFC3F00E7214}" type="slidenum">
+              <a:rPr lang="en-GB" sz="2000" smtClean="0"/>
+              <a:t>8</a:t>
+            </a:fld>
+            <a:r>
+              <a:rPr lang="en-GB" sz="2000" dirty="0"/>
+              <a:t>/8</a:t>
+            </a:r>
+          </a:p>
+        </p:txBody>
+      </p:sp>
     </p:spTree>
     <p:extLst>
       <p:ext uri="{BB962C8B-B14F-4D97-AF65-F5344CB8AC3E}">
-        <p14:creationId xmlns:p14="http://schemas.microsoft.com/office/powerpoint/2010/main" val="1672748841"/>
+        <p14:creationId xmlns:p14="http://schemas.microsoft.com/office/powerpoint/2010/main" val="1824704590"/>
       </p:ext>
     </p:extLst>
   </p:cSld>
@@ -14841,4 +22615,319 @@
     </a:ext>
   </a:extLst>
 </a:theme>
+</file>
+
+<file path=ppt/theme/theme2.xml><?xml version="1.0" encoding="utf-8"?>
+<a:theme xmlns:a="http://schemas.openxmlformats.org/drawingml/2006/main" name="Office Theme">
+  <a:themeElements>
+    <a:clrScheme name="Office">
+      <a:dk1>
+        <a:sysClr val="windowText" lastClr="000000"/>
+      </a:dk1>
+      <a:lt1>
+        <a:sysClr val="window" lastClr="FFFFFF"/>
+      </a:lt1>
+      <a:dk2>
+        <a:srgbClr val="0E2841"/>
+      </a:dk2>
+      <a:lt2>
+        <a:srgbClr val="E8E8E8"/>
+      </a:lt2>
+      <a:accent1>
+        <a:srgbClr val="156082"/>
+      </a:accent1>
+      <a:accent2>
+        <a:srgbClr val="E97132"/>
+      </a:accent2>
+      <a:accent3>
+        <a:srgbClr val="196B24"/>
+      </a:accent3>
+      <a:accent4>
+        <a:srgbClr val="0F9ED5"/>
+      </a:accent4>
+      <a:accent5>
+        <a:srgbClr val="A02B93"/>
+      </a:accent5>
+      <a:accent6>
+        <a:srgbClr val="4EA72E"/>
+      </a:accent6>
+      <a:hlink>
+        <a:srgbClr val="467886"/>
+      </a:hlink>
+      <a:folHlink>
+        <a:srgbClr val="96607D"/>
+      </a:folHlink>
+    </a:clrScheme>
+    <a:fontScheme name="Office">
+      <a:majorFont>
+        <a:latin typeface="Aptos Display" panose="02110004020202020204"/>
+        <a:ea typeface=""/>
+        <a:cs typeface=""/>
+        <a:font script="Jpan" typeface="游ゴシック Light"/>
+        <a:font script="Hang" typeface="맑은 고딕"/>
+        <a:font script="Hans" typeface="等线 Light"/>
+        <a:font script="Hant" typeface="新細明體"/>
+        <a:font script="Arab" typeface="Times New Roman"/>
+        <a:font script="Hebr" typeface="Times New Roman"/>
+        <a:font script="Thai" typeface="Angsana New"/>
+        <a:font script="Ethi" typeface="Nyala"/>
+        <a:font script="Beng" typeface="Vrinda"/>
+        <a:font script="Gujr" typeface="Shruti"/>
+        <a:font script="Khmr" typeface="MoolBoran"/>
+        <a:font script="Knda" typeface="Tunga"/>
+        <a:font script="Guru" typeface="Raavi"/>
+        <a:font script="Cans" typeface="Euphemia"/>
+        <a:font script="Cher" typeface="Plantagenet Cherokee"/>
+        <a:font script="Yiii" typeface="Microsoft Yi Baiti"/>
+        <a:font script="Tibt" typeface="Microsoft Himalaya"/>
+        <a:font script="Thaa" typeface="MV Boli"/>
+        <a:font script="Deva" typeface="Mangal"/>
+        <a:font script="Telu" typeface="Gautami"/>
+        <a:font script="Taml" typeface="Latha"/>
+        <a:font script="Syrc" typeface="Estrangelo Edessa"/>
+        <a:font script="Orya" typeface="Kalinga"/>
+        <a:font script="Mlym" typeface="Kartika"/>
+        <a:font script="Laoo" typeface="DokChampa"/>
+        <a:font script="Sinh" typeface="Iskoola Pota"/>
+        <a:font script="Mong" typeface="Mongolian Baiti"/>
+        <a:font script="Viet" typeface="Times New Roman"/>
+        <a:font script="Uigh" typeface="Microsoft Uighur"/>
+        <a:font script="Geor" typeface="Sylfaen"/>
+        <a:font script="Armn" typeface="Arial"/>
+        <a:font script="Bugi" typeface="Leelawadee UI"/>
+        <a:font script="Bopo" typeface="Microsoft JhengHei"/>
+        <a:font script="Java" typeface="Javanese Text"/>
+        <a:font script="Lisu" typeface="Segoe UI"/>
+        <a:font script="Mymr" typeface="Myanmar Text"/>
+        <a:font script="Nkoo" typeface="Ebrima"/>
+        <a:font script="Olck" typeface="Nirmala UI"/>
+        <a:font script="Osma" typeface="Ebrima"/>
+        <a:font script="Phag" typeface="Phagspa"/>
+        <a:font script="Syrn" typeface="Estrangelo Edessa"/>
+        <a:font script="Syrj" typeface="Estrangelo Edessa"/>
+        <a:font script="Syre" typeface="Estrangelo Edessa"/>
+        <a:font script="Sora" typeface="Nirmala UI"/>
+        <a:font script="Tale" typeface="Microsoft Tai Le"/>
+        <a:font script="Talu" typeface="Microsoft New Tai Lue"/>
+        <a:font script="Tfng" typeface="Ebrima"/>
+      </a:majorFont>
+      <a:minorFont>
+        <a:latin typeface="Aptos" panose="02110004020202020204"/>
+        <a:ea typeface=""/>
+        <a:cs typeface=""/>
+        <a:font script="Jpan" typeface="游ゴシック"/>
+        <a:font script="Hang" typeface="맑은 고딕"/>
+        <a:font script="Hans" typeface="等线"/>
+        <a:font script="Hant" typeface="新細明體"/>
+        <a:font script="Arab" typeface="Arial"/>
+        <a:font script="Hebr" typeface="Arial"/>
+        <a:font script="Thai" typeface="Cordia New"/>
+        <a:font script="Ethi" typeface="Nyala"/>
+        <a:font script="Beng" typeface="Vrinda"/>
+        <a:font script="Gujr" typeface="Shruti"/>
+        <a:font script="Khmr" typeface="DaunPenh"/>
+        <a:font script="Knda" typeface="Tunga"/>
+        <a:font script="Guru" typeface="Raavi"/>
+        <a:font script="Cans" typeface="Euphemia"/>
+        <a:font script="Cher" typeface="Plantagenet Cherokee"/>
+        <a:font script="Yiii" typeface="Microsoft Yi Baiti"/>
+        <a:font script="Tibt" typeface="Microsoft Himalaya"/>
+        <a:font script="Thaa" typeface="MV Boli"/>
+        <a:font script="Deva" typeface="Mangal"/>
+        <a:font script="Telu" typeface="Gautami"/>
+        <a:font script="Taml" typeface="Latha"/>
+        <a:font script="Syrc" typeface="Estrangelo Edessa"/>
+        <a:font script="Orya" typeface="Kalinga"/>
+        <a:font script="Mlym" typeface="Kartika"/>
+        <a:font script="Laoo" typeface="DokChampa"/>
+        <a:font script="Sinh" typeface="Iskoola Pota"/>
+        <a:font script="Mong" typeface="Mongolian Baiti"/>
+        <a:font script="Viet" typeface="Arial"/>
+        <a:font script="Uigh" typeface="Microsoft Uighur"/>
+        <a:font script="Geor" typeface="Sylfaen"/>
+        <a:font script="Armn" typeface="Arial"/>
+        <a:font script="Bugi" typeface="Leelawadee UI"/>
+        <a:font script="Bopo" typeface="Microsoft JhengHei"/>
+        <a:font script="Java" typeface="Javanese Text"/>
+        <a:font script="Lisu" typeface="Segoe UI"/>
+        <a:font script="Mymr" typeface="Myanmar Text"/>
+        <a:font script="Nkoo" typeface="Ebrima"/>
+        <a:font script="Olck" typeface="Nirmala UI"/>
+        <a:font script="Osma" typeface="Ebrima"/>
+        <a:font script="Phag" typeface="Phagspa"/>
+        <a:font script="Syrn" typeface="Estrangelo Edessa"/>
+        <a:font script="Syrj" typeface="Estrangelo Edessa"/>
+        <a:font script="Syre" typeface="Estrangelo Edessa"/>
+        <a:font script="Sora" typeface="Nirmala UI"/>
+        <a:font script="Tale" typeface="Microsoft Tai Le"/>
+        <a:font script="Talu" typeface="Microsoft New Tai Lue"/>
+        <a:font script="Tfng" typeface="Ebrima"/>
+      </a:minorFont>
+    </a:fontScheme>
+    <a:fmtScheme name="Office">
+      <a:fillStyleLst>
+        <a:solidFill>
+          <a:schemeClr val="phClr"/>
+        </a:solidFill>
+        <a:gradFill rotWithShape="1">
+          <a:gsLst>
+            <a:gs pos="0">
+              <a:schemeClr val="phClr">
+                <a:lumMod val="110000"/>
+                <a:satMod val="105000"/>
+                <a:tint val="67000"/>
+              </a:schemeClr>
+            </a:gs>
+            <a:gs pos="50000">
+              <a:schemeClr val="phClr">
+                <a:lumMod val="105000"/>
+                <a:satMod val="103000"/>
+                <a:tint val="73000"/>
+              </a:schemeClr>
+            </a:gs>
+            <a:gs pos="100000">
+              <a:schemeClr val="phClr">
+                <a:lumMod val="105000"/>
+                <a:satMod val="109000"/>
+                <a:tint val="81000"/>
+              </a:schemeClr>
+            </a:gs>
+          </a:gsLst>
+          <a:lin ang="5400000" scaled="0"/>
+        </a:gradFill>
+        <a:gradFill rotWithShape="1">
+          <a:gsLst>
+            <a:gs pos="0">
+              <a:schemeClr val="phClr">
+                <a:satMod val="103000"/>
+                <a:lumMod val="102000"/>
+                <a:tint val="94000"/>
+              </a:schemeClr>
+            </a:gs>
+            <a:gs pos="50000">
+              <a:schemeClr val="phClr">
+                <a:satMod val="110000"/>
+                <a:lumMod val="100000"/>
+                <a:shade val="100000"/>
+              </a:schemeClr>
+            </a:gs>
+            <a:gs pos="100000">
+              <a:schemeClr val="phClr">
+                <a:lumMod val="99000"/>
+                <a:satMod val="120000"/>
+                <a:shade val="78000"/>
+              </a:schemeClr>
+            </a:gs>
+          </a:gsLst>
+          <a:lin ang="5400000" scaled="0"/>
+        </a:gradFill>
+      </a:fillStyleLst>
+      <a:lnStyleLst>
+        <a:ln w="12700" cap="flat" cmpd="sng" algn="ctr">
+          <a:solidFill>
+            <a:schemeClr val="phClr"/>
+          </a:solidFill>
+          <a:prstDash val="solid"/>
+          <a:miter lim="800000"/>
+        </a:ln>
+        <a:ln w="19050" cap="flat" cmpd="sng" algn="ctr">
+          <a:solidFill>
+            <a:schemeClr val="phClr"/>
+          </a:solidFill>
+          <a:prstDash val="solid"/>
+          <a:miter lim="800000"/>
+        </a:ln>
+        <a:ln w="25400" cap="flat" cmpd="sng" algn="ctr">
+          <a:solidFill>
+            <a:schemeClr val="phClr"/>
+          </a:solidFill>
+          <a:prstDash val="solid"/>
+          <a:miter lim="800000"/>
+        </a:ln>
+      </a:lnStyleLst>
+      <a:effectStyleLst>
+        <a:effectStyle>
+          <a:effectLst/>
+        </a:effectStyle>
+        <a:effectStyle>
+          <a:effectLst/>
+        </a:effectStyle>
+        <a:effectStyle>
+          <a:effectLst>
+            <a:outerShdw blurRad="57150" dist="19050" dir="5400000" algn="ctr" rotWithShape="0">
+              <a:srgbClr val="000000">
+                <a:alpha val="63000"/>
+              </a:srgbClr>
+            </a:outerShdw>
+          </a:effectLst>
+        </a:effectStyle>
+      </a:effectStyleLst>
+      <a:bgFillStyleLst>
+        <a:solidFill>
+          <a:schemeClr val="phClr"/>
+        </a:solidFill>
+        <a:solidFill>
+          <a:schemeClr val="phClr">
+            <a:tint val="95000"/>
+            <a:satMod val="170000"/>
+          </a:schemeClr>
+        </a:solidFill>
+        <a:gradFill rotWithShape="1">
+          <a:gsLst>
+            <a:gs pos="0">
+              <a:schemeClr val="phClr">
+                <a:tint val="93000"/>
+                <a:satMod val="150000"/>
+                <a:shade val="98000"/>
+                <a:lumMod val="102000"/>
+              </a:schemeClr>
+            </a:gs>
+            <a:gs pos="50000">
+              <a:schemeClr val="phClr">
+                <a:tint val="98000"/>
+                <a:satMod val="130000"/>
+                <a:shade val="90000"/>
+                <a:lumMod val="103000"/>
+              </a:schemeClr>
+            </a:gs>
+            <a:gs pos="100000">
+              <a:schemeClr val="phClr">
+                <a:shade val="63000"/>
+                <a:satMod val="120000"/>
+              </a:schemeClr>
+            </a:gs>
+          </a:gsLst>
+          <a:lin ang="5400000" scaled="0"/>
+        </a:gradFill>
+      </a:bgFillStyleLst>
+    </a:fmtScheme>
+  </a:themeElements>
+  <a:objectDefaults>
+    <a:lnDef>
+      <a:spPr/>
+      <a:bodyPr/>
+      <a:lstStyle/>
+      <a:style>
+        <a:lnRef idx="2">
+          <a:schemeClr val="accent1"/>
+        </a:lnRef>
+        <a:fillRef idx="0">
+          <a:schemeClr val="accent1"/>
+        </a:fillRef>
+        <a:effectRef idx="1">
+          <a:schemeClr val="accent1"/>
+        </a:effectRef>
+        <a:fontRef idx="minor">
+          <a:schemeClr val="tx1"/>
+        </a:fontRef>
+      </a:style>
+    </a:lnDef>
+  </a:objectDefaults>
+  <a:extraClrSchemeLst/>
+  <a:extLst>
+    <a:ext uri="{05A4C25C-085E-4340-85A3-A5531E510DB2}">
+      <thm15:themeFamily xmlns:thm15="http://schemas.microsoft.com/office/thememl/2012/main" name="Office Theme" id="{2E142A2C-CD16-42D6-873A-C26D2A0506FA}" vid="{1BDDFF52-6CD6-40A5-AB3C-68EB2F1E4D0A}"/>
+    </a:ext>
+  </a:extLst>
+</a:theme>
 </file>
--- a/Presentation/SiteSafeAiPresentation.pptx
+++ b/Presentation/SiteSafeAiPresentation.pptx
@@ -881,6 +881,925 @@
 </file>
 
 <file path=ppt/diagrams/colors2.xml><?xml version="1.0" encoding="utf-8"?>
+<dgm:colorsDef xmlns:dgm="http://schemas.openxmlformats.org/drawingml/2006/diagram" xmlns:a="http://schemas.openxmlformats.org/drawingml/2006/main" uniqueId="urn:microsoft.com/office/officeart/2005/8/colors/colorful1">
+  <dgm:title val=""/>
+  <dgm:desc val=""/>
+  <dgm:catLst>
+    <dgm:cat type="colorful" pri="10100"/>
+  </dgm:catLst>
+  <dgm:styleLbl name="node0">
+    <dgm:fillClrLst meth="repeat">
+      <a:schemeClr val="accent1"/>
+    </dgm:fillClrLst>
+    <dgm:linClrLst meth="repeat">
+      <a:schemeClr val="lt1"/>
+    </dgm:linClrLst>
+    <dgm:effectClrLst/>
+    <dgm:txLinClrLst/>
+    <dgm:txFillClrLst/>
+    <dgm:txEffectClrLst/>
+  </dgm:styleLbl>
+  <dgm:styleLbl name="node1">
+    <dgm:fillClrLst meth="repeat">
+      <a:schemeClr val="accent2"/>
+      <a:schemeClr val="accent3"/>
+      <a:schemeClr val="accent4"/>
+      <a:schemeClr val="accent5"/>
+      <a:schemeClr val="accent6"/>
+    </dgm:fillClrLst>
+    <dgm:linClrLst meth="repeat">
+      <a:schemeClr val="lt1"/>
+    </dgm:linClrLst>
+    <dgm:effectClrLst/>
+    <dgm:txLinClrLst/>
+    <dgm:txFillClrLst/>
+    <dgm:txEffectClrLst/>
+  </dgm:styleLbl>
+  <dgm:styleLbl name="alignNode1">
+    <dgm:fillClrLst meth="repeat">
+      <a:schemeClr val="accent2"/>
+      <a:schemeClr val="accent3"/>
+      <a:schemeClr val="accent4"/>
+      <a:schemeClr val="accent5"/>
+      <a:schemeClr val="accent6"/>
+    </dgm:fillClrLst>
+    <dgm:linClrLst meth="repeat">
+      <a:schemeClr val="accent2"/>
+      <a:schemeClr val="accent3"/>
+      <a:schemeClr val="accent4"/>
+      <a:schemeClr val="accent5"/>
+      <a:schemeClr val="accent6"/>
+    </dgm:linClrLst>
+    <dgm:effectClrLst/>
+    <dgm:txLinClrLst/>
+    <dgm:txFillClrLst/>
+    <dgm:txEffectClrLst/>
+  </dgm:styleLbl>
+  <dgm:styleLbl name="lnNode1">
+    <dgm:fillClrLst meth="repeat">
+      <a:schemeClr val="accent2"/>
+      <a:schemeClr val="accent3"/>
+      <a:schemeClr val="accent4"/>
+      <a:schemeClr val="accent5"/>
+      <a:schemeClr val="accent6"/>
+    </dgm:fillClrLst>
+    <dgm:linClrLst meth="repeat">
+      <a:schemeClr val="lt1"/>
+    </dgm:linClrLst>
+    <dgm:effectClrLst/>
+    <dgm:txLinClrLst/>
+    <dgm:txFillClrLst/>
+    <dgm:txEffectClrLst/>
+  </dgm:styleLbl>
+  <dgm:styleLbl name="vennNode1">
+    <dgm:fillClrLst meth="repeat">
+      <a:schemeClr val="accent2">
+        <a:alpha val="50000"/>
+      </a:schemeClr>
+      <a:schemeClr val="accent3">
+        <a:alpha val="50000"/>
+      </a:schemeClr>
+      <a:schemeClr val="accent4">
+        <a:alpha val="50000"/>
+      </a:schemeClr>
+      <a:schemeClr val="accent5">
+        <a:alpha val="50000"/>
+      </a:schemeClr>
+      <a:schemeClr val="accent6">
+        <a:alpha val="50000"/>
+      </a:schemeClr>
+    </dgm:fillClrLst>
+    <dgm:linClrLst meth="repeat">
+      <a:schemeClr val="lt1"/>
+    </dgm:linClrLst>
+    <dgm:effectClrLst/>
+    <dgm:txLinClrLst/>
+    <dgm:txFillClrLst/>
+    <dgm:txEffectClrLst/>
+  </dgm:styleLbl>
+  <dgm:styleLbl name="node2">
+    <dgm:fillClrLst>
+      <a:schemeClr val="accent2"/>
+    </dgm:fillClrLst>
+    <dgm:linClrLst meth="repeat">
+      <a:schemeClr val="lt1"/>
+    </dgm:linClrLst>
+    <dgm:effectClrLst/>
+    <dgm:txLinClrLst/>
+    <dgm:txFillClrLst/>
+    <dgm:txEffectClrLst/>
+  </dgm:styleLbl>
+  <dgm:styleLbl name="node3">
+    <dgm:fillClrLst>
+      <a:schemeClr val="accent3"/>
+    </dgm:fillClrLst>
+    <dgm:linClrLst meth="repeat">
+      <a:schemeClr val="lt1"/>
+    </dgm:linClrLst>
+    <dgm:effectClrLst/>
+    <dgm:txLinClrLst/>
+    <dgm:txFillClrLst/>
+    <dgm:txEffectClrLst/>
+  </dgm:styleLbl>
+  <dgm:styleLbl name="node4">
+    <dgm:fillClrLst>
+      <a:schemeClr val="accent4"/>
+    </dgm:fillClrLst>
+    <dgm:linClrLst meth="repeat">
+      <a:schemeClr val="lt1"/>
+    </dgm:linClrLst>
+    <dgm:effectClrLst/>
+    <dgm:txLinClrLst/>
+    <dgm:txFillClrLst/>
+    <dgm:txEffectClrLst/>
+  </dgm:styleLbl>
+  <dgm:styleLbl name="fgImgPlace1">
+    <dgm:fillClrLst meth="repeat">
+      <a:schemeClr val="accent2">
+        <a:tint val="50000"/>
+      </a:schemeClr>
+      <a:schemeClr val="accent3">
+        <a:tint val="50000"/>
+      </a:schemeClr>
+      <a:schemeClr val="accent4">
+        <a:tint val="50000"/>
+      </a:schemeClr>
+      <a:schemeClr val="accent5">
+        <a:tint val="50000"/>
+      </a:schemeClr>
+      <a:schemeClr val="accent6">
+        <a:tint val="50000"/>
+      </a:schemeClr>
+    </dgm:fillClrLst>
+    <dgm:linClrLst meth="repeat">
+      <a:schemeClr val="lt1"/>
+    </dgm:linClrLst>
+    <dgm:effectClrLst/>
+    <dgm:txLinClrLst/>
+    <dgm:txFillClrLst meth="repeat">
+      <a:schemeClr val="lt1"/>
+    </dgm:txFillClrLst>
+    <dgm:txEffectClrLst/>
+  </dgm:styleLbl>
+  <dgm:styleLbl name="alignImgPlace1">
+    <dgm:fillClrLst>
+      <a:schemeClr val="accent1">
+        <a:tint val="50000"/>
+      </a:schemeClr>
+      <a:schemeClr val="accent2">
+        <a:tint val="20000"/>
+      </a:schemeClr>
+    </dgm:fillClrLst>
+    <dgm:linClrLst meth="repeat">
+      <a:schemeClr val="lt1"/>
+    </dgm:linClrLst>
+    <dgm:effectClrLst/>
+    <dgm:txLinClrLst/>
+    <dgm:txFillClrLst meth="repeat">
+      <a:schemeClr val="lt1"/>
+    </dgm:txFillClrLst>
+    <dgm:txEffectClrLst/>
+  </dgm:styleLbl>
+  <dgm:styleLbl name="bgImgPlace1">
+    <dgm:fillClrLst>
+      <a:schemeClr val="accent1">
+        <a:tint val="50000"/>
+      </a:schemeClr>
+      <a:schemeClr val="accent2">
+        <a:tint val="20000"/>
+      </a:schemeClr>
+    </dgm:fillClrLst>
+    <dgm:linClrLst meth="repeat">
+      <a:schemeClr val="lt1"/>
+    </dgm:linClrLst>
+    <dgm:effectClrLst/>
+    <dgm:txLinClrLst/>
+    <dgm:txFillClrLst meth="repeat">
+      <a:schemeClr val="lt1"/>
+    </dgm:txFillClrLst>
+    <dgm:txEffectClrLst/>
+  </dgm:styleLbl>
+  <dgm:styleLbl name="sibTrans2D1">
+    <dgm:fillClrLst meth="repeat">
+      <a:schemeClr val="accent2"/>
+      <a:schemeClr val="accent3"/>
+      <a:schemeClr val="accent4"/>
+      <a:schemeClr val="accent5"/>
+      <a:schemeClr val="accent6"/>
+    </dgm:fillClrLst>
+    <dgm:linClrLst meth="cycle">
+      <a:schemeClr val="lt1"/>
+    </dgm:linClrLst>
+    <dgm:effectClrLst/>
+    <dgm:txLinClrLst/>
+    <dgm:txFillClrLst/>
+    <dgm:txEffectClrLst/>
+  </dgm:styleLbl>
+  <dgm:styleLbl name="fgSibTrans2D1">
+    <dgm:fillClrLst meth="repeat">
+      <a:schemeClr val="accent2"/>
+      <a:schemeClr val="accent3"/>
+      <a:schemeClr val="accent4"/>
+      <a:schemeClr val="accent5"/>
+      <a:schemeClr val="accent6"/>
+    </dgm:fillClrLst>
+    <dgm:linClrLst meth="cycle">
+      <a:schemeClr val="lt1"/>
+    </dgm:linClrLst>
+    <dgm:effectClrLst/>
+    <dgm:txLinClrLst/>
+    <dgm:txFillClrLst meth="repeat">
+      <a:schemeClr val="lt1"/>
+    </dgm:txFillClrLst>
+    <dgm:txEffectClrLst/>
+  </dgm:styleLbl>
+  <dgm:styleLbl name="bgSibTrans2D1">
+    <dgm:fillClrLst meth="repeat">
+      <a:schemeClr val="accent2"/>
+      <a:schemeClr val="accent3"/>
+      <a:schemeClr val="accent4"/>
+      <a:schemeClr val="accent5"/>
+      <a:schemeClr val="accent6"/>
+    </dgm:fillClrLst>
+    <dgm:linClrLst meth="cycle">
+      <a:schemeClr val="lt1"/>
+    </dgm:linClrLst>
+    <dgm:effectClrLst/>
+    <dgm:txLinClrLst/>
+    <dgm:txFillClrLst meth="repeat">
+      <a:schemeClr val="lt1"/>
+    </dgm:txFillClrLst>
+    <dgm:txEffectClrLst/>
+  </dgm:styleLbl>
+  <dgm:styleLbl name="sibTrans1D1">
+    <dgm:fillClrLst meth="repeat">
+      <a:schemeClr val="accent2"/>
+      <a:schemeClr val="accent3"/>
+      <a:schemeClr val="accent4"/>
+      <a:schemeClr val="accent5"/>
+      <a:schemeClr val="accent6"/>
+    </dgm:fillClrLst>
+    <dgm:linClrLst meth="repeat">
+      <a:schemeClr val="accent2"/>
+      <a:schemeClr val="accent3"/>
+      <a:schemeClr val="accent4"/>
+      <a:schemeClr val="accent5"/>
+      <a:schemeClr val="accent6"/>
+    </dgm:linClrLst>
+    <dgm:effectClrLst/>
+    <dgm:txLinClrLst/>
+    <dgm:txFillClrLst meth="repeat">
+      <a:schemeClr val="tx1"/>
+    </dgm:txFillClrLst>
+    <dgm:txEffectClrLst/>
+  </dgm:styleLbl>
+  <dgm:styleLbl name="callout">
+    <dgm:fillClrLst meth="repeat">
+      <a:schemeClr val="accent2"/>
+    </dgm:fillClrLst>
+    <dgm:linClrLst meth="repeat">
+      <a:schemeClr val="accent2">
+        <a:tint val="50000"/>
+      </a:schemeClr>
+    </dgm:linClrLst>
+    <dgm:effectClrLst/>
+    <dgm:txLinClrLst/>
+    <dgm:txFillClrLst meth="repeat">
+      <a:schemeClr val="tx1"/>
+    </dgm:txFillClrLst>
+    <dgm:txEffectClrLst/>
+  </dgm:styleLbl>
+  <dgm:styleLbl name="asst0">
+    <dgm:fillClrLst meth="repeat">
+      <a:schemeClr val="accent1"/>
+    </dgm:fillClrLst>
+    <dgm:linClrLst meth="repeat">
+      <a:schemeClr val="lt1"/>
+    </dgm:linClrLst>
+    <dgm:effectClrLst/>
+    <dgm:txLinClrLst/>
+    <dgm:txFillClrLst/>
+    <dgm:txEffectClrLst/>
+  </dgm:styleLbl>
+  <dgm:styleLbl name="asst1">
+    <dgm:fillClrLst meth="repeat">
+      <a:schemeClr val="accent2"/>
+    </dgm:fillClrLst>
+    <dgm:linClrLst meth="repeat">
+      <a:schemeClr val="lt1"/>
+    </dgm:linClrLst>
+    <dgm:effectClrLst/>
+    <dgm:txLinClrLst/>
+    <dgm:txFillClrLst/>
+    <dgm:txEffectClrLst/>
+  </dgm:styleLbl>
+  <dgm:styleLbl name="asst2">
+    <dgm:fillClrLst>
+      <a:schemeClr val="accent3"/>
+    </dgm:fillClrLst>
+    <dgm:linClrLst meth="repeat">
+      <a:schemeClr val="lt1"/>
+    </dgm:linClrLst>
+    <dgm:effectClrLst/>
+    <dgm:txLinClrLst/>
+    <dgm:txFillClrLst/>
+    <dgm:txEffectClrLst/>
+  </dgm:styleLbl>
+  <dgm:styleLbl name="asst3">
+    <dgm:fillClrLst>
+      <a:schemeClr val="accent4"/>
+    </dgm:fillClrLst>
+    <dgm:linClrLst meth="repeat">
+      <a:schemeClr val="lt1"/>
+    </dgm:linClrLst>
+    <dgm:effectClrLst/>
+    <dgm:txLinClrLst/>
+    <dgm:txFillClrLst/>
+    <dgm:txEffectClrLst/>
+  </dgm:styleLbl>
+  <dgm:styleLbl name="asst4">
+    <dgm:fillClrLst>
+      <a:schemeClr val="accent5"/>
+    </dgm:fillClrLst>
+    <dgm:linClrLst meth="repeat">
+      <a:schemeClr val="lt1"/>
+    </dgm:linClrLst>
+    <dgm:effectClrLst/>
+    <dgm:txLinClrLst/>
+    <dgm:txFillClrLst/>
+    <dgm:txEffectClrLst/>
+  </dgm:styleLbl>
+  <dgm:styleLbl name="parChTrans2D1">
+    <dgm:fillClrLst meth="repeat">
+      <a:schemeClr val="accent2"/>
+    </dgm:fillClrLst>
+    <dgm:linClrLst meth="repeat">
+      <a:schemeClr val="lt1"/>
+    </dgm:linClrLst>
+    <dgm:effectClrLst/>
+    <dgm:txLinClrLst/>
+    <dgm:txFillClrLst meth="repeat">
+      <a:schemeClr val="lt1"/>
+    </dgm:txFillClrLst>
+    <dgm:txEffectClrLst/>
+  </dgm:styleLbl>
+  <dgm:styleLbl name="parChTrans2D2">
+    <dgm:fillClrLst meth="repeat">
+      <a:schemeClr val="accent3"/>
+    </dgm:fillClrLst>
+    <dgm:linClrLst meth="repeat">
+      <a:schemeClr val="lt1"/>
+    </dgm:linClrLst>
+    <dgm:effectClrLst/>
+    <dgm:txLinClrLst/>
+    <dgm:txFillClrLst/>
+    <dgm:txEffectClrLst/>
+  </dgm:styleLbl>
+  <dgm:styleLbl name="parChTrans2D3">
+    <dgm:fillClrLst meth="repeat">
+      <a:schemeClr val="accent4"/>
+    </dgm:fillClrLst>
+    <dgm:linClrLst meth="repeat">
+      <a:schemeClr val="lt1"/>
+    </dgm:linClrLst>
+    <dgm:effectClrLst/>
+    <dgm:txLinClrLst/>
+    <dgm:txFillClrLst/>
+    <dgm:txEffectClrLst/>
+  </dgm:styleLbl>
+  <dgm:styleLbl name="parChTrans2D4">
+    <dgm:fillClrLst meth="repeat">
+      <a:schemeClr val="accent5"/>
+    </dgm:fillClrLst>
+    <dgm:linClrLst meth="repeat">
+      <a:schemeClr val="lt1"/>
+    </dgm:linClrLst>
+    <dgm:effectClrLst/>
+    <dgm:txLinClrLst/>
+    <dgm:txFillClrLst meth="repeat">
+      <a:schemeClr val="lt1"/>
+    </dgm:txFillClrLst>
+    <dgm:txEffectClrLst/>
+  </dgm:styleLbl>
+  <dgm:styleLbl name="parChTrans1D1">
+    <dgm:fillClrLst meth="repeat">
+      <a:schemeClr val="accent2"/>
+    </dgm:fillClrLst>
+    <dgm:linClrLst meth="repeat">
+      <a:schemeClr val="accent1"/>
+    </dgm:linClrLst>
+    <dgm:effectClrLst/>
+    <dgm:txLinClrLst/>
+    <dgm:txFillClrLst meth="repeat">
+      <a:schemeClr val="tx1"/>
+    </dgm:txFillClrLst>
+    <dgm:txEffectClrLst/>
+  </dgm:styleLbl>
+  <dgm:styleLbl name="parChTrans1D2">
+    <dgm:fillClrLst meth="repeat">
+      <a:schemeClr val="accent3">
+        <a:tint val="90000"/>
+      </a:schemeClr>
+    </dgm:fillClrLst>
+    <dgm:linClrLst meth="repeat">
+      <a:schemeClr val="accent2"/>
+    </dgm:linClrLst>
+    <dgm:effectClrLst/>
+    <dgm:txLinClrLst/>
+    <dgm:txFillClrLst meth="repeat">
+      <a:schemeClr val="tx1"/>
+    </dgm:txFillClrLst>
+    <dgm:txEffectClrLst/>
+  </dgm:styleLbl>
+  <dgm:styleLbl name="parChTrans1D3">
+    <dgm:fillClrLst meth="repeat">
+      <a:schemeClr val="accent4">
+        <a:tint val="70000"/>
+      </a:schemeClr>
+    </dgm:fillClrLst>
+    <dgm:linClrLst meth="repeat">
+      <a:schemeClr val="accent3"/>
+    </dgm:linClrLst>
+    <dgm:effectClrLst/>
+    <dgm:txLinClrLst/>
+    <dgm:txFillClrLst meth="repeat">
+      <a:schemeClr val="tx1"/>
+    </dgm:txFillClrLst>
+    <dgm:txEffectClrLst/>
+  </dgm:styleLbl>
+  <dgm:styleLbl name="parChTrans1D4">
+    <dgm:fillClrLst meth="repeat">
+      <a:schemeClr val="accent5">
+        <a:tint val="50000"/>
+      </a:schemeClr>
+    </dgm:fillClrLst>
+    <dgm:linClrLst meth="repeat">
+      <a:schemeClr val="accent4"/>
+    </dgm:linClrLst>
+    <dgm:effectClrLst/>
+    <dgm:txLinClrLst/>
+    <dgm:txFillClrLst meth="repeat">
+      <a:schemeClr val="tx1"/>
+    </dgm:txFillClrLst>
+    <dgm:txEffectClrLst/>
+  </dgm:styleLbl>
+  <dgm:styleLbl name="fgAcc1">
+    <dgm:fillClrLst meth="repeat">
+      <a:schemeClr val="lt1">
+        <a:alpha val="90000"/>
+      </a:schemeClr>
+    </dgm:fillClrLst>
+    <dgm:linClrLst meth="repeat">
+      <a:schemeClr val="accent2"/>
+      <a:schemeClr val="accent3"/>
+      <a:schemeClr val="accent4"/>
+      <a:schemeClr val="accent5"/>
+      <a:schemeClr val="accent6"/>
+    </dgm:linClrLst>
+    <dgm:effectClrLst/>
+    <dgm:txLinClrLst/>
+    <dgm:txFillClrLst meth="repeat">
+      <a:schemeClr val="dk1"/>
+    </dgm:txFillClrLst>
+    <dgm:txEffectClrLst/>
+  </dgm:styleLbl>
+  <dgm:styleLbl name="conFgAcc1">
+    <dgm:fillClrLst meth="repeat">
+      <a:schemeClr val="lt1">
+        <a:alpha val="90000"/>
+      </a:schemeClr>
+    </dgm:fillClrLst>
+    <dgm:linClrLst meth="repeat">
+      <a:schemeClr val="accent2"/>
+      <a:schemeClr val="accent3"/>
+      <a:schemeClr val="accent4"/>
+      <a:schemeClr val="accent5"/>
+      <a:schemeClr val="accent6"/>
+    </dgm:linClrLst>
+    <dgm:effectClrLst/>
+    <dgm:txLinClrLst/>
+    <dgm:txFillClrLst meth="repeat">
+      <a:schemeClr val="dk1"/>
+    </dgm:txFillClrLst>
+    <dgm:txEffectClrLst/>
+  </dgm:styleLbl>
+  <dgm:styleLbl name="alignAcc1">
+    <dgm:fillClrLst meth="repeat">
+      <a:schemeClr val="lt1">
+        <a:alpha val="90000"/>
+      </a:schemeClr>
+    </dgm:fillClrLst>
+    <dgm:linClrLst meth="repeat">
+      <a:schemeClr val="accent2"/>
+      <a:schemeClr val="accent3"/>
+      <a:schemeClr val="accent4"/>
+      <a:schemeClr val="accent5"/>
+      <a:schemeClr val="accent6"/>
+    </dgm:linClrLst>
+    <dgm:effectClrLst/>
+    <dgm:txLinClrLst/>
+    <dgm:txFillClrLst meth="repeat">
+      <a:schemeClr val="dk1"/>
+    </dgm:txFillClrLst>
+    <dgm:txEffectClrLst/>
+  </dgm:styleLbl>
+  <dgm:styleLbl name="trAlignAcc1">
+    <dgm:fillClrLst meth="repeat">
+      <a:schemeClr val="lt1">
+        <a:alpha val="40000"/>
+      </a:schemeClr>
+    </dgm:fillClrLst>
+    <dgm:linClrLst meth="repeat">
+      <a:schemeClr val="accent1"/>
+    </dgm:linClrLst>
+    <dgm:effectClrLst/>
+    <dgm:txLinClrLst/>
+    <dgm:txFillClrLst meth="repeat">
+      <a:schemeClr val="dk1"/>
+    </dgm:txFillClrLst>
+    <dgm:txEffectClrLst/>
+  </dgm:styleLbl>
+  <dgm:styleLbl name="bgAcc1">
+    <dgm:fillClrLst meth="repeat">
+      <a:schemeClr val="lt1">
+        <a:alpha val="90000"/>
+      </a:schemeClr>
+    </dgm:fillClrLst>
+    <dgm:linClrLst meth="repeat">
+      <a:schemeClr val="accent2"/>
+      <a:schemeClr val="accent3"/>
+      <a:schemeClr val="accent4"/>
+      <a:schemeClr val="accent5"/>
+      <a:schemeClr val="accent6"/>
+    </dgm:linClrLst>
+    <dgm:effectClrLst/>
+    <dgm:txLinClrLst/>
+    <dgm:txFillClrLst meth="repeat">
+      <a:schemeClr val="dk1"/>
+    </dgm:txFillClrLst>
+    <dgm:txEffectClrLst/>
+  </dgm:styleLbl>
+  <dgm:styleLbl name="solidFgAcc1">
+    <dgm:fillClrLst meth="repeat">
+      <a:schemeClr val="lt1"/>
+    </dgm:fillClrLst>
+    <dgm:linClrLst meth="repeat">
+      <a:schemeClr val="accent2"/>
+      <a:schemeClr val="accent3"/>
+      <a:schemeClr val="accent4"/>
+      <a:schemeClr val="accent5"/>
+      <a:schemeClr val="accent6"/>
+    </dgm:linClrLst>
+    <dgm:effectClrLst/>
+    <dgm:txLinClrLst/>
+    <dgm:txFillClrLst meth="repeat">
+      <a:schemeClr val="dk1"/>
+    </dgm:txFillClrLst>
+    <dgm:txEffectClrLst/>
+  </dgm:styleLbl>
+  <dgm:styleLbl name="solidAlignAcc1">
+    <dgm:fillClrLst meth="repeat">
+      <a:schemeClr val="lt1"/>
+    </dgm:fillClrLst>
+    <dgm:linClrLst meth="repeat">
+      <a:schemeClr val="accent2"/>
+      <a:schemeClr val="accent3"/>
+      <a:schemeClr val="accent4"/>
+      <a:schemeClr val="accent5"/>
+      <a:schemeClr val="accent6"/>
+    </dgm:linClrLst>
+    <dgm:effectClrLst/>
+    <dgm:txLinClrLst/>
+    <dgm:txFillClrLst meth="repeat">
+      <a:schemeClr val="dk1"/>
+    </dgm:txFillClrLst>
+    <dgm:txEffectClrLst/>
+  </dgm:styleLbl>
+  <dgm:styleLbl name="solidBgAcc1">
+    <dgm:fillClrLst meth="repeat">
+      <a:schemeClr val="lt1"/>
+    </dgm:fillClrLst>
+    <dgm:linClrLst meth="repeat">
+      <a:schemeClr val="accent2"/>
+      <a:schemeClr val="accent3"/>
+      <a:schemeClr val="accent4"/>
+      <a:schemeClr val="accent5"/>
+      <a:schemeClr val="accent6"/>
+    </dgm:linClrLst>
+    <dgm:effectClrLst/>
+    <dgm:txLinClrLst/>
+    <dgm:txFillClrLst meth="repeat">
+      <a:schemeClr val="dk1"/>
+    </dgm:txFillClrLst>
+    <dgm:txEffectClrLst/>
+  </dgm:styleLbl>
+  <dgm:styleLbl name="fgAccFollowNode1">
+    <dgm:fillClrLst meth="repeat">
+      <a:schemeClr val="accent2">
+        <a:tint val="40000"/>
+        <a:alpha val="90000"/>
+      </a:schemeClr>
+      <a:schemeClr val="accent3">
+        <a:tint val="40000"/>
+        <a:alpha val="90000"/>
+      </a:schemeClr>
+      <a:schemeClr val="accent4">
+        <a:tint val="40000"/>
+        <a:alpha val="90000"/>
+      </a:schemeClr>
+      <a:schemeClr val="accent5">
+        <a:tint val="40000"/>
+        <a:alpha val="90000"/>
+      </a:schemeClr>
+      <a:schemeClr val="accent6">
+        <a:tint val="40000"/>
+        <a:alpha val="90000"/>
+      </a:schemeClr>
+    </dgm:fillClrLst>
+    <dgm:linClrLst meth="repeat">
+      <a:schemeClr val="accent2">
+        <a:tint val="40000"/>
+        <a:alpha val="90000"/>
+      </a:schemeClr>
+      <a:schemeClr val="accent3">
+        <a:tint val="40000"/>
+        <a:alpha val="90000"/>
+      </a:schemeClr>
+      <a:schemeClr val="accent4">
+        <a:tint val="40000"/>
+        <a:alpha val="90000"/>
+      </a:schemeClr>
+      <a:schemeClr val="accent5">
+        <a:tint val="40000"/>
+        <a:alpha val="90000"/>
+      </a:schemeClr>
+      <a:schemeClr val="accent6">
+        <a:tint val="40000"/>
+        <a:alpha val="90000"/>
+      </a:schemeClr>
+    </dgm:linClrLst>
+    <dgm:effectClrLst/>
+    <dgm:txLinClrLst/>
+    <dgm:txFillClrLst meth="repeat">
+      <a:schemeClr val="dk1"/>
+    </dgm:txFillClrLst>
+    <dgm:txEffectClrLst/>
+  </dgm:styleLbl>
+  <dgm:styleLbl name="alignAccFollowNode1">
+    <dgm:fillClrLst meth="repeat">
+      <a:schemeClr val="accent2">
+        <a:tint val="40000"/>
+        <a:alpha val="90000"/>
+      </a:schemeClr>
+      <a:schemeClr val="accent3">
+        <a:tint val="40000"/>
+        <a:alpha val="90000"/>
+      </a:schemeClr>
+      <a:schemeClr val="accent4">
+        <a:tint val="40000"/>
+        <a:alpha val="90000"/>
+      </a:schemeClr>
+      <a:schemeClr val="accent5">
+        <a:tint val="40000"/>
+        <a:alpha val="90000"/>
+      </a:schemeClr>
+      <a:schemeClr val="accent6">
+        <a:tint val="40000"/>
+        <a:alpha val="90000"/>
+      </a:schemeClr>
+    </dgm:fillClrLst>
+    <dgm:linClrLst meth="repeat">
+      <a:schemeClr val="accent2">
+        <a:tint val="40000"/>
+        <a:alpha val="90000"/>
+      </a:schemeClr>
+      <a:schemeClr val="accent3">
+        <a:tint val="40000"/>
+        <a:alpha val="90000"/>
+      </a:schemeClr>
+      <a:schemeClr val="accent4">
+        <a:tint val="40000"/>
+        <a:alpha val="90000"/>
+      </a:schemeClr>
+      <a:schemeClr val="accent5">
+        <a:tint val="40000"/>
+        <a:alpha val="90000"/>
+      </a:schemeClr>
+      <a:schemeClr val="accent6">
+        <a:tint val="40000"/>
+        <a:alpha val="90000"/>
+      </a:schemeClr>
+    </dgm:linClrLst>
+    <dgm:effectClrLst/>
+    <dgm:txLinClrLst/>
+    <dgm:txFillClrLst meth="repeat">
+      <a:schemeClr val="dk1"/>
+    </dgm:txFillClrLst>
+    <dgm:txEffectClrLst/>
+  </dgm:styleLbl>
+  <dgm:styleLbl name="bgAccFollowNode1">
+    <dgm:fillClrLst meth="repeat">
+      <a:schemeClr val="accent2">
+        <a:tint val="40000"/>
+        <a:alpha val="90000"/>
+      </a:schemeClr>
+      <a:schemeClr val="accent3">
+        <a:tint val="40000"/>
+        <a:alpha val="90000"/>
+      </a:schemeClr>
+      <a:schemeClr val="accent4">
+        <a:tint val="40000"/>
+        <a:alpha val="90000"/>
+      </a:schemeClr>
+      <a:schemeClr val="accent5">
+        <a:tint val="40000"/>
+        <a:alpha val="90000"/>
+      </a:schemeClr>
+      <a:schemeClr val="accent6">
+        <a:tint val="40000"/>
+        <a:alpha val="90000"/>
+      </a:schemeClr>
+    </dgm:fillClrLst>
+    <dgm:linClrLst meth="repeat">
+      <a:schemeClr val="accent2">
+        <a:tint val="40000"/>
+        <a:alpha val="90000"/>
+      </a:schemeClr>
+      <a:schemeClr val="accent3">
+        <a:tint val="40000"/>
+        <a:alpha val="90000"/>
+      </a:schemeClr>
+      <a:schemeClr val="accent4">
+        <a:tint val="40000"/>
+        <a:alpha val="90000"/>
+      </a:schemeClr>
+      <a:schemeClr val="accent5">
+        <a:tint val="40000"/>
+        <a:alpha val="90000"/>
+      </a:schemeClr>
+      <a:schemeClr val="accent6">
+        <a:tint val="40000"/>
+        <a:alpha val="90000"/>
+      </a:schemeClr>
+    </dgm:linClrLst>
+    <dgm:effectClrLst/>
+    <dgm:txLinClrLst/>
+    <dgm:txFillClrLst meth="repeat">
+      <a:schemeClr val="dk1"/>
+    </dgm:txFillClrLst>
+    <dgm:txEffectClrLst/>
+  </dgm:styleLbl>
+  <dgm:styleLbl name="fgAcc0">
+    <dgm:fillClrLst meth="repeat">
+      <a:schemeClr val="lt1">
+        <a:alpha val="90000"/>
+      </a:schemeClr>
+    </dgm:fillClrLst>
+    <dgm:linClrLst>
+      <a:schemeClr val="accent1"/>
+    </dgm:linClrLst>
+    <dgm:effectClrLst/>
+    <dgm:txLinClrLst/>
+    <dgm:txFillClrLst meth="repeat">
+      <a:schemeClr val="dk1"/>
+    </dgm:txFillClrLst>
+    <dgm:txEffectClrLst/>
+  </dgm:styleLbl>
+  <dgm:styleLbl name="fgAcc2">
+    <dgm:fillClrLst meth="repeat">
+      <a:schemeClr val="lt1">
+        <a:alpha val="90000"/>
+      </a:schemeClr>
+    </dgm:fillClrLst>
+    <dgm:linClrLst>
+      <a:schemeClr val="accent2"/>
+    </dgm:linClrLst>
+    <dgm:effectClrLst/>
+    <dgm:txLinClrLst/>
+    <dgm:txFillClrLst meth="repeat">
+      <a:schemeClr val="dk1"/>
+    </dgm:txFillClrLst>
+    <dgm:txEffectClrLst/>
+  </dgm:styleLbl>
+  <dgm:styleLbl name="fgAcc3">
+    <dgm:fillClrLst meth="repeat">
+      <a:schemeClr val="lt1">
+        <a:alpha val="90000"/>
+      </a:schemeClr>
+    </dgm:fillClrLst>
+    <dgm:linClrLst>
+      <a:schemeClr val="accent3"/>
+    </dgm:linClrLst>
+    <dgm:effectClrLst/>
+    <dgm:txLinClrLst/>
+    <dgm:txFillClrLst meth="repeat">
+      <a:schemeClr val="dk1"/>
+    </dgm:txFillClrLst>
+    <dgm:txEffectClrLst/>
+  </dgm:styleLbl>
+  <dgm:styleLbl name="fgAcc4">
+    <dgm:fillClrLst meth="repeat">
+      <a:schemeClr val="lt1">
+        <a:alpha val="90000"/>
+      </a:schemeClr>
+    </dgm:fillClrLst>
+    <dgm:linClrLst>
+      <a:schemeClr val="accent4"/>
+    </dgm:linClrLst>
+    <dgm:effectClrLst/>
+    <dgm:txLinClrLst/>
+    <dgm:txFillClrLst meth="repeat">
+      <a:schemeClr val="dk1"/>
+    </dgm:txFillClrLst>
+    <dgm:txEffectClrLst/>
+  </dgm:styleLbl>
+  <dgm:styleLbl name="bgShp">
+    <dgm:fillClrLst meth="repeat">
+      <a:schemeClr val="accent2">
+        <a:tint val="40000"/>
+      </a:schemeClr>
+    </dgm:fillClrLst>
+    <dgm:linClrLst meth="repeat">
+      <a:schemeClr val="dk1"/>
+    </dgm:linClrLst>
+    <dgm:effectClrLst/>
+    <dgm:txLinClrLst/>
+    <dgm:txFillClrLst meth="repeat">
+      <a:schemeClr val="dk1"/>
+    </dgm:txFillClrLst>
+    <dgm:txEffectClrLst/>
+  </dgm:styleLbl>
+  <dgm:styleLbl name="dkBgShp">
+    <dgm:fillClrLst meth="repeat">
+      <a:schemeClr val="accent2">
+        <a:shade val="90000"/>
+      </a:schemeClr>
+    </dgm:fillClrLst>
+    <dgm:linClrLst meth="repeat">
+      <a:schemeClr val="dk1"/>
+    </dgm:linClrLst>
+    <dgm:effectClrLst/>
+    <dgm:txLinClrLst/>
+    <dgm:txFillClrLst meth="repeat">
+      <a:schemeClr val="lt1"/>
+    </dgm:txFillClrLst>
+    <dgm:txEffectClrLst/>
+  </dgm:styleLbl>
+  <dgm:styleLbl name="trBgShp">
+    <dgm:fillClrLst meth="repeat">
+      <a:schemeClr val="accent1">
+        <a:tint val="50000"/>
+        <a:alpha val="40000"/>
+      </a:schemeClr>
+    </dgm:fillClrLst>
+    <dgm:linClrLst meth="repeat">
+      <a:schemeClr val="accent2"/>
+    </dgm:linClrLst>
+    <dgm:effectClrLst/>
+    <dgm:txLinClrLst/>
+    <dgm:txFillClrLst meth="repeat">
+      <a:schemeClr val="lt1"/>
+    </dgm:txFillClrLst>
+    <dgm:txEffectClrLst/>
+  </dgm:styleLbl>
+  <dgm:styleLbl name="fgShp">
+    <dgm:fillClrLst meth="repeat">
+      <a:schemeClr val="accent2">
+        <a:tint val="40000"/>
+      </a:schemeClr>
+    </dgm:fillClrLst>
+    <dgm:linClrLst meth="repeat">
+      <a:schemeClr val="lt1"/>
+    </dgm:linClrLst>
+    <dgm:effectClrLst/>
+    <dgm:txLinClrLst/>
+    <dgm:txFillClrLst meth="repeat">
+      <a:schemeClr val="dk1"/>
+    </dgm:txFillClrLst>
+    <dgm:txEffectClrLst/>
+  </dgm:styleLbl>
+  <dgm:styleLbl name="revTx">
+    <dgm:fillClrLst meth="repeat">
+      <a:schemeClr val="lt1">
+        <a:alpha val="0"/>
+      </a:schemeClr>
+    </dgm:fillClrLst>
+    <dgm:linClrLst meth="repeat">
+      <a:schemeClr val="dk1">
+        <a:alpha val="0"/>
+      </a:schemeClr>
+    </dgm:linClrLst>
+    <dgm:effectClrLst/>
+    <dgm:txLinClrLst/>
+    <dgm:txFillClrLst meth="repeat">
+      <a:schemeClr val="tx1"/>
+    </dgm:txFillClrLst>
+    <dgm:txEffectClrLst/>
+  </dgm:styleLbl>
+</dgm:colorsDef>
+</file>
+
+<file path=ppt/diagrams/colors3.xml><?xml version="1.0" encoding="utf-8"?>
 <dgm:colorsDef xmlns:dgm="http://schemas.openxmlformats.org/drawingml/2006/diagram" xmlns:a="http://schemas.openxmlformats.org/drawingml/2006/main" uniqueId="urn:microsoft.com/office/officeart/2005/8/colors/accent1_2">
   <dgm:title val=""/>
   <dgm:desc val=""/>
@@ -2515,7 +3434,7 @@
 <dgm:dataModel xmlns:dgm="http://schemas.openxmlformats.org/drawingml/2006/diagram" xmlns:a="http://schemas.openxmlformats.org/drawingml/2006/main">
   <dgm:ptLst>
     <dgm:pt modelId="{310C5AED-499C-4509-A31A-3E770F80D6AC}" type="doc">
-      <dgm:prSet loTypeId="urn:microsoft.com/office/officeart/2005/8/layout/default" loCatId="list" qsTypeId="urn:microsoft.com/office/officeart/2005/8/quickstyle/simple1" qsCatId="simple" csTypeId="urn:microsoft.com/office/officeart/2005/8/colors/accent1_2" csCatId="accent1"/>
+      <dgm:prSet loTypeId="urn:microsoft.com/office/officeart/2016/7/layout/RepeatingBendingProcessNew" loCatId="process" qsTypeId="urn:microsoft.com/office/officeart/2005/8/quickstyle/simple1" qsCatId="simple" csTypeId="urn:microsoft.com/office/officeart/2005/8/colors/colorful1" csCatId="colorful" phldr="1"/>
       <dgm:spPr/>
       <dgm:t>
         <a:bodyPr/>
@@ -2533,10 +3452,10 @@
         <a:lstStyle/>
         <a:p>
           <a:r>
-            <a:rPr lang="en-GB"/>
-            <a:t>Finalised Technology</a:t>
+            <a:rPr lang="en-GB" dirty="0"/>
+            <a:t>Finalised Technologies</a:t>
           </a:r>
-          <a:endParaRPr lang="en-US"/>
+          <a:endParaRPr lang="en-US" dirty="0"/>
         </a:p>
       </dgm:t>
     </dgm:pt>
@@ -2747,8 +3666,8 @@
         </a:p>
       </dgm:t>
     </dgm:pt>
-    <dgm:pt modelId="{CF08B7C5-0506-454E-9D26-92460E256643}" type="pres">
-      <dgm:prSet presAssocID="{310C5AED-499C-4509-A31A-3E770F80D6AC}" presName="diagram" presStyleCnt="0">
+    <dgm:pt modelId="{D8C8F105-E23C-45CC-BF37-EF5019979644}" type="pres">
+      <dgm:prSet presAssocID="{310C5AED-499C-4509-A31A-3E770F80D6AC}" presName="Name0" presStyleCnt="0">
         <dgm:presLayoutVars>
           <dgm:dir/>
           <dgm:resizeHandles val="exact"/>
@@ -2756,7 +3675,7 @@
       </dgm:prSet>
       <dgm:spPr/>
     </dgm:pt>
-    <dgm:pt modelId="{2D38C828-CB07-4469-BC0B-1E161180A0A9}" type="pres">
+    <dgm:pt modelId="{73DBE013-C453-4A91-BFAA-7EC6722C5BCD}" type="pres">
       <dgm:prSet presAssocID="{0D794B57-6B83-4926-8AC7-B3E2B87F5D06}" presName="node" presStyleLbl="node1" presStyleIdx="0" presStyleCnt="6">
         <dgm:presLayoutVars>
           <dgm:bulletEnabled val="1"/>
@@ -2764,11 +3683,15 @@
       </dgm:prSet>
       <dgm:spPr/>
     </dgm:pt>
-    <dgm:pt modelId="{ED46FC4B-BEA2-4B40-86DA-086FC6359851}" type="pres">
-      <dgm:prSet presAssocID="{CAE3D534-0120-4446-9EA5-13C50498B81C}" presName="sibTrans" presStyleCnt="0"/>
+    <dgm:pt modelId="{F66EF466-847B-49CB-B3A0-4E9A2ADE891C}" type="pres">
+      <dgm:prSet presAssocID="{CAE3D534-0120-4446-9EA5-13C50498B81C}" presName="sibTrans" presStyleLbl="sibTrans1D1" presStyleIdx="0" presStyleCnt="5"/>
       <dgm:spPr/>
     </dgm:pt>
-    <dgm:pt modelId="{6C6C46E8-A03E-4D96-86A6-7B852063940F}" type="pres">
+    <dgm:pt modelId="{43E95873-08F3-4B60-9522-DCFFF2E332E5}" type="pres">
+      <dgm:prSet presAssocID="{CAE3D534-0120-4446-9EA5-13C50498B81C}" presName="connectorText" presStyleLbl="sibTrans1D1" presStyleIdx="0" presStyleCnt="5"/>
+      <dgm:spPr/>
+    </dgm:pt>
+    <dgm:pt modelId="{89D45EF4-9B2C-4EC1-B2B7-9AB78B964D54}" type="pres">
       <dgm:prSet presAssocID="{1A9563B8-02DA-4724-98BB-8C5A024A59FF}" presName="node" presStyleLbl="node1" presStyleIdx="1" presStyleCnt="6">
         <dgm:presLayoutVars>
           <dgm:bulletEnabled val="1"/>
@@ -2776,11 +3699,15 @@
       </dgm:prSet>
       <dgm:spPr/>
     </dgm:pt>
-    <dgm:pt modelId="{C742B709-0859-4A7C-89A4-83F836376394}" type="pres">
-      <dgm:prSet presAssocID="{36250D64-D81B-434B-B177-3C3F5B4751EF}" presName="sibTrans" presStyleCnt="0"/>
+    <dgm:pt modelId="{0DB3E687-1539-4E5C-B5F0-E970A0F6B5C3}" type="pres">
+      <dgm:prSet presAssocID="{36250D64-D81B-434B-B177-3C3F5B4751EF}" presName="sibTrans" presStyleLbl="sibTrans1D1" presStyleIdx="1" presStyleCnt="5"/>
       <dgm:spPr/>
     </dgm:pt>
-    <dgm:pt modelId="{E3F8B56D-B516-4856-AC07-859F1D459BEF}" type="pres">
+    <dgm:pt modelId="{94F8B76B-2C97-4AFB-8C41-5E35C5E31C0D}" type="pres">
+      <dgm:prSet presAssocID="{36250D64-D81B-434B-B177-3C3F5B4751EF}" presName="connectorText" presStyleLbl="sibTrans1D1" presStyleIdx="1" presStyleCnt="5"/>
+      <dgm:spPr/>
+    </dgm:pt>
+    <dgm:pt modelId="{D004A898-25CE-4F62-9A8E-5E1E641CFF63}" type="pres">
       <dgm:prSet presAssocID="{8653967F-5B3C-4416-BFD2-1D748B3E1364}" presName="node" presStyleLbl="node1" presStyleIdx="2" presStyleCnt="6">
         <dgm:presLayoutVars>
           <dgm:bulletEnabled val="1"/>
@@ -2788,11 +3715,15 @@
       </dgm:prSet>
       <dgm:spPr/>
     </dgm:pt>
-    <dgm:pt modelId="{1A4A46A1-5EAD-4783-B207-44EB1C4706C3}" type="pres">
-      <dgm:prSet presAssocID="{8B5538BF-8737-4056-B8D4-E3B1FE1EC428}" presName="sibTrans" presStyleCnt="0"/>
+    <dgm:pt modelId="{3B91E594-490E-4611-8172-79EF88345F59}" type="pres">
+      <dgm:prSet presAssocID="{8B5538BF-8737-4056-B8D4-E3B1FE1EC428}" presName="sibTrans" presStyleLbl="sibTrans1D1" presStyleIdx="2" presStyleCnt="5"/>
       <dgm:spPr/>
     </dgm:pt>
-    <dgm:pt modelId="{D902EAD3-AC2A-44EF-A24B-DC92EC6DB0F5}" type="pres">
+    <dgm:pt modelId="{842C5D19-93CF-44A7-93F9-EF8E3BD3B443}" type="pres">
+      <dgm:prSet presAssocID="{8B5538BF-8737-4056-B8D4-E3B1FE1EC428}" presName="connectorText" presStyleLbl="sibTrans1D1" presStyleIdx="2" presStyleCnt="5"/>
+      <dgm:spPr/>
+    </dgm:pt>
+    <dgm:pt modelId="{AA7A22F5-E5FF-4692-8DC8-4F70976C6B4A}" type="pres">
       <dgm:prSet presAssocID="{C893DFC1-F8C4-4CC1-A314-60C8FC6231AE}" presName="node" presStyleLbl="node1" presStyleIdx="3" presStyleCnt="6">
         <dgm:presLayoutVars>
           <dgm:bulletEnabled val="1"/>
@@ -2800,11 +3731,15 @@
       </dgm:prSet>
       <dgm:spPr/>
     </dgm:pt>
-    <dgm:pt modelId="{EADEA152-50CC-4459-8F7D-88E21BAB14C3}" type="pres">
-      <dgm:prSet presAssocID="{1DE609B7-48B5-42F9-9A28-AB08A0DBF257}" presName="sibTrans" presStyleCnt="0"/>
+    <dgm:pt modelId="{4A21EF63-2C8B-4EA7-A183-F3E63BD5382B}" type="pres">
+      <dgm:prSet presAssocID="{1DE609B7-48B5-42F9-9A28-AB08A0DBF257}" presName="sibTrans" presStyleLbl="sibTrans1D1" presStyleIdx="3" presStyleCnt="5"/>
       <dgm:spPr/>
     </dgm:pt>
-    <dgm:pt modelId="{7CE73D57-F61E-479E-93B2-04470CB392B7}" type="pres">
+    <dgm:pt modelId="{C704F880-288E-43A0-94F7-CD83A3B82418}" type="pres">
+      <dgm:prSet presAssocID="{1DE609B7-48B5-42F9-9A28-AB08A0DBF257}" presName="connectorText" presStyleLbl="sibTrans1D1" presStyleIdx="3" presStyleCnt="5"/>
+      <dgm:spPr/>
+    </dgm:pt>
+    <dgm:pt modelId="{D106C643-60C1-4C17-87E2-4586395B07E8}" type="pres">
       <dgm:prSet presAssocID="{E12C84DE-EE00-4C47-B7D8-4CF6B1859EDC}" presName="node" presStyleLbl="node1" presStyleIdx="4" presStyleCnt="6">
         <dgm:presLayoutVars>
           <dgm:bulletEnabled val="1"/>
@@ -2812,11 +3747,15 @@
       </dgm:prSet>
       <dgm:spPr/>
     </dgm:pt>
-    <dgm:pt modelId="{F9B0AF94-AC7F-4DA1-9A65-4E4085BB023A}" type="pres">
-      <dgm:prSet presAssocID="{DF93DF6E-1B3A-47C8-AFC4-C2B323BC3096}" presName="sibTrans" presStyleCnt="0"/>
+    <dgm:pt modelId="{4C7DCDE3-BA83-4ECD-B552-22B8F630D527}" type="pres">
+      <dgm:prSet presAssocID="{DF93DF6E-1B3A-47C8-AFC4-C2B323BC3096}" presName="sibTrans" presStyleLbl="sibTrans1D1" presStyleIdx="4" presStyleCnt="5"/>
       <dgm:spPr/>
     </dgm:pt>
-    <dgm:pt modelId="{8721C090-38C6-4C97-B221-EF6F0FB02030}" type="pres">
+    <dgm:pt modelId="{E16F0AAE-C476-43D9-8FA3-28CE893C14BE}" type="pres">
+      <dgm:prSet presAssocID="{DF93DF6E-1B3A-47C8-AFC4-C2B323BC3096}" presName="connectorText" presStyleLbl="sibTrans1D1" presStyleIdx="4" presStyleCnt="5"/>
+      <dgm:spPr/>
+    </dgm:pt>
+    <dgm:pt modelId="{6AC9EB11-ECFA-4A5F-96CD-782DD0A29363}" type="pres">
       <dgm:prSet presAssocID="{2E58586B-EC3A-4B69-A668-E2191E93A2AB}" presName="node" presStyleLbl="node1" presStyleIdx="5" presStyleCnt="6">
         <dgm:presLayoutVars>
           <dgm:bulletEnabled val="1"/>
@@ -2826,30 +3765,473 @@
     </dgm:pt>
   </dgm:ptLst>
   <dgm:cxnLst>
+    <dgm:cxn modelId="{D8BB6F0A-0D7E-4EC2-8E14-EC15FD8FAC75}" type="presOf" srcId="{DF93DF6E-1B3A-47C8-AFC4-C2B323BC3096}" destId="{4C7DCDE3-BA83-4ECD-B552-22B8F630D527}" srcOrd="0" destOrd="0" presId="urn:microsoft.com/office/officeart/2016/7/layout/RepeatingBendingProcessNew"/>
+    <dgm:cxn modelId="{350A690B-6632-4EDF-9ECF-1AA3ECC7B7E0}" type="presOf" srcId="{2E58586B-EC3A-4B69-A668-E2191E93A2AB}" destId="{6AC9EB11-ECFA-4A5F-96CD-782DD0A29363}" srcOrd="0" destOrd="0" presId="urn:microsoft.com/office/officeart/2016/7/layout/RepeatingBendingProcessNew"/>
+    <dgm:cxn modelId="{54E8FA0E-E0B0-423D-BD08-925D8C2E232E}" type="presOf" srcId="{8653967F-5B3C-4416-BFD2-1D748B3E1364}" destId="{D004A898-25CE-4F62-9A8E-5E1E641CFF63}" srcOrd="0" destOrd="0" presId="urn:microsoft.com/office/officeart/2016/7/layout/RepeatingBendingProcessNew"/>
+    <dgm:cxn modelId="{46264616-91D0-4109-99D1-92553A8DC64F}" type="presOf" srcId="{1DE609B7-48B5-42F9-9A28-AB08A0DBF257}" destId="{C704F880-288E-43A0-94F7-CD83A3B82418}" srcOrd="1" destOrd="0" presId="urn:microsoft.com/office/officeart/2016/7/layout/RepeatingBendingProcessNew"/>
     <dgm:cxn modelId="{7939A716-6D71-41DF-AE6E-000E8FB80EAE}" srcId="{310C5AED-499C-4509-A31A-3E770F80D6AC}" destId="{8653967F-5B3C-4416-BFD2-1D748B3E1364}" srcOrd="2" destOrd="0" parTransId="{C0B1D06F-1CEF-4185-94E9-718B10637605}" sibTransId="{8B5538BF-8737-4056-B8D4-E3B1FE1EC428}"/>
-    <dgm:cxn modelId="{E2865036-5B0A-402A-AF36-AD8195066787}" type="presOf" srcId="{2E58586B-EC3A-4B69-A668-E2191E93A2AB}" destId="{8721C090-38C6-4C97-B221-EF6F0FB02030}" srcOrd="0" destOrd="0" presId="urn:microsoft.com/office/officeart/2005/8/layout/default"/>
+    <dgm:cxn modelId="{0740722B-91E9-4E3D-8E5C-B83B97E8C957}" type="presOf" srcId="{8B5538BF-8737-4056-B8D4-E3B1FE1EC428}" destId="{842C5D19-93CF-44A7-93F9-EF8E3BD3B443}" srcOrd="1" destOrd="0" presId="urn:microsoft.com/office/officeart/2016/7/layout/RepeatingBendingProcessNew"/>
+    <dgm:cxn modelId="{FAA89F37-C765-4764-9FE3-D7B639E6698F}" type="presOf" srcId="{DF93DF6E-1B3A-47C8-AFC4-C2B323BC3096}" destId="{E16F0AAE-C476-43D9-8FA3-28CE893C14BE}" srcOrd="1" destOrd="0" presId="urn:microsoft.com/office/officeart/2016/7/layout/RepeatingBendingProcessNew"/>
     <dgm:cxn modelId="{114B8138-CA57-4877-90AE-20CA26186514}" srcId="{310C5AED-499C-4509-A31A-3E770F80D6AC}" destId="{2E58586B-EC3A-4B69-A668-E2191E93A2AB}" srcOrd="5" destOrd="0" parTransId="{E17F6674-B81E-4F0C-B525-FAE8A5021BC2}" sibTransId="{8B384019-2C5D-4853-A3ED-79E835871008}"/>
-    <dgm:cxn modelId="{3AF7B13A-1EA8-4274-9BDC-81EB52558102}" type="presOf" srcId="{310C5AED-499C-4509-A31A-3E770F80D6AC}" destId="{CF08B7C5-0506-454E-9D26-92460E256643}" srcOrd="0" destOrd="0" presId="urn:microsoft.com/office/officeart/2005/8/layout/default"/>
-    <dgm:cxn modelId="{FC70C35B-ECD5-4547-85D3-D0F92D6D6CAC}" type="presOf" srcId="{0D794B57-6B83-4926-8AC7-B3E2B87F5D06}" destId="{2D38C828-CB07-4469-BC0B-1E161180A0A9}" srcOrd="0" destOrd="0" presId="urn:microsoft.com/office/officeart/2005/8/layout/default"/>
-    <dgm:cxn modelId="{9F0FA96D-5B91-405F-95C7-50C709FAB6FC}" type="presOf" srcId="{1A9563B8-02DA-4724-98BB-8C5A024A59FF}" destId="{6C6C46E8-A03E-4D96-86A6-7B852063940F}" srcOrd="0" destOrd="0" presId="urn:microsoft.com/office/officeart/2005/8/layout/default"/>
+    <dgm:cxn modelId="{C4573765-54FA-4FE5-9550-12274ABD97DF}" type="presOf" srcId="{36250D64-D81B-434B-B177-3C3F5B4751EF}" destId="{0DB3E687-1539-4E5C-B5F0-E970A0F6B5C3}" srcOrd="0" destOrd="0" presId="urn:microsoft.com/office/officeart/2016/7/layout/RepeatingBendingProcessNew"/>
+    <dgm:cxn modelId="{C6469848-2B38-474F-BFD5-E33E38406D7E}" type="presOf" srcId="{CAE3D534-0120-4446-9EA5-13C50498B81C}" destId="{43E95873-08F3-4B60-9522-DCFFF2E332E5}" srcOrd="1" destOrd="0" presId="urn:microsoft.com/office/officeart/2016/7/layout/RepeatingBendingProcessNew"/>
+    <dgm:cxn modelId="{685AB24B-98DE-444B-AB72-6199C65AD687}" type="presOf" srcId="{E12C84DE-EE00-4C47-B7D8-4CF6B1859EDC}" destId="{D106C643-60C1-4C17-87E2-4586395B07E8}" srcOrd="0" destOrd="0" presId="urn:microsoft.com/office/officeart/2016/7/layout/RepeatingBendingProcessNew"/>
     <dgm:cxn modelId="{848EFA6D-F77A-45EA-A76B-D766B2D21640}" srcId="{310C5AED-499C-4509-A31A-3E770F80D6AC}" destId="{0D794B57-6B83-4926-8AC7-B3E2B87F5D06}" srcOrd="0" destOrd="0" parTransId="{615D1EAE-5C27-4E2B-83F9-67A3D7B1E161}" sibTransId="{CAE3D534-0120-4446-9EA5-13C50498B81C}"/>
-    <dgm:cxn modelId="{89E39D9C-C1D2-4997-AC42-C5D07FD9DAEB}" type="presOf" srcId="{E12C84DE-EE00-4C47-B7D8-4CF6B1859EDC}" destId="{7CE73D57-F61E-479E-93B2-04470CB392B7}" srcOrd="0" destOrd="0" presId="urn:microsoft.com/office/officeart/2005/8/layout/default"/>
+    <dgm:cxn modelId="{E72D506E-181A-41A5-BED3-7C1025AD7574}" type="presOf" srcId="{0D794B57-6B83-4926-8AC7-B3E2B87F5D06}" destId="{73DBE013-C453-4A91-BFAA-7EC6722C5BCD}" srcOrd="0" destOrd="0" presId="urn:microsoft.com/office/officeart/2016/7/layout/RepeatingBendingProcessNew"/>
+    <dgm:cxn modelId="{C6E0677B-8A51-4250-A710-1D618E981901}" type="presOf" srcId="{C893DFC1-F8C4-4CC1-A314-60C8FC6231AE}" destId="{AA7A22F5-E5FF-4692-8DC8-4F70976C6B4A}" srcOrd="0" destOrd="0" presId="urn:microsoft.com/office/officeart/2016/7/layout/RepeatingBendingProcessNew"/>
+    <dgm:cxn modelId="{1BAA6595-AF53-4708-A4EC-EE157DA9DC4F}" type="presOf" srcId="{1A9563B8-02DA-4724-98BB-8C5A024A59FF}" destId="{89D45EF4-9B2C-4EC1-B2B7-9AB78B964D54}" srcOrd="0" destOrd="0" presId="urn:microsoft.com/office/officeart/2016/7/layout/RepeatingBendingProcessNew"/>
+    <dgm:cxn modelId="{CD1378A4-8445-4A06-83CA-DD06CA6ADF9D}" type="presOf" srcId="{36250D64-D81B-434B-B177-3C3F5B4751EF}" destId="{94F8B76B-2C97-4AFB-8C41-5E35C5E31C0D}" srcOrd="1" destOrd="0" presId="urn:microsoft.com/office/officeart/2016/7/layout/RepeatingBendingProcessNew"/>
     <dgm:cxn modelId="{505DBFA5-6429-48E8-A825-06A4AA69B869}" srcId="{310C5AED-499C-4509-A31A-3E770F80D6AC}" destId="{1A9563B8-02DA-4724-98BB-8C5A024A59FF}" srcOrd="1" destOrd="0" parTransId="{8AA16C7A-44F5-49BD-9250-8CA19EAE2231}" sibTransId="{36250D64-D81B-434B-B177-3C3F5B4751EF}"/>
+    <dgm:cxn modelId="{33AC72B8-1453-4BFF-9ADD-DA37F0DB5501}" type="presOf" srcId="{CAE3D534-0120-4446-9EA5-13C50498B81C}" destId="{F66EF466-847B-49CB-B3A0-4E9A2ADE891C}" srcOrd="0" destOrd="0" presId="urn:microsoft.com/office/officeart/2016/7/layout/RepeatingBendingProcessNew"/>
     <dgm:cxn modelId="{3C4D95B8-2372-405D-9D1C-D3B1B4EE3A18}" srcId="{310C5AED-499C-4509-A31A-3E770F80D6AC}" destId="{C893DFC1-F8C4-4CC1-A314-60C8FC6231AE}" srcOrd="3" destOrd="0" parTransId="{91A0CA44-5322-4E3E-BFA0-15057D8E9B39}" sibTransId="{1DE609B7-48B5-42F9-9A28-AB08A0DBF257}"/>
+    <dgm:cxn modelId="{A6F0E5B9-6419-4642-AA7D-AFBC79C9735E}" type="presOf" srcId="{1DE609B7-48B5-42F9-9A28-AB08A0DBF257}" destId="{4A21EF63-2C8B-4EA7-A183-F3E63BD5382B}" srcOrd="0" destOrd="0" presId="urn:microsoft.com/office/officeart/2016/7/layout/RepeatingBendingProcessNew"/>
     <dgm:cxn modelId="{96C84DBB-5EE2-4495-BF21-FD58C258A1C4}" srcId="{310C5AED-499C-4509-A31A-3E770F80D6AC}" destId="{E12C84DE-EE00-4C47-B7D8-4CF6B1859EDC}" srcOrd="4" destOrd="0" parTransId="{538EC088-219F-44AB-83EC-9A696279A0A0}" sibTransId="{DF93DF6E-1B3A-47C8-AFC4-C2B323BC3096}"/>
-    <dgm:cxn modelId="{B1775BBF-8E1F-4132-8168-2A992ED60C0C}" type="presOf" srcId="{8653967F-5B3C-4416-BFD2-1D748B3E1364}" destId="{E3F8B56D-B516-4856-AC07-859F1D459BEF}" srcOrd="0" destOrd="0" presId="urn:microsoft.com/office/officeart/2005/8/layout/default"/>
-    <dgm:cxn modelId="{FA015AE8-E2DB-4897-A2CC-DFA2240DFB28}" type="presOf" srcId="{C893DFC1-F8C4-4CC1-A314-60C8FC6231AE}" destId="{D902EAD3-AC2A-44EF-A24B-DC92EC6DB0F5}" srcOrd="0" destOrd="0" presId="urn:microsoft.com/office/officeart/2005/8/layout/default"/>
-    <dgm:cxn modelId="{5FC723F5-1105-40FC-8C8D-3700621D666D}" type="presParOf" srcId="{CF08B7C5-0506-454E-9D26-92460E256643}" destId="{2D38C828-CB07-4469-BC0B-1E161180A0A9}" srcOrd="0" destOrd="0" presId="urn:microsoft.com/office/officeart/2005/8/layout/default"/>
-    <dgm:cxn modelId="{2DE72387-46E1-4574-8B96-4B01DE776EB2}" type="presParOf" srcId="{CF08B7C5-0506-454E-9D26-92460E256643}" destId="{ED46FC4B-BEA2-4B40-86DA-086FC6359851}" srcOrd="1" destOrd="0" presId="urn:microsoft.com/office/officeart/2005/8/layout/default"/>
-    <dgm:cxn modelId="{8A32C71B-587E-4C7B-A999-6B98FEEF7E3C}" type="presParOf" srcId="{CF08B7C5-0506-454E-9D26-92460E256643}" destId="{6C6C46E8-A03E-4D96-86A6-7B852063940F}" srcOrd="2" destOrd="0" presId="urn:microsoft.com/office/officeart/2005/8/layout/default"/>
-    <dgm:cxn modelId="{757BC833-DDA0-425B-B15B-BD75309050CE}" type="presParOf" srcId="{CF08B7C5-0506-454E-9D26-92460E256643}" destId="{C742B709-0859-4A7C-89A4-83F836376394}" srcOrd="3" destOrd="0" presId="urn:microsoft.com/office/officeart/2005/8/layout/default"/>
-    <dgm:cxn modelId="{269A1018-8F6A-4215-9079-C708D8A7A5B3}" type="presParOf" srcId="{CF08B7C5-0506-454E-9D26-92460E256643}" destId="{E3F8B56D-B516-4856-AC07-859F1D459BEF}" srcOrd="4" destOrd="0" presId="urn:microsoft.com/office/officeart/2005/8/layout/default"/>
-    <dgm:cxn modelId="{6F0AB9F6-94D1-4052-BFD0-77B816A3BBF6}" type="presParOf" srcId="{CF08B7C5-0506-454E-9D26-92460E256643}" destId="{1A4A46A1-5EAD-4783-B207-44EB1C4706C3}" srcOrd="5" destOrd="0" presId="urn:microsoft.com/office/officeart/2005/8/layout/default"/>
-    <dgm:cxn modelId="{0077BF2E-D465-4A96-A7F8-D83A3B97E0D2}" type="presParOf" srcId="{CF08B7C5-0506-454E-9D26-92460E256643}" destId="{D902EAD3-AC2A-44EF-A24B-DC92EC6DB0F5}" srcOrd="6" destOrd="0" presId="urn:microsoft.com/office/officeart/2005/8/layout/default"/>
-    <dgm:cxn modelId="{6F9387E2-D485-4072-9328-A3465DA775D7}" type="presParOf" srcId="{CF08B7C5-0506-454E-9D26-92460E256643}" destId="{EADEA152-50CC-4459-8F7D-88E21BAB14C3}" srcOrd="7" destOrd="0" presId="urn:microsoft.com/office/officeart/2005/8/layout/default"/>
-    <dgm:cxn modelId="{483A02EA-5F85-4FFA-B560-D92BF8C8EDDD}" type="presParOf" srcId="{CF08B7C5-0506-454E-9D26-92460E256643}" destId="{7CE73D57-F61E-479E-93B2-04470CB392B7}" srcOrd="8" destOrd="0" presId="urn:microsoft.com/office/officeart/2005/8/layout/default"/>
-    <dgm:cxn modelId="{D7FB5051-42CC-4331-A842-40D56BC91B55}" type="presParOf" srcId="{CF08B7C5-0506-454E-9D26-92460E256643}" destId="{F9B0AF94-AC7F-4DA1-9A65-4E4085BB023A}" srcOrd="9" destOrd="0" presId="urn:microsoft.com/office/officeart/2005/8/layout/default"/>
-    <dgm:cxn modelId="{54AE6BD7-941A-4E6C-8FC3-4260A8D77300}" type="presParOf" srcId="{CF08B7C5-0506-454E-9D26-92460E256643}" destId="{8721C090-38C6-4C97-B221-EF6F0FB02030}" srcOrd="10" destOrd="0" presId="urn:microsoft.com/office/officeart/2005/8/layout/default"/>
+    <dgm:cxn modelId="{AC7FADBE-739E-473B-8559-AC87F6B5C237}" type="presOf" srcId="{8B5538BF-8737-4056-B8D4-E3B1FE1EC428}" destId="{3B91E594-490E-4611-8172-79EF88345F59}" srcOrd="0" destOrd="0" presId="urn:microsoft.com/office/officeart/2016/7/layout/RepeatingBendingProcessNew"/>
+    <dgm:cxn modelId="{B4470BED-8BF5-4064-B3C4-F58439A36EF9}" type="presOf" srcId="{310C5AED-499C-4509-A31A-3E770F80D6AC}" destId="{D8C8F105-E23C-45CC-BF37-EF5019979644}" srcOrd="0" destOrd="0" presId="urn:microsoft.com/office/officeart/2016/7/layout/RepeatingBendingProcessNew"/>
+    <dgm:cxn modelId="{187F6B23-76B3-419E-AD59-1C65B4AF5FC2}" type="presParOf" srcId="{D8C8F105-E23C-45CC-BF37-EF5019979644}" destId="{73DBE013-C453-4A91-BFAA-7EC6722C5BCD}" srcOrd="0" destOrd="0" presId="urn:microsoft.com/office/officeart/2016/7/layout/RepeatingBendingProcessNew"/>
+    <dgm:cxn modelId="{DCFE8C58-4CAC-4186-A8DD-C53207DC8294}" type="presParOf" srcId="{D8C8F105-E23C-45CC-BF37-EF5019979644}" destId="{F66EF466-847B-49CB-B3A0-4E9A2ADE891C}" srcOrd="1" destOrd="0" presId="urn:microsoft.com/office/officeart/2016/7/layout/RepeatingBendingProcessNew"/>
+    <dgm:cxn modelId="{13D60ADC-0B1E-4F34-ACC8-1EB96EFC005D}" type="presParOf" srcId="{F66EF466-847B-49CB-B3A0-4E9A2ADE891C}" destId="{43E95873-08F3-4B60-9522-DCFFF2E332E5}" srcOrd="0" destOrd="0" presId="urn:microsoft.com/office/officeart/2016/7/layout/RepeatingBendingProcessNew"/>
+    <dgm:cxn modelId="{342BCF3B-8CB7-4D38-9762-BF3FD88CD707}" type="presParOf" srcId="{D8C8F105-E23C-45CC-BF37-EF5019979644}" destId="{89D45EF4-9B2C-4EC1-B2B7-9AB78B964D54}" srcOrd="2" destOrd="0" presId="urn:microsoft.com/office/officeart/2016/7/layout/RepeatingBendingProcessNew"/>
+    <dgm:cxn modelId="{E333C552-694F-4D3D-88CD-6FC63675D0E7}" type="presParOf" srcId="{D8C8F105-E23C-45CC-BF37-EF5019979644}" destId="{0DB3E687-1539-4E5C-B5F0-E970A0F6B5C3}" srcOrd="3" destOrd="0" presId="urn:microsoft.com/office/officeart/2016/7/layout/RepeatingBendingProcessNew"/>
+    <dgm:cxn modelId="{130F1812-5366-4CC6-8333-95C896E781B4}" type="presParOf" srcId="{0DB3E687-1539-4E5C-B5F0-E970A0F6B5C3}" destId="{94F8B76B-2C97-4AFB-8C41-5E35C5E31C0D}" srcOrd="0" destOrd="0" presId="urn:microsoft.com/office/officeart/2016/7/layout/RepeatingBendingProcessNew"/>
+    <dgm:cxn modelId="{1B6AB185-4194-43FB-83FA-E3B6F7B52585}" type="presParOf" srcId="{D8C8F105-E23C-45CC-BF37-EF5019979644}" destId="{D004A898-25CE-4F62-9A8E-5E1E641CFF63}" srcOrd="4" destOrd="0" presId="urn:microsoft.com/office/officeart/2016/7/layout/RepeatingBendingProcessNew"/>
+    <dgm:cxn modelId="{6CDBFF7A-F3CB-4BE7-8272-2FFAC2243BDF}" type="presParOf" srcId="{D8C8F105-E23C-45CC-BF37-EF5019979644}" destId="{3B91E594-490E-4611-8172-79EF88345F59}" srcOrd="5" destOrd="0" presId="urn:microsoft.com/office/officeart/2016/7/layout/RepeatingBendingProcessNew"/>
+    <dgm:cxn modelId="{824FA566-5EF7-4498-B08F-E1354A083D49}" type="presParOf" srcId="{3B91E594-490E-4611-8172-79EF88345F59}" destId="{842C5D19-93CF-44A7-93F9-EF8E3BD3B443}" srcOrd="0" destOrd="0" presId="urn:microsoft.com/office/officeart/2016/7/layout/RepeatingBendingProcessNew"/>
+    <dgm:cxn modelId="{926E1C09-EDEF-4974-B093-E818C1C01B5D}" type="presParOf" srcId="{D8C8F105-E23C-45CC-BF37-EF5019979644}" destId="{AA7A22F5-E5FF-4692-8DC8-4F70976C6B4A}" srcOrd="6" destOrd="0" presId="urn:microsoft.com/office/officeart/2016/7/layout/RepeatingBendingProcessNew"/>
+    <dgm:cxn modelId="{98F098CB-67DF-4B9E-A797-4B6EF606A9C6}" type="presParOf" srcId="{D8C8F105-E23C-45CC-BF37-EF5019979644}" destId="{4A21EF63-2C8B-4EA7-A183-F3E63BD5382B}" srcOrd="7" destOrd="0" presId="urn:microsoft.com/office/officeart/2016/7/layout/RepeatingBendingProcessNew"/>
+    <dgm:cxn modelId="{23A2577C-B6BA-462F-9691-AA1E59C2984E}" type="presParOf" srcId="{4A21EF63-2C8B-4EA7-A183-F3E63BD5382B}" destId="{C704F880-288E-43A0-94F7-CD83A3B82418}" srcOrd="0" destOrd="0" presId="urn:microsoft.com/office/officeart/2016/7/layout/RepeatingBendingProcessNew"/>
+    <dgm:cxn modelId="{A5F8139F-F111-4231-90CE-DA292E72681F}" type="presParOf" srcId="{D8C8F105-E23C-45CC-BF37-EF5019979644}" destId="{D106C643-60C1-4C17-87E2-4586395B07E8}" srcOrd="8" destOrd="0" presId="urn:microsoft.com/office/officeart/2016/7/layout/RepeatingBendingProcessNew"/>
+    <dgm:cxn modelId="{7B16F47E-379D-4236-89F1-5304625086C8}" type="presParOf" srcId="{D8C8F105-E23C-45CC-BF37-EF5019979644}" destId="{4C7DCDE3-BA83-4ECD-B552-22B8F630D527}" srcOrd="9" destOrd="0" presId="urn:microsoft.com/office/officeart/2016/7/layout/RepeatingBendingProcessNew"/>
+    <dgm:cxn modelId="{663A3D70-303D-461C-8645-88B8E23EDB6A}" type="presParOf" srcId="{4C7DCDE3-BA83-4ECD-B552-22B8F630D527}" destId="{E16F0AAE-C476-43D9-8FA3-28CE893C14BE}" srcOrd="0" destOrd="0" presId="urn:microsoft.com/office/officeart/2016/7/layout/RepeatingBendingProcessNew"/>
+    <dgm:cxn modelId="{4A2AA56E-D1E0-4D7A-A526-A60F27990197}" type="presParOf" srcId="{D8C8F105-E23C-45CC-BF37-EF5019979644}" destId="{6AC9EB11-ECFA-4A5F-96CD-782DD0A29363}" srcOrd="10" destOrd="0" presId="urn:microsoft.com/office/officeart/2016/7/layout/RepeatingBendingProcessNew"/>
+  </dgm:cxnLst>
+  <dgm:bg/>
+  <dgm:whole/>
+  <dgm:extLst>
+    <a:ext uri="http://schemas.microsoft.com/office/drawing/2008/diagram">
+      <dsp:dataModelExt xmlns:dsp="http://schemas.microsoft.com/office/drawing/2008/diagram" relId="rId6" minVer="http://schemas.openxmlformats.org/drawingml/2006/diagram"/>
+    </a:ext>
+  </dgm:extLst>
+</dgm:dataModel>
+</file>
+
+<file path=ppt/diagrams/data3.xml><?xml version="1.0" encoding="utf-8"?>
+<dgm:dataModel xmlns:dgm="http://schemas.openxmlformats.org/drawingml/2006/diagram" xmlns:a="http://schemas.openxmlformats.org/drawingml/2006/main">
+  <dgm:ptLst>
+    <dgm:pt modelId="{0A2772AE-9294-4313-8D3B-7D4045E9491B}" type="doc">
+      <dgm:prSet loTypeId="urn:microsoft.com/office/officeart/2008/layout/LinedList" loCatId="list" qsTypeId="urn:microsoft.com/office/officeart/2005/8/quickstyle/simple1" qsCatId="simple" csTypeId="urn:microsoft.com/office/officeart/2005/8/colors/accent1_2" csCatId="accent1"/>
+      <dgm:spPr/>
+      <dgm:t>
+        <a:bodyPr/>
+        <a:lstStyle/>
+        <a:p>
+          <a:endParaRPr lang="en-US"/>
+        </a:p>
+      </dgm:t>
+    </dgm:pt>
+    <dgm:pt modelId="{7C75C0FD-244D-472F-A1B9-02BC98B20FCC}">
+      <dgm:prSet/>
+      <dgm:spPr/>
+      <dgm:t>
+        <a:bodyPr/>
+        <a:lstStyle/>
+        <a:p>
+          <a:r>
+            <a:rPr lang="en-GB"/>
+            <a:t>Netwatch logo: </a:t>
+          </a:r>
+          <a:r>
+            <a:rPr lang="en-GB">
+              <a:hlinkClick xmlns:r="http://schemas.openxmlformats.org/officeDocument/2006/relationships" r:id="rId1"/>
+            </a:rPr>
+            <a:t>www.netwatchsystem.com</a:t>
+          </a:r>
+          <a:endParaRPr lang="en-US"/>
+        </a:p>
+      </dgm:t>
+    </dgm:pt>
+    <dgm:pt modelId="{A1500B65-F95C-451A-9047-836BF9E7DC6C}" type="parTrans" cxnId="{73837314-75E2-46D5-8A86-532C464409B2}">
+      <dgm:prSet/>
+      <dgm:spPr/>
+      <dgm:t>
+        <a:bodyPr/>
+        <a:lstStyle/>
+        <a:p>
+          <a:endParaRPr lang="en-US"/>
+        </a:p>
+      </dgm:t>
+    </dgm:pt>
+    <dgm:pt modelId="{2A1016DB-3CE7-4B71-8AF2-AED1367611CE}" type="sibTrans" cxnId="{73837314-75E2-46D5-8A86-532C464409B2}">
+      <dgm:prSet/>
+      <dgm:spPr/>
+      <dgm:t>
+        <a:bodyPr/>
+        <a:lstStyle/>
+        <a:p>
+          <a:endParaRPr lang="en-US"/>
+        </a:p>
+      </dgm:t>
+    </dgm:pt>
+    <dgm:pt modelId="{8E04B1E9-3D14-4D43-BDF3-CA02C5D5490E}">
+      <dgm:prSet/>
+      <dgm:spPr/>
+      <dgm:t>
+        <a:bodyPr/>
+        <a:lstStyle/>
+        <a:p>
+          <a:r>
+            <a:rPr lang="en-GB"/>
+            <a:t>SiteSafeAi logo creation: </a:t>
+          </a:r>
+          <a:r>
+            <a:rPr lang="en-GB">
+              <a:hlinkClick xmlns:r="http://schemas.openxmlformats.org/officeDocument/2006/relationships" r:id="rId2"/>
+            </a:rPr>
+            <a:t>www.canva.com</a:t>
+          </a:r>
+          <a:endParaRPr lang="en-US"/>
+        </a:p>
+      </dgm:t>
+    </dgm:pt>
+    <dgm:pt modelId="{B1812C61-88D4-4D8E-8FD1-20EF25C45D82}" type="parTrans" cxnId="{9DC41C98-9DC0-4F87-BED5-57B8DD7CBD15}">
+      <dgm:prSet/>
+      <dgm:spPr/>
+      <dgm:t>
+        <a:bodyPr/>
+        <a:lstStyle/>
+        <a:p>
+          <a:endParaRPr lang="en-US"/>
+        </a:p>
+      </dgm:t>
+    </dgm:pt>
+    <dgm:pt modelId="{0BB19DB2-F697-4E6C-BBC6-2A60847300B3}" type="sibTrans" cxnId="{9DC41C98-9DC0-4F87-BED5-57B8DD7CBD15}">
+      <dgm:prSet/>
+      <dgm:spPr/>
+      <dgm:t>
+        <a:bodyPr/>
+        <a:lstStyle/>
+        <a:p>
+          <a:endParaRPr lang="en-US"/>
+        </a:p>
+      </dgm:t>
+    </dgm:pt>
+    <dgm:pt modelId="{7163F3EB-CF6B-40C6-9800-F0BBA6BFAAF6}">
+      <dgm:prSet/>
+      <dgm:spPr/>
+      <dgm:t>
+        <a:bodyPr/>
+        <a:lstStyle/>
+        <a:p>
+          <a:r>
+            <a:rPr lang="en-GB"/>
+            <a:t>Context diagram creation: </a:t>
+          </a:r>
+          <a:r>
+            <a:rPr lang="en-GB">
+              <a:hlinkClick xmlns:r="http://schemas.openxmlformats.org/officeDocument/2006/relationships" r:id="rId3"/>
+            </a:rPr>
+            <a:t>www.creately.com</a:t>
+          </a:r>
+          <a:endParaRPr lang="en-US"/>
+        </a:p>
+      </dgm:t>
+    </dgm:pt>
+    <dgm:pt modelId="{3DF0F64E-378F-4FB9-9F3D-ADF6D05A5F76}" type="parTrans" cxnId="{42573BEF-5D19-446C-AC50-3E83A43CC4DA}">
+      <dgm:prSet/>
+      <dgm:spPr/>
+      <dgm:t>
+        <a:bodyPr/>
+        <a:lstStyle/>
+        <a:p>
+          <a:endParaRPr lang="en-US"/>
+        </a:p>
+      </dgm:t>
+    </dgm:pt>
+    <dgm:pt modelId="{0A5202D6-5205-4302-9701-2A4BCBE35293}" type="sibTrans" cxnId="{42573BEF-5D19-446C-AC50-3E83A43CC4DA}">
+      <dgm:prSet/>
+      <dgm:spPr/>
+      <dgm:t>
+        <a:bodyPr/>
+        <a:lstStyle/>
+        <a:p>
+          <a:endParaRPr lang="en-US"/>
+        </a:p>
+      </dgm:t>
+    </dgm:pt>
+    <dgm:pt modelId="{8755530F-F9EC-474B-B203-138FA137966D}">
+      <dgm:prSet/>
+      <dgm:spPr/>
+      <dgm:t>
+        <a:bodyPr/>
+        <a:lstStyle/>
+        <a:p>
+          <a:r>
+            <a:rPr lang="en-GB"/>
+            <a:t>Technology logos: </a:t>
+          </a:r>
+          <a:r>
+            <a:rPr lang="en-GB">
+              <a:hlinkClick xmlns:r="http://schemas.openxmlformats.org/officeDocument/2006/relationships" r:id="rId4"/>
+            </a:rPr>
+            <a:t>www.iconscout.com</a:t>
+          </a:r>
+          <a:endParaRPr lang="en-US"/>
+        </a:p>
+      </dgm:t>
+    </dgm:pt>
+    <dgm:pt modelId="{5D2A8444-E026-40AE-A03A-113380E621D3}" type="parTrans" cxnId="{C03FC157-74AA-4F68-8C86-B52EF34700AB}">
+      <dgm:prSet/>
+      <dgm:spPr/>
+      <dgm:t>
+        <a:bodyPr/>
+        <a:lstStyle/>
+        <a:p>
+          <a:endParaRPr lang="en-US"/>
+        </a:p>
+      </dgm:t>
+    </dgm:pt>
+    <dgm:pt modelId="{FDB55F70-6603-4CA7-B280-9F802FA2CB8E}" type="sibTrans" cxnId="{C03FC157-74AA-4F68-8C86-B52EF34700AB}">
+      <dgm:prSet/>
+      <dgm:spPr/>
+      <dgm:t>
+        <a:bodyPr/>
+        <a:lstStyle/>
+        <a:p>
+          <a:endParaRPr lang="en-US"/>
+        </a:p>
+      </dgm:t>
+    </dgm:pt>
+    <dgm:pt modelId="{CF3E0C8F-121A-4503-AB0E-6BB2C96421E5}">
+      <dgm:prSet/>
+      <dgm:spPr/>
+      <dgm:t>
+        <a:bodyPr/>
+        <a:lstStyle/>
+        <a:p>
+          <a:r>
+            <a:rPr lang="en-GB"/>
+            <a:t>Similar company: </a:t>
+          </a:r>
+          <a:r>
+            <a:rPr lang="en-GB">
+              <a:hlinkClick xmlns:r="http://schemas.openxmlformats.org/officeDocument/2006/relationships" r:id="rId5"/>
+            </a:rPr>
+            <a:t>www.synaedge.com/en</a:t>
+          </a:r>
+          <a:endParaRPr lang="en-US"/>
+        </a:p>
+      </dgm:t>
+    </dgm:pt>
+    <dgm:pt modelId="{348B9A55-B7CF-4AA6-BD4B-A49729B7B691}" type="parTrans" cxnId="{BBE267A2-EDED-4611-B598-C9B83893AB98}">
+      <dgm:prSet/>
+      <dgm:spPr/>
+      <dgm:t>
+        <a:bodyPr/>
+        <a:lstStyle/>
+        <a:p>
+          <a:endParaRPr lang="en-US"/>
+        </a:p>
+      </dgm:t>
+    </dgm:pt>
+    <dgm:pt modelId="{E7FFB303-5B83-4E9E-988F-BFDE76F60485}" type="sibTrans" cxnId="{BBE267A2-EDED-4611-B598-C9B83893AB98}">
+      <dgm:prSet/>
+      <dgm:spPr/>
+      <dgm:t>
+        <a:bodyPr/>
+        <a:lstStyle/>
+        <a:p>
+          <a:endParaRPr lang="en-US"/>
+        </a:p>
+      </dgm:t>
+    </dgm:pt>
+    <dgm:pt modelId="{9FA9FD06-D521-4402-B660-03EADF7F19B1}">
+      <dgm:prSet/>
+      <dgm:spPr/>
+      <dgm:t>
+        <a:bodyPr/>
+        <a:lstStyle/>
+        <a:p>
+          <a:r>
+            <a:rPr lang="en-GB"/>
+            <a:t>Frisbys Homes logo: </a:t>
+          </a:r>
+          <a:r>
+            <a:rPr lang="en-GB">
+              <a:hlinkClick xmlns:r="http://schemas.openxmlformats.org/officeDocument/2006/relationships" r:id="rId6"/>
+            </a:rPr>
+            <a:t>www.frisbyhomes.com</a:t>
+          </a:r>
+          <a:endParaRPr lang="en-US"/>
+        </a:p>
+      </dgm:t>
+    </dgm:pt>
+    <dgm:pt modelId="{63DD4D77-B4FA-4DBB-99AE-CE79C186505F}" type="parTrans" cxnId="{63A5999D-DB29-48C2-A74E-C474346832CA}">
+      <dgm:prSet/>
+      <dgm:spPr/>
+      <dgm:t>
+        <a:bodyPr/>
+        <a:lstStyle/>
+        <a:p>
+          <a:endParaRPr lang="en-US"/>
+        </a:p>
+      </dgm:t>
+    </dgm:pt>
+    <dgm:pt modelId="{29523147-D54D-423A-A285-4298F92886BA}" type="sibTrans" cxnId="{63A5999D-DB29-48C2-A74E-C474346832CA}">
+      <dgm:prSet/>
+      <dgm:spPr/>
+      <dgm:t>
+        <a:bodyPr/>
+        <a:lstStyle/>
+        <a:p>
+          <a:endParaRPr lang="en-US"/>
+        </a:p>
+      </dgm:t>
+    </dgm:pt>
+    <dgm:pt modelId="{18181D53-A9C8-40DA-ADA5-BF3B98997E32}" type="pres">
+      <dgm:prSet presAssocID="{0A2772AE-9294-4313-8D3B-7D4045E9491B}" presName="vert0" presStyleCnt="0">
+        <dgm:presLayoutVars>
+          <dgm:dir/>
+          <dgm:animOne val="branch"/>
+          <dgm:animLvl val="lvl"/>
+        </dgm:presLayoutVars>
+      </dgm:prSet>
+      <dgm:spPr/>
+    </dgm:pt>
+    <dgm:pt modelId="{F576D237-D86B-4E74-9A5E-2341DAEC9A8D}" type="pres">
+      <dgm:prSet presAssocID="{7C75C0FD-244D-472F-A1B9-02BC98B20FCC}" presName="thickLine" presStyleLbl="alignNode1" presStyleIdx="0" presStyleCnt="6"/>
+      <dgm:spPr/>
+    </dgm:pt>
+    <dgm:pt modelId="{7D2B3E94-D73E-44F2-9C3B-E347D574E238}" type="pres">
+      <dgm:prSet presAssocID="{7C75C0FD-244D-472F-A1B9-02BC98B20FCC}" presName="horz1" presStyleCnt="0"/>
+      <dgm:spPr/>
+    </dgm:pt>
+    <dgm:pt modelId="{1EA44391-E4F4-4B52-9752-7D24B77006DD}" type="pres">
+      <dgm:prSet presAssocID="{7C75C0FD-244D-472F-A1B9-02BC98B20FCC}" presName="tx1" presStyleLbl="revTx" presStyleIdx="0" presStyleCnt="6"/>
+      <dgm:spPr/>
+    </dgm:pt>
+    <dgm:pt modelId="{6321F83D-D8EF-41B7-B9B4-9894E56EEE4E}" type="pres">
+      <dgm:prSet presAssocID="{7C75C0FD-244D-472F-A1B9-02BC98B20FCC}" presName="vert1" presStyleCnt="0"/>
+      <dgm:spPr/>
+    </dgm:pt>
+    <dgm:pt modelId="{42899E16-BFFB-4249-98C9-AD97C212253C}" type="pres">
+      <dgm:prSet presAssocID="{8E04B1E9-3D14-4D43-BDF3-CA02C5D5490E}" presName="thickLine" presStyleLbl="alignNode1" presStyleIdx="1" presStyleCnt="6"/>
+      <dgm:spPr/>
+    </dgm:pt>
+    <dgm:pt modelId="{3B887DF0-0356-4118-AE90-2C7BEFF72596}" type="pres">
+      <dgm:prSet presAssocID="{8E04B1E9-3D14-4D43-BDF3-CA02C5D5490E}" presName="horz1" presStyleCnt="0"/>
+      <dgm:spPr/>
+    </dgm:pt>
+    <dgm:pt modelId="{B8A61DF9-02A2-48A6-A1FA-B7A4F984EEEB}" type="pres">
+      <dgm:prSet presAssocID="{8E04B1E9-3D14-4D43-BDF3-CA02C5D5490E}" presName="tx1" presStyleLbl="revTx" presStyleIdx="1" presStyleCnt="6"/>
+      <dgm:spPr/>
+    </dgm:pt>
+    <dgm:pt modelId="{0D69A0D2-3510-440C-ADEE-0B111285C4B8}" type="pres">
+      <dgm:prSet presAssocID="{8E04B1E9-3D14-4D43-BDF3-CA02C5D5490E}" presName="vert1" presStyleCnt="0"/>
+      <dgm:spPr/>
+    </dgm:pt>
+    <dgm:pt modelId="{C2DDD462-9DC5-4C03-83B5-D1B04BB614BB}" type="pres">
+      <dgm:prSet presAssocID="{7163F3EB-CF6B-40C6-9800-F0BBA6BFAAF6}" presName="thickLine" presStyleLbl="alignNode1" presStyleIdx="2" presStyleCnt="6"/>
+      <dgm:spPr/>
+    </dgm:pt>
+    <dgm:pt modelId="{4E10D2ED-EBB5-4D51-AF67-6D1B74B50C56}" type="pres">
+      <dgm:prSet presAssocID="{7163F3EB-CF6B-40C6-9800-F0BBA6BFAAF6}" presName="horz1" presStyleCnt="0"/>
+      <dgm:spPr/>
+    </dgm:pt>
+    <dgm:pt modelId="{CBFCDBC2-A2DE-402A-B255-66D444A90B4D}" type="pres">
+      <dgm:prSet presAssocID="{7163F3EB-CF6B-40C6-9800-F0BBA6BFAAF6}" presName="tx1" presStyleLbl="revTx" presStyleIdx="2" presStyleCnt="6"/>
+      <dgm:spPr/>
+    </dgm:pt>
+    <dgm:pt modelId="{7A9C2675-E4F7-4CFB-9DCC-DDE5D9E6649B}" type="pres">
+      <dgm:prSet presAssocID="{7163F3EB-CF6B-40C6-9800-F0BBA6BFAAF6}" presName="vert1" presStyleCnt="0"/>
+      <dgm:spPr/>
+    </dgm:pt>
+    <dgm:pt modelId="{7CC9958B-6A51-4381-9F64-369C1C669D33}" type="pres">
+      <dgm:prSet presAssocID="{8755530F-F9EC-474B-B203-138FA137966D}" presName="thickLine" presStyleLbl="alignNode1" presStyleIdx="3" presStyleCnt="6"/>
+      <dgm:spPr/>
+    </dgm:pt>
+    <dgm:pt modelId="{9F61B0B1-B25B-497B-B60D-8CFCC785ED58}" type="pres">
+      <dgm:prSet presAssocID="{8755530F-F9EC-474B-B203-138FA137966D}" presName="horz1" presStyleCnt="0"/>
+      <dgm:spPr/>
+    </dgm:pt>
+    <dgm:pt modelId="{B191F5D6-5B9B-4287-AD44-F7F56FEBF56F}" type="pres">
+      <dgm:prSet presAssocID="{8755530F-F9EC-474B-B203-138FA137966D}" presName="tx1" presStyleLbl="revTx" presStyleIdx="3" presStyleCnt="6"/>
+      <dgm:spPr/>
+    </dgm:pt>
+    <dgm:pt modelId="{DE433610-4199-4657-A8B6-F96E28A8CEEB}" type="pres">
+      <dgm:prSet presAssocID="{8755530F-F9EC-474B-B203-138FA137966D}" presName="vert1" presStyleCnt="0"/>
+      <dgm:spPr/>
+    </dgm:pt>
+    <dgm:pt modelId="{4DFCB8B9-E5D4-4E57-BF7A-7C21BEFB5D8D}" type="pres">
+      <dgm:prSet presAssocID="{CF3E0C8F-121A-4503-AB0E-6BB2C96421E5}" presName="thickLine" presStyleLbl="alignNode1" presStyleIdx="4" presStyleCnt="6"/>
+      <dgm:spPr/>
+    </dgm:pt>
+    <dgm:pt modelId="{F4A60F5E-8E64-4EBE-AF69-9AD247E77166}" type="pres">
+      <dgm:prSet presAssocID="{CF3E0C8F-121A-4503-AB0E-6BB2C96421E5}" presName="horz1" presStyleCnt="0"/>
+      <dgm:spPr/>
+    </dgm:pt>
+    <dgm:pt modelId="{484EBC66-1835-4BFA-8DA0-0E9AB7FDAE82}" type="pres">
+      <dgm:prSet presAssocID="{CF3E0C8F-121A-4503-AB0E-6BB2C96421E5}" presName="tx1" presStyleLbl="revTx" presStyleIdx="4" presStyleCnt="6"/>
+      <dgm:spPr/>
+    </dgm:pt>
+    <dgm:pt modelId="{5B68CD3F-2677-4CF6-9984-6BE6D1F32678}" type="pres">
+      <dgm:prSet presAssocID="{CF3E0C8F-121A-4503-AB0E-6BB2C96421E5}" presName="vert1" presStyleCnt="0"/>
+      <dgm:spPr/>
+    </dgm:pt>
+    <dgm:pt modelId="{1BCB4C99-9E9F-4916-BE8D-528DB97EA466}" type="pres">
+      <dgm:prSet presAssocID="{9FA9FD06-D521-4402-B660-03EADF7F19B1}" presName="thickLine" presStyleLbl="alignNode1" presStyleIdx="5" presStyleCnt="6"/>
+      <dgm:spPr/>
+    </dgm:pt>
+    <dgm:pt modelId="{56FF8900-9D4A-4301-BBA5-DFADB18B57DF}" type="pres">
+      <dgm:prSet presAssocID="{9FA9FD06-D521-4402-B660-03EADF7F19B1}" presName="horz1" presStyleCnt="0"/>
+      <dgm:spPr/>
+    </dgm:pt>
+    <dgm:pt modelId="{2E2B7F4E-D9EC-4184-9D45-5B25235123ED}" type="pres">
+      <dgm:prSet presAssocID="{9FA9FD06-D521-4402-B660-03EADF7F19B1}" presName="tx1" presStyleLbl="revTx" presStyleIdx="5" presStyleCnt="6"/>
+      <dgm:spPr/>
+    </dgm:pt>
+    <dgm:pt modelId="{EEA39460-4AB9-4A81-BC68-C7F6421DF01A}" type="pres">
+      <dgm:prSet presAssocID="{9FA9FD06-D521-4402-B660-03EADF7F19B1}" presName="vert1" presStyleCnt="0"/>
+      <dgm:spPr/>
+    </dgm:pt>
+  </dgm:ptLst>
+  <dgm:cxnLst>
+    <dgm:cxn modelId="{73837314-75E2-46D5-8A86-532C464409B2}" srcId="{0A2772AE-9294-4313-8D3B-7D4045E9491B}" destId="{7C75C0FD-244D-472F-A1B9-02BC98B20FCC}" srcOrd="0" destOrd="0" parTransId="{A1500B65-F95C-451A-9047-836BF9E7DC6C}" sibTransId="{2A1016DB-3CE7-4B71-8AF2-AED1367611CE}"/>
+    <dgm:cxn modelId="{3A2BB53B-8512-4365-B8E1-A59ECAC1B124}" type="presOf" srcId="{9FA9FD06-D521-4402-B660-03EADF7F19B1}" destId="{2E2B7F4E-D9EC-4184-9D45-5B25235123ED}" srcOrd="0" destOrd="0" presId="urn:microsoft.com/office/officeart/2008/layout/LinedList"/>
+    <dgm:cxn modelId="{0029E64C-FC14-42B6-AC58-D749F74326FA}" type="presOf" srcId="{7C75C0FD-244D-472F-A1B9-02BC98B20FCC}" destId="{1EA44391-E4F4-4B52-9752-7D24B77006DD}" srcOrd="0" destOrd="0" presId="urn:microsoft.com/office/officeart/2008/layout/LinedList"/>
+    <dgm:cxn modelId="{636BB375-05F8-46BD-B16E-B4FA6B003041}" type="presOf" srcId="{8E04B1E9-3D14-4D43-BDF3-CA02C5D5490E}" destId="{B8A61DF9-02A2-48A6-A1FA-B7A4F984EEEB}" srcOrd="0" destOrd="0" presId="urn:microsoft.com/office/officeart/2008/layout/LinedList"/>
+    <dgm:cxn modelId="{C03FC157-74AA-4F68-8C86-B52EF34700AB}" srcId="{0A2772AE-9294-4313-8D3B-7D4045E9491B}" destId="{8755530F-F9EC-474B-B203-138FA137966D}" srcOrd="3" destOrd="0" parTransId="{5D2A8444-E026-40AE-A03A-113380E621D3}" sibTransId="{FDB55F70-6603-4CA7-B280-9F802FA2CB8E}"/>
+    <dgm:cxn modelId="{9DC41C98-9DC0-4F87-BED5-57B8DD7CBD15}" srcId="{0A2772AE-9294-4313-8D3B-7D4045E9491B}" destId="{8E04B1E9-3D14-4D43-BDF3-CA02C5D5490E}" srcOrd="1" destOrd="0" parTransId="{B1812C61-88D4-4D8E-8FD1-20EF25C45D82}" sibTransId="{0BB19DB2-F697-4E6C-BBC6-2A60847300B3}"/>
+    <dgm:cxn modelId="{63A5999D-DB29-48C2-A74E-C474346832CA}" srcId="{0A2772AE-9294-4313-8D3B-7D4045E9491B}" destId="{9FA9FD06-D521-4402-B660-03EADF7F19B1}" srcOrd="5" destOrd="0" parTransId="{63DD4D77-B4FA-4DBB-99AE-CE79C186505F}" sibTransId="{29523147-D54D-423A-A285-4298F92886BA}"/>
+    <dgm:cxn modelId="{BBE267A2-EDED-4611-B598-C9B83893AB98}" srcId="{0A2772AE-9294-4313-8D3B-7D4045E9491B}" destId="{CF3E0C8F-121A-4503-AB0E-6BB2C96421E5}" srcOrd="4" destOrd="0" parTransId="{348B9A55-B7CF-4AA6-BD4B-A49729B7B691}" sibTransId="{E7FFB303-5B83-4E9E-988F-BFDE76F60485}"/>
+    <dgm:cxn modelId="{9223F3D7-D227-4185-87A1-6E029474543C}" type="presOf" srcId="{0A2772AE-9294-4313-8D3B-7D4045E9491B}" destId="{18181D53-A9C8-40DA-ADA5-BF3B98997E32}" srcOrd="0" destOrd="0" presId="urn:microsoft.com/office/officeart/2008/layout/LinedList"/>
+    <dgm:cxn modelId="{179A6CDA-F8E2-4FD5-9948-68EA99317DA1}" type="presOf" srcId="{CF3E0C8F-121A-4503-AB0E-6BB2C96421E5}" destId="{484EBC66-1835-4BFA-8DA0-0E9AB7FDAE82}" srcOrd="0" destOrd="0" presId="urn:microsoft.com/office/officeart/2008/layout/LinedList"/>
+    <dgm:cxn modelId="{18D5D6DC-F7DA-44BE-B506-27EBF2EE4ABB}" type="presOf" srcId="{7163F3EB-CF6B-40C6-9800-F0BBA6BFAAF6}" destId="{CBFCDBC2-A2DE-402A-B255-66D444A90B4D}" srcOrd="0" destOrd="0" presId="urn:microsoft.com/office/officeart/2008/layout/LinedList"/>
+    <dgm:cxn modelId="{42573BEF-5D19-446C-AC50-3E83A43CC4DA}" srcId="{0A2772AE-9294-4313-8D3B-7D4045E9491B}" destId="{7163F3EB-CF6B-40C6-9800-F0BBA6BFAAF6}" srcOrd="2" destOrd="0" parTransId="{3DF0F64E-378F-4FB9-9F3D-ADF6D05A5F76}" sibTransId="{0A5202D6-5205-4302-9701-2A4BCBE35293}"/>
+    <dgm:cxn modelId="{BF52FBFF-23D8-4BD7-9416-F95DEC123891}" type="presOf" srcId="{8755530F-F9EC-474B-B203-138FA137966D}" destId="{B191F5D6-5B9B-4287-AD44-F7F56FEBF56F}" srcOrd="0" destOrd="0" presId="urn:microsoft.com/office/officeart/2008/layout/LinedList"/>
+    <dgm:cxn modelId="{A1C59B2F-23ED-4D96-8E61-5AD18E257F1B}" type="presParOf" srcId="{18181D53-A9C8-40DA-ADA5-BF3B98997E32}" destId="{F576D237-D86B-4E74-9A5E-2341DAEC9A8D}" srcOrd="0" destOrd="0" presId="urn:microsoft.com/office/officeart/2008/layout/LinedList"/>
+    <dgm:cxn modelId="{293EAA75-252B-4BE0-B4D8-B8D60B9FBF35}" type="presParOf" srcId="{18181D53-A9C8-40DA-ADA5-BF3B98997E32}" destId="{7D2B3E94-D73E-44F2-9C3B-E347D574E238}" srcOrd="1" destOrd="0" presId="urn:microsoft.com/office/officeart/2008/layout/LinedList"/>
+    <dgm:cxn modelId="{A78DB03D-FF4F-4F39-BC59-7D8AFC56F254}" type="presParOf" srcId="{7D2B3E94-D73E-44F2-9C3B-E347D574E238}" destId="{1EA44391-E4F4-4B52-9752-7D24B77006DD}" srcOrd="0" destOrd="0" presId="urn:microsoft.com/office/officeart/2008/layout/LinedList"/>
+    <dgm:cxn modelId="{FFA17C30-AC3D-4606-8F7A-27621DF7CC99}" type="presParOf" srcId="{7D2B3E94-D73E-44F2-9C3B-E347D574E238}" destId="{6321F83D-D8EF-41B7-B9B4-9894E56EEE4E}" srcOrd="1" destOrd="0" presId="urn:microsoft.com/office/officeart/2008/layout/LinedList"/>
+    <dgm:cxn modelId="{092CB830-CE6C-44F5-9775-4E2075A898A4}" type="presParOf" srcId="{18181D53-A9C8-40DA-ADA5-BF3B98997E32}" destId="{42899E16-BFFB-4249-98C9-AD97C212253C}" srcOrd="2" destOrd="0" presId="urn:microsoft.com/office/officeart/2008/layout/LinedList"/>
+    <dgm:cxn modelId="{396C437D-D809-474C-83B1-23A3F35907F2}" type="presParOf" srcId="{18181D53-A9C8-40DA-ADA5-BF3B98997E32}" destId="{3B887DF0-0356-4118-AE90-2C7BEFF72596}" srcOrd="3" destOrd="0" presId="urn:microsoft.com/office/officeart/2008/layout/LinedList"/>
+    <dgm:cxn modelId="{2472C7A4-D0EA-4B93-9427-B68B88D4786F}" type="presParOf" srcId="{3B887DF0-0356-4118-AE90-2C7BEFF72596}" destId="{B8A61DF9-02A2-48A6-A1FA-B7A4F984EEEB}" srcOrd="0" destOrd="0" presId="urn:microsoft.com/office/officeart/2008/layout/LinedList"/>
+    <dgm:cxn modelId="{11FAF5CF-614F-4579-BEE4-B392110A1AEF}" type="presParOf" srcId="{3B887DF0-0356-4118-AE90-2C7BEFF72596}" destId="{0D69A0D2-3510-440C-ADEE-0B111285C4B8}" srcOrd="1" destOrd="0" presId="urn:microsoft.com/office/officeart/2008/layout/LinedList"/>
+    <dgm:cxn modelId="{405368F1-1E66-40A3-869E-CCD164960462}" type="presParOf" srcId="{18181D53-A9C8-40DA-ADA5-BF3B98997E32}" destId="{C2DDD462-9DC5-4C03-83B5-D1B04BB614BB}" srcOrd="4" destOrd="0" presId="urn:microsoft.com/office/officeart/2008/layout/LinedList"/>
+    <dgm:cxn modelId="{63607889-7811-4C2A-86EC-A8B92B16CE68}" type="presParOf" srcId="{18181D53-A9C8-40DA-ADA5-BF3B98997E32}" destId="{4E10D2ED-EBB5-4D51-AF67-6D1B74B50C56}" srcOrd="5" destOrd="0" presId="urn:microsoft.com/office/officeart/2008/layout/LinedList"/>
+    <dgm:cxn modelId="{4F45F58F-4326-4F4E-BEC5-83DA8564E7E5}" type="presParOf" srcId="{4E10D2ED-EBB5-4D51-AF67-6D1B74B50C56}" destId="{CBFCDBC2-A2DE-402A-B255-66D444A90B4D}" srcOrd="0" destOrd="0" presId="urn:microsoft.com/office/officeart/2008/layout/LinedList"/>
+    <dgm:cxn modelId="{ECA39B9F-13DA-4606-93A6-B22F5E830267}" type="presParOf" srcId="{4E10D2ED-EBB5-4D51-AF67-6D1B74B50C56}" destId="{7A9C2675-E4F7-4CFB-9DCC-DDE5D9E6649B}" srcOrd="1" destOrd="0" presId="urn:microsoft.com/office/officeart/2008/layout/LinedList"/>
+    <dgm:cxn modelId="{870A638F-0D34-47C6-B298-710DFBAB7476}" type="presParOf" srcId="{18181D53-A9C8-40DA-ADA5-BF3B98997E32}" destId="{7CC9958B-6A51-4381-9F64-369C1C669D33}" srcOrd="6" destOrd="0" presId="urn:microsoft.com/office/officeart/2008/layout/LinedList"/>
+    <dgm:cxn modelId="{370D6CA6-317F-424D-BD71-68331AA75D0C}" type="presParOf" srcId="{18181D53-A9C8-40DA-ADA5-BF3B98997E32}" destId="{9F61B0B1-B25B-497B-B60D-8CFCC785ED58}" srcOrd="7" destOrd="0" presId="urn:microsoft.com/office/officeart/2008/layout/LinedList"/>
+    <dgm:cxn modelId="{8730F493-480C-4AA2-9173-83EFCB11BDF1}" type="presParOf" srcId="{9F61B0B1-B25B-497B-B60D-8CFCC785ED58}" destId="{B191F5D6-5B9B-4287-AD44-F7F56FEBF56F}" srcOrd="0" destOrd="0" presId="urn:microsoft.com/office/officeart/2008/layout/LinedList"/>
+    <dgm:cxn modelId="{2C7F5FB2-0896-4E98-A3F2-14C03FCBF843}" type="presParOf" srcId="{9F61B0B1-B25B-497B-B60D-8CFCC785ED58}" destId="{DE433610-4199-4657-A8B6-F96E28A8CEEB}" srcOrd="1" destOrd="0" presId="urn:microsoft.com/office/officeart/2008/layout/LinedList"/>
+    <dgm:cxn modelId="{CDA73F05-75E3-4153-B7B7-21F438BC088F}" type="presParOf" srcId="{18181D53-A9C8-40DA-ADA5-BF3B98997E32}" destId="{4DFCB8B9-E5D4-4E57-BF7A-7C21BEFB5D8D}" srcOrd="8" destOrd="0" presId="urn:microsoft.com/office/officeart/2008/layout/LinedList"/>
+    <dgm:cxn modelId="{6FDE500B-EA4E-4B40-902C-AF5DA2BB2A68}" type="presParOf" srcId="{18181D53-A9C8-40DA-ADA5-BF3B98997E32}" destId="{F4A60F5E-8E64-4EBE-AF69-9AD247E77166}" srcOrd="9" destOrd="0" presId="urn:microsoft.com/office/officeart/2008/layout/LinedList"/>
+    <dgm:cxn modelId="{0F708209-7246-4A11-A8BC-95D98A5A1B2A}" type="presParOf" srcId="{F4A60F5E-8E64-4EBE-AF69-9AD247E77166}" destId="{484EBC66-1835-4BFA-8DA0-0E9AB7FDAE82}" srcOrd="0" destOrd="0" presId="urn:microsoft.com/office/officeart/2008/layout/LinedList"/>
+    <dgm:cxn modelId="{B8FF794B-C78E-4919-AEAB-81587EBA805D}" type="presParOf" srcId="{F4A60F5E-8E64-4EBE-AF69-9AD247E77166}" destId="{5B68CD3F-2677-4CF6-9984-6BE6D1F32678}" srcOrd="1" destOrd="0" presId="urn:microsoft.com/office/officeart/2008/layout/LinedList"/>
+    <dgm:cxn modelId="{8A7A8161-63AD-41A0-9772-E8A849A83E89}" type="presParOf" srcId="{18181D53-A9C8-40DA-ADA5-BF3B98997E32}" destId="{1BCB4C99-9E9F-4916-BE8D-528DB97EA466}" srcOrd="10" destOrd="0" presId="urn:microsoft.com/office/officeart/2008/layout/LinedList"/>
+    <dgm:cxn modelId="{D19573AA-9CE7-4F24-94A6-74A92B54EC6E}" type="presParOf" srcId="{18181D53-A9C8-40DA-ADA5-BF3B98997E32}" destId="{56FF8900-9D4A-4301-BBA5-DFADB18B57DF}" srcOrd="11" destOrd="0" presId="urn:microsoft.com/office/officeart/2008/layout/LinedList"/>
+    <dgm:cxn modelId="{36513533-BE50-4EC9-9CB0-58D3DC3D0131}" type="presParOf" srcId="{56FF8900-9D4A-4301-BBA5-DFADB18B57DF}" destId="{2E2B7F4E-D9EC-4184-9D45-5B25235123ED}" srcOrd="0" destOrd="0" presId="urn:microsoft.com/office/officeart/2008/layout/LinedList"/>
+    <dgm:cxn modelId="{D3149B69-9FFB-4D57-92FE-AD89854AF0AE}" type="presParOf" srcId="{56FF8900-9D4A-4301-BBA5-DFADB18B57DF}" destId="{EEA39460-4AB9-4A81-BC68-C7F6421DF01A}" srcOrd="1" destOrd="0" presId="urn:microsoft.com/office/officeart/2008/layout/LinedList"/>
   </dgm:cxnLst>
   <dgm:bg/>
   <dgm:whole/>
@@ -4145,21 +5527,102 @@
       <dsp:cNvGrpSpPr/>
     </dsp:nvGrpSpPr>
     <dsp:grpSpPr/>
-    <dsp:sp modelId="{2D38C828-CB07-4469-BC0B-1E161180A0A9}">
+    <dsp:sp modelId="{F66EF466-847B-49CB-B3A0-4E9A2ADE891C}">
       <dsp:nvSpPr>
         <dsp:cNvPr id="0" name=""/>
         <dsp:cNvSpPr/>
       </dsp:nvSpPr>
       <dsp:spPr>
         <a:xfrm>
-          <a:off x="0" y="39687"/>
-          <a:ext cx="3286125" cy="1971675"/>
+          <a:off x="3323664" y="834988"/>
+          <a:ext cx="643158" cy="91440"/>
+        </a:xfrm>
+        <a:custGeom>
+          <a:avLst/>
+          <a:gdLst/>
+          <a:ahLst/>
+          <a:cxnLst/>
+          <a:rect l="0" t="0" r="0" b="0"/>
+          <a:pathLst>
+            <a:path>
+              <a:moveTo>
+                <a:pt x="0" y="45720"/>
+              </a:moveTo>
+              <a:lnTo>
+                <a:pt x="643158" y="45720"/>
+              </a:lnTo>
+            </a:path>
+          </a:pathLst>
+        </a:custGeom>
+        <a:noFill/>
+        <a:ln w="12700" cap="flat" cmpd="sng" algn="ctr">
+          <a:solidFill>
+            <a:schemeClr val="accent2">
+              <a:hueOff val="0"/>
+              <a:satOff val="0"/>
+              <a:lumOff val="0"/>
+              <a:alphaOff val="0"/>
+            </a:schemeClr>
+          </a:solidFill>
+          <a:prstDash val="solid"/>
+          <a:miter lim="800000"/>
+          <a:tailEnd type="arrow"/>
+        </a:ln>
+        <a:effectLst/>
+      </dsp:spPr>
+      <dsp:style>
+        <a:lnRef idx="1">
+          <a:scrgbClr r="0" g="0" b="0"/>
+        </a:lnRef>
+        <a:fillRef idx="0">
+          <a:scrgbClr r="0" g="0" b="0"/>
+        </a:fillRef>
+        <a:effectRef idx="0">
+          <a:scrgbClr r="0" g="0" b="0"/>
+        </a:effectRef>
+        <a:fontRef idx="minor"/>
+      </dsp:style>
+      <dsp:txBody>
+        <a:bodyPr spcFirstLastPara="0" vert="horz" wrap="square" lIns="12700" tIns="0" rIns="12700" bIns="0" numCol="1" spcCol="1270" anchor="ctr" anchorCtr="0">
+          <a:noAutofit/>
+        </a:bodyPr>
+        <a:lstStyle/>
+        <a:p>
+          <a:pPr marL="0" lvl="0" indent="0" algn="ctr" defTabSz="222250">
+            <a:lnSpc>
+              <a:spcPct val="90000"/>
+            </a:lnSpc>
+            <a:spcBef>
+              <a:spcPct val="0"/>
+            </a:spcBef>
+            <a:spcAft>
+              <a:spcPct val="35000"/>
+            </a:spcAft>
+            <a:buNone/>
+          </a:pPr>
+          <a:endParaRPr lang="en-US" sz="500" kern="1200"/>
+        </a:p>
+      </dsp:txBody>
+      <dsp:txXfrm>
+        <a:off x="3628399" y="877339"/>
+        <a:ext cx="33687" cy="6737"/>
+      </dsp:txXfrm>
+    </dsp:sp>
+    <dsp:sp modelId="{73DBE013-C453-4A91-BFAA-7EC6722C5BCD}">
+      <dsp:nvSpPr>
+        <dsp:cNvPr id="0" name=""/>
+        <dsp:cNvSpPr/>
+      </dsp:nvSpPr>
+      <dsp:spPr>
+        <a:xfrm>
+          <a:off x="396080" y="1893"/>
+          <a:ext cx="2929383" cy="1757630"/>
         </a:xfrm>
         <a:prstGeom prst="rect">
           <a:avLst/>
         </a:prstGeom>
         <a:solidFill>
-          <a:schemeClr val="accent1">
+          <a:schemeClr val="accent2">
             <a:hueOff val="0"/>
             <a:satOff val="0"/>
             <a:lumOff val="0"/>
@@ -4195,12 +5658,12 @@
         </a:fontRef>
       </dsp:style>
       <dsp:txBody>
-        <a:bodyPr spcFirstLastPara="0" vert="horz" wrap="square" lIns="133350" tIns="133350" rIns="133350" bIns="133350" numCol="1" spcCol="1270" anchor="ctr" anchorCtr="0">
+        <a:bodyPr spcFirstLastPara="0" vert="horz" wrap="square" lIns="143542" tIns="150673" rIns="143542" bIns="150673" numCol="1" spcCol="1270" anchor="ctr" anchorCtr="0">
           <a:noAutofit/>
         </a:bodyPr>
         <a:lstStyle/>
         <a:p>
-          <a:pPr marL="0" lvl="0" indent="0" algn="ctr" defTabSz="1555750">
+          <a:pPr marL="0" lvl="0" indent="0" algn="ctr" defTabSz="1333500">
             <a:lnSpc>
               <a:spcPct val="90000"/>
             </a:lnSpc>
@@ -4213,32 +5676,113 @@
             <a:buNone/>
           </a:pPr>
           <a:r>
-            <a:rPr lang="en-GB" sz="3500" kern="1200"/>
-            <a:t>Finalised Technology</a:t>
+            <a:rPr lang="en-GB" sz="3000" kern="1200" dirty="0"/>
+            <a:t>Finalised Technologies</a:t>
           </a:r>
-          <a:endParaRPr lang="en-US" sz="3500" kern="1200"/>
+          <a:endParaRPr lang="en-US" sz="3000" kern="1200" dirty="0"/>
         </a:p>
       </dsp:txBody>
       <dsp:txXfrm>
-        <a:off x="0" y="39687"/>
-        <a:ext cx="3286125" cy="1971675"/>
+        <a:off x="396080" y="1893"/>
+        <a:ext cx="2929383" cy="1757630"/>
       </dsp:txXfrm>
     </dsp:sp>
-    <dsp:sp modelId="{6C6C46E8-A03E-4D96-86A6-7B852063940F}">
+    <dsp:sp modelId="{0DB3E687-1539-4E5C-B5F0-E970A0F6B5C3}">
       <dsp:nvSpPr>
         <dsp:cNvPr id="0" name=""/>
         <dsp:cNvSpPr/>
       </dsp:nvSpPr>
       <dsp:spPr>
         <a:xfrm>
-          <a:off x="3614737" y="39687"/>
-          <a:ext cx="3286125" cy="1971675"/>
+          <a:off x="6926806" y="834988"/>
+          <a:ext cx="643158" cy="91440"/>
+        </a:xfrm>
+        <a:custGeom>
+          <a:avLst/>
+          <a:gdLst/>
+          <a:ahLst/>
+          <a:cxnLst/>
+          <a:rect l="0" t="0" r="0" b="0"/>
+          <a:pathLst>
+            <a:path>
+              <a:moveTo>
+                <a:pt x="0" y="45720"/>
+              </a:moveTo>
+              <a:lnTo>
+                <a:pt x="643158" y="45720"/>
+              </a:lnTo>
+            </a:path>
+          </a:pathLst>
+        </a:custGeom>
+        <a:noFill/>
+        <a:ln w="12700" cap="flat" cmpd="sng" algn="ctr">
+          <a:solidFill>
+            <a:schemeClr val="accent3">
+              <a:hueOff val="0"/>
+              <a:satOff val="0"/>
+              <a:lumOff val="0"/>
+              <a:alphaOff val="0"/>
+            </a:schemeClr>
+          </a:solidFill>
+          <a:prstDash val="solid"/>
+          <a:miter lim="800000"/>
+          <a:tailEnd type="arrow"/>
+        </a:ln>
+        <a:effectLst/>
+      </dsp:spPr>
+      <dsp:style>
+        <a:lnRef idx="1">
+          <a:scrgbClr r="0" g="0" b="0"/>
+        </a:lnRef>
+        <a:fillRef idx="0">
+          <a:scrgbClr r="0" g="0" b="0"/>
+        </a:fillRef>
+        <a:effectRef idx="0">
+          <a:scrgbClr r="0" g="0" b="0"/>
+        </a:effectRef>
+        <a:fontRef idx="minor"/>
+      </dsp:style>
+      <dsp:txBody>
+        <a:bodyPr spcFirstLastPara="0" vert="horz" wrap="square" lIns="12700" tIns="0" rIns="12700" bIns="0" numCol="1" spcCol="1270" anchor="ctr" anchorCtr="0">
+          <a:noAutofit/>
+        </a:bodyPr>
+        <a:lstStyle/>
+        <a:p>
+          <a:pPr marL="0" lvl="0" indent="0" algn="ctr" defTabSz="222250">
+            <a:lnSpc>
+              <a:spcPct val="90000"/>
+            </a:lnSpc>
+            <a:spcBef>
+              <a:spcPct val="0"/>
+            </a:spcBef>
+            <a:spcAft>
+              <a:spcPct val="35000"/>
+            </a:spcAft>
+            <a:buNone/>
+          </a:pPr>
+          <a:endParaRPr lang="en-US" sz="500" kern="1200"/>
+        </a:p>
+      </dsp:txBody>
+      <dsp:txXfrm>
+        <a:off x="7231541" y="877339"/>
+        <a:ext cx="33687" cy="6737"/>
+      </dsp:txXfrm>
+    </dsp:sp>
+    <dsp:sp modelId="{89D45EF4-9B2C-4EC1-B2B7-9AB78B964D54}">
+      <dsp:nvSpPr>
+        <dsp:cNvPr id="0" name=""/>
+        <dsp:cNvSpPr/>
+      </dsp:nvSpPr>
+      <dsp:spPr>
+        <a:xfrm>
+          <a:off x="3999222" y="1893"/>
+          <a:ext cx="2929383" cy="1757630"/>
         </a:xfrm>
         <a:prstGeom prst="rect">
           <a:avLst/>
         </a:prstGeom>
         <a:solidFill>
-          <a:schemeClr val="accent1">
+          <a:schemeClr val="accent3">
             <a:hueOff val="0"/>
             <a:satOff val="0"/>
             <a:lumOff val="0"/>
@@ -4274,12 +5818,12 @@
         </a:fontRef>
       </dsp:style>
       <dsp:txBody>
-        <a:bodyPr spcFirstLastPara="0" vert="horz" wrap="square" lIns="133350" tIns="133350" rIns="133350" bIns="133350" numCol="1" spcCol="1270" anchor="ctr" anchorCtr="0">
+        <a:bodyPr spcFirstLastPara="0" vert="horz" wrap="square" lIns="143542" tIns="150673" rIns="143542" bIns="150673" numCol="1" spcCol="1270" anchor="ctr" anchorCtr="0">
           <a:noAutofit/>
         </a:bodyPr>
         <a:lstStyle/>
         <a:p>
-          <a:pPr marL="0" lvl="0" indent="0" algn="ctr" defTabSz="1555750">
+          <a:pPr marL="0" lvl="0" indent="0" algn="ctr" defTabSz="1333500">
             <a:lnSpc>
               <a:spcPct val="90000"/>
             </a:lnSpc>
@@ -4292,32 +5836,119 @@
             <a:buNone/>
           </a:pPr>
           <a:r>
-            <a:rPr lang="en-GB" sz="3500" kern="1200"/>
+            <a:rPr lang="en-GB" sz="3000" kern="1200"/>
             <a:t>Reviewed Technology Documentation</a:t>
           </a:r>
-          <a:endParaRPr lang="en-US" sz="3500" kern="1200"/>
+          <a:endParaRPr lang="en-US" sz="3000" kern="1200"/>
         </a:p>
       </dsp:txBody>
       <dsp:txXfrm>
-        <a:off x="3614737" y="39687"/>
-        <a:ext cx="3286125" cy="1971675"/>
+        <a:off x="3999222" y="1893"/>
+        <a:ext cx="2929383" cy="1757630"/>
       </dsp:txXfrm>
     </dsp:sp>
-    <dsp:sp modelId="{E3F8B56D-B516-4856-AC07-859F1D459BEF}">
+    <dsp:sp modelId="{3B91E594-490E-4611-8172-79EF88345F59}">
       <dsp:nvSpPr>
         <dsp:cNvPr id="0" name=""/>
         <dsp:cNvSpPr/>
       </dsp:nvSpPr>
       <dsp:spPr>
         <a:xfrm>
-          <a:off x="7229475" y="39687"/>
-          <a:ext cx="3286125" cy="1971675"/>
+          <a:off x="1860772" y="1757723"/>
+          <a:ext cx="7206284" cy="643158"/>
+        </a:xfrm>
+        <a:custGeom>
+          <a:avLst/>
+          <a:gdLst/>
+          <a:ahLst/>
+          <a:cxnLst/>
+          <a:rect l="0" t="0" r="0" b="0"/>
+          <a:pathLst>
+            <a:path>
+              <a:moveTo>
+                <a:pt x="7206284" y="0"/>
+              </a:moveTo>
+              <a:lnTo>
+                <a:pt x="7206284" y="338679"/>
+              </a:lnTo>
+              <a:lnTo>
+                <a:pt x="0" y="338679"/>
+              </a:lnTo>
+              <a:lnTo>
+                <a:pt x="0" y="643158"/>
+              </a:lnTo>
+            </a:path>
+          </a:pathLst>
+        </a:custGeom>
+        <a:noFill/>
+        <a:ln w="12700" cap="flat" cmpd="sng" algn="ctr">
+          <a:solidFill>
+            <a:schemeClr val="accent4">
+              <a:hueOff val="0"/>
+              <a:satOff val="0"/>
+              <a:lumOff val="0"/>
+              <a:alphaOff val="0"/>
+            </a:schemeClr>
+          </a:solidFill>
+          <a:prstDash val="solid"/>
+          <a:miter lim="800000"/>
+          <a:tailEnd type="arrow"/>
+        </a:ln>
+        <a:effectLst/>
+      </dsp:spPr>
+      <dsp:style>
+        <a:lnRef idx="1">
+          <a:scrgbClr r="0" g="0" b="0"/>
+        </a:lnRef>
+        <a:fillRef idx="0">
+          <a:scrgbClr r="0" g="0" b="0"/>
+        </a:fillRef>
+        <a:effectRef idx="0">
+          <a:scrgbClr r="0" g="0" b="0"/>
+        </a:effectRef>
+        <a:fontRef idx="minor"/>
+      </dsp:style>
+      <dsp:txBody>
+        <a:bodyPr spcFirstLastPara="0" vert="horz" wrap="square" lIns="12700" tIns="0" rIns="12700" bIns="0" numCol="1" spcCol="1270" anchor="ctr" anchorCtr="0">
+          <a:noAutofit/>
+        </a:bodyPr>
+        <a:lstStyle/>
+        <a:p>
+          <a:pPr marL="0" lvl="0" indent="0" algn="ctr" defTabSz="222250">
+            <a:lnSpc>
+              <a:spcPct val="90000"/>
+            </a:lnSpc>
+            <a:spcBef>
+              <a:spcPct val="0"/>
+            </a:spcBef>
+            <a:spcAft>
+              <a:spcPct val="35000"/>
+            </a:spcAft>
+            <a:buNone/>
+          </a:pPr>
+          <a:endParaRPr lang="en-US" sz="500" kern="1200"/>
+        </a:p>
+      </dsp:txBody>
+      <dsp:txXfrm>
+        <a:off x="5282971" y="2075933"/>
+        <a:ext cx="361885" cy="6737"/>
+      </dsp:txXfrm>
+    </dsp:sp>
+    <dsp:sp modelId="{D004A898-25CE-4F62-9A8E-5E1E641CFF63}">
+      <dsp:nvSpPr>
+        <dsp:cNvPr id="0" name=""/>
+        <dsp:cNvSpPr/>
+      </dsp:nvSpPr>
+      <dsp:spPr>
+        <a:xfrm>
+          <a:off x="7602364" y="1893"/>
+          <a:ext cx="2929383" cy="1757630"/>
         </a:xfrm>
         <a:prstGeom prst="rect">
           <a:avLst/>
         </a:prstGeom>
         <a:solidFill>
-          <a:schemeClr val="accent1">
+          <a:schemeClr val="accent4">
             <a:hueOff val="0"/>
             <a:satOff val="0"/>
             <a:lumOff val="0"/>
@@ -4353,12 +5984,12 @@
         </a:fontRef>
       </dsp:style>
       <dsp:txBody>
-        <a:bodyPr spcFirstLastPara="0" vert="horz" wrap="square" lIns="133350" tIns="133350" rIns="133350" bIns="133350" numCol="1" spcCol="1270" anchor="ctr" anchorCtr="0">
+        <a:bodyPr spcFirstLastPara="0" vert="horz" wrap="square" lIns="143542" tIns="150673" rIns="143542" bIns="150673" numCol="1" spcCol="1270" anchor="ctr" anchorCtr="0">
           <a:noAutofit/>
         </a:bodyPr>
         <a:lstStyle/>
         <a:p>
-          <a:pPr marL="0" lvl="0" indent="0" algn="ctr" defTabSz="1555750">
+          <a:pPr marL="0" lvl="0" indent="0" algn="ctr" defTabSz="1333500">
             <a:lnSpc>
               <a:spcPct val="90000"/>
             </a:lnSpc>
@@ -4371,32 +6002,113 @@
             <a:buNone/>
           </a:pPr>
           <a:r>
-            <a:rPr lang="en-GB" sz="3500" kern="1200"/>
+            <a:rPr lang="en-GB" sz="3000" kern="1200"/>
             <a:t>Completed Tutorials</a:t>
           </a:r>
-          <a:endParaRPr lang="en-US" sz="3500" kern="1200"/>
+          <a:endParaRPr lang="en-US" sz="3000" kern="1200"/>
         </a:p>
       </dsp:txBody>
       <dsp:txXfrm>
-        <a:off x="7229475" y="39687"/>
-        <a:ext cx="3286125" cy="1971675"/>
+        <a:off x="7602364" y="1893"/>
+        <a:ext cx="2929383" cy="1757630"/>
       </dsp:txXfrm>
     </dsp:sp>
-    <dsp:sp modelId="{D902EAD3-AC2A-44EF-A24B-DC92EC6DB0F5}">
+    <dsp:sp modelId="{4A21EF63-2C8B-4EA7-A183-F3E63BD5382B}">
       <dsp:nvSpPr>
         <dsp:cNvPr id="0" name=""/>
         <dsp:cNvSpPr/>
       </dsp:nvSpPr>
       <dsp:spPr>
         <a:xfrm>
-          <a:off x="0" y="2339975"/>
-          <a:ext cx="3286125" cy="1971675"/>
+          <a:off x="3323664" y="3266376"/>
+          <a:ext cx="643158" cy="91440"/>
+        </a:xfrm>
+        <a:custGeom>
+          <a:avLst/>
+          <a:gdLst/>
+          <a:ahLst/>
+          <a:cxnLst/>
+          <a:rect l="0" t="0" r="0" b="0"/>
+          <a:pathLst>
+            <a:path>
+              <a:moveTo>
+                <a:pt x="0" y="45720"/>
+              </a:moveTo>
+              <a:lnTo>
+                <a:pt x="643158" y="45720"/>
+              </a:lnTo>
+            </a:path>
+          </a:pathLst>
+        </a:custGeom>
+        <a:noFill/>
+        <a:ln w="12700" cap="flat" cmpd="sng" algn="ctr">
+          <a:solidFill>
+            <a:schemeClr val="accent5">
+              <a:hueOff val="0"/>
+              <a:satOff val="0"/>
+              <a:lumOff val="0"/>
+              <a:alphaOff val="0"/>
+            </a:schemeClr>
+          </a:solidFill>
+          <a:prstDash val="solid"/>
+          <a:miter lim="800000"/>
+          <a:tailEnd type="arrow"/>
+        </a:ln>
+        <a:effectLst/>
+      </dsp:spPr>
+      <dsp:style>
+        <a:lnRef idx="1">
+          <a:scrgbClr r="0" g="0" b="0"/>
+        </a:lnRef>
+        <a:fillRef idx="0">
+          <a:scrgbClr r="0" g="0" b="0"/>
+        </a:fillRef>
+        <a:effectRef idx="0">
+          <a:scrgbClr r="0" g="0" b="0"/>
+        </a:effectRef>
+        <a:fontRef idx="minor"/>
+      </dsp:style>
+      <dsp:txBody>
+        <a:bodyPr spcFirstLastPara="0" vert="horz" wrap="square" lIns="12700" tIns="0" rIns="12700" bIns="0" numCol="1" spcCol="1270" anchor="ctr" anchorCtr="0">
+          <a:noAutofit/>
+        </a:bodyPr>
+        <a:lstStyle/>
+        <a:p>
+          <a:pPr marL="0" lvl="0" indent="0" algn="ctr" defTabSz="222250">
+            <a:lnSpc>
+              <a:spcPct val="90000"/>
+            </a:lnSpc>
+            <a:spcBef>
+              <a:spcPct val="0"/>
+            </a:spcBef>
+            <a:spcAft>
+              <a:spcPct val="35000"/>
+            </a:spcAft>
+            <a:buNone/>
+          </a:pPr>
+          <a:endParaRPr lang="en-US" sz="500" kern="1200"/>
+        </a:p>
+      </dsp:txBody>
+      <dsp:txXfrm>
+        <a:off x="3628399" y="3308728"/>
+        <a:ext cx="33687" cy="6737"/>
+      </dsp:txXfrm>
+    </dsp:sp>
+    <dsp:sp modelId="{AA7A22F5-E5FF-4692-8DC8-4F70976C6B4A}">
+      <dsp:nvSpPr>
+        <dsp:cNvPr id="0" name=""/>
+        <dsp:cNvSpPr/>
+      </dsp:nvSpPr>
+      <dsp:spPr>
+        <a:xfrm>
+          <a:off x="396080" y="2433281"/>
+          <a:ext cx="2929383" cy="1757630"/>
         </a:xfrm>
         <a:prstGeom prst="rect">
           <a:avLst/>
         </a:prstGeom>
         <a:solidFill>
-          <a:schemeClr val="accent1">
+          <a:schemeClr val="accent5">
             <a:hueOff val="0"/>
             <a:satOff val="0"/>
             <a:lumOff val="0"/>
@@ -4432,12 +6144,12 @@
         </a:fontRef>
       </dsp:style>
       <dsp:txBody>
-        <a:bodyPr spcFirstLastPara="0" vert="horz" wrap="square" lIns="133350" tIns="133350" rIns="133350" bIns="133350" numCol="1" spcCol="1270" anchor="ctr" anchorCtr="0">
+        <a:bodyPr spcFirstLastPara="0" vert="horz" wrap="square" lIns="143542" tIns="150673" rIns="143542" bIns="150673" numCol="1" spcCol="1270" anchor="ctr" anchorCtr="0">
           <a:noAutofit/>
         </a:bodyPr>
         <a:lstStyle/>
         <a:p>
-          <a:pPr marL="0" lvl="0" indent="0" algn="ctr" defTabSz="1555750">
+          <a:pPr marL="0" lvl="0" indent="0" algn="ctr" defTabSz="1333500">
             <a:lnSpc>
               <a:spcPct val="90000"/>
             </a:lnSpc>
@@ -4450,32 +6162,113 @@
             <a:buNone/>
           </a:pPr>
           <a:r>
-            <a:rPr lang="en-GB" sz="3500" kern="1200"/>
+            <a:rPr lang="en-GB" sz="3000" kern="1200"/>
             <a:t>Created Logo</a:t>
           </a:r>
-          <a:endParaRPr lang="en-US" sz="3500" kern="1200"/>
+          <a:endParaRPr lang="en-US" sz="3000" kern="1200"/>
         </a:p>
       </dsp:txBody>
       <dsp:txXfrm>
-        <a:off x="0" y="2339975"/>
-        <a:ext cx="3286125" cy="1971675"/>
+        <a:off x="396080" y="2433281"/>
+        <a:ext cx="2929383" cy="1757630"/>
       </dsp:txXfrm>
     </dsp:sp>
-    <dsp:sp modelId="{7CE73D57-F61E-479E-93B2-04470CB392B7}">
+    <dsp:sp modelId="{4C7DCDE3-BA83-4ECD-B552-22B8F630D527}">
       <dsp:nvSpPr>
         <dsp:cNvPr id="0" name=""/>
         <dsp:cNvSpPr/>
       </dsp:nvSpPr>
       <dsp:spPr>
         <a:xfrm>
-          <a:off x="3614737" y="2339975"/>
-          <a:ext cx="3286125" cy="1971675"/>
+          <a:off x="6926806" y="3266376"/>
+          <a:ext cx="643158" cy="91440"/>
+        </a:xfrm>
+        <a:custGeom>
+          <a:avLst/>
+          <a:gdLst/>
+          <a:ahLst/>
+          <a:cxnLst/>
+          <a:rect l="0" t="0" r="0" b="0"/>
+          <a:pathLst>
+            <a:path>
+              <a:moveTo>
+                <a:pt x="0" y="45720"/>
+              </a:moveTo>
+              <a:lnTo>
+                <a:pt x="643158" y="45720"/>
+              </a:lnTo>
+            </a:path>
+          </a:pathLst>
+        </a:custGeom>
+        <a:noFill/>
+        <a:ln w="12700" cap="flat" cmpd="sng" algn="ctr">
+          <a:solidFill>
+            <a:schemeClr val="accent6">
+              <a:hueOff val="0"/>
+              <a:satOff val="0"/>
+              <a:lumOff val="0"/>
+              <a:alphaOff val="0"/>
+            </a:schemeClr>
+          </a:solidFill>
+          <a:prstDash val="solid"/>
+          <a:miter lim="800000"/>
+          <a:tailEnd type="arrow"/>
+        </a:ln>
+        <a:effectLst/>
+      </dsp:spPr>
+      <dsp:style>
+        <a:lnRef idx="1">
+          <a:scrgbClr r="0" g="0" b="0"/>
+        </a:lnRef>
+        <a:fillRef idx="0">
+          <a:scrgbClr r="0" g="0" b="0"/>
+        </a:fillRef>
+        <a:effectRef idx="0">
+          <a:scrgbClr r="0" g="0" b="0"/>
+        </a:effectRef>
+        <a:fontRef idx="minor"/>
+      </dsp:style>
+      <dsp:txBody>
+        <a:bodyPr spcFirstLastPara="0" vert="horz" wrap="square" lIns="12700" tIns="0" rIns="12700" bIns="0" numCol="1" spcCol="1270" anchor="ctr" anchorCtr="0">
+          <a:noAutofit/>
+        </a:bodyPr>
+        <a:lstStyle/>
+        <a:p>
+          <a:pPr marL="0" lvl="0" indent="0" algn="ctr" defTabSz="222250">
+            <a:lnSpc>
+              <a:spcPct val="90000"/>
+            </a:lnSpc>
+            <a:spcBef>
+              <a:spcPct val="0"/>
+            </a:spcBef>
+            <a:spcAft>
+              <a:spcPct val="35000"/>
+            </a:spcAft>
+            <a:buNone/>
+          </a:pPr>
+          <a:endParaRPr lang="en-US" sz="500" kern="1200"/>
+        </a:p>
+      </dsp:txBody>
+      <dsp:txXfrm>
+        <a:off x="7231541" y="3308728"/>
+        <a:ext cx="33687" cy="6737"/>
+      </dsp:txXfrm>
+    </dsp:sp>
+    <dsp:sp modelId="{D106C643-60C1-4C17-87E2-4586395B07E8}">
+      <dsp:nvSpPr>
+        <dsp:cNvPr id="0" name=""/>
+        <dsp:cNvSpPr/>
+      </dsp:nvSpPr>
+      <dsp:spPr>
+        <a:xfrm>
+          <a:off x="3999222" y="2433281"/>
+          <a:ext cx="2929383" cy="1757630"/>
         </a:xfrm>
         <a:prstGeom prst="rect">
           <a:avLst/>
         </a:prstGeom>
         <a:solidFill>
-          <a:schemeClr val="accent1">
+          <a:schemeClr val="accent6">
             <a:hueOff val="0"/>
             <a:satOff val="0"/>
             <a:lumOff val="0"/>
@@ -4511,12 +6304,12 @@
         </a:fontRef>
       </dsp:style>
       <dsp:txBody>
-        <a:bodyPr spcFirstLastPara="0" vert="horz" wrap="square" lIns="133350" tIns="133350" rIns="133350" bIns="133350" numCol="1" spcCol="1270" anchor="ctr" anchorCtr="0">
+        <a:bodyPr spcFirstLastPara="0" vert="horz" wrap="square" lIns="143542" tIns="150673" rIns="143542" bIns="150673" numCol="1" spcCol="1270" anchor="ctr" anchorCtr="0">
           <a:noAutofit/>
         </a:bodyPr>
         <a:lstStyle/>
         <a:p>
-          <a:pPr marL="0" lvl="0" indent="0" algn="ctr" defTabSz="1555750">
+          <a:pPr marL="0" lvl="0" indent="0" algn="ctr" defTabSz="1333500">
             <a:lnSpc>
               <a:spcPct val="90000"/>
             </a:lnSpc>
@@ -4529,32 +6322,32 @@
             <a:buNone/>
           </a:pPr>
           <a:r>
-            <a:rPr lang="en-GB" sz="3500" kern="1200"/>
+            <a:rPr lang="en-GB" sz="3000" kern="1200"/>
             <a:t>Detailed Project Specifications</a:t>
           </a:r>
-          <a:endParaRPr lang="en-US" sz="3500" kern="1200"/>
+          <a:endParaRPr lang="en-US" sz="3000" kern="1200"/>
         </a:p>
       </dsp:txBody>
       <dsp:txXfrm>
-        <a:off x="3614737" y="2339975"/>
-        <a:ext cx="3286125" cy="1971675"/>
+        <a:off x="3999222" y="2433281"/>
+        <a:ext cx="2929383" cy="1757630"/>
       </dsp:txXfrm>
     </dsp:sp>
-    <dsp:sp modelId="{8721C090-38C6-4C97-B221-EF6F0FB02030}">
+    <dsp:sp modelId="{6AC9EB11-ECFA-4A5F-96CD-782DD0A29363}">
       <dsp:nvSpPr>
         <dsp:cNvPr id="0" name=""/>
         <dsp:cNvSpPr/>
       </dsp:nvSpPr>
       <dsp:spPr>
         <a:xfrm>
-          <a:off x="7229475" y="2339975"/>
-          <a:ext cx="3286125" cy="1971675"/>
+          <a:off x="7602364" y="2433281"/>
+          <a:ext cx="2929383" cy="1757630"/>
         </a:xfrm>
         <a:prstGeom prst="rect">
           <a:avLst/>
         </a:prstGeom>
         <a:solidFill>
-          <a:schemeClr val="accent1">
+          <a:schemeClr val="accent2">
             <a:hueOff val="0"/>
             <a:satOff val="0"/>
             <a:lumOff val="0"/>
@@ -4590,12 +6383,12 @@
         </a:fontRef>
       </dsp:style>
       <dsp:txBody>
-        <a:bodyPr spcFirstLastPara="0" vert="horz" wrap="square" lIns="133350" tIns="133350" rIns="133350" bIns="133350" numCol="1" spcCol="1270" anchor="ctr" anchorCtr="0">
+        <a:bodyPr spcFirstLastPara="0" vert="horz" wrap="square" lIns="143542" tIns="150673" rIns="143542" bIns="150673" numCol="1" spcCol="1270" anchor="ctr" anchorCtr="0">
           <a:noAutofit/>
         </a:bodyPr>
         <a:lstStyle/>
         <a:p>
-          <a:pPr marL="0" lvl="0" indent="0" algn="ctr" defTabSz="1555750">
+          <a:pPr marL="0" lvl="0" indent="0" algn="ctr" defTabSz="1333500">
             <a:lnSpc>
               <a:spcPct val="90000"/>
             </a:lnSpc>
@@ -4608,15 +6401,729 @@
             <a:buNone/>
           </a:pPr>
           <a:r>
-            <a:rPr lang="en-GB" sz="3500" kern="1200"/>
+            <a:rPr lang="en-GB" sz="3000" kern="1200"/>
             <a:t>Developed Project Poster</a:t>
           </a:r>
-          <a:endParaRPr lang="en-US" sz="3500" kern="1200"/>
+          <a:endParaRPr lang="en-US" sz="3000" kern="1200"/>
         </a:p>
       </dsp:txBody>
       <dsp:txXfrm>
-        <a:off x="7229475" y="2339975"/>
-        <a:ext cx="3286125" cy="1971675"/>
+        <a:off x="7602364" y="2433281"/>
+        <a:ext cx="2929383" cy="1757630"/>
+      </dsp:txXfrm>
+    </dsp:sp>
+  </dsp:spTree>
+</dsp:drawing>
+</file>
+
+<file path=ppt/diagrams/drawing3.xml><?xml version="1.0" encoding="utf-8"?>
+<dsp:drawing xmlns:dgm="http://schemas.openxmlformats.org/drawingml/2006/diagram" xmlns:dsp="http://schemas.microsoft.com/office/drawing/2008/diagram" xmlns:a="http://schemas.openxmlformats.org/drawingml/2006/main">
+  <dsp:spTree>
+    <dsp:nvGrpSpPr>
+      <dsp:cNvPr id="0" name=""/>
+      <dsp:cNvGrpSpPr/>
+    </dsp:nvGrpSpPr>
+    <dsp:grpSpPr/>
+    <dsp:sp modelId="{F576D237-D86B-4E74-9A5E-2341DAEC9A8D}">
+      <dsp:nvSpPr>
+        <dsp:cNvPr id="0" name=""/>
+        <dsp:cNvSpPr/>
+      </dsp:nvSpPr>
+      <dsp:spPr>
+        <a:xfrm>
+          <a:off x="0" y="1468"/>
+          <a:ext cx="10515600" cy="0"/>
+        </a:xfrm>
+        <a:prstGeom prst="line">
+          <a:avLst/>
+        </a:prstGeom>
+        <a:solidFill>
+          <a:schemeClr val="accent1">
+            <a:hueOff val="0"/>
+            <a:satOff val="0"/>
+            <a:lumOff val="0"/>
+            <a:alphaOff val="0"/>
+          </a:schemeClr>
+        </a:solidFill>
+        <a:ln w="19050" cap="flat" cmpd="sng" algn="ctr">
+          <a:solidFill>
+            <a:schemeClr val="accent1">
+              <a:hueOff val="0"/>
+              <a:satOff val="0"/>
+              <a:lumOff val="0"/>
+              <a:alphaOff val="0"/>
+            </a:schemeClr>
+          </a:solidFill>
+          <a:prstDash val="solid"/>
+          <a:miter lim="800000"/>
+        </a:ln>
+        <a:effectLst/>
+      </dsp:spPr>
+      <dsp:style>
+        <a:lnRef idx="2">
+          <a:scrgbClr r="0" g="0" b="0"/>
+        </a:lnRef>
+        <a:fillRef idx="1">
+          <a:scrgbClr r="0" g="0" b="0"/>
+        </a:fillRef>
+        <a:effectRef idx="0">
+          <a:scrgbClr r="0" g="0" b="0"/>
+        </a:effectRef>
+        <a:fontRef idx="minor">
+          <a:schemeClr val="lt1"/>
+        </a:fontRef>
+      </dsp:style>
+    </dsp:sp>
+    <dsp:sp modelId="{1EA44391-E4F4-4B52-9752-7D24B77006DD}">
+      <dsp:nvSpPr>
+        <dsp:cNvPr id="0" name=""/>
+        <dsp:cNvSpPr/>
+      </dsp:nvSpPr>
+      <dsp:spPr>
+        <a:xfrm>
+          <a:off x="0" y="1468"/>
+          <a:ext cx="10515600" cy="500684"/>
+        </a:xfrm>
+        <a:prstGeom prst="rect">
+          <a:avLst/>
+        </a:prstGeom>
+        <a:noFill/>
+        <a:ln>
+          <a:noFill/>
+        </a:ln>
+        <a:effectLst/>
+      </dsp:spPr>
+      <dsp:style>
+        <a:lnRef idx="0">
+          <a:scrgbClr r="0" g="0" b="0"/>
+        </a:lnRef>
+        <a:fillRef idx="0">
+          <a:scrgbClr r="0" g="0" b="0"/>
+        </a:fillRef>
+        <a:effectRef idx="0">
+          <a:scrgbClr r="0" g="0" b="0"/>
+        </a:effectRef>
+        <a:fontRef idx="minor"/>
+      </dsp:style>
+      <dsp:txBody>
+        <a:bodyPr spcFirstLastPara="0" vert="horz" wrap="square" lIns="87630" tIns="87630" rIns="87630" bIns="87630" numCol="1" spcCol="1270" anchor="t" anchorCtr="0">
+          <a:noAutofit/>
+        </a:bodyPr>
+        <a:lstStyle/>
+        <a:p>
+          <a:pPr marL="0" lvl="0" indent="0" algn="l" defTabSz="1022350">
+            <a:lnSpc>
+              <a:spcPct val="90000"/>
+            </a:lnSpc>
+            <a:spcBef>
+              <a:spcPct val="0"/>
+            </a:spcBef>
+            <a:spcAft>
+              <a:spcPct val="35000"/>
+            </a:spcAft>
+            <a:buNone/>
+          </a:pPr>
+          <a:r>
+            <a:rPr lang="en-GB" sz="2300" kern="1200"/>
+            <a:t>Netwatch logo: </a:t>
+          </a:r>
+          <a:r>
+            <a:rPr lang="en-GB" sz="2300" kern="1200">
+              <a:hlinkClick xmlns:r="http://schemas.openxmlformats.org/officeDocument/2006/relationships" r:id="rId1"/>
+            </a:rPr>
+            <a:t>www.netwatchsystem.com</a:t>
+          </a:r>
+          <a:endParaRPr lang="en-US" sz="2300" kern="1200"/>
+        </a:p>
+      </dsp:txBody>
+      <dsp:txXfrm>
+        <a:off x="0" y="1468"/>
+        <a:ext cx="10515600" cy="500684"/>
+      </dsp:txXfrm>
+    </dsp:sp>
+    <dsp:sp modelId="{42899E16-BFFB-4249-98C9-AD97C212253C}">
+      <dsp:nvSpPr>
+        <dsp:cNvPr id="0" name=""/>
+        <dsp:cNvSpPr/>
+      </dsp:nvSpPr>
+      <dsp:spPr>
+        <a:xfrm>
+          <a:off x="0" y="502152"/>
+          <a:ext cx="10515600" cy="0"/>
+        </a:xfrm>
+        <a:prstGeom prst="line">
+          <a:avLst/>
+        </a:prstGeom>
+        <a:solidFill>
+          <a:schemeClr val="accent1">
+            <a:hueOff val="0"/>
+            <a:satOff val="0"/>
+            <a:lumOff val="0"/>
+            <a:alphaOff val="0"/>
+          </a:schemeClr>
+        </a:solidFill>
+        <a:ln w="19050" cap="flat" cmpd="sng" algn="ctr">
+          <a:solidFill>
+            <a:schemeClr val="accent1">
+              <a:hueOff val="0"/>
+              <a:satOff val="0"/>
+              <a:lumOff val="0"/>
+              <a:alphaOff val="0"/>
+            </a:schemeClr>
+          </a:solidFill>
+          <a:prstDash val="solid"/>
+          <a:miter lim="800000"/>
+        </a:ln>
+        <a:effectLst/>
+      </dsp:spPr>
+      <dsp:style>
+        <a:lnRef idx="2">
+          <a:scrgbClr r="0" g="0" b="0"/>
+        </a:lnRef>
+        <a:fillRef idx="1">
+          <a:scrgbClr r="0" g="0" b="0"/>
+        </a:fillRef>
+        <a:effectRef idx="0">
+          <a:scrgbClr r="0" g="0" b="0"/>
+        </a:effectRef>
+        <a:fontRef idx="minor">
+          <a:schemeClr val="lt1"/>
+        </a:fontRef>
+      </dsp:style>
+    </dsp:sp>
+    <dsp:sp modelId="{B8A61DF9-02A2-48A6-A1FA-B7A4F984EEEB}">
+      <dsp:nvSpPr>
+        <dsp:cNvPr id="0" name=""/>
+        <dsp:cNvSpPr/>
+      </dsp:nvSpPr>
+      <dsp:spPr>
+        <a:xfrm>
+          <a:off x="0" y="502152"/>
+          <a:ext cx="10515600" cy="500684"/>
+        </a:xfrm>
+        <a:prstGeom prst="rect">
+          <a:avLst/>
+        </a:prstGeom>
+        <a:noFill/>
+        <a:ln>
+          <a:noFill/>
+        </a:ln>
+        <a:effectLst/>
+      </dsp:spPr>
+      <dsp:style>
+        <a:lnRef idx="0">
+          <a:scrgbClr r="0" g="0" b="0"/>
+        </a:lnRef>
+        <a:fillRef idx="0">
+          <a:scrgbClr r="0" g="0" b="0"/>
+        </a:fillRef>
+        <a:effectRef idx="0">
+          <a:scrgbClr r="0" g="0" b="0"/>
+        </a:effectRef>
+        <a:fontRef idx="minor"/>
+      </dsp:style>
+      <dsp:txBody>
+        <a:bodyPr spcFirstLastPara="0" vert="horz" wrap="square" lIns="87630" tIns="87630" rIns="87630" bIns="87630" numCol="1" spcCol="1270" anchor="t" anchorCtr="0">
+          <a:noAutofit/>
+        </a:bodyPr>
+        <a:lstStyle/>
+        <a:p>
+          <a:pPr marL="0" lvl="0" indent="0" algn="l" defTabSz="1022350">
+            <a:lnSpc>
+              <a:spcPct val="90000"/>
+            </a:lnSpc>
+            <a:spcBef>
+              <a:spcPct val="0"/>
+            </a:spcBef>
+            <a:spcAft>
+              <a:spcPct val="35000"/>
+            </a:spcAft>
+            <a:buNone/>
+          </a:pPr>
+          <a:r>
+            <a:rPr lang="en-GB" sz="2300" kern="1200"/>
+            <a:t>SiteSafeAi logo creation: </a:t>
+          </a:r>
+          <a:r>
+            <a:rPr lang="en-GB" sz="2300" kern="1200">
+              <a:hlinkClick xmlns:r="http://schemas.openxmlformats.org/officeDocument/2006/relationships" r:id="rId2"/>
+            </a:rPr>
+            <a:t>www.canva.com</a:t>
+          </a:r>
+          <a:endParaRPr lang="en-US" sz="2300" kern="1200"/>
+        </a:p>
+      </dsp:txBody>
+      <dsp:txXfrm>
+        <a:off x="0" y="502152"/>
+        <a:ext cx="10515600" cy="500684"/>
+      </dsp:txXfrm>
+    </dsp:sp>
+    <dsp:sp modelId="{C2DDD462-9DC5-4C03-83B5-D1B04BB614BB}">
+      <dsp:nvSpPr>
+        <dsp:cNvPr id="0" name=""/>
+        <dsp:cNvSpPr/>
+      </dsp:nvSpPr>
+      <dsp:spPr>
+        <a:xfrm>
+          <a:off x="0" y="1002837"/>
+          <a:ext cx="10515600" cy="0"/>
+        </a:xfrm>
+        <a:prstGeom prst="line">
+          <a:avLst/>
+        </a:prstGeom>
+        <a:solidFill>
+          <a:schemeClr val="accent1">
+            <a:hueOff val="0"/>
+            <a:satOff val="0"/>
+            <a:lumOff val="0"/>
+            <a:alphaOff val="0"/>
+          </a:schemeClr>
+        </a:solidFill>
+        <a:ln w="19050" cap="flat" cmpd="sng" algn="ctr">
+          <a:solidFill>
+            <a:schemeClr val="accent1">
+              <a:hueOff val="0"/>
+              <a:satOff val="0"/>
+              <a:lumOff val="0"/>
+              <a:alphaOff val="0"/>
+            </a:schemeClr>
+          </a:solidFill>
+          <a:prstDash val="solid"/>
+          <a:miter lim="800000"/>
+        </a:ln>
+        <a:effectLst/>
+      </dsp:spPr>
+      <dsp:style>
+        <a:lnRef idx="2">
+          <a:scrgbClr r="0" g="0" b="0"/>
+        </a:lnRef>
+        <a:fillRef idx="1">
+          <a:scrgbClr r="0" g="0" b="0"/>
+        </a:fillRef>
+        <a:effectRef idx="0">
+          <a:scrgbClr r="0" g="0" b="0"/>
+        </a:effectRef>
+        <a:fontRef idx="minor">
+          <a:schemeClr val="lt1"/>
+        </a:fontRef>
+      </dsp:style>
+    </dsp:sp>
+    <dsp:sp modelId="{CBFCDBC2-A2DE-402A-B255-66D444A90B4D}">
+      <dsp:nvSpPr>
+        <dsp:cNvPr id="0" name=""/>
+        <dsp:cNvSpPr/>
+      </dsp:nvSpPr>
+      <dsp:spPr>
+        <a:xfrm>
+          <a:off x="0" y="1002837"/>
+          <a:ext cx="10515600" cy="500684"/>
+        </a:xfrm>
+        <a:prstGeom prst="rect">
+          <a:avLst/>
+        </a:prstGeom>
+        <a:noFill/>
+        <a:ln>
+          <a:noFill/>
+        </a:ln>
+        <a:effectLst/>
+      </dsp:spPr>
+      <dsp:style>
+        <a:lnRef idx="0">
+          <a:scrgbClr r="0" g="0" b="0"/>
+        </a:lnRef>
+        <a:fillRef idx="0">
+          <a:scrgbClr r="0" g="0" b="0"/>
+        </a:fillRef>
+        <a:effectRef idx="0">
+          <a:scrgbClr r="0" g="0" b="0"/>
+        </a:effectRef>
+        <a:fontRef idx="minor"/>
+      </dsp:style>
+      <dsp:txBody>
+        <a:bodyPr spcFirstLastPara="0" vert="horz" wrap="square" lIns="87630" tIns="87630" rIns="87630" bIns="87630" numCol="1" spcCol="1270" anchor="t" anchorCtr="0">
+          <a:noAutofit/>
+        </a:bodyPr>
+        <a:lstStyle/>
+        <a:p>
+          <a:pPr marL="0" lvl="0" indent="0" algn="l" defTabSz="1022350">
+            <a:lnSpc>
+              <a:spcPct val="90000"/>
+            </a:lnSpc>
+            <a:spcBef>
+              <a:spcPct val="0"/>
+            </a:spcBef>
+            <a:spcAft>
+              <a:spcPct val="35000"/>
+            </a:spcAft>
+            <a:buNone/>
+          </a:pPr>
+          <a:r>
+            <a:rPr lang="en-GB" sz="2300" kern="1200"/>
+            <a:t>Context diagram creation: </a:t>
+          </a:r>
+          <a:r>
+            <a:rPr lang="en-GB" sz="2300" kern="1200">
+              <a:hlinkClick xmlns:r="http://schemas.openxmlformats.org/officeDocument/2006/relationships" r:id="rId3"/>
+            </a:rPr>
+            <a:t>www.creately.com</a:t>
+          </a:r>
+          <a:endParaRPr lang="en-US" sz="2300" kern="1200"/>
+        </a:p>
+      </dsp:txBody>
+      <dsp:txXfrm>
+        <a:off x="0" y="1002837"/>
+        <a:ext cx="10515600" cy="500684"/>
+      </dsp:txXfrm>
+    </dsp:sp>
+    <dsp:sp modelId="{7CC9958B-6A51-4381-9F64-369C1C669D33}">
+      <dsp:nvSpPr>
+        <dsp:cNvPr id="0" name=""/>
+        <dsp:cNvSpPr/>
+      </dsp:nvSpPr>
+      <dsp:spPr>
+        <a:xfrm>
+          <a:off x="0" y="1503521"/>
+          <a:ext cx="10515600" cy="0"/>
+        </a:xfrm>
+        <a:prstGeom prst="line">
+          <a:avLst/>
+        </a:prstGeom>
+        <a:solidFill>
+          <a:schemeClr val="accent1">
+            <a:hueOff val="0"/>
+            <a:satOff val="0"/>
+            <a:lumOff val="0"/>
+            <a:alphaOff val="0"/>
+          </a:schemeClr>
+        </a:solidFill>
+        <a:ln w="19050" cap="flat" cmpd="sng" algn="ctr">
+          <a:solidFill>
+            <a:schemeClr val="accent1">
+              <a:hueOff val="0"/>
+              <a:satOff val="0"/>
+              <a:lumOff val="0"/>
+              <a:alphaOff val="0"/>
+            </a:schemeClr>
+          </a:solidFill>
+          <a:prstDash val="solid"/>
+          <a:miter lim="800000"/>
+        </a:ln>
+        <a:effectLst/>
+      </dsp:spPr>
+      <dsp:style>
+        <a:lnRef idx="2">
+          <a:scrgbClr r="0" g="0" b="0"/>
+        </a:lnRef>
+        <a:fillRef idx="1">
+          <a:scrgbClr r="0" g="0" b="0"/>
+        </a:fillRef>
+        <a:effectRef idx="0">
+          <a:scrgbClr r="0" g="0" b="0"/>
+        </a:effectRef>
+        <a:fontRef idx="minor">
+          <a:schemeClr val="lt1"/>
+        </a:fontRef>
+      </dsp:style>
+    </dsp:sp>
+    <dsp:sp modelId="{B191F5D6-5B9B-4287-AD44-F7F56FEBF56F}">
+      <dsp:nvSpPr>
+        <dsp:cNvPr id="0" name=""/>
+        <dsp:cNvSpPr/>
+      </dsp:nvSpPr>
+      <dsp:spPr>
+        <a:xfrm>
+          <a:off x="0" y="1503521"/>
+          <a:ext cx="10515600" cy="500684"/>
+        </a:xfrm>
+        <a:prstGeom prst="rect">
+          <a:avLst/>
+        </a:prstGeom>
+        <a:noFill/>
+        <a:ln>
+          <a:noFill/>
+        </a:ln>
+        <a:effectLst/>
+      </dsp:spPr>
+      <dsp:style>
+        <a:lnRef idx="0">
+          <a:scrgbClr r="0" g="0" b="0"/>
+        </a:lnRef>
+        <a:fillRef idx="0">
+          <a:scrgbClr r="0" g="0" b="0"/>
+        </a:fillRef>
+        <a:effectRef idx="0">
+          <a:scrgbClr r="0" g="0" b="0"/>
+        </a:effectRef>
+        <a:fontRef idx="minor"/>
+      </dsp:style>
+      <dsp:txBody>
+        <a:bodyPr spcFirstLastPara="0" vert="horz" wrap="square" lIns="87630" tIns="87630" rIns="87630" bIns="87630" numCol="1" spcCol="1270" anchor="t" anchorCtr="0">
+          <a:noAutofit/>
+        </a:bodyPr>
+        <a:lstStyle/>
+        <a:p>
+          <a:pPr marL="0" lvl="0" indent="0" algn="l" defTabSz="1022350">
+            <a:lnSpc>
+              <a:spcPct val="90000"/>
+            </a:lnSpc>
+            <a:spcBef>
+              <a:spcPct val="0"/>
+            </a:spcBef>
+            <a:spcAft>
+              <a:spcPct val="35000"/>
+            </a:spcAft>
+            <a:buNone/>
+          </a:pPr>
+          <a:r>
+            <a:rPr lang="en-GB" sz="2300" kern="1200"/>
+            <a:t>Technology logos: </a:t>
+          </a:r>
+          <a:r>
+            <a:rPr lang="en-GB" sz="2300" kern="1200">
+              <a:hlinkClick xmlns:r="http://schemas.openxmlformats.org/officeDocument/2006/relationships" r:id="rId4"/>
+            </a:rPr>
+            <a:t>www.iconscout.com</a:t>
+          </a:r>
+          <a:endParaRPr lang="en-US" sz="2300" kern="1200"/>
+        </a:p>
+      </dsp:txBody>
+      <dsp:txXfrm>
+        <a:off x="0" y="1503521"/>
+        <a:ext cx="10515600" cy="500684"/>
+      </dsp:txXfrm>
+    </dsp:sp>
+    <dsp:sp modelId="{4DFCB8B9-E5D4-4E57-BF7A-7C21BEFB5D8D}">
+      <dsp:nvSpPr>
+        <dsp:cNvPr id="0" name=""/>
+        <dsp:cNvSpPr/>
+      </dsp:nvSpPr>
+      <dsp:spPr>
+        <a:xfrm>
+          <a:off x="0" y="2004205"/>
+          <a:ext cx="10515600" cy="0"/>
+        </a:xfrm>
+        <a:prstGeom prst="line">
+          <a:avLst/>
+        </a:prstGeom>
+        <a:solidFill>
+          <a:schemeClr val="accent1">
+            <a:hueOff val="0"/>
+            <a:satOff val="0"/>
+            <a:lumOff val="0"/>
+            <a:alphaOff val="0"/>
+          </a:schemeClr>
+        </a:solidFill>
+        <a:ln w="19050" cap="flat" cmpd="sng" algn="ctr">
+          <a:solidFill>
+            <a:schemeClr val="accent1">
+              <a:hueOff val="0"/>
+              <a:satOff val="0"/>
+              <a:lumOff val="0"/>
+              <a:alphaOff val="0"/>
+            </a:schemeClr>
+          </a:solidFill>
+          <a:prstDash val="solid"/>
+          <a:miter lim="800000"/>
+        </a:ln>
+        <a:effectLst/>
+      </dsp:spPr>
+      <dsp:style>
+        <a:lnRef idx="2">
+          <a:scrgbClr r="0" g="0" b="0"/>
+        </a:lnRef>
+        <a:fillRef idx="1">
+          <a:scrgbClr r="0" g="0" b="0"/>
+        </a:fillRef>
+        <a:effectRef idx="0">
+          <a:scrgbClr r="0" g="0" b="0"/>
+        </a:effectRef>
+        <a:fontRef idx="minor">
+          <a:schemeClr val="lt1"/>
+        </a:fontRef>
+      </dsp:style>
+    </dsp:sp>
+    <dsp:sp modelId="{484EBC66-1835-4BFA-8DA0-0E9AB7FDAE82}">
+      <dsp:nvSpPr>
+        <dsp:cNvPr id="0" name=""/>
+        <dsp:cNvSpPr/>
+      </dsp:nvSpPr>
+      <dsp:spPr>
+        <a:xfrm>
+          <a:off x="0" y="2004205"/>
+          <a:ext cx="10515600" cy="500684"/>
+        </a:xfrm>
+        <a:prstGeom prst="rect">
+          <a:avLst/>
+        </a:prstGeom>
+        <a:noFill/>
+        <a:ln>
+          <a:noFill/>
+        </a:ln>
+        <a:effectLst/>
+      </dsp:spPr>
+      <dsp:style>
+        <a:lnRef idx="0">
+          <a:scrgbClr r="0" g="0" b="0"/>
+        </a:lnRef>
+        <a:fillRef idx="0">
+          <a:scrgbClr r="0" g="0" b="0"/>
+        </a:fillRef>
+        <a:effectRef idx="0">
+          <a:scrgbClr r="0" g="0" b="0"/>
+        </a:effectRef>
+        <a:fontRef idx="minor"/>
+      </dsp:style>
+      <dsp:txBody>
+        <a:bodyPr spcFirstLastPara="0" vert="horz" wrap="square" lIns="87630" tIns="87630" rIns="87630" bIns="87630" numCol="1" spcCol="1270" anchor="t" anchorCtr="0">
+          <a:noAutofit/>
+        </a:bodyPr>
+        <a:lstStyle/>
+        <a:p>
+          <a:pPr marL="0" lvl="0" indent="0" algn="l" defTabSz="1022350">
+            <a:lnSpc>
+              <a:spcPct val="90000"/>
+            </a:lnSpc>
+            <a:spcBef>
+              <a:spcPct val="0"/>
+            </a:spcBef>
+            <a:spcAft>
+              <a:spcPct val="35000"/>
+            </a:spcAft>
+            <a:buNone/>
+          </a:pPr>
+          <a:r>
+            <a:rPr lang="en-GB" sz="2300" kern="1200"/>
+            <a:t>Similar company: </a:t>
+          </a:r>
+          <a:r>
+            <a:rPr lang="en-GB" sz="2300" kern="1200">
+              <a:hlinkClick xmlns:r="http://schemas.openxmlformats.org/officeDocument/2006/relationships" r:id="rId5"/>
+            </a:rPr>
+            <a:t>www.synaedge.com/en</a:t>
+          </a:r>
+          <a:endParaRPr lang="en-US" sz="2300" kern="1200"/>
+        </a:p>
+      </dsp:txBody>
+      <dsp:txXfrm>
+        <a:off x="0" y="2004205"/>
+        <a:ext cx="10515600" cy="500684"/>
+      </dsp:txXfrm>
+    </dsp:sp>
+    <dsp:sp modelId="{1BCB4C99-9E9F-4916-BE8D-528DB97EA466}">
+      <dsp:nvSpPr>
+        <dsp:cNvPr id="0" name=""/>
+        <dsp:cNvSpPr/>
+      </dsp:nvSpPr>
+      <dsp:spPr>
+        <a:xfrm>
+          <a:off x="0" y="2504890"/>
+          <a:ext cx="10515600" cy="0"/>
+        </a:xfrm>
+        <a:prstGeom prst="line">
+          <a:avLst/>
+        </a:prstGeom>
+        <a:solidFill>
+          <a:schemeClr val="accent1">
+            <a:hueOff val="0"/>
+            <a:satOff val="0"/>
+            <a:lumOff val="0"/>
+            <a:alphaOff val="0"/>
+          </a:schemeClr>
+        </a:solidFill>
+        <a:ln w="19050" cap="flat" cmpd="sng" algn="ctr">
+          <a:solidFill>
+            <a:schemeClr val="accent1">
+              <a:hueOff val="0"/>
+              <a:satOff val="0"/>
+              <a:lumOff val="0"/>
+              <a:alphaOff val="0"/>
+            </a:schemeClr>
+          </a:solidFill>
+          <a:prstDash val="solid"/>
+          <a:miter lim="800000"/>
+        </a:ln>
+        <a:effectLst/>
+      </dsp:spPr>
+      <dsp:style>
+        <a:lnRef idx="2">
+          <a:scrgbClr r="0" g="0" b="0"/>
+        </a:lnRef>
+        <a:fillRef idx="1">
+          <a:scrgbClr r="0" g="0" b="0"/>
+        </a:fillRef>
+        <a:effectRef idx="0">
+          <a:scrgbClr r="0" g="0" b="0"/>
+        </a:effectRef>
+        <a:fontRef idx="minor">
+          <a:schemeClr val="lt1"/>
+        </a:fontRef>
+      </dsp:style>
+    </dsp:sp>
+    <dsp:sp modelId="{2E2B7F4E-D9EC-4184-9D45-5B25235123ED}">
+      <dsp:nvSpPr>
+        <dsp:cNvPr id="0" name=""/>
+        <dsp:cNvSpPr/>
+      </dsp:nvSpPr>
+      <dsp:spPr>
+        <a:xfrm>
+          <a:off x="0" y="2504890"/>
+          <a:ext cx="10515600" cy="500684"/>
+        </a:xfrm>
+        <a:prstGeom prst="rect">
+          <a:avLst/>
+        </a:prstGeom>
+        <a:noFill/>
+        <a:ln>
+          <a:noFill/>
+        </a:ln>
+        <a:effectLst/>
+      </dsp:spPr>
+      <dsp:style>
+        <a:lnRef idx="0">
+          <a:scrgbClr r="0" g="0" b="0"/>
+        </a:lnRef>
+        <a:fillRef idx="0">
+          <a:scrgbClr r="0" g="0" b="0"/>
+        </a:fillRef>
+        <a:effectRef idx="0">
+          <a:scrgbClr r="0" g="0" b="0"/>
+        </a:effectRef>
+        <a:fontRef idx="minor"/>
+      </dsp:style>
+      <dsp:txBody>
+        <a:bodyPr spcFirstLastPara="0" vert="horz" wrap="square" lIns="87630" tIns="87630" rIns="87630" bIns="87630" numCol="1" spcCol="1270" anchor="t" anchorCtr="0">
+          <a:noAutofit/>
+        </a:bodyPr>
+        <a:lstStyle/>
+        <a:p>
+          <a:pPr marL="0" lvl="0" indent="0" algn="l" defTabSz="1022350">
+            <a:lnSpc>
+              <a:spcPct val="90000"/>
+            </a:lnSpc>
+            <a:spcBef>
+              <a:spcPct val="0"/>
+            </a:spcBef>
+            <a:spcAft>
+              <a:spcPct val="35000"/>
+            </a:spcAft>
+            <a:buNone/>
+          </a:pPr>
+          <a:r>
+            <a:rPr lang="en-GB" sz="2300" kern="1200"/>
+            <a:t>Frisbys Homes logo: </a:t>
+          </a:r>
+          <a:r>
+            <a:rPr lang="en-GB" sz="2300" kern="1200">
+              <a:hlinkClick xmlns:r="http://schemas.openxmlformats.org/officeDocument/2006/relationships" r:id="rId6"/>
+            </a:rPr>
+            <a:t>www.frisbyhomes.com</a:t>
+          </a:r>
+          <a:endParaRPr lang="en-US" sz="2300" kern="1200"/>
+        </a:p>
+      </dsp:txBody>
+      <dsp:txXfrm>
+        <a:off x="0" y="2504890"/>
+        <a:ext cx="10515600" cy="500684"/>
       </dsp:txXfrm>
     </dsp:sp>
   </dsp:spTree>
@@ -4836,11 +7343,11 @@
 </file>
 
 <file path=ppt/diagrams/layout2.xml><?xml version="1.0" encoding="utf-8"?>
-<dgm:layoutDef xmlns:dgm="http://schemas.openxmlformats.org/drawingml/2006/diagram" xmlns:a="http://schemas.openxmlformats.org/drawingml/2006/main" uniqueId="urn:microsoft.com/office/officeart/2005/8/layout/default">
-  <dgm:title val=""/>
+<dgm:layoutDef xmlns:dgm="http://schemas.openxmlformats.org/drawingml/2006/diagram" xmlns:a="http://schemas.openxmlformats.org/drawingml/2006/main" uniqueId="urn:microsoft.com/office/officeart/2016/7/layout/RepeatingBendingProcessNew">
+  <dgm:title val="Repeating Bending Process New"/>
   <dgm:desc val=""/>
   <dgm:catLst>
-    <dgm:cat type="list" pri="400"/>
+    <dgm:cat type="process" pri="500"/>
   </dgm:catLst>
   <dgm:sampData>
     <dgm:dataModel>
@@ -4863,11 +7370,11 @@
         </dgm:pt>
       </dgm:ptLst>
       <dgm:cxnLst>
-        <dgm:cxn modelId="6" srcId="0" destId="1" srcOrd="0" destOrd="0"/>
-        <dgm:cxn modelId="7" srcId="0" destId="2" srcOrd="1" destOrd="0"/>
-        <dgm:cxn modelId="8" srcId="0" destId="3" srcOrd="2" destOrd="0"/>
-        <dgm:cxn modelId="9" srcId="0" destId="4" srcOrd="3" destOrd="0"/>
-        <dgm:cxn modelId="10" srcId="0" destId="5" srcOrd="4" destOrd="0"/>
+        <dgm:cxn modelId="7" srcId="0" destId="1" srcOrd="0" destOrd="0"/>
+        <dgm:cxn modelId="8" srcId="0" destId="2" srcOrd="1" destOrd="0"/>
+        <dgm:cxn modelId="9" srcId="0" destId="3" srcOrd="2" destOrd="0"/>
+        <dgm:cxn modelId="10" srcId="0" destId="4" srcOrd="3" destOrd="0"/>
+        <dgm:cxn modelId="11" srcId="0" destId="5" srcOrd="4" destOrd="0"/>
       </dgm:cxnLst>
       <dgm:bg/>
       <dgm:whole/>
@@ -4896,41 +7403,37 @@
         <dgm:pt modelId="2"/>
         <dgm:pt modelId="3"/>
         <dgm:pt modelId="4"/>
-        <dgm:pt modelId="5"/>
-        <dgm:pt modelId="6"/>
       </dgm:ptLst>
       <dgm:cxnLst>
-        <dgm:cxn modelId="7" srcId="0" destId="1" srcOrd="0" destOrd="0"/>
-        <dgm:cxn modelId="8" srcId="0" destId="2" srcOrd="1" destOrd="0"/>
-        <dgm:cxn modelId="9" srcId="0" destId="3" srcOrd="2" destOrd="0"/>
-        <dgm:cxn modelId="10" srcId="0" destId="4" srcOrd="3" destOrd="0"/>
-        <dgm:cxn modelId="11" srcId="0" destId="5" srcOrd="4" destOrd="0"/>
-        <dgm:cxn modelId="12" srcId="0" destId="6" srcOrd="5" destOrd="0"/>
+        <dgm:cxn modelId="5" srcId="0" destId="1" srcOrd="0" destOrd="0"/>
+        <dgm:cxn modelId="6" srcId="0" destId="2" srcOrd="1" destOrd="0"/>
+        <dgm:cxn modelId="7" srcId="0" destId="3" srcOrd="2" destOrd="0"/>
+        <dgm:cxn modelId="8" srcId="0" destId="4" srcOrd="3" destOrd="0"/>
       </dgm:cxnLst>
       <dgm:bg/>
       <dgm:whole/>
     </dgm:dataModel>
   </dgm:clrData>
-  <dgm:layoutNode name="diagram">
+  <dgm:layoutNode name="Name0">
     <dgm:varLst>
       <dgm:dir/>
       <dgm:resizeHandles val="exact"/>
     </dgm:varLst>
-    <dgm:choose name="Name0">
-      <dgm:if name="Name1" func="var" arg="dir" op="equ" val="norm">
+    <dgm:choose name="Name1">
+      <dgm:if name="Name2" axis="self" func="var" arg="dir" op="equ" val="norm">
         <dgm:alg type="snake">
           <dgm:param type="grDir" val="tL"/>
           <dgm:param type="flowDir" val="row"/>
           <dgm:param type="contDir" val="sameDir"/>
-          <dgm:param type="off" val="ctr"/>
+          <dgm:param type="bkpt" val="endCnv"/>
         </dgm:alg>
       </dgm:if>
-      <dgm:else name="Name2">
+      <dgm:else name="Name3">
         <dgm:alg type="snake">
           <dgm:param type="grDir" val="tR"/>
           <dgm:param type="flowDir" val="row"/>
           <dgm:param type="contDir" val="sameDir"/>
-          <dgm:param type="off" val="ctr"/>
+          <dgm:param type="bkpt" val="endCnv"/>
         </dgm:alg>
       </dgm:else>
     </dgm:choose>
@@ -4939,14 +7442,17 @@
     </dgm:shape>
     <dgm:presOf/>
     <dgm:constrLst>
-      <dgm:constr type="w" for="ch" forName="node" refType="w"/>
-      <dgm:constr type="h" for="ch" forName="node" refType="w" refFor="ch" refForName="node" fact="0.6"/>
-      <dgm:constr type="w" for="ch" forName="sibTrans" refType="w" refFor="ch" refForName="node" fact="0.1"/>
-      <dgm:constr type="sp" refType="w" refFor="ch" refForName="sibTrans"/>
-      <dgm:constr type="primFontSz" for="ch" forName="node" op="equ" val="65"/>
+      <dgm:constr type="w" for="ch" ptType="node" refType="w"/>
+      <dgm:constr type="w" for="ch" forName="sibTrans" refType="w" refFor="ch" refPtType="node" op="equ" fact="0.23"/>
+      <dgm:constr type="sp" refType="w" refFor="ch" refForName="sibTrans" op="equ"/>
+      <dgm:constr type="userB" for="des" forName="connectorText" refType="sp"/>
+      <dgm:constr type="primFontSz" for="ch" ptType="node" op="equ" val="65"/>
+      <dgm:constr type="h" for="ch" ptType="sibTrans" op="equ"/>
+      <dgm:constr type="primFontSz" for="des" forName="connectorText" op="equ" val="55"/>
+      <dgm:constr type="primFontSz" for="des" forName="connectorText" refType="primFontSz" refFor="ch" refPtType="node" op="lte" fact="0.8"/>
     </dgm:constrLst>
     <dgm:ruleLst/>
-    <dgm:forEach name="Name3" axis="ch" ptType="node">
+    <dgm:forEach name="nodesForEach" axis="ch" ptType="node">
       <dgm:layoutNode name="node">
         <dgm:varLst>
           <dgm:bulletEnabled val="1"/>
@@ -4957,26 +7463,538 @@
         </dgm:shape>
         <dgm:presOf axis="desOrSelf" ptType="node"/>
         <dgm:constrLst>
-          <dgm:constr type="lMarg" refType="primFontSz" fact="0.3"/>
-          <dgm:constr type="rMarg" refType="primFontSz" fact="0.3"/>
-          <dgm:constr type="tMarg" refType="primFontSz" fact="0.3"/>
-          <dgm:constr type="bMarg" refType="primFontSz" fact="0.3"/>
+          <dgm:constr type="h" refType="w" fact="0.6"/>
+          <dgm:constr type="tMarg" refType="h" fact="0.243"/>
+          <dgm:constr type="bMarg" refType="h" fact="0.243"/>
+          <dgm:constr type="lMarg" refType="w" fact="0.1389"/>
+          <dgm:constr type="rMarg" refType="w" fact="0.1389"/>
         </dgm:constrLst>
         <dgm:ruleLst>
-          <dgm:rule type="primFontSz" val="5" fact="NaN" max="NaN"/>
+          <dgm:rule type="primFontSz" val="12" fact="NaN" max="NaN"/>
         </dgm:ruleLst>
       </dgm:layoutNode>
-      <dgm:forEach name="Name4" axis="followSib" ptType="sibTrans" cnt="1">
+      <dgm:forEach name="sibTransForEach" axis="followSib" ptType="sibTrans" cnt="1">
         <dgm:layoutNode name="sibTrans">
-          <dgm:alg type="sp"/>
+          <dgm:choose name="Name4">
+            <dgm:if name="Name5" axis="self" func="var" arg="dir" op="equ" val="norm">
+              <dgm:alg type="conn">
+                <dgm:param type="connRout" val="bend"/>
+                <dgm:param type="dim" val="1D"/>
+                <dgm:param type="begPts" val="midR bCtr"/>
+                <dgm:param type="endPts" val="midL tCtr"/>
+              </dgm:alg>
+            </dgm:if>
+            <dgm:else name="Name6">
+              <dgm:alg type="conn">
+                <dgm:param type="connRout" val="bend"/>
+                <dgm:param type="dim" val="1D"/>
+                <dgm:param type="begPts" val="midL bCtr"/>
+                <dgm:param type="endPts" val="midR tCtr"/>
+              </dgm:alg>
+            </dgm:else>
+          </dgm:choose>
+          <dgm:shape xmlns:r="http://schemas.openxmlformats.org/officeDocument/2006/relationships" type="conn" r:blip="" zOrderOff="-2">
+            <dgm:adjLst/>
+          </dgm:shape>
+          <dgm:presOf axis="self"/>
+          <dgm:constrLst>
+            <dgm:constr type="begPad" val="-0.05"/>
+            <dgm:constr type="endPad" val="0.9"/>
+            <dgm:constr type="userA" for="ch" refType="connDist"/>
+          </dgm:constrLst>
+          <dgm:ruleLst/>
+          <dgm:layoutNode name="connectorText">
+            <dgm:alg type="tx">
+              <dgm:param type="autoTxRot" val="upr"/>
+            </dgm:alg>
+            <dgm:shape xmlns:r="http://schemas.openxmlformats.org/officeDocument/2006/relationships" type="rect" r:blip="" hideGeom="1">
+              <dgm:adjLst/>
+            </dgm:shape>
+            <dgm:presOf axis="self"/>
+            <dgm:constrLst>
+              <dgm:constr type="userA"/>
+              <dgm:constr type="userB"/>
+              <dgm:constr type="w" refType="userA" fact="0.05"/>
+              <dgm:constr type="h" refType="userB" fact="0.01"/>
+              <dgm:constr type="lMarg" val="1"/>
+              <dgm:constr type="rMarg" val="1"/>
+              <dgm:constr type="tMarg"/>
+              <dgm:constr type="bMarg"/>
+            </dgm:constrLst>
+            <dgm:ruleLst>
+              <dgm:rule type="w" val="NaN" fact="0.6" max="NaN"/>
+              <dgm:rule type="h" val="NaN" fact="0.6" max="NaN"/>
+              <dgm:rule type="primFontSz" val="5" fact="NaN" max="NaN"/>
+            </dgm:ruleLst>
+          </dgm:layoutNode>
+        </dgm:layoutNode>
+      </dgm:forEach>
+    </dgm:forEach>
+  </dgm:layoutNode>
+</dgm:layoutDef>
+</file>
+
+<file path=ppt/diagrams/layout3.xml><?xml version="1.0" encoding="utf-8"?>
+<dgm:layoutDef xmlns:dgm="http://schemas.openxmlformats.org/drawingml/2006/diagram" xmlns:a="http://schemas.openxmlformats.org/drawingml/2006/main" uniqueId="urn:microsoft.com/office/officeart/2008/layout/LinedList">
+  <dgm:title val=""/>
+  <dgm:desc val=""/>
+  <dgm:catLst>
+    <dgm:cat type="hierarchy" pri="8000"/>
+    <dgm:cat type="list" pri="2500"/>
+  </dgm:catLst>
+  <dgm:sampData>
+    <dgm:dataModel>
+      <dgm:ptLst>
+        <dgm:pt modelId="0" type="doc"/>
+        <dgm:pt modelId="1">
+          <dgm:prSet phldr="1"/>
+        </dgm:pt>
+        <dgm:pt modelId="11">
+          <dgm:prSet phldr="1"/>
+        </dgm:pt>
+        <dgm:pt modelId="12">
+          <dgm:prSet phldr="1"/>
+        </dgm:pt>
+        <dgm:pt modelId="13">
+          <dgm:prSet phldr="1"/>
+        </dgm:pt>
+      </dgm:ptLst>
+      <dgm:cxnLst>
+        <dgm:cxn modelId="2" srcId="0" destId="1" srcOrd="0" destOrd="0"/>
+        <dgm:cxn modelId="3" srcId="1" destId="11" srcOrd="0" destOrd="0"/>
+        <dgm:cxn modelId="4" srcId="1" destId="12" srcOrd="1" destOrd="0"/>
+        <dgm:cxn modelId="5" srcId="1" destId="13" srcOrd="2" destOrd="0"/>
+      </dgm:cxnLst>
+      <dgm:bg/>
+      <dgm:whole/>
+    </dgm:dataModel>
+  </dgm:sampData>
+  <dgm:styleData>
+    <dgm:dataModel>
+      <dgm:ptLst>
+        <dgm:pt modelId="0" type="doc"/>
+        <dgm:pt modelId="1">
+          <dgm:prSet phldr="1"/>
+        </dgm:pt>
+        <dgm:pt modelId="11">
+          <dgm:prSet phldr="1"/>
+        </dgm:pt>
+        <dgm:pt modelId="12">
+          <dgm:prSet phldr="1"/>
+        </dgm:pt>
+      </dgm:ptLst>
+      <dgm:cxnLst>
+        <dgm:cxn modelId="2" srcId="0" destId="1" srcOrd="0" destOrd="0"/>
+        <dgm:cxn modelId="3" srcId="1" destId="11" srcOrd="0" destOrd="0"/>
+        <dgm:cxn modelId="4" srcId="1" destId="12" srcOrd="1" destOrd="0"/>
+      </dgm:cxnLst>
+      <dgm:bg/>
+      <dgm:whole/>
+    </dgm:dataModel>
+  </dgm:styleData>
+  <dgm:clrData>
+    <dgm:dataModel>
+      <dgm:ptLst>
+        <dgm:pt modelId="0" type="doc"/>
+        <dgm:pt modelId="1">
+          <dgm:prSet phldr="1"/>
+        </dgm:pt>
+        <dgm:pt modelId="11">
+          <dgm:prSet phldr="1"/>
+        </dgm:pt>
+        <dgm:pt modelId="12">
+          <dgm:prSet phldr="1"/>
+        </dgm:pt>
+      </dgm:ptLst>
+      <dgm:cxnLst>
+        <dgm:cxn modelId="2" srcId="0" destId="1" srcOrd="0" destOrd="0"/>
+        <dgm:cxn modelId="3" srcId="1" destId="11" srcOrd="0" destOrd="0"/>
+        <dgm:cxn modelId="4" srcId="1" destId="12" srcOrd="1" destOrd="0"/>
+      </dgm:cxnLst>
+      <dgm:bg/>
+      <dgm:whole/>
+    </dgm:dataModel>
+  </dgm:clrData>
+  <dgm:layoutNode name="vert0">
+    <dgm:varLst>
+      <dgm:dir/>
+      <dgm:animOne val="branch"/>
+      <dgm:animLvl val="lvl"/>
+    </dgm:varLst>
+    <dgm:choose name="Name0">
+      <dgm:if name="Name1" func="var" arg="dir" op="equ" val="norm">
+        <dgm:alg type="lin">
+          <dgm:param type="linDir" val="fromT"/>
+          <dgm:param type="nodeHorzAlign" val="l"/>
+        </dgm:alg>
+      </dgm:if>
+      <dgm:else name="Name2">
+        <dgm:alg type="lin">
+          <dgm:param type="linDir" val="fromT"/>
+          <dgm:param type="nodeHorzAlign" val="r"/>
+        </dgm:alg>
+      </dgm:else>
+    </dgm:choose>
+    <dgm:shape xmlns:r="http://schemas.openxmlformats.org/officeDocument/2006/relationships" r:blip="">
+      <dgm:adjLst/>
+    </dgm:shape>
+    <dgm:presOf/>
+    <dgm:constrLst>
+      <dgm:constr type="w" for="ch" forName="horz1" refType="w"/>
+      <dgm:constr type="h" for="ch" forName="horz1" refType="h"/>
+      <dgm:constr type="h" for="des" forName="vert1" refType="h"/>
+      <dgm:constr type="h" for="des" forName="tx1" refType="h"/>
+      <dgm:constr type="h" for="des" forName="horz2" refType="h"/>
+      <dgm:constr type="h" for="des" forName="vert2" refType="h"/>
+      <dgm:constr type="h" for="des" forName="horz3" refType="h"/>
+      <dgm:constr type="h" for="des" forName="vert3" refType="h"/>
+      <dgm:constr type="h" for="des" forName="horz4" refType="h"/>
+      <dgm:constr type="h" for="des" ptType="node" refType="h"/>
+      <dgm:constr type="primFontSz" for="des" forName="tx1" op="equ" val="65"/>
+      <dgm:constr type="primFontSz" for="des" forName="tx2" op="equ" val="65"/>
+      <dgm:constr type="primFontSz" for="des" forName="tx3" op="equ" val="65"/>
+      <dgm:constr type="primFontSz" for="des" forName="tx4" op="equ" val="65"/>
+      <dgm:constr type="w" for="des" forName="thickLine" refType="w"/>
+      <dgm:constr type="h" for="des" forName="thickLine"/>
+      <dgm:constr type="h" for="des" forName="thinLine1"/>
+      <dgm:constr type="h" for="des" forName="thinLine2b"/>
+      <dgm:constr type="h" for="des" forName="thinLine3"/>
+      <dgm:constr type="h" for="des" forName="vertSpace2a" refType="h" fact="0.05"/>
+      <dgm:constr type="h" for="des" forName="vertSpace2b" refType="h" refFor="des" refForName="vertSpace2a"/>
+    </dgm:constrLst>
+    <dgm:forEach name="Name3" axis="ch" ptType="node">
+      <dgm:layoutNode name="thickLine" styleLbl="alignNode1">
+        <dgm:alg type="sp"/>
+        <dgm:shape xmlns:r="http://schemas.openxmlformats.org/officeDocument/2006/relationships" type="line" r:blip="">
+          <dgm:adjLst/>
+        </dgm:shape>
+        <dgm:presOf/>
+      </dgm:layoutNode>
+      <dgm:layoutNode name="horz1">
+        <dgm:choose name="Name4">
+          <dgm:if name="Name5" func="var" arg="dir" op="equ" val="norm">
+            <dgm:alg type="lin">
+              <dgm:param type="linDir" val="fromL"/>
+              <dgm:param type="nodeVertAlign" val="t"/>
+            </dgm:alg>
+          </dgm:if>
+          <dgm:else name="Name6">
+            <dgm:alg type="lin">
+              <dgm:param type="linDir" val="fromR"/>
+              <dgm:param type="nodeVertAlign" val="t"/>
+            </dgm:alg>
+          </dgm:else>
+        </dgm:choose>
+        <dgm:shape xmlns:r="http://schemas.openxmlformats.org/officeDocument/2006/relationships" r:blip="">
+          <dgm:adjLst/>
+        </dgm:shape>
+        <dgm:presOf/>
+        <dgm:choose name="Name7">
+          <dgm:if name="Name8" axis="root des" func="maxDepth" op="equ" val="1">
+            <dgm:constrLst>
+              <dgm:constr type="w" for="ch" forName="tx1" refType="w"/>
+            </dgm:constrLst>
+          </dgm:if>
+          <dgm:if name="Name9" axis="root des" func="maxDepth" op="equ" val="2">
+            <dgm:constrLst>
+              <dgm:constr type="w" for="ch" forName="tx1" refType="w" fact="0.2"/>
+              <dgm:constr type="w" for="des" forName="tx2" refType="w" fact="0.785"/>
+              <dgm:constr type="w" for="des" forName="horzSpace2" refType="w" fact="0.015"/>
+              <dgm:constr type="w" for="des" forName="thinLine2b" refType="w" fact="0.8"/>
+            </dgm:constrLst>
+          </dgm:if>
+          <dgm:if name="Name10" axis="root des" func="maxDepth" op="equ" val="3">
+            <dgm:constrLst>
+              <dgm:constr type="w" for="ch" forName="tx1" refType="w" fact="0.2"/>
+              <dgm:constr type="w" for="des" forName="tx2" refType="w" fact="0.385"/>
+              <dgm:constr type="w" for="des" forName="tx3" refType="w" fact="0.385"/>
+              <dgm:constr type="w" for="des" forName="horzSpace2" refType="w" fact="0.015"/>
+              <dgm:constr type="w" for="des" forName="horzSpace3" refType="w" fact="0.015"/>
+              <dgm:constr type="w" for="des" forName="thinLine2b" refType="w" fact="0.8"/>
+              <dgm:constr type="w" for="des" forName="thinLine3" refType="w" fact="0.385"/>
+            </dgm:constrLst>
+          </dgm:if>
+          <dgm:if name="Name11" axis="root des" func="maxDepth" op="gte" val="4">
+            <dgm:constrLst>
+              <dgm:constr type="w" for="ch" forName="tx1" refType="w" fact="0.2"/>
+              <dgm:constr type="w" for="des" forName="tx2" refType="w" fact="0.2516"/>
+              <dgm:constr type="w" for="des" forName="tx3" refType="w" fact="0.2516"/>
+              <dgm:constr type="w" for="des" forName="tx4" refType="w" fact="0.2516"/>
+              <dgm:constr type="w" for="des" forName="horzSpace2" refType="w" fact="0.015"/>
+              <dgm:constr type="w" for="des" forName="horzSpace3" refType="w" fact="0.015"/>
+              <dgm:constr type="w" for="des" forName="horzSpace4" refType="w" fact="0.015"/>
+              <dgm:constr type="w" for="des" forName="thinLine2b" refType="w" fact="0.8"/>
+              <dgm:constr type="w" for="des" forName="thinLine3" refType="w" fact="0.5332"/>
+            </dgm:constrLst>
+          </dgm:if>
+          <dgm:else name="Name12"/>
+        </dgm:choose>
+        <dgm:layoutNode name="tx1" styleLbl="revTx">
+          <dgm:alg type="tx">
+            <dgm:param type="parTxLTRAlign" val="l"/>
+            <dgm:param type="parTxRTLAlign" val="r"/>
+            <dgm:param type="txAnchorVert" val="t"/>
+          </dgm:alg>
+          <dgm:shape xmlns:r="http://schemas.openxmlformats.org/officeDocument/2006/relationships" type="rect" r:blip="">
+            <dgm:adjLst/>
+          </dgm:shape>
+          <dgm:presOf axis="self"/>
+          <dgm:constrLst>
+            <dgm:constr type="tMarg" refType="primFontSz" fact="0.3"/>
+            <dgm:constr type="bMarg" refType="primFontSz" fact="0.3"/>
+            <dgm:constr type="lMarg" refType="primFontSz" fact="0.3"/>
+            <dgm:constr type="rMarg" refType="primFontSz" fact="0.3"/>
+          </dgm:constrLst>
+          <dgm:ruleLst>
+            <dgm:rule type="primFontSz" val="5" fact="NaN" max="NaN"/>
+          </dgm:ruleLst>
+        </dgm:layoutNode>
+        <dgm:layoutNode name="vert1">
+          <dgm:choose name="Name13">
+            <dgm:if name="Name14" func="var" arg="dir" op="equ" val="norm">
+              <dgm:alg type="lin">
+                <dgm:param type="linDir" val="fromT"/>
+                <dgm:param type="nodeHorzAlign" val="l"/>
+              </dgm:alg>
+            </dgm:if>
+            <dgm:else name="Name15">
+              <dgm:alg type="lin">
+                <dgm:param type="linDir" val="fromT"/>
+                <dgm:param type="nodeHorzAlign" val="r"/>
+              </dgm:alg>
+            </dgm:else>
+          </dgm:choose>
           <dgm:shape xmlns:r="http://schemas.openxmlformats.org/officeDocument/2006/relationships" r:blip="">
             <dgm:adjLst/>
           </dgm:shape>
           <dgm:presOf/>
-          <dgm:constrLst/>
-          <dgm:ruleLst/>
+          <dgm:forEach name="Name16" axis="ch" ptType="node">
+            <dgm:choose name="Name17">
+              <dgm:if name="Name18" axis="self" ptType="node" func="pos" op="equ" val="1">
+                <dgm:layoutNode name="vertSpace2a">
+                  <dgm:alg type="sp"/>
+                  <dgm:shape xmlns:r="http://schemas.openxmlformats.org/officeDocument/2006/relationships" r:blip="">
+                    <dgm:adjLst/>
+                  </dgm:shape>
+                  <dgm:presOf/>
+                </dgm:layoutNode>
+              </dgm:if>
+              <dgm:else name="Name19"/>
+            </dgm:choose>
+            <dgm:layoutNode name="horz2">
+              <dgm:choose name="Name20">
+                <dgm:if name="Name21" func="var" arg="dir" op="equ" val="norm">
+                  <dgm:alg type="lin">
+                    <dgm:param type="linDir" val="fromL"/>
+                    <dgm:param type="nodeVertAlign" val="t"/>
+                  </dgm:alg>
+                </dgm:if>
+                <dgm:else name="Name22">
+                  <dgm:alg type="lin">
+                    <dgm:param type="linDir" val="fromR"/>
+                    <dgm:param type="nodeVertAlign" val="t"/>
+                  </dgm:alg>
+                </dgm:else>
+              </dgm:choose>
+              <dgm:shape xmlns:r="http://schemas.openxmlformats.org/officeDocument/2006/relationships" r:blip="">
+                <dgm:adjLst/>
+              </dgm:shape>
+              <dgm:presOf/>
+              <dgm:layoutNode name="horzSpace2">
+                <dgm:alg type="sp"/>
+                <dgm:shape xmlns:r="http://schemas.openxmlformats.org/officeDocument/2006/relationships" r:blip="">
+                  <dgm:adjLst/>
+                </dgm:shape>
+                <dgm:presOf/>
+              </dgm:layoutNode>
+              <dgm:layoutNode name="tx2" styleLbl="revTx">
+                <dgm:alg type="tx">
+                  <dgm:param type="parTxLTRAlign" val="l"/>
+                  <dgm:param type="parTxRTLAlign" val="r"/>
+                  <dgm:param type="txAnchorVert" val="t"/>
+                </dgm:alg>
+                <dgm:shape xmlns:r="http://schemas.openxmlformats.org/officeDocument/2006/relationships" type="rect" r:blip="">
+                  <dgm:adjLst/>
+                </dgm:shape>
+                <dgm:presOf axis="self"/>
+                <dgm:constrLst>
+                  <dgm:constr type="tMarg" refType="primFontSz" fact="0.3"/>
+                  <dgm:constr type="bMarg" refType="primFontSz" fact="0.3"/>
+                  <dgm:constr type="lMarg" refType="primFontSz" fact="0.3"/>
+                  <dgm:constr type="rMarg" refType="primFontSz" fact="0.3"/>
+                </dgm:constrLst>
+                <dgm:ruleLst>
+                  <dgm:rule type="primFontSz" val="5" fact="NaN" max="NaN"/>
+                </dgm:ruleLst>
+              </dgm:layoutNode>
+              <dgm:layoutNode name="vert2">
+                <dgm:choose name="Name23">
+                  <dgm:if name="Name24" func="var" arg="dir" op="equ" val="norm">
+                    <dgm:alg type="lin">
+                      <dgm:param type="linDir" val="fromT"/>
+                      <dgm:param type="nodeHorzAlign" val="l"/>
+                    </dgm:alg>
+                  </dgm:if>
+                  <dgm:else name="Name25">
+                    <dgm:alg type="lin">
+                      <dgm:param type="linDir" val="fromT"/>
+                      <dgm:param type="nodeHorzAlign" val="r"/>
+                    </dgm:alg>
+                  </dgm:else>
+                </dgm:choose>
+                <dgm:shape xmlns:r="http://schemas.openxmlformats.org/officeDocument/2006/relationships" r:blip="">
+                  <dgm:adjLst/>
+                </dgm:shape>
+                <dgm:presOf/>
+                <dgm:forEach name="Name26" axis="ch" ptType="node">
+                  <dgm:layoutNode name="horz3">
+                    <dgm:choose name="Name27">
+                      <dgm:if name="Name28" func="var" arg="dir" op="equ" val="norm">
+                        <dgm:alg type="lin">
+                          <dgm:param type="linDir" val="fromL"/>
+                          <dgm:param type="nodeVertAlign" val="t"/>
+                        </dgm:alg>
+                      </dgm:if>
+                      <dgm:else name="Name29">
+                        <dgm:alg type="lin">
+                          <dgm:param type="linDir" val="fromR"/>
+                          <dgm:param type="nodeVertAlign" val="t"/>
+                        </dgm:alg>
+                      </dgm:else>
+                    </dgm:choose>
+                    <dgm:shape xmlns:r="http://schemas.openxmlformats.org/officeDocument/2006/relationships" r:blip="">
+                      <dgm:adjLst/>
+                    </dgm:shape>
+                    <dgm:presOf/>
+                    <dgm:layoutNode name="horzSpace3">
+                      <dgm:alg type="sp"/>
+                      <dgm:shape xmlns:r="http://schemas.openxmlformats.org/officeDocument/2006/relationships" r:blip="">
+                        <dgm:adjLst/>
+                      </dgm:shape>
+                      <dgm:presOf/>
+                    </dgm:layoutNode>
+                    <dgm:layoutNode name="tx3" styleLbl="revTx">
+                      <dgm:alg type="tx">
+                        <dgm:param type="parTxLTRAlign" val="l"/>
+                        <dgm:param type="parTxRTLAlign" val="r"/>
+                        <dgm:param type="txAnchorVert" val="t"/>
+                      </dgm:alg>
+                      <dgm:shape xmlns:r="http://schemas.openxmlformats.org/officeDocument/2006/relationships" type="rect" r:blip="">
+                        <dgm:adjLst/>
+                      </dgm:shape>
+                      <dgm:presOf axis="self"/>
+                      <dgm:constrLst>
+                        <dgm:constr type="tMarg" refType="primFontSz" fact="0.3"/>
+                        <dgm:constr type="bMarg" refType="primFontSz" fact="0.3"/>
+                        <dgm:constr type="lMarg" refType="primFontSz" fact="0.3"/>
+                        <dgm:constr type="rMarg" refType="primFontSz" fact="0.3"/>
+                      </dgm:constrLst>
+                      <dgm:ruleLst>
+                        <dgm:rule type="primFontSz" val="5" fact="NaN" max="NaN"/>
+                      </dgm:ruleLst>
+                    </dgm:layoutNode>
+                    <dgm:layoutNode name="vert3">
+                      <dgm:choose name="Name30">
+                        <dgm:if name="Name31" func="var" arg="dir" op="equ" val="norm">
+                          <dgm:alg type="lin">
+                            <dgm:param type="linDir" val="fromT"/>
+                            <dgm:param type="nodeHorzAlign" val="l"/>
+                          </dgm:alg>
+                        </dgm:if>
+                        <dgm:else name="Name32">
+                          <dgm:alg type="lin">
+                            <dgm:param type="linDir" val="fromT"/>
+                            <dgm:param type="nodeHorzAlign" val="r"/>
+                          </dgm:alg>
+                        </dgm:else>
+                      </dgm:choose>
+                      <dgm:shape xmlns:r="http://schemas.openxmlformats.org/officeDocument/2006/relationships" r:blip="">
+                        <dgm:adjLst/>
+                      </dgm:shape>
+                      <dgm:presOf/>
+                      <dgm:forEach name="Name33" axis="ch" ptType="node">
+                        <dgm:layoutNode name="horz4">
+                          <dgm:choose name="Name34">
+                            <dgm:if name="Name35" func="var" arg="dir" op="equ" val="norm">
+                              <dgm:alg type="lin">
+                                <dgm:param type="linDir" val="fromL"/>
+                                <dgm:param type="nodeVertAlign" val="t"/>
+                              </dgm:alg>
+                            </dgm:if>
+                            <dgm:else name="Name36">
+                              <dgm:alg type="lin">
+                                <dgm:param type="linDir" val="fromR"/>
+                                <dgm:param type="nodeVertAlign" val="t"/>
+                              </dgm:alg>
+                            </dgm:else>
+                          </dgm:choose>
+                          <dgm:shape xmlns:r="http://schemas.openxmlformats.org/officeDocument/2006/relationships" r:blip="">
+                            <dgm:adjLst/>
+                          </dgm:shape>
+                          <dgm:presOf/>
+                          <dgm:layoutNode name="horzSpace4">
+                            <dgm:alg type="sp"/>
+                            <dgm:shape xmlns:r="http://schemas.openxmlformats.org/officeDocument/2006/relationships" r:blip="">
+                              <dgm:adjLst/>
+                            </dgm:shape>
+                            <dgm:presOf/>
+                          </dgm:layoutNode>
+                          <dgm:layoutNode name="tx4" styleLbl="revTx">
+                            <dgm:varLst>
+                              <dgm:bulletEnabled val="1"/>
+                            </dgm:varLst>
+                            <dgm:alg type="tx">
+                              <dgm:param type="parTxLTRAlign" val="l"/>
+                              <dgm:param type="parTxRTLAlign" val="r"/>
+                              <dgm:param type="txAnchorVert" val="t"/>
+                            </dgm:alg>
+                            <dgm:shape xmlns:r="http://schemas.openxmlformats.org/officeDocument/2006/relationships" type="rect" r:blip="">
+                              <dgm:adjLst/>
+                            </dgm:shape>
+                            <dgm:presOf axis="desOrSelf" ptType="node"/>
+                            <dgm:constrLst>
+                              <dgm:constr type="tMarg" refType="primFontSz" fact="0.3"/>
+                              <dgm:constr type="bMarg" refType="primFontSz" fact="0.3"/>
+                              <dgm:constr type="lMarg" refType="primFontSz" fact="0.3"/>
+                              <dgm:constr type="rMarg" refType="primFontSz" fact="0.3"/>
+                            </dgm:constrLst>
+                            <dgm:ruleLst>
+                              <dgm:rule type="primFontSz" val="5" fact="NaN" max="NaN"/>
+                            </dgm:ruleLst>
+                          </dgm:layoutNode>
+                        </dgm:layoutNode>
+                      </dgm:forEach>
+                    </dgm:layoutNode>
+                  </dgm:layoutNode>
+                  <dgm:forEach name="Name37" axis="followSib" ptType="sibTrans" cnt="1">
+                    <dgm:layoutNode name="thinLine3" styleLbl="callout">
+                      <dgm:alg type="sp"/>
+                      <dgm:shape xmlns:r="http://schemas.openxmlformats.org/officeDocument/2006/relationships" type="line" r:blip="">
+                        <dgm:adjLst/>
+                      </dgm:shape>
+                      <dgm:presOf/>
+                    </dgm:layoutNode>
+                  </dgm:forEach>
+                </dgm:forEach>
+              </dgm:layoutNode>
+            </dgm:layoutNode>
+            <dgm:layoutNode name="thinLine2b" styleLbl="callout">
+              <dgm:alg type="sp"/>
+              <dgm:shape xmlns:r="http://schemas.openxmlformats.org/officeDocument/2006/relationships" type="line" r:blip="">
+                <dgm:adjLst/>
+              </dgm:shape>
+              <dgm:presOf/>
+            </dgm:layoutNode>
+            <dgm:layoutNode name="vertSpace2b">
+              <dgm:alg type="sp"/>
+              <dgm:shape xmlns:r="http://schemas.openxmlformats.org/officeDocument/2006/relationships" r:blip="">
+                <dgm:adjLst/>
+              </dgm:shape>
+              <dgm:presOf/>
+            </dgm:layoutNode>
+          </dgm:forEach>
         </dgm:layoutNode>
-      </dgm:forEach>
+      </dgm:layoutNode>
     </dgm:forEach>
   </dgm:layoutNode>
 </dgm:layoutDef>
@@ -6017,6 +9035,1040 @@
 </file>
 
 <file path=ppt/diagrams/quickStyle2.xml><?xml version="1.0" encoding="utf-8"?>
+<dgm:styleDef xmlns:dgm="http://schemas.openxmlformats.org/drawingml/2006/diagram" xmlns:a="http://schemas.openxmlformats.org/drawingml/2006/main" uniqueId="urn:microsoft.com/office/officeart/2005/8/quickstyle/simple1">
+  <dgm:title val=""/>
+  <dgm:desc val=""/>
+  <dgm:catLst>
+    <dgm:cat type="simple" pri="10100"/>
+  </dgm:catLst>
+  <dgm:scene3d>
+    <a:camera prst="orthographicFront"/>
+    <a:lightRig rig="threePt" dir="t"/>
+  </dgm:scene3d>
+  <dgm:styleLbl name="node0">
+    <dgm:scene3d>
+      <a:camera prst="orthographicFront"/>
+      <a:lightRig rig="threePt" dir="t"/>
+    </dgm:scene3d>
+    <dgm:sp3d/>
+    <dgm:txPr/>
+    <dgm:style>
+      <a:lnRef idx="2">
+        <a:scrgbClr r="0" g="0" b="0"/>
+      </a:lnRef>
+      <a:fillRef idx="1">
+        <a:scrgbClr r="0" g="0" b="0"/>
+      </a:fillRef>
+      <a:effectRef idx="0">
+        <a:scrgbClr r="0" g="0" b="0"/>
+      </a:effectRef>
+      <a:fontRef idx="minor">
+        <a:schemeClr val="lt1"/>
+      </a:fontRef>
+    </dgm:style>
+  </dgm:styleLbl>
+  <dgm:styleLbl name="lnNode1">
+    <dgm:scene3d>
+      <a:camera prst="orthographicFront"/>
+      <a:lightRig rig="threePt" dir="t"/>
+    </dgm:scene3d>
+    <dgm:sp3d/>
+    <dgm:txPr/>
+    <dgm:style>
+      <a:lnRef idx="2">
+        <a:scrgbClr r="0" g="0" b="0"/>
+      </a:lnRef>
+      <a:fillRef idx="1">
+        <a:scrgbClr r="0" g="0" b="0"/>
+      </a:fillRef>
+      <a:effectRef idx="0">
+        <a:scrgbClr r="0" g="0" b="0"/>
+      </a:effectRef>
+      <a:fontRef idx="minor">
+        <a:schemeClr val="lt1"/>
+      </a:fontRef>
+    </dgm:style>
+  </dgm:styleLbl>
+  <dgm:styleLbl name="vennNode1">
+    <dgm:scene3d>
+      <a:camera prst="orthographicFront"/>
+      <a:lightRig rig="threePt" dir="t"/>
+    </dgm:scene3d>
+    <dgm:sp3d/>
+    <dgm:txPr/>
+    <dgm:style>
+      <a:lnRef idx="2">
+        <a:scrgbClr r="0" g="0" b="0"/>
+      </a:lnRef>
+      <a:fillRef idx="1">
+        <a:scrgbClr r="0" g="0" b="0"/>
+      </a:fillRef>
+      <a:effectRef idx="0">
+        <a:scrgbClr r="0" g="0" b="0"/>
+      </a:effectRef>
+      <a:fontRef idx="minor">
+        <a:schemeClr val="tx1"/>
+      </a:fontRef>
+    </dgm:style>
+  </dgm:styleLbl>
+  <dgm:styleLbl name="alignNode1">
+    <dgm:scene3d>
+      <a:camera prst="orthographicFront"/>
+      <a:lightRig rig="threePt" dir="t"/>
+    </dgm:scene3d>
+    <dgm:sp3d/>
+    <dgm:txPr/>
+    <dgm:style>
+      <a:lnRef idx="2">
+        <a:scrgbClr r="0" g="0" b="0"/>
+      </a:lnRef>
+      <a:fillRef idx="1">
+        <a:scrgbClr r="0" g="0" b="0"/>
+      </a:fillRef>
+      <a:effectRef idx="0">
+        <a:scrgbClr r="0" g="0" b="0"/>
+      </a:effectRef>
+      <a:fontRef idx="minor">
+        <a:schemeClr val="lt1"/>
+      </a:fontRef>
+    </dgm:style>
+  </dgm:styleLbl>
+  <dgm:styleLbl name="node1">
+    <dgm:scene3d>
+      <a:camera prst="orthographicFront"/>
+      <a:lightRig rig="threePt" dir="t"/>
+    </dgm:scene3d>
+    <dgm:sp3d/>
+    <dgm:txPr/>
+    <dgm:style>
+      <a:lnRef idx="2">
+        <a:scrgbClr r="0" g="0" b="0"/>
+      </a:lnRef>
+      <a:fillRef idx="1">
+        <a:scrgbClr r="0" g="0" b="0"/>
+      </a:fillRef>
+      <a:effectRef idx="0">
+        <a:scrgbClr r="0" g="0" b="0"/>
+      </a:effectRef>
+      <a:fontRef idx="minor">
+        <a:schemeClr val="lt1"/>
+      </a:fontRef>
+    </dgm:style>
+  </dgm:styleLbl>
+  <dgm:styleLbl name="node2">
+    <dgm:scene3d>
+      <a:camera prst="orthographicFront"/>
+      <a:lightRig rig="threePt" dir="t"/>
+    </dgm:scene3d>
+    <dgm:sp3d/>
+    <dgm:txPr/>
+    <dgm:style>
+      <a:lnRef idx="2">
+        <a:scrgbClr r="0" g="0" b="0"/>
+      </a:lnRef>
+      <a:fillRef idx="1">
+        <a:scrgbClr r="0" g="0" b="0"/>
+      </a:fillRef>
+      <a:effectRef idx="0">
+        <a:scrgbClr r="0" g="0" b="0"/>
+      </a:effectRef>
+      <a:fontRef idx="minor">
+        <a:schemeClr val="lt1"/>
+      </a:fontRef>
+    </dgm:style>
+  </dgm:styleLbl>
+  <dgm:styleLbl name="node3">
+    <dgm:scene3d>
+      <a:camera prst="orthographicFront"/>
+      <a:lightRig rig="threePt" dir="t"/>
+    </dgm:scene3d>
+    <dgm:sp3d/>
+    <dgm:txPr/>
+    <dgm:style>
+      <a:lnRef idx="2">
+        <a:scrgbClr r="0" g="0" b="0"/>
+      </a:lnRef>
+      <a:fillRef idx="1">
+        <a:scrgbClr r="0" g="0" b="0"/>
+      </a:fillRef>
+      <a:effectRef idx="0">
+        <a:scrgbClr r="0" g="0" b="0"/>
+      </a:effectRef>
+      <a:fontRef idx="minor">
+        <a:schemeClr val="lt1"/>
+      </a:fontRef>
+    </dgm:style>
+  </dgm:styleLbl>
+  <dgm:styleLbl name="node4">
+    <dgm:scene3d>
+      <a:camera prst="orthographicFront"/>
+      <a:lightRig rig="threePt" dir="t"/>
+    </dgm:scene3d>
+    <dgm:sp3d/>
+    <dgm:txPr/>
+    <dgm:style>
+      <a:lnRef idx="2">
+        <a:scrgbClr r="0" g="0" b="0"/>
+      </a:lnRef>
+      <a:fillRef idx="1">
+        <a:scrgbClr r="0" g="0" b="0"/>
+      </a:fillRef>
+      <a:effectRef idx="0">
+        <a:scrgbClr r="0" g="0" b="0"/>
+      </a:effectRef>
+      <a:fontRef idx="minor">
+        <a:schemeClr val="lt1"/>
+      </a:fontRef>
+    </dgm:style>
+  </dgm:styleLbl>
+  <dgm:styleLbl name="fgImgPlace1">
+    <dgm:scene3d>
+      <a:camera prst="orthographicFront"/>
+      <a:lightRig rig="threePt" dir="t"/>
+    </dgm:scene3d>
+    <dgm:sp3d/>
+    <dgm:txPr/>
+    <dgm:style>
+      <a:lnRef idx="2">
+        <a:scrgbClr r="0" g="0" b="0"/>
+      </a:lnRef>
+      <a:fillRef idx="1">
+        <a:scrgbClr r="0" g="0" b="0"/>
+      </a:fillRef>
+      <a:effectRef idx="0">
+        <a:scrgbClr r="0" g="0" b="0"/>
+      </a:effectRef>
+      <a:fontRef idx="minor"/>
+    </dgm:style>
+  </dgm:styleLbl>
+  <dgm:styleLbl name="alignImgPlace1">
+    <dgm:scene3d>
+      <a:camera prst="orthographicFront"/>
+      <a:lightRig rig="threePt" dir="t"/>
+    </dgm:scene3d>
+    <dgm:sp3d/>
+    <dgm:txPr/>
+    <dgm:style>
+      <a:lnRef idx="2">
+        <a:scrgbClr r="0" g="0" b="0"/>
+      </a:lnRef>
+      <a:fillRef idx="1">
+        <a:scrgbClr r="0" g="0" b="0"/>
+      </a:fillRef>
+      <a:effectRef idx="0">
+        <a:scrgbClr r="0" g="0" b="0"/>
+      </a:effectRef>
+      <a:fontRef idx="minor"/>
+    </dgm:style>
+  </dgm:styleLbl>
+  <dgm:styleLbl name="bgImgPlace1">
+    <dgm:scene3d>
+      <a:camera prst="orthographicFront"/>
+      <a:lightRig rig="threePt" dir="t"/>
+    </dgm:scene3d>
+    <dgm:sp3d/>
+    <dgm:txPr/>
+    <dgm:style>
+      <a:lnRef idx="2">
+        <a:scrgbClr r="0" g="0" b="0"/>
+      </a:lnRef>
+      <a:fillRef idx="1">
+        <a:scrgbClr r="0" g="0" b="0"/>
+      </a:fillRef>
+      <a:effectRef idx="0">
+        <a:scrgbClr r="0" g="0" b="0"/>
+      </a:effectRef>
+      <a:fontRef idx="minor"/>
+    </dgm:style>
+  </dgm:styleLbl>
+  <dgm:styleLbl name="sibTrans2D1">
+    <dgm:scene3d>
+      <a:camera prst="orthographicFront"/>
+      <a:lightRig rig="threePt" dir="t"/>
+    </dgm:scene3d>
+    <dgm:sp3d/>
+    <dgm:txPr/>
+    <dgm:style>
+      <a:lnRef idx="0">
+        <a:scrgbClr r="0" g="0" b="0"/>
+      </a:lnRef>
+      <a:fillRef idx="1">
+        <a:scrgbClr r="0" g="0" b="0"/>
+      </a:fillRef>
+      <a:effectRef idx="0">
+        <a:scrgbClr r="0" g="0" b="0"/>
+      </a:effectRef>
+      <a:fontRef idx="minor">
+        <a:schemeClr val="lt1"/>
+      </a:fontRef>
+    </dgm:style>
+  </dgm:styleLbl>
+  <dgm:styleLbl name="fgSibTrans2D1">
+    <dgm:scene3d>
+      <a:camera prst="orthographicFront"/>
+      <a:lightRig rig="threePt" dir="t"/>
+    </dgm:scene3d>
+    <dgm:sp3d/>
+    <dgm:txPr/>
+    <dgm:style>
+      <a:lnRef idx="0">
+        <a:scrgbClr r="0" g="0" b="0"/>
+      </a:lnRef>
+      <a:fillRef idx="1">
+        <a:scrgbClr r="0" g="0" b="0"/>
+      </a:fillRef>
+      <a:effectRef idx="0">
+        <a:scrgbClr r="0" g="0" b="0"/>
+      </a:effectRef>
+      <a:fontRef idx="minor">
+        <a:schemeClr val="lt1"/>
+      </a:fontRef>
+    </dgm:style>
+  </dgm:styleLbl>
+  <dgm:styleLbl name="bgSibTrans2D1">
+    <dgm:scene3d>
+      <a:camera prst="orthographicFront"/>
+      <a:lightRig rig="threePt" dir="t"/>
+    </dgm:scene3d>
+    <dgm:sp3d/>
+    <dgm:txPr/>
+    <dgm:style>
+      <a:lnRef idx="0">
+        <a:scrgbClr r="0" g="0" b="0"/>
+      </a:lnRef>
+      <a:fillRef idx="1">
+        <a:scrgbClr r="0" g="0" b="0"/>
+      </a:fillRef>
+      <a:effectRef idx="0">
+        <a:scrgbClr r="0" g="0" b="0"/>
+      </a:effectRef>
+      <a:fontRef idx="minor">
+        <a:schemeClr val="lt1"/>
+      </a:fontRef>
+    </dgm:style>
+  </dgm:styleLbl>
+  <dgm:styleLbl name="sibTrans1D1">
+    <dgm:scene3d>
+      <a:camera prst="orthographicFront"/>
+      <a:lightRig rig="threePt" dir="t"/>
+    </dgm:scene3d>
+    <dgm:sp3d/>
+    <dgm:txPr/>
+    <dgm:style>
+      <a:lnRef idx="1">
+        <a:scrgbClr r="0" g="0" b="0"/>
+      </a:lnRef>
+      <a:fillRef idx="0">
+        <a:scrgbClr r="0" g="0" b="0"/>
+      </a:fillRef>
+      <a:effectRef idx="0">
+        <a:scrgbClr r="0" g="0" b="0"/>
+      </a:effectRef>
+      <a:fontRef idx="minor"/>
+    </dgm:style>
+  </dgm:styleLbl>
+  <dgm:styleLbl name="callout">
+    <dgm:scene3d>
+      <a:camera prst="orthographicFront"/>
+      <a:lightRig rig="threePt" dir="t"/>
+    </dgm:scene3d>
+    <dgm:sp3d/>
+    <dgm:txPr/>
+    <dgm:style>
+      <a:lnRef idx="2">
+        <a:scrgbClr r="0" g="0" b="0"/>
+      </a:lnRef>
+      <a:fillRef idx="1">
+        <a:scrgbClr r="0" g="0" b="0"/>
+      </a:fillRef>
+      <a:effectRef idx="0">
+        <a:scrgbClr r="0" g="0" b="0"/>
+      </a:effectRef>
+      <a:fontRef idx="minor"/>
+    </dgm:style>
+  </dgm:styleLbl>
+  <dgm:styleLbl name="asst0">
+    <dgm:scene3d>
+      <a:camera prst="orthographicFront"/>
+      <a:lightRig rig="threePt" dir="t"/>
+    </dgm:scene3d>
+    <dgm:sp3d/>
+    <dgm:txPr/>
+    <dgm:style>
+      <a:lnRef idx="2">
+        <a:scrgbClr r="0" g="0" b="0"/>
+      </a:lnRef>
+      <a:fillRef idx="1">
+        <a:scrgbClr r="0" g="0" b="0"/>
+      </a:fillRef>
+      <a:effectRef idx="0">
+        <a:scrgbClr r="0" g="0" b="0"/>
+      </a:effectRef>
+      <a:fontRef idx="minor">
+        <a:schemeClr val="lt1"/>
+      </a:fontRef>
+    </dgm:style>
+  </dgm:styleLbl>
+  <dgm:styleLbl name="asst1">
+    <dgm:scene3d>
+      <a:camera prst="orthographicFront"/>
+      <a:lightRig rig="threePt" dir="t"/>
+    </dgm:scene3d>
+    <dgm:sp3d/>
+    <dgm:txPr/>
+    <dgm:style>
+      <a:lnRef idx="2">
+        <a:scrgbClr r="0" g="0" b="0"/>
+      </a:lnRef>
+      <a:fillRef idx="1">
+        <a:scrgbClr r="0" g="0" b="0"/>
+      </a:fillRef>
+      <a:effectRef idx="0">
+        <a:scrgbClr r="0" g="0" b="0"/>
+      </a:effectRef>
+      <a:fontRef idx="minor">
+        <a:schemeClr val="lt1"/>
+      </a:fontRef>
+    </dgm:style>
+  </dgm:styleLbl>
+  <dgm:styleLbl name="asst2">
+    <dgm:scene3d>
+      <a:camera prst="orthographicFront"/>
+      <a:lightRig rig="threePt" dir="t"/>
+    </dgm:scene3d>
+    <dgm:sp3d/>
+    <dgm:txPr/>
+    <dgm:style>
+      <a:lnRef idx="2">
+        <a:scrgbClr r="0" g="0" b="0"/>
+      </a:lnRef>
+      <a:fillRef idx="1">
+        <a:scrgbClr r="0" g="0" b="0"/>
+      </a:fillRef>
+      <a:effectRef idx="0">
+        <a:scrgbClr r="0" g="0" b="0"/>
+      </a:effectRef>
+      <a:fontRef idx="minor">
+        <a:schemeClr val="lt1"/>
+      </a:fontRef>
+    </dgm:style>
+  </dgm:styleLbl>
+  <dgm:styleLbl name="asst3">
+    <dgm:scene3d>
+      <a:camera prst="orthographicFront"/>
+      <a:lightRig rig="threePt" dir="t"/>
+    </dgm:scene3d>
+    <dgm:sp3d/>
+    <dgm:txPr/>
+    <dgm:style>
+      <a:lnRef idx="2">
+        <a:scrgbClr r="0" g="0" b="0"/>
+      </a:lnRef>
+      <a:fillRef idx="1">
+        <a:scrgbClr r="0" g="0" b="0"/>
+      </a:fillRef>
+      <a:effectRef idx="0">
+        <a:scrgbClr r="0" g="0" b="0"/>
+      </a:effectRef>
+      <a:fontRef idx="minor">
+        <a:schemeClr val="lt1"/>
+      </a:fontRef>
+    </dgm:style>
+  </dgm:styleLbl>
+  <dgm:styleLbl name="asst4">
+    <dgm:scene3d>
+      <a:camera prst="orthographicFront"/>
+      <a:lightRig rig="threePt" dir="t"/>
+    </dgm:scene3d>
+    <dgm:sp3d/>
+    <dgm:txPr/>
+    <dgm:style>
+      <a:lnRef idx="2">
+        <a:scrgbClr r="0" g="0" b="0"/>
+      </a:lnRef>
+      <a:fillRef idx="1">
+        <a:scrgbClr r="0" g="0" b="0"/>
+      </a:fillRef>
+      <a:effectRef idx="0">
+        <a:scrgbClr r="0" g="0" b="0"/>
+      </a:effectRef>
+      <a:fontRef idx="minor">
+        <a:schemeClr val="lt1"/>
+      </a:fontRef>
+    </dgm:style>
+  </dgm:styleLbl>
+  <dgm:styleLbl name="parChTrans2D1">
+    <dgm:scene3d>
+      <a:camera prst="orthographicFront"/>
+      <a:lightRig rig="threePt" dir="t"/>
+    </dgm:scene3d>
+    <dgm:sp3d/>
+    <dgm:txPr/>
+    <dgm:style>
+      <a:lnRef idx="2">
+        <a:scrgbClr r="0" g="0" b="0"/>
+      </a:lnRef>
+      <a:fillRef idx="1">
+        <a:scrgbClr r="0" g="0" b="0"/>
+      </a:fillRef>
+      <a:effectRef idx="0">
+        <a:scrgbClr r="0" g="0" b="0"/>
+      </a:effectRef>
+      <a:fontRef idx="minor">
+        <a:schemeClr val="lt1"/>
+      </a:fontRef>
+    </dgm:style>
+  </dgm:styleLbl>
+  <dgm:styleLbl name="parChTrans2D2">
+    <dgm:scene3d>
+      <a:camera prst="orthographicFront"/>
+      <a:lightRig rig="threePt" dir="t"/>
+    </dgm:scene3d>
+    <dgm:sp3d/>
+    <dgm:txPr/>
+    <dgm:style>
+      <a:lnRef idx="2">
+        <a:scrgbClr r="0" g="0" b="0"/>
+      </a:lnRef>
+      <a:fillRef idx="1">
+        <a:scrgbClr r="0" g="0" b="0"/>
+      </a:fillRef>
+      <a:effectRef idx="0">
+        <a:scrgbClr r="0" g="0" b="0"/>
+      </a:effectRef>
+      <a:fontRef idx="minor">
+        <a:schemeClr val="lt1"/>
+      </a:fontRef>
+    </dgm:style>
+  </dgm:styleLbl>
+  <dgm:styleLbl name="parChTrans2D3">
+    <dgm:scene3d>
+      <a:camera prst="orthographicFront"/>
+      <a:lightRig rig="threePt" dir="t"/>
+    </dgm:scene3d>
+    <dgm:sp3d/>
+    <dgm:txPr/>
+    <dgm:style>
+      <a:lnRef idx="2">
+        <a:scrgbClr r="0" g="0" b="0"/>
+      </a:lnRef>
+      <a:fillRef idx="1">
+        <a:scrgbClr r="0" g="0" b="0"/>
+      </a:fillRef>
+      <a:effectRef idx="0">
+        <a:scrgbClr r="0" g="0" b="0"/>
+      </a:effectRef>
+      <a:fontRef idx="minor">
+        <a:schemeClr val="lt1"/>
+      </a:fontRef>
+    </dgm:style>
+  </dgm:styleLbl>
+  <dgm:styleLbl name="parChTrans2D4">
+    <dgm:scene3d>
+      <a:camera prst="orthographicFront"/>
+      <a:lightRig rig="threePt" dir="t"/>
+    </dgm:scene3d>
+    <dgm:sp3d/>
+    <dgm:txPr/>
+    <dgm:style>
+      <a:lnRef idx="2">
+        <a:scrgbClr r="0" g="0" b="0"/>
+      </a:lnRef>
+      <a:fillRef idx="1">
+        <a:scrgbClr r="0" g="0" b="0"/>
+      </a:fillRef>
+      <a:effectRef idx="0">
+        <a:scrgbClr r="0" g="0" b="0"/>
+      </a:effectRef>
+      <a:fontRef idx="minor">
+        <a:schemeClr val="lt1"/>
+      </a:fontRef>
+    </dgm:style>
+  </dgm:styleLbl>
+  <dgm:styleLbl name="parChTrans1D1">
+    <dgm:scene3d>
+      <a:camera prst="orthographicFront"/>
+      <a:lightRig rig="threePt" dir="t"/>
+    </dgm:scene3d>
+    <dgm:sp3d/>
+    <dgm:txPr/>
+    <dgm:style>
+      <a:lnRef idx="2">
+        <a:scrgbClr r="0" g="0" b="0"/>
+      </a:lnRef>
+      <a:fillRef idx="0">
+        <a:scrgbClr r="0" g="0" b="0"/>
+      </a:fillRef>
+      <a:effectRef idx="0">
+        <a:scrgbClr r="0" g="0" b="0"/>
+      </a:effectRef>
+      <a:fontRef idx="minor"/>
+    </dgm:style>
+  </dgm:styleLbl>
+  <dgm:styleLbl name="parChTrans1D2">
+    <dgm:scene3d>
+      <a:camera prst="orthographicFront"/>
+      <a:lightRig rig="threePt" dir="t"/>
+    </dgm:scene3d>
+    <dgm:sp3d/>
+    <dgm:txPr/>
+    <dgm:style>
+      <a:lnRef idx="2">
+        <a:scrgbClr r="0" g="0" b="0"/>
+      </a:lnRef>
+      <a:fillRef idx="0">
+        <a:scrgbClr r="0" g="0" b="0"/>
+      </a:fillRef>
+      <a:effectRef idx="0">
+        <a:scrgbClr r="0" g="0" b="0"/>
+      </a:effectRef>
+      <a:fontRef idx="minor"/>
+    </dgm:style>
+  </dgm:styleLbl>
+  <dgm:styleLbl name="parChTrans1D3">
+    <dgm:scene3d>
+      <a:camera prst="orthographicFront"/>
+      <a:lightRig rig="threePt" dir="t"/>
+    </dgm:scene3d>
+    <dgm:sp3d/>
+    <dgm:txPr/>
+    <dgm:style>
+      <a:lnRef idx="2">
+        <a:scrgbClr r="0" g="0" b="0"/>
+      </a:lnRef>
+      <a:fillRef idx="0">
+        <a:scrgbClr r="0" g="0" b="0"/>
+      </a:fillRef>
+      <a:effectRef idx="0">
+        <a:scrgbClr r="0" g="0" b="0"/>
+      </a:effectRef>
+      <a:fontRef idx="minor"/>
+    </dgm:style>
+  </dgm:styleLbl>
+  <dgm:styleLbl name="parChTrans1D4">
+    <dgm:scene3d>
+      <a:camera prst="orthographicFront"/>
+      <a:lightRig rig="threePt" dir="t"/>
+    </dgm:scene3d>
+    <dgm:sp3d/>
+    <dgm:txPr/>
+    <dgm:style>
+      <a:lnRef idx="2">
+        <a:scrgbClr r="0" g="0" b="0"/>
+      </a:lnRef>
+      <a:fillRef idx="0">
+        <a:scrgbClr r="0" g="0" b="0"/>
+      </a:fillRef>
+      <a:effectRef idx="0">
+        <a:scrgbClr r="0" g="0" b="0"/>
+      </a:effectRef>
+      <a:fontRef idx="minor"/>
+    </dgm:style>
+  </dgm:styleLbl>
+  <dgm:styleLbl name="fgAcc1">
+    <dgm:scene3d>
+      <a:camera prst="orthographicFront"/>
+      <a:lightRig rig="threePt" dir="t"/>
+    </dgm:scene3d>
+    <dgm:sp3d/>
+    <dgm:txPr/>
+    <dgm:style>
+      <a:lnRef idx="2">
+        <a:scrgbClr r="0" g="0" b="0"/>
+      </a:lnRef>
+      <a:fillRef idx="1">
+        <a:scrgbClr r="0" g="0" b="0"/>
+      </a:fillRef>
+      <a:effectRef idx="0">
+        <a:scrgbClr r="0" g="0" b="0"/>
+      </a:effectRef>
+      <a:fontRef idx="minor"/>
+    </dgm:style>
+  </dgm:styleLbl>
+  <dgm:styleLbl name="conFgAcc1">
+    <dgm:scene3d>
+      <a:camera prst="orthographicFront"/>
+      <a:lightRig rig="threePt" dir="t"/>
+    </dgm:scene3d>
+    <dgm:sp3d/>
+    <dgm:txPr/>
+    <dgm:style>
+      <a:lnRef idx="2">
+        <a:scrgbClr r="0" g="0" b="0"/>
+      </a:lnRef>
+      <a:fillRef idx="1">
+        <a:scrgbClr r="0" g="0" b="0"/>
+      </a:fillRef>
+      <a:effectRef idx="0">
+        <a:scrgbClr r="0" g="0" b="0"/>
+      </a:effectRef>
+      <a:fontRef idx="minor"/>
+    </dgm:style>
+  </dgm:styleLbl>
+  <dgm:styleLbl name="alignAcc1">
+    <dgm:scene3d>
+      <a:camera prst="orthographicFront"/>
+      <a:lightRig rig="threePt" dir="t"/>
+    </dgm:scene3d>
+    <dgm:sp3d/>
+    <dgm:txPr/>
+    <dgm:style>
+      <a:lnRef idx="2">
+        <a:scrgbClr r="0" g="0" b="0"/>
+      </a:lnRef>
+      <a:fillRef idx="1">
+        <a:scrgbClr r="0" g="0" b="0"/>
+      </a:fillRef>
+      <a:effectRef idx="0">
+        <a:scrgbClr r="0" g="0" b="0"/>
+      </a:effectRef>
+      <a:fontRef idx="minor"/>
+    </dgm:style>
+  </dgm:styleLbl>
+  <dgm:styleLbl name="trAlignAcc1">
+    <dgm:scene3d>
+      <a:camera prst="orthographicFront"/>
+      <a:lightRig rig="threePt" dir="t"/>
+    </dgm:scene3d>
+    <dgm:sp3d/>
+    <dgm:txPr/>
+    <dgm:style>
+      <a:lnRef idx="1">
+        <a:scrgbClr r="0" g="0" b="0"/>
+      </a:lnRef>
+      <a:fillRef idx="1">
+        <a:scrgbClr r="0" g="0" b="0"/>
+      </a:fillRef>
+      <a:effectRef idx="0">
+        <a:scrgbClr r="0" g="0" b="0"/>
+      </a:effectRef>
+      <a:fontRef idx="minor"/>
+    </dgm:style>
+  </dgm:styleLbl>
+  <dgm:styleLbl name="bgAcc1">
+    <dgm:scene3d>
+      <a:camera prst="orthographicFront"/>
+      <a:lightRig rig="threePt" dir="t"/>
+    </dgm:scene3d>
+    <dgm:sp3d/>
+    <dgm:txPr/>
+    <dgm:style>
+      <a:lnRef idx="2">
+        <a:scrgbClr r="0" g="0" b="0"/>
+      </a:lnRef>
+      <a:fillRef idx="1">
+        <a:scrgbClr r="0" g="0" b="0"/>
+      </a:fillRef>
+      <a:effectRef idx="0">
+        <a:scrgbClr r="0" g="0" b="0"/>
+      </a:effectRef>
+      <a:fontRef idx="minor"/>
+    </dgm:style>
+  </dgm:styleLbl>
+  <dgm:styleLbl name="solidFgAcc1">
+    <dgm:scene3d>
+      <a:camera prst="orthographicFront"/>
+      <a:lightRig rig="threePt" dir="t"/>
+    </dgm:scene3d>
+    <dgm:sp3d/>
+    <dgm:txPr/>
+    <dgm:style>
+      <a:lnRef idx="2">
+        <a:scrgbClr r="0" g="0" b="0"/>
+      </a:lnRef>
+      <a:fillRef idx="1">
+        <a:scrgbClr r="0" g="0" b="0"/>
+      </a:fillRef>
+      <a:effectRef idx="0">
+        <a:scrgbClr r="0" g="0" b="0"/>
+      </a:effectRef>
+      <a:fontRef idx="minor"/>
+    </dgm:style>
+  </dgm:styleLbl>
+  <dgm:styleLbl name="solidAlignAcc1">
+    <dgm:scene3d>
+      <a:camera prst="orthographicFront"/>
+      <a:lightRig rig="threePt" dir="t"/>
+    </dgm:scene3d>
+    <dgm:sp3d/>
+    <dgm:txPr/>
+    <dgm:style>
+      <a:lnRef idx="2">
+        <a:scrgbClr r="0" g="0" b="0"/>
+      </a:lnRef>
+      <a:fillRef idx="1">
+        <a:scrgbClr r="0" g="0" b="0"/>
+      </a:fillRef>
+      <a:effectRef idx="0">
+        <a:scrgbClr r="0" g="0" b="0"/>
+      </a:effectRef>
+      <a:fontRef idx="minor"/>
+    </dgm:style>
+  </dgm:styleLbl>
+  <dgm:styleLbl name="solidBgAcc1">
+    <dgm:scene3d>
+      <a:camera prst="orthographicFront"/>
+      <a:lightRig rig="threePt" dir="t"/>
+    </dgm:scene3d>
+    <dgm:sp3d/>
+    <dgm:txPr/>
+    <dgm:style>
+      <a:lnRef idx="2">
+        <a:scrgbClr r="0" g="0" b="0"/>
+      </a:lnRef>
+      <a:fillRef idx="1">
+        <a:scrgbClr r="0" g="0" b="0"/>
+      </a:fillRef>
+      <a:effectRef idx="0">
+        <a:scrgbClr r="0" g="0" b="0"/>
+      </a:effectRef>
+      <a:fontRef idx="minor"/>
+    </dgm:style>
+  </dgm:styleLbl>
+  <dgm:styleLbl name="fgAccFollowNode1">
+    <dgm:scene3d>
+      <a:camera prst="orthographicFront"/>
+      <a:lightRig rig="threePt" dir="t"/>
+    </dgm:scene3d>
+    <dgm:sp3d/>
+    <dgm:txPr/>
+    <dgm:style>
+      <a:lnRef idx="2">
+        <a:scrgbClr r="0" g="0" b="0"/>
+      </a:lnRef>
+      <a:fillRef idx="1">
+        <a:scrgbClr r="0" g="0" b="0"/>
+      </a:fillRef>
+      <a:effectRef idx="0">
+        <a:scrgbClr r="0" g="0" b="0"/>
+      </a:effectRef>
+      <a:fontRef idx="minor"/>
+    </dgm:style>
+  </dgm:styleLbl>
+  <dgm:styleLbl name="alignAccFollowNode1">
+    <dgm:scene3d>
+      <a:camera prst="orthographicFront"/>
+      <a:lightRig rig="threePt" dir="t"/>
+    </dgm:scene3d>
+    <dgm:sp3d/>
+    <dgm:txPr/>
+    <dgm:style>
+      <a:lnRef idx="2">
+        <a:scrgbClr r="0" g="0" b="0"/>
+      </a:lnRef>
+      <a:fillRef idx="1">
+        <a:scrgbClr r="0" g="0" b="0"/>
+      </a:fillRef>
+      <a:effectRef idx="0">
+        <a:scrgbClr r="0" g="0" b="0"/>
+      </a:effectRef>
+      <a:fontRef idx="minor"/>
+    </dgm:style>
+  </dgm:styleLbl>
+  <dgm:styleLbl name="bgAccFollowNode1">
+    <dgm:scene3d>
+      <a:camera prst="orthographicFront"/>
+      <a:lightRig rig="threePt" dir="t"/>
+    </dgm:scene3d>
+    <dgm:sp3d/>
+    <dgm:txPr/>
+    <dgm:style>
+      <a:lnRef idx="2">
+        <a:scrgbClr r="0" g="0" b="0"/>
+      </a:lnRef>
+      <a:fillRef idx="1">
+        <a:scrgbClr r="0" g="0" b="0"/>
+      </a:fillRef>
+      <a:effectRef idx="0">
+        <a:scrgbClr r="0" g="0" b="0"/>
+      </a:effectRef>
+      <a:fontRef idx="minor"/>
+    </dgm:style>
+  </dgm:styleLbl>
+  <dgm:styleLbl name="fgAcc0">
+    <dgm:scene3d>
+      <a:camera prst="orthographicFront"/>
+      <a:lightRig rig="threePt" dir="t"/>
+    </dgm:scene3d>
+    <dgm:sp3d/>
+    <dgm:txPr/>
+    <dgm:style>
+      <a:lnRef idx="2">
+        <a:scrgbClr r="0" g="0" b="0"/>
+      </a:lnRef>
+      <a:fillRef idx="1">
+        <a:scrgbClr r="0" g="0" b="0"/>
+      </a:fillRef>
+      <a:effectRef idx="0">
+        <a:scrgbClr r="0" g="0" b="0"/>
+      </a:effectRef>
+      <a:fontRef idx="minor"/>
+    </dgm:style>
+  </dgm:styleLbl>
+  <dgm:styleLbl name="fgAcc2">
+    <dgm:scene3d>
+      <a:camera prst="orthographicFront"/>
+      <a:lightRig rig="threePt" dir="t"/>
+    </dgm:scene3d>
+    <dgm:sp3d/>
+    <dgm:txPr/>
+    <dgm:style>
+      <a:lnRef idx="2">
+        <a:scrgbClr r="0" g="0" b="0"/>
+      </a:lnRef>
+      <a:fillRef idx="1">
+        <a:scrgbClr r="0" g="0" b="0"/>
+      </a:fillRef>
+      <a:effectRef idx="0">
+        <a:scrgbClr r="0" g="0" b="0"/>
+      </a:effectRef>
+      <a:fontRef idx="minor"/>
+    </dgm:style>
+  </dgm:styleLbl>
+  <dgm:styleLbl name="fgAcc3">
+    <dgm:scene3d>
+      <a:camera prst="orthographicFront"/>
+      <a:lightRig rig="threePt" dir="t"/>
+    </dgm:scene3d>
+    <dgm:sp3d/>
+    <dgm:txPr/>
+    <dgm:style>
+      <a:lnRef idx="2">
+        <a:scrgbClr r="0" g="0" b="0"/>
+      </a:lnRef>
+      <a:fillRef idx="1">
+        <a:scrgbClr r="0" g="0" b="0"/>
+      </a:fillRef>
+      <a:effectRef idx="0">
+        <a:scrgbClr r="0" g="0" b="0"/>
+      </a:effectRef>
+      <a:fontRef idx="minor"/>
+    </dgm:style>
+  </dgm:styleLbl>
+  <dgm:styleLbl name="fgAcc4">
+    <dgm:scene3d>
+      <a:camera prst="orthographicFront"/>
+      <a:lightRig rig="threePt" dir="t"/>
+    </dgm:scene3d>
+    <dgm:sp3d/>
+    <dgm:txPr/>
+    <dgm:style>
+      <a:lnRef idx="2">
+        <a:scrgbClr r="0" g="0" b="0"/>
+      </a:lnRef>
+      <a:fillRef idx="1">
+        <a:scrgbClr r="0" g="0" b="0"/>
+      </a:fillRef>
+      <a:effectRef idx="0">
+        <a:scrgbClr r="0" g="0" b="0"/>
+      </a:effectRef>
+      <a:fontRef idx="minor"/>
+    </dgm:style>
+  </dgm:styleLbl>
+  <dgm:styleLbl name="bgShp">
+    <dgm:scene3d>
+      <a:camera prst="orthographicFront"/>
+      <a:lightRig rig="threePt" dir="t"/>
+    </dgm:scene3d>
+    <dgm:sp3d/>
+    <dgm:txPr/>
+    <dgm:style>
+      <a:lnRef idx="0">
+        <a:scrgbClr r="0" g="0" b="0"/>
+      </a:lnRef>
+      <a:fillRef idx="1">
+        <a:scrgbClr r="0" g="0" b="0"/>
+      </a:fillRef>
+      <a:effectRef idx="0">
+        <a:scrgbClr r="0" g="0" b="0"/>
+      </a:effectRef>
+      <a:fontRef idx="minor"/>
+    </dgm:style>
+  </dgm:styleLbl>
+  <dgm:styleLbl name="dkBgShp">
+    <dgm:scene3d>
+      <a:camera prst="orthographicFront"/>
+      <a:lightRig rig="threePt" dir="t"/>
+    </dgm:scene3d>
+    <dgm:sp3d/>
+    <dgm:txPr/>
+    <dgm:style>
+      <a:lnRef idx="0">
+        <a:scrgbClr r="0" g="0" b="0"/>
+      </a:lnRef>
+      <a:fillRef idx="1">
+        <a:scrgbClr r="0" g="0" b="0"/>
+      </a:fillRef>
+      <a:effectRef idx="0">
+        <a:scrgbClr r="0" g="0" b="0"/>
+      </a:effectRef>
+      <a:fontRef idx="minor"/>
+    </dgm:style>
+  </dgm:styleLbl>
+  <dgm:styleLbl name="trBgShp">
+    <dgm:scene3d>
+      <a:camera prst="orthographicFront"/>
+      <a:lightRig rig="threePt" dir="t"/>
+    </dgm:scene3d>
+    <dgm:sp3d/>
+    <dgm:txPr/>
+    <dgm:style>
+      <a:lnRef idx="0">
+        <a:scrgbClr r="0" g="0" b="0"/>
+      </a:lnRef>
+      <a:fillRef idx="1">
+        <a:scrgbClr r="0" g="0" b="0"/>
+      </a:fillRef>
+      <a:effectRef idx="0">
+        <a:scrgbClr r="0" g="0" b="0"/>
+      </a:effectRef>
+      <a:fontRef idx="minor"/>
+    </dgm:style>
+  </dgm:styleLbl>
+  <dgm:styleLbl name="fgShp">
+    <dgm:scene3d>
+      <a:camera prst="orthographicFront"/>
+      <a:lightRig rig="threePt" dir="t"/>
+    </dgm:scene3d>
+    <dgm:sp3d/>
+    <dgm:txPr/>
+    <dgm:style>
+      <a:lnRef idx="2">
+        <a:scrgbClr r="0" g="0" b="0"/>
+      </a:lnRef>
+      <a:fillRef idx="1">
+        <a:scrgbClr r="0" g="0" b="0"/>
+      </a:fillRef>
+      <a:effectRef idx="0">
+        <a:scrgbClr r="0" g="0" b="0"/>
+      </a:effectRef>
+      <a:fontRef idx="minor"/>
+    </dgm:style>
+  </dgm:styleLbl>
+  <dgm:styleLbl name="revTx">
+    <dgm:scene3d>
+      <a:camera prst="orthographicFront"/>
+      <a:lightRig rig="threePt" dir="t"/>
+    </dgm:scene3d>
+    <dgm:sp3d/>
+    <dgm:txPr/>
+    <dgm:style>
+      <a:lnRef idx="0">
+        <a:scrgbClr r="0" g="0" b="0"/>
+      </a:lnRef>
+      <a:fillRef idx="0">
+        <a:scrgbClr r="0" g="0" b="0"/>
+      </a:fillRef>
+      <a:effectRef idx="0">
+        <a:scrgbClr r="0" g="0" b="0"/>
+      </a:effectRef>
+      <a:fontRef idx="minor"/>
+    </dgm:style>
+  </dgm:styleLbl>
+</dgm:styleDef>
+</file>
+
+<file path=ppt/diagrams/quickStyle3.xml><?xml version="1.0" encoding="utf-8"?>
 <dgm:styleDef xmlns:dgm="http://schemas.openxmlformats.org/drawingml/2006/diagram" xmlns:a="http://schemas.openxmlformats.org/drawingml/2006/main" uniqueId="urn:microsoft.com/office/officeart/2005/8/quickstyle/simple1">
   <dgm:title val=""/>
   <dgm:desc val=""/>
@@ -7132,7 +11184,7 @@
           <a:p>
             <a:fld id="{74FCF980-36E5-46BF-A02A-756B7FE0A693}" type="datetimeFigureOut">
               <a:rPr lang="en-GB" smtClean="0"/>
-              <a:t>25/10/2024</a:t>
+              <a:t>11/11/2024</a:t>
             </a:fld>
             <a:endParaRPr lang="en-GB"/>
           </a:p>
@@ -7549,7 +11601,7 @@
           <a:p>
             <a:fld id="{7E55B3EA-B30C-4CE3-B538-BC7F603EE92A}" type="datetime1">
               <a:rPr lang="en-GB" smtClean="0"/>
-              <a:t>25/10/2024</a:t>
+              <a:t>11/11/2024</a:t>
             </a:fld>
             <a:endParaRPr lang="en-GB"/>
           </a:p>
@@ -7749,7 +11801,7 @@
           <a:p>
             <a:fld id="{908DF4FF-43EB-43ED-BF8E-EF1421EE1B33}" type="datetime1">
               <a:rPr lang="en-GB" smtClean="0"/>
-              <a:t>25/10/2024</a:t>
+              <a:t>11/11/2024</a:t>
             </a:fld>
             <a:endParaRPr lang="en-GB"/>
           </a:p>
@@ -7959,7 +12011,7 @@
           <a:p>
             <a:fld id="{F5FB5ABF-7BF5-4383-BD15-C04E1EF89981}" type="datetime1">
               <a:rPr lang="en-GB" smtClean="0"/>
-              <a:t>25/10/2024</a:t>
+              <a:t>11/11/2024</a:t>
             </a:fld>
             <a:endParaRPr lang="en-GB"/>
           </a:p>
@@ -8159,7 +12211,7 @@
           <a:p>
             <a:fld id="{3249EB88-2E63-470B-B5AE-ED8F04DEB571}" type="datetime1">
               <a:rPr lang="en-GB" smtClean="0"/>
-              <a:t>25/10/2024</a:t>
+              <a:t>11/11/2024</a:t>
             </a:fld>
             <a:endParaRPr lang="en-GB" dirty="0"/>
           </a:p>
@@ -8456,7 +12508,7 @@
           <a:p>
             <a:fld id="{8A25558C-F5C9-425F-A937-DAD336474D19}" type="datetime1">
               <a:rPr lang="en-GB" smtClean="0"/>
-              <a:t>25/10/2024</a:t>
+              <a:t>11/11/2024</a:t>
             </a:fld>
             <a:endParaRPr lang="en-GB"/>
           </a:p>
@@ -8724,7 +12776,7 @@
           <a:p>
             <a:fld id="{78F23361-B348-4CBC-9D98-FFEC573232E9}" type="datetime1">
               <a:rPr lang="en-GB" smtClean="0"/>
-              <a:t>25/10/2024</a:t>
+              <a:t>11/11/2024</a:t>
             </a:fld>
             <a:endParaRPr lang="en-GB"/>
           </a:p>
@@ -9139,7 +13191,7 @@
           <a:p>
             <a:fld id="{209E1356-F7A0-4DDA-9B79-8677F0203A36}" type="datetime1">
               <a:rPr lang="en-GB" smtClean="0"/>
-              <a:t>25/10/2024</a:t>
+              <a:t>11/11/2024</a:t>
             </a:fld>
             <a:endParaRPr lang="en-GB"/>
           </a:p>
@@ -9281,7 +13333,7 @@
           <a:p>
             <a:fld id="{7B0BD8A4-DB30-4644-BD53-95B03F580EBF}" type="datetime1">
               <a:rPr lang="en-GB" smtClean="0"/>
-              <a:t>25/10/2024</a:t>
+              <a:t>11/11/2024</a:t>
             </a:fld>
             <a:endParaRPr lang="en-GB"/>
           </a:p>
@@ -9394,7 +13446,7 @@
           <a:p>
             <a:fld id="{EBE70D1A-1D8E-4DCC-9397-026B2065BFC1}" type="datetime1">
               <a:rPr lang="en-GB" smtClean="0"/>
-              <a:t>25/10/2024</a:t>
+              <a:t>11/11/2024</a:t>
             </a:fld>
             <a:endParaRPr lang="en-GB"/>
           </a:p>
@@ -9707,7 +13759,7 @@
           <a:p>
             <a:fld id="{1D27C71C-4D63-45B1-B210-A6E88395339E}" type="datetime1">
               <a:rPr lang="en-GB" smtClean="0"/>
-              <a:t>25/10/2024</a:t>
+              <a:t>11/11/2024</a:t>
             </a:fld>
             <a:endParaRPr lang="en-GB"/>
           </a:p>
@@ -9996,7 +14048,7 @@
           <a:p>
             <a:fld id="{CE4A0315-D938-4806-831E-5BEF87E79DEC}" type="datetime1">
               <a:rPr lang="en-GB" smtClean="0"/>
-              <a:t>25/10/2024</a:t>
+              <a:t>11/11/2024</a:t>
             </a:fld>
             <a:endParaRPr lang="en-GB"/>
           </a:p>
@@ -10239,7 +14291,7 @@
           <a:p>
             <a:fld id="{EDF9EF3A-9B5C-4F8E-BE21-1A9759F13C31}" type="datetime1">
               <a:rPr lang="en-GB" smtClean="0"/>
-              <a:t>25/10/2024</a:t>
+              <a:t>11/11/2024</a:t>
             </a:fld>
             <a:endParaRPr lang="en-GB"/>
           </a:p>
@@ -21912,6 +25964,14 @@
 <file path=ppt/slides/slide7.xml><?xml version="1.0" encoding="utf-8"?>
 <p:sld xmlns:a="http://schemas.openxmlformats.org/drawingml/2006/main" xmlns:r="http://schemas.openxmlformats.org/officeDocument/2006/relationships" xmlns:p="http://schemas.openxmlformats.org/presentationml/2006/main">
   <p:cSld>
+    <p:bg>
+      <p:bgPr>
+        <a:solidFill>
+          <a:schemeClr val="bg1"/>
+        </a:solidFill>
+        <a:effectLst/>
+      </p:bgPr>
+    </p:bg>
     <p:spTree>
       <p:nvGrpSpPr>
         <p:cNvPr id="1" name=""/>
@@ -21926,6 +25986,308 @@
           <a:chExt cx="0" cy="0"/>
         </a:xfrm>
       </p:grpSpPr>
+      <p:sp useBgFill="1">
+        <p:nvSpPr>
+          <p:cNvPr id="16" name="Rectangle 15">
+            <a:extLst>
+              <a:ext uri="{FF2B5EF4-FFF2-40B4-BE49-F238E27FC236}">
+                <a16:creationId xmlns:a16="http://schemas.microsoft.com/office/drawing/2014/main" id="{BACC6370-2D7E-4714-9D71-7542949D7D5D}"/>
+              </a:ext>
+              <a:ext uri="{C183D7F6-B498-43B3-948B-1728B52AA6E4}">
+                <adec:decorative xmlns:adec="http://schemas.microsoft.com/office/drawing/2017/decorative" val="1"/>
+              </a:ext>
+            </a:extLst>
+          </p:cNvPr>
+          <p:cNvSpPr>
+            <a:spLocks noGrp="1" noRot="1" noChangeAspect="1" noMove="1" noResize="1" noEditPoints="1" noAdjustHandles="1" noChangeArrowheads="1" noChangeShapeType="1" noTextEdit="1"/>
+          </p:cNvSpPr>
+          <p:nvPr>
+            <p:extLst>
+              <p:ext uri="{386F3935-93C4-4BCD-93E2-E3B085C9AB24}">
+                <p16:designElem xmlns:p16="http://schemas.microsoft.com/office/powerpoint/2015/main" val="1"/>
+              </p:ext>
+            </p:extLst>
+          </p:nvPr>
+        </p:nvSpPr>
+        <p:spPr>
+          <a:xfrm>
+            <a:off x="0" y="0"/>
+            <a:ext cx="12192000" cy="6858000"/>
+          </a:xfrm>
+          <a:prstGeom prst="rect">
+            <a:avLst/>
+          </a:prstGeom>
+          <a:ln w="12700" cap="flat" cmpd="sng" algn="ctr">
+            <a:noFill/>
+            <a:prstDash val="solid"/>
+            <a:miter lim="800000"/>
+          </a:ln>
+          <a:effectLst/>
+          <a:extLst>
+            <a:ext uri="{91240B29-F687-4F45-9708-019B960494DF}">
+              <a14:hiddenLine xmlns:a14="http://schemas.microsoft.com/office/drawing/2010/main" w="12700" cap="flat" cmpd="sng" algn="ctr">
+                <a:solidFill>
+                  <a:schemeClr val="accent1">
+                    <a:shade val="50000"/>
+                  </a:schemeClr>
+                </a:solidFill>
+                <a:prstDash val="solid"/>
+                <a:miter lim="800000"/>
+              </a14:hiddenLine>
+            </a:ext>
+          </a:extLst>
+        </p:spPr>
+        <p:style>
+          <a:lnRef idx="2">
+            <a:schemeClr val="accent1">
+              <a:shade val="50000"/>
+            </a:schemeClr>
+          </a:lnRef>
+          <a:fillRef idx="1">
+            <a:schemeClr val="accent1"/>
+          </a:fillRef>
+          <a:effectRef idx="0">
+            <a:schemeClr val="accent1"/>
+          </a:effectRef>
+          <a:fontRef idx="minor">
+            <a:schemeClr val="lt1"/>
+          </a:fontRef>
+        </p:style>
+        <p:txBody>
+          <a:bodyPr rtlCol="0" anchor="ctr"/>
+          <a:lstStyle/>
+          <a:p>
+            <a:pPr algn="ctr"/>
+            <a:endParaRPr lang="en-US"/>
+          </a:p>
+        </p:txBody>
+      </p:sp>
+      <p:sp>
+        <p:nvSpPr>
+          <p:cNvPr id="18" name="Rectangle 17">
+            <a:extLst>
+              <a:ext uri="{FF2B5EF4-FFF2-40B4-BE49-F238E27FC236}">
+                <a16:creationId xmlns:a16="http://schemas.microsoft.com/office/drawing/2014/main" id="{F68B3F68-107C-434F-AA38-110D5EA91B85}"/>
+              </a:ext>
+              <a:ext uri="{C183D7F6-B498-43B3-948B-1728B52AA6E4}">
+                <adec:decorative xmlns:adec="http://schemas.microsoft.com/office/drawing/2017/decorative" val="1"/>
+              </a:ext>
+            </a:extLst>
+          </p:cNvPr>
+          <p:cNvSpPr>
+            <a:spLocks noGrp="1" noRot="1" noChangeAspect="1" noMove="1" noResize="1" noEditPoints="1" noAdjustHandles="1" noChangeArrowheads="1" noChangeShapeType="1" noTextEdit="1"/>
+          </p:cNvSpPr>
+          <p:nvPr>
+            <p:extLst>
+              <p:ext uri="{386F3935-93C4-4BCD-93E2-E3B085C9AB24}">
+                <p16:designElem xmlns:p16="http://schemas.microsoft.com/office/powerpoint/2015/main" val="1"/>
+              </p:ext>
+            </p:extLst>
+          </p:nvPr>
+        </p:nvSpPr>
+        <p:spPr>
+          <a:xfrm flipH="1">
+            <a:off x="2" y="0"/>
+            <a:ext cx="12191998" cy="1575955"/>
+          </a:xfrm>
+          <a:prstGeom prst="rect">
+            <a:avLst/>
+          </a:prstGeom>
+          <a:gradFill>
+            <a:gsLst>
+              <a:gs pos="0">
+                <a:srgbClr val="000000">
+                  <a:alpha val="96000"/>
+                </a:srgbClr>
+              </a:gs>
+              <a:gs pos="100000">
+                <a:schemeClr val="accent1">
+                  <a:lumMod val="75000"/>
+                </a:schemeClr>
+              </a:gs>
+            </a:gsLst>
+            <a:lin ang="8400000" scaled="0"/>
+          </a:gradFill>
+          <a:ln>
+            <a:noFill/>
+          </a:ln>
+        </p:spPr>
+        <p:style>
+          <a:lnRef idx="2">
+            <a:schemeClr val="accent1">
+              <a:shade val="50000"/>
+            </a:schemeClr>
+          </a:lnRef>
+          <a:fillRef idx="1">
+            <a:schemeClr val="accent1"/>
+          </a:fillRef>
+          <a:effectRef idx="0">
+            <a:schemeClr val="accent1"/>
+          </a:effectRef>
+          <a:fontRef idx="minor">
+            <a:schemeClr val="lt1"/>
+          </a:fontRef>
+        </p:style>
+        <p:txBody>
+          <a:bodyPr rtlCol="0" anchor="ctr"/>
+          <a:lstStyle/>
+          <a:p>
+            <a:pPr algn="ctr"/>
+            <a:endParaRPr lang="en-US"/>
+          </a:p>
+        </p:txBody>
+      </p:sp>
+      <p:sp>
+        <p:nvSpPr>
+          <p:cNvPr id="20" name="Rectangle 19">
+            <a:extLst>
+              <a:ext uri="{FF2B5EF4-FFF2-40B4-BE49-F238E27FC236}">
+                <a16:creationId xmlns:a16="http://schemas.microsoft.com/office/drawing/2014/main" id="{AAD0DBB9-1A4B-4391-81D4-CB19F9AB918A}"/>
+              </a:ext>
+              <a:ext uri="{C183D7F6-B498-43B3-948B-1728B52AA6E4}">
+                <adec:decorative xmlns:adec="http://schemas.microsoft.com/office/drawing/2017/decorative" val="1"/>
+              </a:ext>
+            </a:extLst>
+          </p:cNvPr>
+          <p:cNvSpPr>
+            <a:spLocks noGrp="1" noRot="1" noChangeAspect="1" noMove="1" noResize="1" noEditPoints="1" noAdjustHandles="1" noChangeArrowheads="1" noChangeShapeType="1" noTextEdit="1"/>
+          </p:cNvSpPr>
+          <p:nvPr>
+            <p:extLst>
+              <p:ext uri="{386F3935-93C4-4BCD-93E2-E3B085C9AB24}">
+                <p16:designElem xmlns:p16="http://schemas.microsoft.com/office/powerpoint/2015/main" val="1"/>
+              </p:ext>
+            </p:extLst>
+          </p:nvPr>
+        </p:nvSpPr>
+        <p:spPr>
+          <a:xfrm rot="10800000" flipH="1">
+            <a:off x="8128857" y="0"/>
+            <a:ext cx="4063143" cy="1576412"/>
+          </a:xfrm>
+          <a:prstGeom prst="rect">
+            <a:avLst/>
+          </a:prstGeom>
+          <a:gradFill>
+            <a:gsLst>
+              <a:gs pos="19000">
+                <a:schemeClr val="accent1">
+                  <a:lumMod val="50000"/>
+                  <a:alpha val="68000"/>
+                </a:schemeClr>
+              </a:gs>
+              <a:gs pos="100000">
+                <a:schemeClr val="accent1">
+                  <a:alpha val="79000"/>
+                </a:schemeClr>
+              </a:gs>
+            </a:gsLst>
+            <a:lin ang="19200000" scaled="0"/>
+          </a:gradFill>
+          <a:ln>
+            <a:noFill/>
+          </a:ln>
+        </p:spPr>
+        <p:style>
+          <a:lnRef idx="2">
+            <a:schemeClr val="accent1">
+              <a:shade val="50000"/>
+            </a:schemeClr>
+          </a:lnRef>
+          <a:fillRef idx="1">
+            <a:schemeClr val="accent1"/>
+          </a:fillRef>
+          <a:effectRef idx="0">
+            <a:schemeClr val="accent1"/>
+          </a:effectRef>
+          <a:fontRef idx="minor">
+            <a:schemeClr val="lt1"/>
+          </a:fontRef>
+        </p:style>
+        <p:txBody>
+          <a:bodyPr rtlCol="0" anchor="ctr"/>
+          <a:lstStyle/>
+          <a:p>
+            <a:pPr algn="ctr"/>
+            <a:endParaRPr lang="en-US"/>
+          </a:p>
+        </p:txBody>
+      </p:sp>
+      <p:sp>
+        <p:nvSpPr>
+          <p:cNvPr id="22" name="Rectangle 21">
+            <a:extLst>
+              <a:ext uri="{FF2B5EF4-FFF2-40B4-BE49-F238E27FC236}">
+                <a16:creationId xmlns:a16="http://schemas.microsoft.com/office/drawing/2014/main" id="{063BBA22-50EA-4C4D-BE05-F1CE4E63AA56}"/>
+              </a:ext>
+              <a:ext uri="{C183D7F6-B498-43B3-948B-1728B52AA6E4}">
+                <adec:decorative xmlns:adec="http://schemas.microsoft.com/office/drawing/2017/decorative" val="1"/>
+              </a:ext>
+            </a:extLst>
+          </p:cNvPr>
+          <p:cNvSpPr>
+            <a:spLocks noGrp="1" noRot="1" noChangeAspect="1" noMove="1" noResize="1" noEditPoints="1" noAdjustHandles="1" noChangeArrowheads="1" noChangeShapeType="1" noTextEdit="1"/>
+          </p:cNvSpPr>
+          <p:nvPr>
+            <p:extLst>
+              <p:ext uri="{386F3935-93C4-4BCD-93E2-E3B085C9AB24}">
+                <p16:designElem xmlns:p16="http://schemas.microsoft.com/office/powerpoint/2015/main" val="1"/>
+              </p:ext>
+            </p:extLst>
+          </p:nvPr>
+        </p:nvSpPr>
+        <p:spPr>
+          <a:xfrm rot="5400000">
+            <a:off x="5307777" y="-5307778"/>
+            <a:ext cx="1576446" cy="12192002"/>
+          </a:xfrm>
+          <a:prstGeom prst="rect">
+            <a:avLst/>
+          </a:prstGeom>
+          <a:gradFill>
+            <a:gsLst>
+              <a:gs pos="23000">
+                <a:schemeClr val="accent1">
+                  <a:alpha val="0"/>
+                </a:schemeClr>
+              </a:gs>
+              <a:gs pos="99000">
+                <a:srgbClr val="000000">
+                  <a:alpha val="74000"/>
+                </a:srgbClr>
+              </a:gs>
+            </a:gsLst>
+            <a:lin ang="20400000" scaled="0"/>
+          </a:gradFill>
+          <a:ln>
+            <a:noFill/>
+          </a:ln>
+        </p:spPr>
+        <p:style>
+          <a:lnRef idx="2">
+            <a:schemeClr val="accent1">
+              <a:shade val="50000"/>
+            </a:schemeClr>
+          </a:lnRef>
+          <a:fillRef idx="1">
+            <a:schemeClr val="accent1"/>
+          </a:fillRef>
+          <a:effectRef idx="0">
+            <a:schemeClr val="accent1"/>
+          </a:effectRef>
+          <a:fontRef idx="minor">
+            <a:schemeClr val="lt1"/>
+          </a:fontRef>
+        </p:style>
+        <p:txBody>
+          <a:bodyPr rtlCol="0" anchor="ctr"/>
+          <a:lstStyle/>
+          <a:p>
+            <a:pPr algn="ctr"/>
+            <a:endParaRPr lang="en-US" dirty="0"/>
+          </a:p>
+        </p:txBody>
+      </p:sp>
       <p:sp>
         <p:nvSpPr>
           <p:cNvPr id="2" name="Title 1">
@@ -21942,29 +26304,90 @@
             <p:ph type="title"/>
           </p:nvPr>
         </p:nvSpPr>
-        <p:spPr/>
+        <p:spPr>
+          <a:xfrm>
+            <a:off x="1371597" y="348865"/>
+            <a:ext cx="10044023" cy="877729"/>
+          </a:xfrm>
+        </p:spPr>
+        <p:txBody>
+          <a:bodyPr anchor="ctr">
+            <a:normAutofit/>
+          </a:bodyPr>
+          <a:lstStyle/>
+          <a:p>
+            <a:r>
+              <a:rPr lang="en-GB" sz="4000">
+                <a:solidFill>
+                  <a:srgbClr val="FFFFFF"/>
+                </a:solidFill>
+                <a:latin typeface="Ariel"/>
+              </a:rPr>
+              <a:t>Progress so far in SiteSafeAI</a:t>
+            </a:r>
+          </a:p>
+        </p:txBody>
+      </p:sp>
+      <p:sp>
+        <p:nvSpPr>
+          <p:cNvPr id="6" name="Slide Number Placeholder 5">
+            <a:extLst>
+              <a:ext uri="{FF2B5EF4-FFF2-40B4-BE49-F238E27FC236}">
+                <a16:creationId xmlns:a16="http://schemas.microsoft.com/office/drawing/2014/main" id="{3C07B640-53DC-14EC-C556-9F807C94C338}"/>
+              </a:ext>
+            </a:extLst>
+          </p:cNvPr>
+          <p:cNvSpPr>
+            <a:spLocks noGrp="1"/>
+          </p:cNvSpPr>
+          <p:nvPr>
+            <p:ph type="sldNum" sz="quarter" idx="12"/>
+          </p:nvPr>
+        </p:nvSpPr>
+        <p:spPr>
+          <a:xfrm>
+            <a:off x="11704320" y="6455664"/>
+            <a:ext cx="448056" cy="365125"/>
+          </a:xfrm>
+        </p:spPr>
         <p:txBody>
           <a:bodyPr>
             <a:normAutofit/>
           </a:bodyPr>
           <a:lstStyle/>
           <a:p>
-            <a:pPr algn="ctr"/>
+            <a:pPr>
+              <a:spcAft>
+                <a:spcPts val="600"/>
+              </a:spcAft>
+            </a:pPr>
+            <a:fld id="{39DC44A4-4954-4CC0-AE95-AFC3F00E7214}" type="slidenum">
+              <a:rPr lang="en-GB" sz="1100">
+                <a:solidFill>
+                  <a:schemeClr val="tx1">
+                    <a:lumMod val="50000"/>
+                    <a:lumOff val="50000"/>
+                  </a:schemeClr>
+                </a:solidFill>
+              </a:rPr>
+              <a:pPr>
+                <a:spcAft>
+                  <a:spcPts val="600"/>
+                </a:spcAft>
+              </a:pPr>
+              <a:t>7</a:t>
+            </a:fld>
             <a:r>
-              <a:rPr lang="en-GB" sz="5400" dirty="0">
-                <a:latin typeface="Ariel"/>
+              <a:rPr lang="en-GB" sz="1100">
+                <a:solidFill>
+                  <a:schemeClr val="tx1">
+                    <a:lumMod val="50000"/>
+                    <a:lumOff val="50000"/>
+                  </a:schemeClr>
+                </a:solidFill>
               </a:rPr>
-              <a:t>Progress so far in </a:t>
+              <a:t>/8</a:t>
             </a:r>
-            <a:r>
-              <a:rPr lang="en-GB" sz="5400" dirty="0" err="1">
-                <a:latin typeface="Ariel"/>
-              </a:rPr>
-              <a:t>SiteSafeAI</a:t>
-            </a:r>
-            <a:endParaRPr lang="en-GB" sz="5400" dirty="0">
-              <a:latin typeface="Ariel"/>
-            </a:endParaRPr>
           </a:p>
         </p:txBody>
       </p:sp>
@@ -21982,11 +26405,16 @@
           </p:cNvGraphicFramePr>
           <p:nvPr>
             <p:ph idx="1"/>
+            <p:extLst>
+              <p:ext uri="{D42A27DB-BD31-4B8C-83A1-F6EECF244321}">
+                <p14:modId xmlns:p14="http://schemas.microsoft.com/office/powerpoint/2010/main" val="1814779552"/>
+              </p:ext>
+            </p:extLst>
           </p:nvPr>
         </p:nvGraphicFramePr>
         <p:xfrm>
-          <a:off x="838200" y="1825625"/>
-          <a:ext cx="10515600" cy="4351338"/>
+          <a:off x="644056" y="2112579"/>
+          <a:ext cx="10927829" cy="4192805"/>
         </p:xfrm>
         <a:graphic>
           <a:graphicData uri="http://schemas.openxmlformats.org/drawingml/2006/diagram">
@@ -21994,38 +26422,6 @@
           </a:graphicData>
         </a:graphic>
       </p:graphicFrame>
-      <p:sp>
-        <p:nvSpPr>
-          <p:cNvPr id="6" name="Slide Number Placeholder 5">
-            <a:extLst>
-              <a:ext uri="{FF2B5EF4-FFF2-40B4-BE49-F238E27FC236}">
-                <a16:creationId xmlns:a16="http://schemas.microsoft.com/office/drawing/2014/main" id="{3C07B640-53DC-14EC-C556-9F807C94C338}"/>
-              </a:ext>
-            </a:extLst>
-          </p:cNvPr>
-          <p:cNvSpPr>
-            <a:spLocks noGrp="1"/>
-          </p:cNvSpPr>
-          <p:nvPr>
-            <p:ph type="sldNum" sz="quarter" idx="12"/>
-          </p:nvPr>
-        </p:nvSpPr>
-        <p:spPr/>
-        <p:txBody>
-          <a:bodyPr/>
-          <a:lstStyle/>
-          <a:p>
-            <a:fld id="{39DC44A4-4954-4CC0-AE95-AFC3F00E7214}" type="slidenum">
-              <a:rPr lang="en-GB" sz="2000" smtClean="0"/>
-              <a:t>7</a:t>
-            </a:fld>
-            <a:r>
-              <a:rPr lang="en-GB" sz="2000" dirty="0"/>
-              <a:t>/8</a:t>
-            </a:r>
-          </a:p>
-        </p:txBody>
-      </p:sp>
     </p:spTree>
     <p:extLst>
       <p:ext uri="{BB962C8B-B14F-4D97-AF65-F5344CB8AC3E}">
@@ -22072,7 +26468,12 @@
             <p:ph type="title"/>
           </p:nvPr>
         </p:nvSpPr>
-        <p:spPr/>
+        <p:spPr>
+          <a:xfrm>
+            <a:off x="838200" y="1774189"/>
+            <a:ext cx="10515600" cy="1325563"/>
+          </a:xfrm>
+        </p:spPr>
         <p:txBody>
           <a:bodyPr>
             <a:normAutofit/>
@@ -22089,174 +26490,32 @@
           </a:p>
         </p:txBody>
       </p:sp>
-      <p:sp>
-        <p:nvSpPr>
-          <p:cNvPr id="3" name="Content Placeholder 2">
+      <p:graphicFrame>
+        <p:nvGraphicFramePr>
+          <p:cNvPr id="7" name="Content Placeholder 2">
             <a:extLst>
               <a:ext uri="{FF2B5EF4-FFF2-40B4-BE49-F238E27FC236}">
-                <a16:creationId xmlns:a16="http://schemas.microsoft.com/office/drawing/2014/main" id="{0CC22812-BC64-0B8D-C5D5-6D71D740C123}"/>
+                <a16:creationId xmlns:a16="http://schemas.microsoft.com/office/drawing/2014/main" id="{CBBF9A35-99EF-ACA5-257B-265D0429A739}"/>
               </a:ext>
             </a:extLst>
           </p:cNvPr>
-          <p:cNvSpPr>
-            <a:spLocks noGrp="1"/>
-          </p:cNvSpPr>
+          <p:cNvGraphicFramePr>
+            <a:graphicFrameLocks noGrp="1"/>
+          </p:cNvGraphicFramePr>
           <p:nvPr>
             <p:ph idx="1"/>
           </p:nvPr>
-        </p:nvSpPr>
-        <p:spPr/>
-        <p:txBody>
-          <a:bodyPr/>
-          <a:lstStyle/>
-          <a:p>
-            <a:r>
-              <a:rPr lang="en-GB" dirty="0" err="1">
-                <a:latin typeface="Ariel"/>
-              </a:rPr>
-              <a:t>Netwatch</a:t>
-            </a:r>
-            <a:r>
-              <a:rPr lang="en-GB" dirty="0">
-                <a:latin typeface="Ariel"/>
-              </a:rPr>
-              <a:t> logo: </a:t>
-            </a:r>
-            <a:r>
-              <a:rPr lang="en-GB" dirty="0">
-                <a:latin typeface="Ariel"/>
-                <a:hlinkClick r:id="rId2"/>
-              </a:rPr>
-              <a:t>www.netwatchsystem.com</a:t>
-            </a:r>
-            <a:endParaRPr lang="en-GB" dirty="0">
-              <a:latin typeface="Ariel"/>
-            </a:endParaRPr>
-          </a:p>
-          <a:p>
-            <a:r>
-              <a:rPr lang="en-GB" dirty="0" err="1">
-                <a:latin typeface="Ariel"/>
-              </a:rPr>
-              <a:t>SiteSafeAi</a:t>
-            </a:r>
-            <a:r>
-              <a:rPr lang="en-GB" dirty="0">
-                <a:latin typeface="Ariel"/>
-              </a:rPr>
-              <a:t> logo creation: </a:t>
-            </a:r>
-            <a:r>
-              <a:rPr lang="en-GB" dirty="0">
-                <a:latin typeface="Ariel"/>
-                <a:hlinkClick r:id="rId3"/>
-              </a:rPr>
-              <a:t>www.canva.com</a:t>
-            </a:r>
-            <a:endParaRPr lang="en-GB" dirty="0">
-              <a:latin typeface="Ariel"/>
-            </a:endParaRPr>
-          </a:p>
-          <a:p>
-            <a:r>
-              <a:rPr lang="en-GB" dirty="0">
-                <a:latin typeface="Ariel"/>
-              </a:rPr>
-              <a:t>Context diagram creation: </a:t>
-            </a:r>
-            <a:r>
-              <a:rPr lang="en-GB" dirty="0">
-                <a:latin typeface="Ariel"/>
-                <a:hlinkClick r:id="rId4"/>
-              </a:rPr>
-              <a:t>www.creately.com</a:t>
-            </a:r>
-            <a:endParaRPr lang="en-GB" dirty="0">
-              <a:latin typeface="Ariel"/>
-            </a:endParaRPr>
-          </a:p>
-          <a:p>
-            <a:r>
-              <a:rPr lang="en-GB" dirty="0">
-                <a:latin typeface="Ariel"/>
-              </a:rPr>
-              <a:t>Technology logos: </a:t>
-            </a:r>
-            <a:r>
-              <a:rPr lang="en-GB" dirty="0">
-                <a:latin typeface="Ariel"/>
-                <a:hlinkClick r:id="rId5"/>
-              </a:rPr>
-              <a:t>www.iconscout.com</a:t>
-            </a:r>
-            <a:endParaRPr lang="en-GB" dirty="0">
-              <a:latin typeface="Ariel"/>
-            </a:endParaRPr>
-          </a:p>
-          <a:p>
-            <a:r>
-              <a:rPr lang="en-GB" dirty="0">
-                <a:latin typeface="Ariel"/>
-              </a:rPr>
-              <a:t>Similar company: </a:t>
-            </a:r>
-            <a:r>
-              <a:rPr lang="en-GB" dirty="0">
-                <a:latin typeface="Ariel"/>
-                <a:hlinkClick r:id="rId6"/>
-              </a:rPr>
-              <a:t>www.synaedge.com/en</a:t>
-            </a:r>
-            <a:endParaRPr lang="en-GB" dirty="0">
-              <a:latin typeface="Ariel"/>
-            </a:endParaRPr>
-          </a:p>
-          <a:p>
-            <a:r>
-              <a:rPr lang="en-GB" dirty="0" err="1">
-                <a:latin typeface="Ariel"/>
-              </a:rPr>
-              <a:t>Frisbys</a:t>
-            </a:r>
-            <a:r>
-              <a:rPr lang="en-GB" dirty="0">
-                <a:latin typeface="Ariel"/>
-              </a:rPr>
-              <a:t> Homes logo: </a:t>
-            </a:r>
-            <a:r>
-              <a:rPr lang="en-GB" dirty="0">
-                <a:latin typeface="Ariel"/>
-                <a:hlinkClick r:id="rId7"/>
-              </a:rPr>
-              <a:t>www.frisbyhomes.com</a:t>
-            </a:r>
-            <a:endParaRPr lang="en-GB" dirty="0">
-              <a:latin typeface="Ariel"/>
-            </a:endParaRPr>
-          </a:p>
-          <a:p>
-            <a:endParaRPr lang="en-GB" dirty="0">
-              <a:latin typeface="Ariel"/>
-            </a:endParaRPr>
-          </a:p>
-          <a:p>
-            <a:endParaRPr lang="en-GB" dirty="0"/>
-          </a:p>
-          <a:p>
-            <a:endParaRPr lang="en-GB" dirty="0"/>
-          </a:p>
-          <a:p>
-            <a:endParaRPr lang="en-GB" dirty="0"/>
-          </a:p>
-          <a:p>
-            <a:endParaRPr lang="en-GB" dirty="0"/>
-          </a:p>
-          <a:p>
-            <a:endParaRPr lang="en-GB" dirty="0"/>
-          </a:p>
-        </p:txBody>
-      </p:sp>
+        </p:nvGraphicFramePr>
+        <p:xfrm>
+          <a:off x="838200" y="3169920"/>
+          <a:ext cx="10515600" cy="3007043"/>
+        </p:xfrm>
+        <a:graphic>
+          <a:graphicData uri="http://schemas.openxmlformats.org/drawingml/2006/diagram">
+            <dgm:relIds xmlns:dgm="http://schemas.openxmlformats.org/drawingml/2006/diagram" xmlns:r="http://schemas.openxmlformats.org/officeDocument/2006/relationships" r:dm="rId2" r:lo="rId3" r:qs="rId4" r:cs="rId5"/>
+          </a:graphicData>
+        </a:graphic>
+      </p:graphicFrame>
       <p:sp>
         <p:nvSpPr>
           <p:cNvPr id="4" name="Slide Number Placeholder 3">
@@ -22273,7 +26532,12 @@
             <p:ph type="sldNum" sz="quarter" idx="12"/>
           </p:nvPr>
         </p:nvSpPr>
-        <p:spPr/>
+        <p:spPr>
+          <a:xfrm>
+            <a:off x="8868410" y="6144897"/>
+            <a:ext cx="2743200" cy="365125"/>
+          </a:xfrm>
+        </p:spPr>
         <p:txBody>
           <a:bodyPr/>
           <a:lstStyle/>
@@ -22285,6 +26549,63 @@
             <a:r>
               <a:rPr lang="en-GB" sz="2000" dirty="0"/>
               <a:t>/8</a:t>
+            </a:r>
+          </a:p>
+        </p:txBody>
+      </p:sp>
+      <p:sp>
+        <p:nvSpPr>
+          <p:cNvPr id="5" name="Title 1">
+            <a:extLst>
+              <a:ext uri="{FF2B5EF4-FFF2-40B4-BE49-F238E27FC236}">
+                <a16:creationId xmlns:a16="http://schemas.microsoft.com/office/drawing/2014/main" id="{F76D391A-CF52-608C-E98C-AA8293E69A78}"/>
+              </a:ext>
+            </a:extLst>
+          </p:cNvPr>
+          <p:cNvSpPr txBox="1">
+            <a:spLocks/>
+          </p:cNvSpPr>
+          <p:nvPr/>
+        </p:nvSpPr>
+        <p:spPr>
+          <a:xfrm>
+            <a:off x="838200" y="448626"/>
+            <a:ext cx="10515600" cy="1325563"/>
+          </a:xfrm>
+          <a:prstGeom prst="rect">
+            <a:avLst/>
+          </a:prstGeom>
+        </p:spPr>
+        <p:txBody>
+          <a:bodyPr vert="horz" lIns="91440" tIns="45720" rIns="91440" bIns="45720" rtlCol="0" anchor="ctr">
+            <a:normAutofit/>
+          </a:bodyPr>
+          <a:lstStyle>
+            <a:lvl1pPr algn="l" defTabSz="914400" rtl="0" eaLnBrk="1" latinLnBrk="0" hangingPunct="1">
+              <a:lnSpc>
+                <a:spcPct val="90000"/>
+              </a:lnSpc>
+              <a:spcBef>
+                <a:spcPct val="0"/>
+              </a:spcBef>
+              <a:buNone/>
+              <a:defRPr sz="4400" kern="1200">
+                <a:solidFill>
+                  <a:schemeClr val="tx1"/>
+                </a:solidFill>
+                <a:latin typeface="+mj-lt"/>
+                <a:ea typeface="+mj-ea"/>
+                <a:cs typeface="+mj-cs"/>
+              </a:defRPr>
+            </a:lvl1pPr>
+          </a:lstStyle>
+          <a:p>
+            <a:pPr algn="ctr"/>
+            <a:r>
+              <a:rPr lang="en-GB" sz="5400" dirty="0">
+                <a:latin typeface="Ariel"/>
+              </a:rPr>
+              <a:t>Questions?</a:t>
             </a:r>
           </a:p>
         </p:txBody>

--- a/Presentation/SiteSafeAiPresentation.pptx
+++ b/Presentation/SiteSafeAiPresentation.pptx
@@ -3489,10 +3489,10 @@
         <a:lstStyle/>
         <a:p>
           <a:r>
-            <a:rPr lang="en-GB"/>
-            <a:t>Reviewed Technology Documentation</a:t>
+            <a:rPr lang="en-GB" dirty="0"/>
+            <a:t>Functional Specifications</a:t>
           </a:r>
-          <a:endParaRPr lang="en-US"/>
+          <a:endParaRPr lang="en-US" dirty="0"/>
         </a:p>
       </dgm:t>
     </dgm:pt>
@@ -3526,10 +3526,10 @@
         <a:lstStyle/>
         <a:p>
           <a:r>
-            <a:rPr lang="en-GB"/>
-            <a:t>Completed Tutorials</a:t>
+            <a:rPr lang="en-GB" dirty="0"/>
+            <a:t>Poster, Presentation</a:t>
           </a:r>
-          <a:endParaRPr lang="en-US"/>
+          <a:endParaRPr lang="en-US" dirty="0"/>
         </a:p>
       </dgm:t>
     </dgm:pt>
@@ -3563,10 +3563,10 @@
         <a:lstStyle/>
         <a:p>
           <a:r>
-            <a:rPr lang="en-GB"/>
-            <a:t>Created Logo</a:t>
+            <a:rPr lang="en-GB" dirty="0"/>
+            <a:t>Model Trained on 500 images</a:t>
           </a:r>
-          <a:endParaRPr lang="en-US"/>
+          <a:endParaRPr lang="en-US" dirty="0"/>
         </a:p>
       </dgm:t>
     </dgm:pt>
@@ -3600,10 +3600,10 @@
         <a:lstStyle/>
         <a:p>
           <a:r>
-            <a:rPr lang="en-GB"/>
-            <a:t>Detailed Project Specifications</a:t>
+            <a:rPr lang="en-GB" dirty="0"/>
+            <a:t>Model Tested</a:t>
           </a:r>
-          <a:endParaRPr lang="en-US"/>
+          <a:endParaRPr lang="en-US" dirty="0"/>
         </a:p>
       </dgm:t>
     </dgm:pt>
@@ -3637,10 +3637,10 @@
         <a:lstStyle/>
         <a:p>
           <a:r>
-            <a:rPr lang="en-GB"/>
-            <a:t>Developed Project Poster</a:t>
+            <a:rPr lang="en-GB" dirty="0"/>
+            <a:t>Front-End Page Layout</a:t>
           </a:r>
-          <a:endParaRPr lang="en-US"/>
+          <a:endParaRPr lang="en-US" dirty="0"/>
         </a:p>
       </dgm:t>
     </dgm:pt>
@@ -5663,7 +5663,7 @@
         </a:bodyPr>
         <a:lstStyle/>
         <a:p>
-          <a:pPr marL="0" lvl="0" indent="0" algn="ctr" defTabSz="1333500">
+          <a:pPr marL="0" lvl="0" indent="0" algn="ctr" defTabSz="1466850">
             <a:lnSpc>
               <a:spcPct val="90000"/>
             </a:lnSpc>
@@ -5676,10 +5676,10 @@
             <a:buNone/>
           </a:pPr>
           <a:r>
-            <a:rPr lang="en-GB" sz="3000" kern="1200" dirty="0"/>
+            <a:rPr lang="en-GB" sz="3300" kern="1200" dirty="0"/>
             <a:t>Finalised Technologies</a:t>
           </a:r>
-          <a:endParaRPr lang="en-US" sz="3000" kern="1200" dirty="0"/>
+          <a:endParaRPr lang="en-US" sz="3300" kern="1200" dirty="0"/>
         </a:p>
       </dsp:txBody>
       <dsp:txXfrm>
@@ -5823,7 +5823,7 @@
         </a:bodyPr>
         <a:lstStyle/>
         <a:p>
-          <a:pPr marL="0" lvl="0" indent="0" algn="ctr" defTabSz="1333500">
+          <a:pPr marL="0" lvl="0" indent="0" algn="ctr" defTabSz="1466850">
             <a:lnSpc>
               <a:spcPct val="90000"/>
             </a:lnSpc>
@@ -5836,10 +5836,10 @@
             <a:buNone/>
           </a:pPr>
           <a:r>
-            <a:rPr lang="en-GB" sz="3000" kern="1200"/>
-            <a:t>Reviewed Technology Documentation</a:t>
+            <a:rPr lang="en-GB" sz="3300" kern="1200" dirty="0"/>
+            <a:t>Functional Specifications</a:t>
           </a:r>
-          <a:endParaRPr lang="en-US" sz="3000" kern="1200"/>
+          <a:endParaRPr lang="en-US" sz="3300" kern="1200" dirty="0"/>
         </a:p>
       </dsp:txBody>
       <dsp:txXfrm>
@@ -5989,7 +5989,7 @@
         </a:bodyPr>
         <a:lstStyle/>
         <a:p>
-          <a:pPr marL="0" lvl="0" indent="0" algn="ctr" defTabSz="1333500">
+          <a:pPr marL="0" lvl="0" indent="0" algn="ctr" defTabSz="1466850">
             <a:lnSpc>
               <a:spcPct val="90000"/>
             </a:lnSpc>
@@ -6002,10 +6002,10 @@
             <a:buNone/>
           </a:pPr>
           <a:r>
-            <a:rPr lang="en-GB" sz="3000" kern="1200"/>
-            <a:t>Completed Tutorials</a:t>
+            <a:rPr lang="en-GB" sz="3300" kern="1200" dirty="0"/>
+            <a:t>Poster, Presentation</a:t>
           </a:r>
-          <a:endParaRPr lang="en-US" sz="3000" kern="1200"/>
+          <a:endParaRPr lang="en-US" sz="3300" kern="1200" dirty="0"/>
         </a:p>
       </dsp:txBody>
       <dsp:txXfrm>
@@ -6149,7 +6149,7 @@
         </a:bodyPr>
         <a:lstStyle/>
         <a:p>
-          <a:pPr marL="0" lvl="0" indent="0" algn="ctr" defTabSz="1333500">
+          <a:pPr marL="0" lvl="0" indent="0" algn="ctr" defTabSz="1466850">
             <a:lnSpc>
               <a:spcPct val="90000"/>
             </a:lnSpc>
@@ -6162,10 +6162,10 @@
             <a:buNone/>
           </a:pPr>
           <a:r>
-            <a:rPr lang="en-GB" sz="3000" kern="1200"/>
-            <a:t>Created Logo</a:t>
+            <a:rPr lang="en-GB" sz="3300" kern="1200" dirty="0"/>
+            <a:t>Model Trained on 500 images</a:t>
           </a:r>
-          <a:endParaRPr lang="en-US" sz="3000" kern="1200"/>
+          <a:endParaRPr lang="en-US" sz="3300" kern="1200" dirty="0"/>
         </a:p>
       </dsp:txBody>
       <dsp:txXfrm>
@@ -6309,7 +6309,7 @@
         </a:bodyPr>
         <a:lstStyle/>
         <a:p>
-          <a:pPr marL="0" lvl="0" indent="0" algn="ctr" defTabSz="1333500">
+          <a:pPr marL="0" lvl="0" indent="0" algn="ctr" defTabSz="1466850">
             <a:lnSpc>
               <a:spcPct val="90000"/>
             </a:lnSpc>
@@ -6322,10 +6322,10 @@
             <a:buNone/>
           </a:pPr>
           <a:r>
-            <a:rPr lang="en-GB" sz="3000" kern="1200"/>
-            <a:t>Detailed Project Specifications</a:t>
+            <a:rPr lang="en-GB" sz="3300" kern="1200" dirty="0"/>
+            <a:t>Model Tested</a:t>
           </a:r>
-          <a:endParaRPr lang="en-US" sz="3000" kern="1200"/>
+          <a:endParaRPr lang="en-US" sz="3300" kern="1200" dirty="0"/>
         </a:p>
       </dsp:txBody>
       <dsp:txXfrm>
@@ -6388,7 +6388,7 @@
         </a:bodyPr>
         <a:lstStyle/>
         <a:p>
-          <a:pPr marL="0" lvl="0" indent="0" algn="ctr" defTabSz="1333500">
+          <a:pPr marL="0" lvl="0" indent="0" algn="ctr" defTabSz="1466850">
             <a:lnSpc>
               <a:spcPct val="90000"/>
             </a:lnSpc>
@@ -6401,10 +6401,10 @@
             <a:buNone/>
           </a:pPr>
           <a:r>
-            <a:rPr lang="en-GB" sz="3000" kern="1200"/>
-            <a:t>Developed Project Poster</a:t>
+            <a:rPr lang="en-GB" sz="3300" kern="1200" dirty="0"/>
+            <a:t>Front-End Page Layout</a:t>
           </a:r>
-          <a:endParaRPr lang="en-US" sz="3000" kern="1200"/>
+          <a:endParaRPr lang="en-US" sz="3300" kern="1200" dirty="0"/>
         </a:p>
       </dsp:txBody>
       <dsp:txXfrm>
@@ -11184,7 +11184,7 @@
           <a:p>
             <a:fld id="{74FCF980-36E5-46BF-A02A-756B7FE0A693}" type="datetimeFigureOut">
               <a:rPr lang="en-GB" smtClean="0"/>
-              <a:t>11/11/2024</a:t>
+              <a:t>30/11/2024</a:t>
             </a:fld>
             <a:endParaRPr lang="en-GB"/>
           </a:p>
@@ -11601,7 +11601,7 @@
           <a:p>
             <a:fld id="{7E55B3EA-B30C-4CE3-B538-BC7F603EE92A}" type="datetime1">
               <a:rPr lang="en-GB" smtClean="0"/>
-              <a:t>11/11/2024</a:t>
+              <a:t>30/11/2024</a:t>
             </a:fld>
             <a:endParaRPr lang="en-GB"/>
           </a:p>
@@ -11801,7 +11801,7 @@
           <a:p>
             <a:fld id="{908DF4FF-43EB-43ED-BF8E-EF1421EE1B33}" type="datetime1">
               <a:rPr lang="en-GB" smtClean="0"/>
-              <a:t>11/11/2024</a:t>
+              <a:t>30/11/2024</a:t>
             </a:fld>
             <a:endParaRPr lang="en-GB"/>
           </a:p>
@@ -12011,7 +12011,7 @@
           <a:p>
             <a:fld id="{F5FB5ABF-7BF5-4383-BD15-C04E1EF89981}" type="datetime1">
               <a:rPr lang="en-GB" smtClean="0"/>
-              <a:t>11/11/2024</a:t>
+              <a:t>30/11/2024</a:t>
             </a:fld>
             <a:endParaRPr lang="en-GB"/>
           </a:p>
@@ -12211,7 +12211,7 @@
           <a:p>
             <a:fld id="{3249EB88-2E63-470B-B5AE-ED8F04DEB571}" type="datetime1">
               <a:rPr lang="en-GB" smtClean="0"/>
-              <a:t>11/11/2024</a:t>
+              <a:t>30/11/2024</a:t>
             </a:fld>
             <a:endParaRPr lang="en-GB" dirty="0"/>
           </a:p>
@@ -12508,7 +12508,7 @@
           <a:p>
             <a:fld id="{8A25558C-F5C9-425F-A937-DAD336474D19}" type="datetime1">
               <a:rPr lang="en-GB" smtClean="0"/>
-              <a:t>11/11/2024</a:t>
+              <a:t>30/11/2024</a:t>
             </a:fld>
             <a:endParaRPr lang="en-GB"/>
           </a:p>
@@ -12776,7 +12776,7 @@
           <a:p>
             <a:fld id="{78F23361-B348-4CBC-9D98-FFEC573232E9}" type="datetime1">
               <a:rPr lang="en-GB" smtClean="0"/>
-              <a:t>11/11/2024</a:t>
+              <a:t>30/11/2024</a:t>
             </a:fld>
             <a:endParaRPr lang="en-GB"/>
           </a:p>
@@ -13191,7 +13191,7 @@
           <a:p>
             <a:fld id="{209E1356-F7A0-4DDA-9B79-8677F0203A36}" type="datetime1">
               <a:rPr lang="en-GB" smtClean="0"/>
-              <a:t>11/11/2024</a:t>
+              <a:t>30/11/2024</a:t>
             </a:fld>
             <a:endParaRPr lang="en-GB"/>
           </a:p>
@@ -13333,7 +13333,7 @@
           <a:p>
             <a:fld id="{7B0BD8A4-DB30-4644-BD53-95B03F580EBF}" type="datetime1">
               <a:rPr lang="en-GB" smtClean="0"/>
-              <a:t>11/11/2024</a:t>
+              <a:t>30/11/2024</a:t>
             </a:fld>
             <a:endParaRPr lang="en-GB"/>
           </a:p>
@@ -13446,7 +13446,7 @@
           <a:p>
             <a:fld id="{EBE70D1A-1D8E-4DCC-9397-026B2065BFC1}" type="datetime1">
               <a:rPr lang="en-GB" smtClean="0"/>
-              <a:t>11/11/2024</a:t>
+              <a:t>30/11/2024</a:t>
             </a:fld>
             <a:endParaRPr lang="en-GB"/>
           </a:p>
@@ -13759,7 +13759,7 @@
           <a:p>
             <a:fld id="{1D27C71C-4D63-45B1-B210-A6E88395339E}" type="datetime1">
               <a:rPr lang="en-GB" smtClean="0"/>
-              <a:t>11/11/2024</a:t>
+              <a:t>30/11/2024</a:t>
             </a:fld>
             <a:endParaRPr lang="en-GB"/>
           </a:p>
@@ -14048,7 +14048,7 @@
           <a:p>
             <a:fld id="{CE4A0315-D938-4806-831E-5BEF87E79DEC}" type="datetime1">
               <a:rPr lang="en-GB" smtClean="0"/>
-              <a:t>11/11/2024</a:t>
+              <a:t>30/11/2024</a:t>
             </a:fld>
             <a:endParaRPr lang="en-GB"/>
           </a:p>
@@ -14291,7 +14291,7 @@
           <a:p>
             <a:fld id="{EDF9EF3A-9B5C-4F8E-BE21-1A9759F13C31}" type="datetime1">
               <a:rPr lang="en-GB" smtClean="0"/>
-              <a:t>11/11/2024</a:t>
+              <a:t>30/11/2024</a:t>
             </a:fld>
             <a:endParaRPr lang="en-GB"/>
           </a:p>
@@ -26407,7 +26407,7 @@
             <p:ph idx="1"/>
             <p:extLst>
               <p:ext uri="{D42A27DB-BD31-4B8C-83A1-F6EECF244321}">
-                <p14:modId xmlns:p14="http://schemas.microsoft.com/office/powerpoint/2010/main" val="1814779552"/>
+                <p14:modId xmlns:p14="http://schemas.microsoft.com/office/powerpoint/2010/main" val="484401191"/>
               </p:ext>
             </p:extLst>
           </p:nvPr>

--- a/Presentation/SiteSafeAiPresentation.pptx
+++ b/Presentation/SiteSafeAiPresentation.pptx
@@ -2561,7 +2561,7 @@
       </dgm:t>
     </dgm:pt>
     <dgm:pt modelId="{694B7AF4-3A8B-4ADF-926E-D04343A67A5B}">
-      <dgm:prSet/>
+      <dgm:prSet custT="1"/>
       <dgm:spPr/>
       <dgm:t>
         <a:bodyPr/>
@@ -2573,10 +2573,10 @@
             </a:lnSpc>
           </a:pPr>
           <a:r>
-            <a:rPr lang="en-GB" dirty="0"/>
+            <a:rPr lang="en-GB" sz="1800" dirty="0"/>
             <a:t>Python - Main Programming Language</a:t>
           </a:r>
-          <a:endParaRPr lang="en-US" dirty="0"/>
+          <a:endParaRPr lang="en-US" sz="1800" dirty="0"/>
         </a:p>
       </dgm:t>
     </dgm:pt>
@@ -2608,7 +2608,7 @@
       </dgm:t>
     </dgm:pt>
     <dgm:pt modelId="{FAE58B5E-C93F-41D0-A6F6-D1E16200C15F}">
-      <dgm:prSet/>
+      <dgm:prSet custT="1"/>
       <dgm:spPr/>
       <dgm:t>
         <a:bodyPr/>
@@ -2620,10 +2620,10 @@
             </a:lnSpc>
           </a:pPr>
           <a:r>
-            <a:rPr lang="en-GB" dirty="0"/>
+            <a:rPr lang="en-GB" sz="1800" dirty="0"/>
             <a:t>YOLO - Object Detection  </a:t>
           </a:r>
-          <a:endParaRPr lang="en-US" dirty="0"/>
+          <a:endParaRPr lang="en-US" sz="1800" dirty="0"/>
         </a:p>
       </dgm:t>
     </dgm:pt>
@@ -2655,7 +2655,7 @@
       </dgm:t>
     </dgm:pt>
     <dgm:pt modelId="{A936FE28-DE30-4F99-9D61-A0E9F5DEDAEB}">
-      <dgm:prSet/>
+      <dgm:prSet custT="1"/>
       <dgm:spPr/>
       <dgm:t>
         <a:bodyPr/>
@@ -2667,10 +2667,14 @@
             </a:lnSpc>
           </a:pPr>
           <a:r>
-            <a:rPr lang="en-GB"/>
-            <a:t>Ultralytics - Framework</a:t>
+            <a:rPr lang="en-GB" sz="1800" dirty="0" err="1"/>
+            <a:t>Ultralytics</a:t>
           </a:r>
-          <a:endParaRPr lang="en-US"/>
+          <a:r>
+            <a:rPr lang="en-GB" sz="1800" dirty="0"/>
+            <a:t> - Framework</a:t>
+          </a:r>
+          <a:endParaRPr lang="en-US" sz="1800" dirty="0"/>
         </a:p>
       </dgm:t>
     </dgm:pt>
@@ -2702,7 +2706,7 @@
       </dgm:t>
     </dgm:pt>
     <dgm:pt modelId="{05172726-9EC8-4DAB-9C24-AF72B6B26FE5}">
-      <dgm:prSet/>
+      <dgm:prSet custT="1"/>
       <dgm:spPr/>
       <dgm:t>
         <a:bodyPr/>
@@ -2714,10 +2718,10 @@
             </a:lnSpc>
           </a:pPr>
           <a:r>
-            <a:rPr lang="en-GB" dirty="0"/>
+            <a:rPr lang="en-GB" sz="1800" dirty="0"/>
             <a:t>OpenCV – Computer Vision Library</a:t>
           </a:r>
-          <a:endParaRPr lang="en-US" dirty="0"/>
+          <a:endParaRPr lang="en-US" sz="1800" dirty="0"/>
         </a:p>
       </dgm:t>
     </dgm:pt>
@@ -2749,7 +2753,7 @@
       </dgm:t>
     </dgm:pt>
     <dgm:pt modelId="{472CDD00-1D69-4A6B-8AC4-8A36F0E79CA1}">
-      <dgm:prSet/>
+      <dgm:prSet custT="1"/>
       <dgm:spPr/>
       <dgm:t>
         <a:bodyPr/>
@@ -2761,10 +2765,10 @@
             </a:lnSpc>
           </a:pPr>
           <a:r>
-            <a:rPr lang="en-GB"/>
+            <a:rPr lang="en-GB" sz="1800" dirty="0"/>
             <a:t>Flask – Web Framework</a:t>
           </a:r>
-          <a:endParaRPr lang="en-US"/>
+          <a:endParaRPr lang="en-US" sz="1800" dirty="0"/>
         </a:p>
       </dgm:t>
     </dgm:pt>
@@ -2796,7 +2800,7 @@
       </dgm:t>
     </dgm:pt>
     <dgm:pt modelId="{6153FF18-8BD2-45BB-854A-CD8632CDC26A}">
-      <dgm:prSet/>
+      <dgm:prSet custT="1"/>
       <dgm:spPr/>
       <dgm:t>
         <a:bodyPr/>
@@ -2808,10 +2812,10 @@
             </a:lnSpc>
           </a:pPr>
           <a:r>
-            <a:rPr lang="en-GB"/>
+            <a:rPr lang="en-GB" sz="1800" dirty="0"/>
             <a:t>React – Front End</a:t>
           </a:r>
-          <a:endParaRPr lang="en-US"/>
+          <a:endParaRPr lang="en-US" sz="1800" dirty="0"/>
         </a:p>
       </dgm:t>
     </dgm:pt>
@@ -2843,7 +2847,7 @@
       </dgm:t>
     </dgm:pt>
     <dgm:pt modelId="{D4B3BAF0-1DFF-452A-8E9F-7F6DAEDD5259}">
-      <dgm:prSet/>
+      <dgm:prSet custT="1"/>
       <dgm:spPr/>
       <dgm:t>
         <a:bodyPr/>
@@ -2855,10 +2859,10 @@
             </a:lnSpc>
           </a:pPr>
           <a:r>
-            <a:rPr lang="en-GB"/>
+            <a:rPr lang="en-GB" sz="1800" dirty="0"/>
             <a:t>SMTP – Email Service</a:t>
           </a:r>
-          <a:endParaRPr lang="en-US"/>
+          <a:endParaRPr lang="en-US" sz="1800" dirty="0"/>
         </a:p>
       </dgm:t>
     </dgm:pt>
@@ -2890,7 +2894,7 @@
       </dgm:t>
     </dgm:pt>
     <dgm:pt modelId="{E3A74F75-AC17-48AD-A734-885D21E05F60}">
-      <dgm:prSet/>
+      <dgm:prSet custT="1"/>
       <dgm:spPr/>
       <dgm:t>
         <a:bodyPr/>
@@ -2902,10 +2906,10 @@
             </a:lnSpc>
           </a:pPr>
           <a:r>
-            <a:rPr lang="en-GB"/>
+            <a:rPr lang="en-GB" sz="1800" dirty="0"/>
             <a:t>MySQL - Database</a:t>
           </a:r>
-          <a:endParaRPr lang="en-US"/>
+          <a:endParaRPr lang="en-US" sz="1800" dirty="0"/>
         </a:p>
       </dgm:t>
     </dgm:pt>
@@ -2987,7 +2991,7 @@
       <dgm:spPr/>
     </dgm:pt>
     <dgm:pt modelId="{78D769C6-C2A1-4934-8341-175D00ECACE4}" type="pres">
-      <dgm:prSet presAssocID="{694B7AF4-3A8B-4ADF-926E-D04343A67A5B}" presName="textRect" presStyleLbl="revTx" presStyleIdx="0" presStyleCnt="8">
+      <dgm:prSet presAssocID="{694B7AF4-3A8B-4ADF-926E-D04343A67A5B}" presName="textRect" presStyleLbl="revTx" presStyleIdx="0" presStyleCnt="8" custScaleX="102100">
         <dgm:presLayoutVars>
           <dgm:chMax val="1"/>
           <dgm:chPref val="1"/>
@@ -4258,7 +4262,7 @@
       </dsp:nvSpPr>
       <dsp:spPr>
         <a:xfrm>
-          <a:off x="921098" y="459"/>
+          <a:off x="914308" y="459"/>
           <a:ext cx="548690" cy="548690"/>
         </a:xfrm>
         <a:prstGeom prst="ellipse">
@@ -4298,7 +4302,7 @@
       </dsp:nvSpPr>
       <dsp:spPr>
         <a:xfrm>
-          <a:off x="1036323" y="115684"/>
+          <a:off x="1029533" y="115684"/>
           <a:ext cx="318240" cy="318240"/>
         </a:xfrm>
         <a:prstGeom prst="rect">
@@ -4355,8 +4359,8 @@
       </dsp:nvSpPr>
       <dsp:spPr>
         <a:xfrm>
-          <a:off x="1587365" y="459"/>
-          <a:ext cx="1293342" cy="548690"/>
+          <a:off x="1566995" y="459"/>
+          <a:ext cx="1320502" cy="548690"/>
         </a:xfrm>
         <a:prstGeom prst="rect">
           <a:avLst/>
@@ -4385,7 +4389,7 @@
         </a:bodyPr>
         <a:lstStyle/>
         <a:p>
-          <a:pPr marL="0" lvl="0" indent="0" algn="l" defTabSz="488950">
+          <a:pPr marL="0" lvl="0" indent="0" algn="l" defTabSz="800100">
             <a:lnSpc>
               <a:spcPct val="100000"/>
             </a:lnSpc>
@@ -4398,15 +4402,15 @@
             <a:buNone/>
           </a:pPr>
           <a:r>
-            <a:rPr lang="en-GB" sz="1100" kern="1200" dirty="0"/>
+            <a:rPr lang="en-GB" sz="1800" kern="1200" dirty="0"/>
             <a:t>Python - Main Programming Language</a:t>
           </a:r>
-          <a:endParaRPr lang="en-US" sz="1100" kern="1200" dirty="0"/>
+          <a:endParaRPr lang="en-US" sz="1800" kern="1200" dirty="0"/>
         </a:p>
       </dsp:txBody>
       <dsp:txXfrm>
-        <a:off x="1587365" y="459"/>
-        <a:ext cx="1293342" cy="548690"/>
+        <a:off x="1566995" y="459"/>
+        <a:ext cx="1320502" cy="548690"/>
       </dsp:txXfrm>
     </dsp:sp>
     <dsp:sp modelId="{6429BE27-F80E-40E8-AD6E-BCF5F22ACF2F}">
@@ -4416,7 +4420,7 @@
       </dsp:nvSpPr>
       <dsp:spPr>
         <a:xfrm>
-          <a:off x="3106062" y="459"/>
+          <a:off x="3112852" y="459"/>
           <a:ext cx="548690" cy="548690"/>
         </a:xfrm>
         <a:prstGeom prst="ellipse">
@@ -4456,7 +4460,7 @@
       </dsp:nvSpPr>
       <dsp:spPr>
         <a:xfrm>
-          <a:off x="3221287" y="115684"/>
+          <a:off x="3228077" y="115684"/>
           <a:ext cx="318240" cy="318240"/>
         </a:xfrm>
         <a:prstGeom prst="rect">
@@ -4513,7 +4517,7 @@
       </dsp:nvSpPr>
       <dsp:spPr>
         <a:xfrm>
-          <a:off x="3772329" y="459"/>
+          <a:off x="3779119" y="459"/>
           <a:ext cx="1293342" cy="548690"/>
         </a:xfrm>
         <a:prstGeom prst="rect">
@@ -4543,7 +4547,7 @@
         </a:bodyPr>
         <a:lstStyle/>
         <a:p>
-          <a:pPr marL="0" lvl="0" indent="0" algn="l" defTabSz="488950">
+          <a:pPr marL="0" lvl="0" indent="0" algn="l" defTabSz="800100">
             <a:lnSpc>
               <a:spcPct val="100000"/>
             </a:lnSpc>
@@ -4556,14 +4560,14 @@
             <a:buNone/>
           </a:pPr>
           <a:r>
-            <a:rPr lang="en-GB" sz="1100" kern="1200" dirty="0"/>
+            <a:rPr lang="en-GB" sz="1800" kern="1200" dirty="0"/>
             <a:t>YOLO - Object Detection  </a:t>
           </a:r>
-          <a:endParaRPr lang="en-US" sz="1100" kern="1200" dirty="0"/>
+          <a:endParaRPr lang="en-US" sz="1800" kern="1200" dirty="0"/>
         </a:p>
       </dsp:txBody>
       <dsp:txXfrm>
-        <a:off x="3772329" y="459"/>
+        <a:off x="3779119" y="459"/>
         <a:ext cx="1293342" cy="548690"/>
       </dsp:txXfrm>
     </dsp:sp>
@@ -4574,7 +4578,7 @@
       </dsp:nvSpPr>
       <dsp:spPr>
         <a:xfrm>
-          <a:off x="921098" y="1179390"/>
+          <a:off x="914308" y="1179390"/>
           <a:ext cx="548690" cy="548690"/>
         </a:xfrm>
         <a:prstGeom prst="ellipse">
@@ -4614,7 +4618,7 @@
       </dsp:nvSpPr>
       <dsp:spPr>
         <a:xfrm>
-          <a:off x="1036323" y="1294615"/>
+          <a:off x="1029533" y="1294615"/>
           <a:ext cx="318240" cy="318240"/>
         </a:xfrm>
         <a:prstGeom prst="rect">
@@ -4671,7 +4675,7 @@
       </dsp:nvSpPr>
       <dsp:spPr>
         <a:xfrm>
-          <a:off x="1587365" y="1179390"/>
+          <a:off x="1580575" y="1179390"/>
           <a:ext cx="1293342" cy="548690"/>
         </a:xfrm>
         <a:prstGeom prst="rect">
@@ -4701,7 +4705,7 @@
         </a:bodyPr>
         <a:lstStyle/>
         <a:p>
-          <a:pPr marL="0" lvl="0" indent="0" algn="l" defTabSz="488950">
+          <a:pPr marL="0" lvl="0" indent="0" algn="l" defTabSz="800100">
             <a:lnSpc>
               <a:spcPct val="100000"/>
             </a:lnSpc>
@@ -4714,14 +4718,18 @@
             <a:buNone/>
           </a:pPr>
           <a:r>
-            <a:rPr lang="en-GB" sz="1100" kern="1200"/>
-            <a:t>Ultralytics - Framework</a:t>
+            <a:rPr lang="en-GB" sz="1800" kern="1200" dirty="0" err="1"/>
+            <a:t>Ultralytics</a:t>
           </a:r>
-          <a:endParaRPr lang="en-US" sz="1100" kern="1200"/>
+          <a:r>
+            <a:rPr lang="en-GB" sz="1800" kern="1200" dirty="0"/>
+            <a:t> - Framework</a:t>
+          </a:r>
+          <a:endParaRPr lang="en-US" sz="1800" kern="1200" dirty="0"/>
         </a:p>
       </dsp:txBody>
       <dsp:txXfrm>
-        <a:off x="1587365" y="1179390"/>
+        <a:off x="1580575" y="1179390"/>
         <a:ext cx="1293342" cy="548690"/>
       </dsp:txXfrm>
     </dsp:sp>
@@ -4732,7 +4740,7 @@
       </dsp:nvSpPr>
       <dsp:spPr>
         <a:xfrm>
-          <a:off x="3106062" y="1179390"/>
+          <a:off x="3099272" y="1179390"/>
           <a:ext cx="548690" cy="548690"/>
         </a:xfrm>
         <a:prstGeom prst="ellipse">
@@ -4772,7 +4780,7 @@
       </dsp:nvSpPr>
       <dsp:spPr>
         <a:xfrm>
-          <a:off x="3221287" y="1294615"/>
+          <a:off x="3214497" y="1294615"/>
           <a:ext cx="318240" cy="318240"/>
         </a:xfrm>
         <a:prstGeom prst="rect">
@@ -4829,7 +4837,7 @@
       </dsp:nvSpPr>
       <dsp:spPr>
         <a:xfrm>
-          <a:off x="3772329" y="1179390"/>
+          <a:off x="3765539" y="1179390"/>
           <a:ext cx="1293342" cy="548690"/>
         </a:xfrm>
         <a:prstGeom prst="rect">
@@ -4859,7 +4867,7 @@
         </a:bodyPr>
         <a:lstStyle/>
         <a:p>
-          <a:pPr marL="0" lvl="0" indent="0" algn="l" defTabSz="488950">
+          <a:pPr marL="0" lvl="0" indent="0" algn="l" defTabSz="800100">
             <a:lnSpc>
               <a:spcPct val="100000"/>
             </a:lnSpc>
@@ -4872,14 +4880,14 @@
             <a:buNone/>
           </a:pPr>
           <a:r>
-            <a:rPr lang="en-GB" sz="1100" kern="1200" dirty="0"/>
+            <a:rPr lang="en-GB" sz="1800" kern="1200" dirty="0"/>
             <a:t>OpenCV – Computer Vision Library</a:t>
           </a:r>
-          <a:endParaRPr lang="en-US" sz="1100" kern="1200" dirty="0"/>
+          <a:endParaRPr lang="en-US" sz="1800" kern="1200" dirty="0"/>
         </a:p>
       </dsp:txBody>
       <dsp:txXfrm>
-        <a:off x="3772329" y="1179390"/>
+        <a:off x="3765539" y="1179390"/>
         <a:ext cx="1293342" cy="548690"/>
       </dsp:txXfrm>
     </dsp:sp>
@@ -4890,7 +4898,7 @@
       </dsp:nvSpPr>
       <dsp:spPr>
         <a:xfrm>
-          <a:off x="921098" y="2358320"/>
+          <a:off x="914308" y="2358320"/>
           <a:ext cx="548690" cy="548690"/>
         </a:xfrm>
         <a:prstGeom prst="ellipse">
@@ -4930,7 +4938,7 @@
       </dsp:nvSpPr>
       <dsp:spPr>
         <a:xfrm>
-          <a:off x="1036323" y="2473545"/>
+          <a:off x="1029533" y="2473545"/>
           <a:ext cx="318240" cy="318240"/>
         </a:xfrm>
         <a:prstGeom prst="rect">
@@ -4987,7 +4995,7 @@
       </dsp:nvSpPr>
       <dsp:spPr>
         <a:xfrm>
-          <a:off x="1587365" y="2358320"/>
+          <a:off x="1580575" y="2358320"/>
           <a:ext cx="1293342" cy="548690"/>
         </a:xfrm>
         <a:prstGeom prst="rect">
@@ -5017,7 +5025,7 @@
         </a:bodyPr>
         <a:lstStyle/>
         <a:p>
-          <a:pPr marL="0" lvl="0" indent="0" algn="l" defTabSz="488950">
+          <a:pPr marL="0" lvl="0" indent="0" algn="l" defTabSz="800100">
             <a:lnSpc>
               <a:spcPct val="100000"/>
             </a:lnSpc>
@@ -5030,14 +5038,14 @@
             <a:buNone/>
           </a:pPr>
           <a:r>
-            <a:rPr lang="en-GB" sz="1100" kern="1200"/>
+            <a:rPr lang="en-GB" sz="1800" kern="1200" dirty="0"/>
             <a:t>Flask – Web Framework</a:t>
           </a:r>
-          <a:endParaRPr lang="en-US" sz="1100" kern="1200"/>
+          <a:endParaRPr lang="en-US" sz="1800" kern="1200" dirty="0"/>
         </a:p>
       </dsp:txBody>
       <dsp:txXfrm>
-        <a:off x="1587365" y="2358320"/>
+        <a:off x="1580575" y="2358320"/>
         <a:ext cx="1293342" cy="548690"/>
       </dsp:txXfrm>
     </dsp:sp>
@@ -5048,7 +5056,7 @@
       </dsp:nvSpPr>
       <dsp:spPr>
         <a:xfrm>
-          <a:off x="3106062" y="2358320"/>
+          <a:off x="3099272" y="2358320"/>
           <a:ext cx="548690" cy="548690"/>
         </a:xfrm>
         <a:prstGeom prst="ellipse">
@@ -5088,7 +5096,7 @@
       </dsp:nvSpPr>
       <dsp:spPr>
         <a:xfrm>
-          <a:off x="3221287" y="2473545"/>
+          <a:off x="3214497" y="2473545"/>
           <a:ext cx="318240" cy="318240"/>
         </a:xfrm>
         <a:prstGeom prst="rect">
@@ -5145,7 +5153,7 @@
       </dsp:nvSpPr>
       <dsp:spPr>
         <a:xfrm>
-          <a:off x="3772329" y="2358320"/>
+          <a:off x="3765539" y="2358320"/>
           <a:ext cx="1293342" cy="548690"/>
         </a:xfrm>
         <a:prstGeom prst="rect">
@@ -5175,7 +5183,7 @@
         </a:bodyPr>
         <a:lstStyle/>
         <a:p>
-          <a:pPr marL="0" lvl="0" indent="0" algn="l" defTabSz="488950">
+          <a:pPr marL="0" lvl="0" indent="0" algn="l" defTabSz="800100">
             <a:lnSpc>
               <a:spcPct val="100000"/>
             </a:lnSpc>
@@ -5188,14 +5196,14 @@
             <a:buNone/>
           </a:pPr>
           <a:r>
-            <a:rPr lang="en-GB" sz="1100" kern="1200"/>
+            <a:rPr lang="en-GB" sz="1800" kern="1200" dirty="0"/>
             <a:t>React – Front End</a:t>
           </a:r>
-          <a:endParaRPr lang="en-US" sz="1100" kern="1200"/>
+          <a:endParaRPr lang="en-US" sz="1800" kern="1200" dirty="0"/>
         </a:p>
       </dsp:txBody>
       <dsp:txXfrm>
-        <a:off x="3772329" y="2358320"/>
+        <a:off x="3765539" y="2358320"/>
         <a:ext cx="1293342" cy="548690"/>
       </dsp:txXfrm>
     </dsp:sp>
@@ -5206,7 +5214,7 @@
       </dsp:nvSpPr>
       <dsp:spPr>
         <a:xfrm>
-          <a:off x="921098" y="3537250"/>
+          <a:off x="914308" y="3537250"/>
           <a:ext cx="548690" cy="548690"/>
         </a:xfrm>
         <a:prstGeom prst="ellipse">
@@ -5246,7 +5254,7 @@
       </dsp:nvSpPr>
       <dsp:spPr>
         <a:xfrm>
-          <a:off x="1036323" y="3652475"/>
+          <a:off x="1029533" y="3652475"/>
           <a:ext cx="318240" cy="318240"/>
         </a:xfrm>
         <a:prstGeom prst="rect">
@@ -5303,7 +5311,7 @@
       </dsp:nvSpPr>
       <dsp:spPr>
         <a:xfrm>
-          <a:off x="1587365" y="3537250"/>
+          <a:off x="1580575" y="3537250"/>
           <a:ext cx="1293342" cy="548690"/>
         </a:xfrm>
         <a:prstGeom prst="rect">
@@ -5333,7 +5341,7 @@
         </a:bodyPr>
         <a:lstStyle/>
         <a:p>
-          <a:pPr marL="0" lvl="0" indent="0" algn="l" defTabSz="488950">
+          <a:pPr marL="0" lvl="0" indent="0" algn="l" defTabSz="800100">
             <a:lnSpc>
               <a:spcPct val="100000"/>
             </a:lnSpc>
@@ -5346,14 +5354,14 @@
             <a:buNone/>
           </a:pPr>
           <a:r>
-            <a:rPr lang="en-GB" sz="1100" kern="1200"/>
+            <a:rPr lang="en-GB" sz="1800" kern="1200" dirty="0"/>
             <a:t>SMTP – Email Service</a:t>
           </a:r>
-          <a:endParaRPr lang="en-US" sz="1100" kern="1200"/>
+          <a:endParaRPr lang="en-US" sz="1800" kern="1200" dirty="0"/>
         </a:p>
       </dsp:txBody>
       <dsp:txXfrm>
-        <a:off x="1587365" y="3537250"/>
+        <a:off x="1580575" y="3537250"/>
         <a:ext cx="1293342" cy="548690"/>
       </dsp:txXfrm>
     </dsp:sp>
@@ -5364,7 +5372,7 @@
       </dsp:nvSpPr>
       <dsp:spPr>
         <a:xfrm>
-          <a:off x="3106062" y="3537250"/>
+          <a:off x="3099272" y="3537250"/>
           <a:ext cx="548690" cy="548690"/>
         </a:xfrm>
         <a:prstGeom prst="ellipse">
@@ -5404,7 +5412,7 @@
       </dsp:nvSpPr>
       <dsp:spPr>
         <a:xfrm>
-          <a:off x="3221287" y="3652475"/>
+          <a:off x="3214497" y="3652475"/>
           <a:ext cx="318240" cy="318240"/>
         </a:xfrm>
         <a:prstGeom prst="rect">
@@ -5461,7 +5469,7 @@
       </dsp:nvSpPr>
       <dsp:spPr>
         <a:xfrm>
-          <a:off x="3772329" y="3537250"/>
+          <a:off x="3765539" y="3537250"/>
           <a:ext cx="1293342" cy="548690"/>
         </a:xfrm>
         <a:prstGeom prst="rect">
@@ -5491,7 +5499,7 @@
         </a:bodyPr>
         <a:lstStyle/>
         <a:p>
-          <a:pPr marL="0" lvl="0" indent="0" algn="l" defTabSz="488950">
+          <a:pPr marL="0" lvl="0" indent="0" algn="l" defTabSz="800100">
             <a:lnSpc>
               <a:spcPct val="100000"/>
             </a:lnSpc>
@@ -5504,14 +5512,14 @@
             <a:buNone/>
           </a:pPr>
           <a:r>
-            <a:rPr lang="en-GB" sz="1100" kern="1200"/>
+            <a:rPr lang="en-GB" sz="1800" kern="1200" dirty="0"/>
             <a:t>MySQL - Database</a:t>
           </a:r>
-          <a:endParaRPr lang="en-US" sz="1100" kern="1200"/>
+          <a:endParaRPr lang="en-US" sz="1800" kern="1200" dirty="0"/>
         </a:p>
       </dsp:txBody>
       <dsp:txXfrm>
-        <a:off x="3772329" y="3537250"/>
+        <a:off x="3765539" y="3537250"/>
         <a:ext cx="1293342" cy="548690"/>
       </dsp:txXfrm>
     </dsp:sp>
@@ -11184,7 +11192,7 @@
           <a:p>
             <a:fld id="{74FCF980-36E5-46BF-A02A-756B7FE0A693}" type="datetimeFigureOut">
               <a:rPr lang="en-GB" smtClean="0"/>
-              <a:t>30/11/2024</a:t>
+              <a:t>04/12/2024</a:t>
             </a:fld>
             <a:endParaRPr lang="en-GB"/>
           </a:p>
@@ -11601,7 +11609,7 @@
           <a:p>
             <a:fld id="{7E55B3EA-B30C-4CE3-B538-BC7F603EE92A}" type="datetime1">
               <a:rPr lang="en-GB" smtClean="0"/>
-              <a:t>30/11/2024</a:t>
+              <a:t>04/12/2024</a:t>
             </a:fld>
             <a:endParaRPr lang="en-GB"/>
           </a:p>
@@ -11801,7 +11809,7 @@
           <a:p>
             <a:fld id="{908DF4FF-43EB-43ED-BF8E-EF1421EE1B33}" type="datetime1">
               <a:rPr lang="en-GB" smtClean="0"/>
-              <a:t>30/11/2024</a:t>
+              <a:t>04/12/2024</a:t>
             </a:fld>
             <a:endParaRPr lang="en-GB"/>
           </a:p>
@@ -12011,7 +12019,7 @@
           <a:p>
             <a:fld id="{F5FB5ABF-7BF5-4383-BD15-C04E1EF89981}" type="datetime1">
               <a:rPr lang="en-GB" smtClean="0"/>
-              <a:t>30/11/2024</a:t>
+              <a:t>04/12/2024</a:t>
             </a:fld>
             <a:endParaRPr lang="en-GB"/>
           </a:p>
@@ -12211,7 +12219,7 @@
           <a:p>
             <a:fld id="{3249EB88-2E63-470B-B5AE-ED8F04DEB571}" type="datetime1">
               <a:rPr lang="en-GB" smtClean="0"/>
-              <a:t>30/11/2024</a:t>
+              <a:t>04/12/2024</a:t>
             </a:fld>
             <a:endParaRPr lang="en-GB" dirty="0"/>
           </a:p>
@@ -12508,7 +12516,7 @@
           <a:p>
             <a:fld id="{8A25558C-F5C9-425F-A937-DAD336474D19}" type="datetime1">
               <a:rPr lang="en-GB" smtClean="0"/>
-              <a:t>30/11/2024</a:t>
+              <a:t>04/12/2024</a:t>
             </a:fld>
             <a:endParaRPr lang="en-GB"/>
           </a:p>
@@ -12776,7 +12784,7 @@
           <a:p>
             <a:fld id="{78F23361-B348-4CBC-9D98-FFEC573232E9}" type="datetime1">
               <a:rPr lang="en-GB" smtClean="0"/>
-              <a:t>30/11/2024</a:t>
+              <a:t>04/12/2024</a:t>
             </a:fld>
             <a:endParaRPr lang="en-GB"/>
           </a:p>
@@ -13191,7 +13199,7 @@
           <a:p>
             <a:fld id="{209E1356-F7A0-4DDA-9B79-8677F0203A36}" type="datetime1">
               <a:rPr lang="en-GB" smtClean="0"/>
-              <a:t>30/11/2024</a:t>
+              <a:t>04/12/2024</a:t>
             </a:fld>
             <a:endParaRPr lang="en-GB"/>
           </a:p>
@@ -13333,7 +13341,7 @@
           <a:p>
             <a:fld id="{7B0BD8A4-DB30-4644-BD53-95B03F580EBF}" type="datetime1">
               <a:rPr lang="en-GB" smtClean="0"/>
-              <a:t>30/11/2024</a:t>
+              <a:t>04/12/2024</a:t>
             </a:fld>
             <a:endParaRPr lang="en-GB"/>
           </a:p>
@@ -13446,7 +13454,7 @@
           <a:p>
             <a:fld id="{EBE70D1A-1D8E-4DCC-9397-026B2065BFC1}" type="datetime1">
               <a:rPr lang="en-GB" smtClean="0"/>
-              <a:t>30/11/2024</a:t>
+              <a:t>04/12/2024</a:t>
             </a:fld>
             <a:endParaRPr lang="en-GB"/>
           </a:p>
@@ -13759,7 +13767,7 @@
           <a:p>
             <a:fld id="{1D27C71C-4D63-45B1-B210-A6E88395339E}" type="datetime1">
               <a:rPr lang="en-GB" smtClean="0"/>
-              <a:t>30/11/2024</a:t>
+              <a:t>04/12/2024</a:t>
             </a:fld>
             <a:endParaRPr lang="en-GB"/>
           </a:p>
@@ -14048,7 +14056,7 @@
           <a:p>
             <a:fld id="{CE4A0315-D938-4806-831E-5BEF87E79DEC}" type="datetime1">
               <a:rPr lang="en-GB" smtClean="0"/>
-              <a:t>30/11/2024</a:t>
+              <a:t>04/12/2024</a:t>
             </a:fld>
             <a:endParaRPr lang="en-GB"/>
           </a:p>
@@ -14291,7 +14299,7 @@
           <a:p>
             <a:fld id="{EDF9EF3A-9B5C-4F8E-BE21-1A9759F13C31}" type="datetime1">
               <a:rPr lang="en-GB" smtClean="0"/>
-              <a:t>30/11/2024</a:t>
+              <a:t>04/12/2024</a:t>
             </a:fld>
             <a:endParaRPr lang="en-GB"/>
           </a:p>
@@ -25901,7 +25909,7 @@
             <p:ph sz="half" idx="1"/>
             <p:extLst>
               <p:ext uri="{D42A27DB-BD31-4B8C-83A1-F6EECF244321}">
-                <p14:modId xmlns:p14="http://schemas.microsoft.com/office/powerpoint/2010/main" val="805853074"/>
+                <p14:modId xmlns:p14="http://schemas.microsoft.com/office/powerpoint/2010/main" val="317243692"/>
               </p:ext>
             </p:extLst>
           </p:nvPr>

--- a/Presentation/SiteSafeAiPresentation.pptx
+++ b/Presentation/SiteSafeAiPresentation.pptx
@@ -3531,7 +3531,7 @@
         <a:p>
           <a:r>
             <a:rPr lang="en-GB" dirty="0"/>
-            <a:t>Poster, Presentation</a:t>
+            <a:t>Poster, Presentation, Design Doc</a:t>
           </a:r>
           <a:endParaRPr lang="en-US" dirty="0"/>
         </a:p>
@@ -3605,7 +3605,7 @@
         <a:p>
           <a:r>
             <a:rPr lang="en-GB" dirty="0"/>
-            <a:t>Model Tested</a:t>
+            <a:t>Model Implemented for helmets</a:t>
           </a:r>
           <a:endParaRPr lang="en-US" dirty="0"/>
         </a:p>
@@ -3642,7 +3642,7 @@
         <a:p>
           <a:r>
             <a:rPr lang="en-GB" dirty="0"/>
-            <a:t>Front-End Page Layout</a:t>
+            <a:t>First Official Release</a:t>
           </a:r>
           <a:endParaRPr lang="en-US" dirty="0"/>
         </a:p>
@@ -6011,7 +6011,7 @@
           </a:pPr>
           <a:r>
             <a:rPr lang="en-GB" sz="3300" kern="1200" dirty="0"/>
-            <a:t>Poster, Presentation</a:t>
+            <a:t>Poster, Presentation, Design Doc</a:t>
           </a:r>
           <a:endParaRPr lang="en-US" sz="3300" kern="1200" dirty="0"/>
         </a:p>
@@ -6331,7 +6331,7 @@
           </a:pPr>
           <a:r>
             <a:rPr lang="en-GB" sz="3300" kern="1200" dirty="0"/>
-            <a:t>Model Tested</a:t>
+            <a:t>Model Implemented for helmets</a:t>
           </a:r>
           <a:endParaRPr lang="en-US" sz="3300" kern="1200" dirty="0"/>
         </a:p>
@@ -6410,7 +6410,7 @@
           </a:pPr>
           <a:r>
             <a:rPr lang="en-GB" sz="3300" kern="1200" dirty="0"/>
-            <a:t>Front-End Page Layout</a:t>
+            <a:t>First Official Release</a:t>
           </a:r>
           <a:endParaRPr lang="en-US" sz="3300" kern="1200" dirty="0"/>
         </a:p>
@@ -11192,7 +11192,7 @@
           <a:p>
             <a:fld id="{74FCF980-36E5-46BF-A02A-756B7FE0A693}" type="datetimeFigureOut">
               <a:rPr lang="en-GB" smtClean="0"/>
-              <a:t>04/12/2024</a:t>
+              <a:t>23/02/2025</a:t>
             </a:fld>
             <a:endParaRPr lang="en-GB"/>
           </a:p>
@@ -11609,7 +11609,7 @@
           <a:p>
             <a:fld id="{7E55B3EA-B30C-4CE3-B538-BC7F603EE92A}" type="datetime1">
               <a:rPr lang="en-GB" smtClean="0"/>
-              <a:t>04/12/2024</a:t>
+              <a:t>23/02/2025</a:t>
             </a:fld>
             <a:endParaRPr lang="en-GB"/>
           </a:p>
@@ -11809,7 +11809,7 @@
           <a:p>
             <a:fld id="{908DF4FF-43EB-43ED-BF8E-EF1421EE1B33}" type="datetime1">
               <a:rPr lang="en-GB" smtClean="0"/>
-              <a:t>04/12/2024</a:t>
+              <a:t>23/02/2025</a:t>
             </a:fld>
             <a:endParaRPr lang="en-GB"/>
           </a:p>
@@ -12019,7 +12019,7 @@
           <a:p>
             <a:fld id="{F5FB5ABF-7BF5-4383-BD15-C04E1EF89981}" type="datetime1">
               <a:rPr lang="en-GB" smtClean="0"/>
-              <a:t>04/12/2024</a:t>
+              <a:t>23/02/2025</a:t>
             </a:fld>
             <a:endParaRPr lang="en-GB"/>
           </a:p>
@@ -12219,7 +12219,7 @@
           <a:p>
             <a:fld id="{3249EB88-2E63-470B-B5AE-ED8F04DEB571}" type="datetime1">
               <a:rPr lang="en-GB" smtClean="0"/>
-              <a:t>04/12/2024</a:t>
+              <a:t>23/02/2025</a:t>
             </a:fld>
             <a:endParaRPr lang="en-GB" dirty="0"/>
           </a:p>
@@ -12516,7 +12516,7 @@
           <a:p>
             <a:fld id="{8A25558C-F5C9-425F-A937-DAD336474D19}" type="datetime1">
               <a:rPr lang="en-GB" smtClean="0"/>
-              <a:t>04/12/2024</a:t>
+              <a:t>23/02/2025</a:t>
             </a:fld>
             <a:endParaRPr lang="en-GB"/>
           </a:p>
@@ -12784,7 +12784,7 @@
           <a:p>
             <a:fld id="{78F23361-B348-4CBC-9D98-FFEC573232E9}" type="datetime1">
               <a:rPr lang="en-GB" smtClean="0"/>
-              <a:t>04/12/2024</a:t>
+              <a:t>23/02/2025</a:t>
             </a:fld>
             <a:endParaRPr lang="en-GB"/>
           </a:p>
@@ -13199,7 +13199,7 @@
           <a:p>
             <a:fld id="{209E1356-F7A0-4DDA-9B79-8677F0203A36}" type="datetime1">
               <a:rPr lang="en-GB" smtClean="0"/>
-              <a:t>04/12/2024</a:t>
+              <a:t>23/02/2025</a:t>
             </a:fld>
             <a:endParaRPr lang="en-GB"/>
           </a:p>
@@ -13341,7 +13341,7 @@
           <a:p>
             <a:fld id="{7B0BD8A4-DB30-4644-BD53-95B03F580EBF}" type="datetime1">
               <a:rPr lang="en-GB" smtClean="0"/>
-              <a:t>04/12/2024</a:t>
+              <a:t>23/02/2025</a:t>
             </a:fld>
             <a:endParaRPr lang="en-GB"/>
           </a:p>
@@ -13454,7 +13454,7 @@
           <a:p>
             <a:fld id="{EBE70D1A-1D8E-4DCC-9397-026B2065BFC1}" type="datetime1">
               <a:rPr lang="en-GB" smtClean="0"/>
-              <a:t>04/12/2024</a:t>
+              <a:t>23/02/2025</a:t>
             </a:fld>
             <a:endParaRPr lang="en-GB"/>
           </a:p>
@@ -13767,7 +13767,7 @@
           <a:p>
             <a:fld id="{1D27C71C-4D63-45B1-B210-A6E88395339E}" type="datetime1">
               <a:rPr lang="en-GB" smtClean="0"/>
-              <a:t>04/12/2024</a:t>
+              <a:t>23/02/2025</a:t>
             </a:fld>
             <a:endParaRPr lang="en-GB"/>
           </a:p>
@@ -14056,7 +14056,7 @@
           <a:p>
             <a:fld id="{CE4A0315-D938-4806-831E-5BEF87E79DEC}" type="datetime1">
               <a:rPr lang="en-GB" smtClean="0"/>
-              <a:t>04/12/2024</a:t>
+              <a:t>23/02/2025</a:t>
             </a:fld>
             <a:endParaRPr lang="en-GB"/>
           </a:p>
@@ -14299,7 +14299,7 @@
           <a:p>
             <a:fld id="{EDF9EF3A-9B5C-4F8E-BE21-1A9759F13C31}" type="datetime1">
               <a:rPr lang="en-GB" smtClean="0"/>
-              <a:t>04/12/2024</a:t>
+              <a:t>23/02/2025</a:t>
             </a:fld>
             <a:endParaRPr lang="en-GB"/>
           </a:p>
@@ -26415,7 +26415,7 @@
             <p:ph idx="1"/>
             <p:extLst>
               <p:ext uri="{D42A27DB-BD31-4B8C-83A1-F6EECF244321}">
-                <p14:modId xmlns:p14="http://schemas.microsoft.com/office/powerpoint/2010/main" val="484401191"/>
+                <p14:modId xmlns:p14="http://schemas.microsoft.com/office/powerpoint/2010/main" val="254270102"/>
               </p:ext>
             </p:extLst>
           </p:nvPr>
